--- a/parte_2_modelo_logistico_binomial_negativa.pptx
+++ b/parte_2_modelo_logistico_binomial_negativa.pptx
@@ -380,7 +380,7 @@
             <a:pPr indent="0" algn="r">
               <a:buNone/>
             </a:pPr>
-            <a:fld id="{13084D3D-A1FE-4FD8-868F-471A2436BDF8}" type="slidenum">
+            <a:fld id="{94398D34-DD9E-429D-8F5F-856188D4285B}" type="slidenum">
               <a:rPr lang="en-US" sz="1400" b="0" u="none" strike="noStrike">
                 <a:solidFill>
                   <a:srgbClr val="000000"/>
@@ -427,7 +427,7 @@
       </p:grpSpPr>
       <p:sp>
         <p:nvSpPr>
-          <p:cNvPr id="269" name="PlaceHolder 1"/>
+          <p:cNvPr id="250" name="PlaceHolder 1"/>
           <p:cNvSpPr>
             <a:spLocks noGrp="1"/>
           </p:cNvSpPr>
@@ -438,19 +438,19 @@
         <p:spPr>
           <a:xfrm>
             <a:off x="685800" y="1143000"/>
-            <a:ext cx="5485680" cy="3085560"/>
-          </a:xfrm>
-          <a:prstGeom prst="rect">
-            <a:avLst/>
-          </a:prstGeom>
-          <a:ln w="0">
-            <a:noFill/>
-          </a:ln>
-        </p:spPr>
-      </p:sp>
-      <p:sp>
-        <p:nvSpPr>
-          <p:cNvPr id="270" name="PlaceHolder 2"/>
+            <a:ext cx="5485320" cy="3085200"/>
+          </a:xfrm>
+          <a:prstGeom prst="rect">
+            <a:avLst/>
+          </a:prstGeom>
+          <a:ln w="0">
+            <a:noFill/>
+          </a:ln>
+        </p:spPr>
+      </p:sp>
+      <p:sp>
+        <p:nvSpPr>
+          <p:cNvPr id="251" name="PlaceHolder 2"/>
           <p:cNvSpPr>
             <a:spLocks noGrp="1"/>
           </p:cNvSpPr>
@@ -461,7 +461,7 @@
         <p:spPr>
           <a:xfrm>
             <a:off x="685800" y="4400640"/>
-            <a:ext cx="5485680" cy="3599640"/>
+            <a:ext cx="5485320" cy="3599280"/>
           </a:xfrm>
           <a:prstGeom prst="rect">
             <a:avLst/>
@@ -492,7 +492,7 @@
       </p:sp>
       <p:sp>
         <p:nvSpPr>
-          <p:cNvPr id="271" name="PlaceHolder 3"/>
+          <p:cNvPr id="252" name="PlaceHolder 3"/>
           <p:cNvSpPr>
             <a:spLocks noGrp="1"/>
           </p:cNvSpPr>
@@ -503,7 +503,7 @@
         <p:spPr>
           <a:xfrm>
             <a:off x="3884760" y="8685360"/>
-            <a:ext cx="2971080" cy="457920"/>
+            <a:ext cx="2970720" cy="457560"/>
           </a:xfrm>
           <a:prstGeom prst="rect">
             <a:avLst/>
@@ -547,7 +547,7 @@
                 <a:tab algn="l" pos="0"/>
               </a:tabLst>
             </a:pPr>
-            <a:fld id="{66E62FFF-4D1A-44FA-AB97-3B79B57AF8D9}" type="slidenum">
+            <a:fld id="{0E524CA2-7CA7-413D-BA9E-CCC05116DA9C}" type="slidenum">
               <a:rPr lang="en-US" sz="1200" b="0" u="none" strike="noStrike">
                 <a:solidFill>
                   <a:schemeClr val="dk1"/>
@@ -594,7 +594,7 @@
       </p:grpSpPr>
       <p:sp>
         <p:nvSpPr>
-          <p:cNvPr id="290" name="PlaceHolder 1"/>
+          <p:cNvPr id="268" name="PlaceHolder 1"/>
           <p:cNvSpPr>
             <a:spLocks noGrp="1"/>
           </p:cNvSpPr>
@@ -605,19 +605,19 @@
         <p:spPr>
           <a:xfrm>
             <a:off x="685800" y="1143000"/>
-            <a:ext cx="5485680" cy="3085560"/>
-          </a:xfrm>
-          <a:prstGeom prst="rect">
-            <a:avLst/>
-          </a:prstGeom>
-          <a:ln w="0">
-            <a:noFill/>
-          </a:ln>
-        </p:spPr>
-      </p:sp>
-      <p:sp>
-        <p:nvSpPr>
-          <p:cNvPr id="291" name="PlaceHolder 2"/>
+            <a:ext cx="5485320" cy="3085200"/>
+          </a:xfrm>
+          <a:prstGeom prst="rect">
+            <a:avLst/>
+          </a:prstGeom>
+          <a:ln w="0">
+            <a:noFill/>
+          </a:ln>
+        </p:spPr>
+      </p:sp>
+      <p:sp>
+        <p:nvSpPr>
+          <p:cNvPr id="269" name="PlaceHolder 2"/>
           <p:cNvSpPr>
             <a:spLocks noGrp="1"/>
           </p:cNvSpPr>
@@ -628,7 +628,7 @@
         <p:spPr>
           <a:xfrm>
             <a:off x="685800" y="4400640"/>
-            <a:ext cx="5485680" cy="3599640"/>
+            <a:ext cx="5485320" cy="3599280"/>
           </a:xfrm>
           <a:prstGeom prst="rect">
             <a:avLst/>
@@ -659,18 +659,18 @@
       </p:sp>
       <p:sp>
         <p:nvSpPr>
-          <p:cNvPr id="292" name="PlaceHolder 3"/>
+          <p:cNvPr id="270" name="PlaceHolder 3"/>
           <p:cNvSpPr>
             <a:spLocks noGrp="1"/>
           </p:cNvSpPr>
           <p:nvPr>
-            <p:ph type="sldNum" idx="11"/>
+            <p:ph type="sldNum" idx="10"/>
           </p:nvPr>
         </p:nvSpPr>
         <p:spPr>
           <a:xfrm>
             <a:off x="3884760" y="8685360"/>
-            <a:ext cx="2971080" cy="457920"/>
+            <a:ext cx="2970720" cy="457560"/>
           </a:xfrm>
           <a:prstGeom prst="rect">
             <a:avLst/>
@@ -714,7 +714,7 @@
                 <a:tab algn="l" pos="0"/>
               </a:tabLst>
             </a:pPr>
-            <a:fld id="{E930A75C-6914-4531-B2CD-D3D79B9FD842}" type="slidenum">
+            <a:fld id="{FA76A935-DA06-4A93-B07F-6D9BD5732195}" type="slidenum">
               <a:rPr lang="en-US" sz="1200" b="0" u="none" strike="noStrike">
                 <a:solidFill>
                   <a:schemeClr val="dk1"/>
@@ -761,7 +761,7 @@
       </p:grpSpPr>
       <p:sp>
         <p:nvSpPr>
-          <p:cNvPr id="293" name="PlaceHolder 1"/>
+          <p:cNvPr id="271" name="PlaceHolder 1"/>
           <p:cNvSpPr>
             <a:spLocks noGrp="1"/>
           </p:cNvSpPr>
@@ -772,19 +772,19 @@
         <p:spPr>
           <a:xfrm>
             <a:off x="685800" y="1143000"/>
-            <a:ext cx="5485680" cy="3085560"/>
-          </a:xfrm>
-          <a:prstGeom prst="rect">
-            <a:avLst/>
-          </a:prstGeom>
-          <a:ln w="0">
-            <a:noFill/>
-          </a:ln>
-        </p:spPr>
-      </p:sp>
-      <p:sp>
-        <p:nvSpPr>
-          <p:cNvPr id="294" name="PlaceHolder 2"/>
+            <a:ext cx="5485320" cy="3085200"/>
+          </a:xfrm>
+          <a:prstGeom prst="rect">
+            <a:avLst/>
+          </a:prstGeom>
+          <a:ln w="0">
+            <a:noFill/>
+          </a:ln>
+        </p:spPr>
+      </p:sp>
+      <p:sp>
+        <p:nvSpPr>
+          <p:cNvPr id="272" name="PlaceHolder 2"/>
           <p:cNvSpPr>
             <a:spLocks noGrp="1"/>
           </p:cNvSpPr>
@@ -795,7 +795,7 @@
         <p:spPr>
           <a:xfrm>
             <a:off x="685800" y="4400640"/>
-            <a:ext cx="5485680" cy="3599640"/>
+            <a:ext cx="5485320" cy="3599280"/>
           </a:xfrm>
           <a:prstGeom prst="rect">
             <a:avLst/>
@@ -826,18 +826,18 @@
       </p:sp>
       <p:sp>
         <p:nvSpPr>
-          <p:cNvPr id="295" name="PlaceHolder 3"/>
+          <p:cNvPr id="273" name="PlaceHolder 3"/>
           <p:cNvSpPr>
             <a:spLocks noGrp="1"/>
           </p:cNvSpPr>
           <p:nvPr>
-            <p:ph type="sldNum" idx="12"/>
+            <p:ph type="sldNum" idx="11"/>
           </p:nvPr>
         </p:nvSpPr>
         <p:spPr>
           <a:xfrm>
             <a:off x="3884760" y="8685360"/>
-            <a:ext cx="2971080" cy="457920"/>
+            <a:ext cx="2970720" cy="457560"/>
           </a:xfrm>
           <a:prstGeom prst="rect">
             <a:avLst/>
@@ -881,7 +881,7 @@
                 <a:tab algn="l" pos="0"/>
               </a:tabLst>
             </a:pPr>
-            <a:fld id="{E2E11F16-BE09-4617-BD4C-0A6796358BF8}" type="slidenum">
+            <a:fld id="{87165F64-A2D3-4FED-8179-113EFDE9EFCA}" type="slidenum">
               <a:rPr lang="en-US" sz="1200" b="0" u="none" strike="noStrike">
                 <a:solidFill>
                   <a:schemeClr val="dk1"/>
@@ -928,7 +928,7 @@
       </p:grpSpPr>
       <p:sp>
         <p:nvSpPr>
-          <p:cNvPr id="296" name="PlaceHolder 1"/>
+          <p:cNvPr id="274" name="PlaceHolder 1"/>
           <p:cNvSpPr>
             <a:spLocks noGrp="1"/>
           </p:cNvSpPr>
@@ -939,19 +939,19 @@
         <p:spPr>
           <a:xfrm>
             <a:off x="685800" y="1143000"/>
-            <a:ext cx="5485680" cy="3085560"/>
-          </a:xfrm>
-          <a:prstGeom prst="rect">
-            <a:avLst/>
-          </a:prstGeom>
-          <a:ln w="0">
-            <a:noFill/>
-          </a:ln>
-        </p:spPr>
-      </p:sp>
-      <p:sp>
-        <p:nvSpPr>
-          <p:cNvPr id="297" name="PlaceHolder 2"/>
+            <a:ext cx="5485320" cy="3085200"/>
+          </a:xfrm>
+          <a:prstGeom prst="rect">
+            <a:avLst/>
+          </a:prstGeom>
+          <a:ln w="0">
+            <a:noFill/>
+          </a:ln>
+        </p:spPr>
+      </p:sp>
+      <p:sp>
+        <p:nvSpPr>
+          <p:cNvPr id="275" name="PlaceHolder 2"/>
           <p:cNvSpPr>
             <a:spLocks noGrp="1"/>
           </p:cNvSpPr>
@@ -962,7 +962,7 @@
         <p:spPr>
           <a:xfrm>
             <a:off x="685800" y="4400640"/>
-            <a:ext cx="5485680" cy="3599640"/>
+            <a:ext cx="5485320" cy="3599280"/>
           </a:xfrm>
           <a:prstGeom prst="rect">
             <a:avLst/>
@@ -993,18 +993,18 @@
       </p:sp>
       <p:sp>
         <p:nvSpPr>
-          <p:cNvPr id="298" name="PlaceHolder 3"/>
+          <p:cNvPr id="276" name="PlaceHolder 3"/>
           <p:cNvSpPr>
             <a:spLocks noGrp="1"/>
           </p:cNvSpPr>
           <p:nvPr>
-            <p:ph type="sldNum" idx="13"/>
+            <p:ph type="sldNum" idx="12"/>
           </p:nvPr>
         </p:nvSpPr>
         <p:spPr>
           <a:xfrm>
             <a:off x="3884760" y="8685360"/>
-            <a:ext cx="2971080" cy="457920"/>
+            <a:ext cx="2970720" cy="457560"/>
           </a:xfrm>
           <a:prstGeom prst="rect">
             <a:avLst/>
@@ -1048,7 +1048,7 @@
                 <a:tab algn="l" pos="0"/>
               </a:tabLst>
             </a:pPr>
-            <a:fld id="{1F870000-51A0-41A6-8886-B3EB4ACF473D}" type="slidenum">
+            <a:fld id="{569A08F2-31CC-4CA8-9290-5D9093DEE883}" type="slidenum">
               <a:rPr lang="en-US" sz="1200" b="0" u="none" strike="noStrike">
                 <a:solidFill>
                   <a:schemeClr val="dk1"/>
@@ -1095,7 +1095,7 @@
       </p:grpSpPr>
       <p:sp>
         <p:nvSpPr>
-          <p:cNvPr id="299" name="PlaceHolder 1"/>
+          <p:cNvPr id="277" name="PlaceHolder 1"/>
           <p:cNvSpPr>
             <a:spLocks noGrp="1"/>
           </p:cNvSpPr>
@@ -1106,19 +1106,19 @@
         <p:spPr>
           <a:xfrm>
             <a:off x="685800" y="1143000"/>
-            <a:ext cx="5485680" cy="3085560"/>
-          </a:xfrm>
-          <a:prstGeom prst="rect">
-            <a:avLst/>
-          </a:prstGeom>
-          <a:ln w="0">
-            <a:noFill/>
-          </a:ln>
-        </p:spPr>
-      </p:sp>
-      <p:sp>
-        <p:nvSpPr>
-          <p:cNvPr id="300" name="PlaceHolder 2"/>
+            <a:ext cx="5485320" cy="3085200"/>
+          </a:xfrm>
+          <a:prstGeom prst="rect">
+            <a:avLst/>
+          </a:prstGeom>
+          <a:ln w="0">
+            <a:noFill/>
+          </a:ln>
+        </p:spPr>
+      </p:sp>
+      <p:sp>
+        <p:nvSpPr>
+          <p:cNvPr id="278" name="PlaceHolder 2"/>
           <p:cNvSpPr>
             <a:spLocks noGrp="1"/>
           </p:cNvSpPr>
@@ -1129,7 +1129,7 @@
         <p:spPr>
           <a:xfrm>
             <a:off x="685800" y="4400640"/>
-            <a:ext cx="5485680" cy="3599640"/>
+            <a:ext cx="5485320" cy="3599280"/>
           </a:xfrm>
           <a:prstGeom prst="rect">
             <a:avLst/>
@@ -1160,18 +1160,18 @@
       </p:sp>
       <p:sp>
         <p:nvSpPr>
-          <p:cNvPr id="301" name="PlaceHolder 3"/>
+          <p:cNvPr id="279" name="PlaceHolder 3"/>
           <p:cNvSpPr>
             <a:spLocks noGrp="1"/>
           </p:cNvSpPr>
           <p:nvPr>
-            <p:ph type="sldNum" idx="14"/>
+            <p:ph type="sldNum" idx="13"/>
           </p:nvPr>
         </p:nvSpPr>
         <p:spPr>
           <a:xfrm>
             <a:off x="3884760" y="8685360"/>
-            <a:ext cx="2971080" cy="457920"/>
+            <a:ext cx="2970720" cy="457560"/>
           </a:xfrm>
           <a:prstGeom prst="rect">
             <a:avLst/>
@@ -1215,7 +1215,7 @@
                 <a:tab algn="l" pos="0"/>
               </a:tabLst>
             </a:pPr>
-            <a:fld id="{168B52DC-428C-492C-B4CD-3A8E41B5DA75}" type="slidenum">
+            <a:fld id="{66CBCD3F-D9D2-49A1-9CF4-64F0BEE96134}" type="slidenum">
               <a:rPr lang="en-US" sz="1200" b="0" u="none" strike="noStrike">
                 <a:solidFill>
                   <a:schemeClr val="dk1"/>
@@ -1262,7 +1262,7 @@
       </p:grpSpPr>
       <p:sp>
         <p:nvSpPr>
-          <p:cNvPr id="302" name="PlaceHolder 1"/>
+          <p:cNvPr id="280" name="PlaceHolder 1"/>
           <p:cNvSpPr>
             <a:spLocks noGrp="1"/>
           </p:cNvSpPr>
@@ -1273,19 +1273,19 @@
         <p:spPr>
           <a:xfrm>
             <a:off x="685800" y="1143000"/>
-            <a:ext cx="5485680" cy="3085560"/>
-          </a:xfrm>
-          <a:prstGeom prst="rect">
-            <a:avLst/>
-          </a:prstGeom>
-          <a:ln w="0">
-            <a:noFill/>
-          </a:ln>
-        </p:spPr>
-      </p:sp>
-      <p:sp>
-        <p:nvSpPr>
-          <p:cNvPr id="303" name="PlaceHolder 2"/>
+            <a:ext cx="5485320" cy="3085200"/>
+          </a:xfrm>
+          <a:prstGeom prst="rect">
+            <a:avLst/>
+          </a:prstGeom>
+          <a:ln w="0">
+            <a:noFill/>
+          </a:ln>
+        </p:spPr>
+      </p:sp>
+      <p:sp>
+        <p:nvSpPr>
+          <p:cNvPr id="281" name="PlaceHolder 2"/>
           <p:cNvSpPr>
             <a:spLocks noGrp="1"/>
           </p:cNvSpPr>
@@ -1296,7 +1296,7 @@
         <p:spPr>
           <a:xfrm>
             <a:off x="685800" y="4400640"/>
-            <a:ext cx="5485680" cy="3599640"/>
+            <a:ext cx="5485320" cy="3599280"/>
           </a:xfrm>
           <a:prstGeom prst="rect">
             <a:avLst/>
@@ -1327,18 +1327,18 @@
       </p:sp>
       <p:sp>
         <p:nvSpPr>
-          <p:cNvPr id="304" name="PlaceHolder 3"/>
+          <p:cNvPr id="282" name="PlaceHolder 3"/>
           <p:cNvSpPr>
             <a:spLocks noGrp="1"/>
           </p:cNvSpPr>
           <p:nvPr>
-            <p:ph type="sldNum" idx="15"/>
+            <p:ph type="sldNum" idx="14"/>
           </p:nvPr>
         </p:nvSpPr>
         <p:spPr>
           <a:xfrm>
             <a:off x="3884760" y="8685360"/>
-            <a:ext cx="2971080" cy="457920"/>
+            <a:ext cx="2970720" cy="457560"/>
           </a:xfrm>
           <a:prstGeom prst="rect">
             <a:avLst/>
@@ -1382,7 +1382,7 @@
                 <a:tab algn="l" pos="0"/>
               </a:tabLst>
             </a:pPr>
-            <a:fld id="{EDA0F8F7-091B-4754-A4A4-6C02D5D877C8}" type="slidenum">
+            <a:fld id="{3E006176-DC59-42C8-9AC5-0DB799D2E325}" type="slidenum">
               <a:rPr lang="en-US" sz="1200" b="0" u="none" strike="noStrike">
                 <a:solidFill>
                   <a:schemeClr val="dk1"/>
@@ -1429,7 +1429,7 @@
       </p:grpSpPr>
       <p:sp>
         <p:nvSpPr>
-          <p:cNvPr id="305" name="PlaceHolder 1"/>
+          <p:cNvPr id="283" name="PlaceHolder 1"/>
           <p:cNvSpPr>
             <a:spLocks noGrp="1"/>
           </p:cNvSpPr>
@@ -1440,19 +1440,19 @@
         <p:spPr>
           <a:xfrm>
             <a:off x="685800" y="1143000"/>
-            <a:ext cx="5485680" cy="3085560"/>
-          </a:xfrm>
-          <a:prstGeom prst="rect">
-            <a:avLst/>
-          </a:prstGeom>
-          <a:ln w="0">
-            <a:noFill/>
-          </a:ln>
-        </p:spPr>
-      </p:sp>
-      <p:sp>
-        <p:nvSpPr>
-          <p:cNvPr id="306" name="PlaceHolder 2"/>
+            <a:ext cx="5485320" cy="3085200"/>
+          </a:xfrm>
+          <a:prstGeom prst="rect">
+            <a:avLst/>
+          </a:prstGeom>
+          <a:ln w="0">
+            <a:noFill/>
+          </a:ln>
+        </p:spPr>
+      </p:sp>
+      <p:sp>
+        <p:nvSpPr>
+          <p:cNvPr id="284" name="PlaceHolder 2"/>
           <p:cNvSpPr>
             <a:spLocks noGrp="1"/>
           </p:cNvSpPr>
@@ -1463,7 +1463,7 @@
         <p:spPr>
           <a:xfrm>
             <a:off x="685800" y="4400640"/>
-            <a:ext cx="5485680" cy="3599640"/>
+            <a:ext cx="5485320" cy="3599280"/>
           </a:xfrm>
           <a:prstGeom prst="rect">
             <a:avLst/>
@@ -1494,18 +1494,18 @@
       </p:sp>
       <p:sp>
         <p:nvSpPr>
-          <p:cNvPr id="307" name="PlaceHolder 3"/>
+          <p:cNvPr id="285" name="PlaceHolder 3"/>
           <p:cNvSpPr>
             <a:spLocks noGrp="1"/>
           </p:cNvSpPr>
           <p:nvPr>
-            <p:ph type="sldNum" idx="16"/>
+            <p:ph type="sldNum" idx="15"/>
           </p:nvPr>
         </p:nvSpPr>
         <p:spPr>
           <a:xfrm>
             <a:off x="3884760" y="8685360"/>
-            <a:ext cx="2971080" cy="457920"/>
+            <a:ext cx="2970720" cy="457560"/>
           </a:xfrm>
           <a:prstGeom prst="rect">
             <a:avLst/>
@@ -1549,7 +1549,7 @@
                 <a:tab algn="l" pos="0"/>
               </a:tabLst>
             </a:pPr>
-            <a:fld id="{BFFF1517-2ECB-4D99-978A-2935276AD9FF}" type="slidenum">
+            <a:fld id="{129073A7-F579-4E1C-9917-180D22CC3B38}" type="slidenum">
               <a:rPr lang="en-US" sz="1200" b="0" u="none" strike="noStrike">
                 <a:solidFill>
                   <a:schemeClr val="dk1"/>
@@ -1559,7 +1559,7 @@
                 <a:latin typeface="+mn-lt"/>
                 <a:ea typeface="+mn-ea"/>
               </a:rPr>
-              <a:t>&lt;number&gt;</a:t>
+              <a:t>16</a:t>
             </a:fld>
             <a:endParaRPr lang="en-US" sz="1200" b="0" u="none" strike="noStrike">
               <a:solidFill>
@@ -1596,7 +1596,7 @@
       </p:grpSpPr>
       <p:sp>
         <p:nvSpPr>
-          <p:cNvPr id="272" name="PlaceHolder 1"/>
+          <p:cNvPr id="253" name="PlaceHolder 1"/>
           <p:cNvSpPr>
             <a:spLocks noGrp="1"/>
           </p:cNvSpPr>
@@ -1607,19 +1607,19 @@
         <p:spPr>
           <a:xfrm>
             <a:off x="685800" y="1143000"/>
-            <a:ext cx="5485680" cy="3085560"/>
-          </a:xfrm>
-          <a:prstGeom prst="rect">
-            <a:avLst/>
-          </a:prstGeom>
-          <a:ln w="0">
-            <a:noFill/>
-          </a:ln>
-        </p:spPr>
-      </p:sp>
-      <p:sp>
-        <p:nvSpPr>
-          <p:cNvPr id="273" name="PlaceHolder 2"/>
+            <a:ext cx="5485320" cy="3085200"/>
+          </a:xfrm>
+          <a:prstGeom prst="rect">
+            <a:avLst/>
+          </a:prstGeom>
+          <a:ln w="0">
+            <a:noFill/>
+          </a:ln>
+        </p:spPr>
+      </p:sp>
+      <p:sp>
+        <p:nvSpPr>
+          <p:cNvPr id="254" name="PlaceHolder 2"/>
           <p:cNvSpPr>
             <a:spLocks noGrp="1"/>
           </p:cNvSpPr>
@@ -1630,7 +1630,7 @@
         <p:spPr>
           <a:xfrm>
             <a:off x="685800" y="4400640"/>
-            <a:ext cx="5485680" cy="3599640"/>
+            <a:ext cx="5485320" cy="3599280"/>
           </a:xfrm>
           <a:prstGeom prst="rect">
             <a:avLst/>
@@ -1661,7 +1661,7 @@
       </p:sp>
       <p:sp>
         <p:nvSpPr>
-          <p:cNvPr id="274" name="PlaceHolder 3"/>
+          <p:cNvPr id="255" name="PlaceHolder 3"/>
           <p:cNvSpPr>
             <a:spLocks noGrp="1"/>
           </p:cNvSpPr>
@@ -1672,7 +1672,7 @@
         <p:spPr>
           <a:xfrm>
             <a:off x="3884760" y="8685360"/>
-            <a:ext cx="2971080" cy="457920"/>
+            <a:ext cx="2970720" cy="457560"/>
           </a:xfrm>
           <a:prstGeom prst="rect">
             <a:avLst/>
@@ -1716,7 +1716,7 @@
                 <a:tab algn="l" pos="0"/>
               </a:tabLst>
             </a:pPr>
-            <a:fld id="{78D826D4-148C-45B4-9A7F-5A6FEB7D19AF}" type="slidenum">
+            <a:fld id="{4BDCEE58-F6C1-4606-AF9B-06AD47BF60F4}" type="slidenum">
               <a:rPr lang="en-US" sz="1200" b="0" u="none" strike="noStrike">
                 <a:solidFill>
                   <a:schemeClr val="dk1"/>
@@ -1763,7 +1763,7 @@
       </p:grpSpPr>
       <p:sp>
         <p:nvSpPr>
-          <p:cNvPr id="275" name="PlaceHolder 1"/>
+          <p:cNvPr id="256" name="PlaceHolder 1"/>
           <p:cNvSpPr>
             <a:spLocks noGrp="1"/>
           </p:cNvSpPr>
@@ -1774,19 +1774,19 @@
         <p:spPr>
           <a:xfrm>
             <a:off x="685800" y="1143000"/>
-            <a:ext cx="5485680" cy="3085560"/>
-          </a:xfrm>
-          <a:prstGeom prst="rect">
-            <a:avLst/>
-          </a:prstGeom>
-          <a:ln w="0">
-            <a:noFill/>
-          </a:ln>
-        </p:spPr>
-      </p:sp>
-      <p:sp>
-        <p:nvSpPr>
-          <p:cNvPr id="276" name="PlaceHolder 2"/>
+            <a:ext cx="5485320" cy="3085200"/>
+          </a:xfrm>
+          <a:prstGeom prst="rect">
+            <a:avLst/>
+          </a:prstGeom>
+          <a:ln w="0">
+            <a:noFill/>
+          </a:ln>
+        </p:spPr>
+      </p:sp>
+      <p:sp>
+        <p:nvSpPr>
+          <p:cNvPr id="257" name="PlaceHolder 2"/>
           <p:cNvSpPr>
             <a:spLocks noGrp="1"/>
           </p:cNvSpPr>
@@ -1797,7 +1797,7 @@
         <p:spPr>
           <a:xfrm>
             <a:off x="685800" y="4400640"/>
-            <a:ext cx="5485680" cy="3599640"/>
+            <a:ext cx="5485320" cy="3599280"/>
           </a:xfrm>
           <a:prstGeom prst="rect">
             <a:avLst/>
@@ -1828,7 +1828,7 @@
       </p:sp>
       <p:sp>
         <p:nvSpPr>
-          <p:cNvPr id="277" name="PlaceHolder 3"/>
+          <p:cNvPr id="258" name="PlaceHolder 3"/>
           <p:cNvSpPr>
             <a:spLocks noGrp="1"/>
           </p:cNvSpPr>
@@ -1839,7 +1839,7 @@
         <p:spPr>
           <a:xfrm>
             <a:off x="3884760" y="8685360"/>
-            <a:ext cx="2971080" cy="457920"/>
+            <a:ext cx="2970720" cy="457560"/>
           </a:xfrm>
           <a:prstGeom prst="rect">
             <a:avLst/>
@@ -1883,7 +1883,7 @@
                 <a:tab algn="l" pos="0"/>
               </a:tabLst>
             </a:pPr>
-            <a:fld id="{1190D5B7-B163-4FF5-86E0-5EAF59A309FB}" type="slidenum">
+            <a:fld id="{6F65A029-F001-49E9-AD82-AB4FFD50D6CD}" type="slidenum">
               <a:rPr lang="en-US" sz="1200" b="0" u="none" strike="noStrike">
                 <a:solidFill>
                   <a:schemeClr val="dk1"/>
@@ -1930,7 +1930,7 @@
       </p:grpSpPr>
       <p:sp>
         <p:nvSpPr>
-          <p:cNvPr id="278" name="PlaceHolder 1"/>
+          <p:cNvPr id="259" name="PlaceHolder 1"/>
           <p:cNvSpPr>
             <a:spLocks noGrp="1"/>
           </p:cNvSpPr>
@@ -1941,19 +1941,19 @@
         <p:spPr>
           <a:xfrm>
             <a:off x="685800" y="1143000"/>
-            <a:ext cx="5485680" cy="3085560"/>
-          </a:xfrm>
-          <a:prstGeom prst="rect">
-            <a:avLst/>
-          </a:prstGeom>
-          <a:ln w="0">
-            <a:noFill/>
-          </a:ln>
-        </p:spPr>
-      </p:sp>
-      <p:sp>
-        <p:nvSpPr>
-          <p:cNvPr id="279" name="PlaceHolder 2"/>
+            <a:ext cx="5485320" cy="3085200"/>
+          </a:xfrm>
+          <a:prstGeom prst="rect">
+            <a:avLst/>
+          </a:prstGeom>
+          <a:ln w="0">
+            <a:noFill/>
+          </a:ln>
+        </p:spPr>
+      </p:sp>
+      <p:sp>
+        <p:nvSpPr>
+          <p:cNvPr id="260" name="PlaceHolder 2"/>
           <p:cNvSpPr>
             <a:spLocks noGrp="1"/>
           </p:cNvSpPr>
@@ -1964,7 +1964,7 @@
         <p:spPr>
           <a:xfrm>
             <a:off x="685800" y="4400640"/>
-            <a:ext cx="5485680" cy="3599640"/>
+            <a:ext cx="5485320" cy="3599280"/>
           </a:xfrm>
           <a:prstGeom prst="rect">
             <a:avLst/>
@@ -1995,7 +1995,7 @@
       </p:sp>
       <p:sp>
         <p:nvSpPr>
-          <p:cNvPr id="280" name="PlaceHolder 3"/>
+          <p:cNvPr id="261" name="PlaceHolder 3"/>
           <p:cNvSpPr>
             <a:spLocks noGrp="1"/>
           </p:cNvSpPr>
@@ -2006,7 +2006,7 @@
         <p:spPr>
           <a:xfrm>
             <a:off x="3884760" y="8685360"/>
-            <a:ext cx="2971080" cy="457920"/>
+            <a:ext cx="2970720" cy="457560"/>
           </a:xfrm>
           <a:prstGeom prst="rect">
             <a:avLst/>
@@ -2050,7 +2050,7 @@
                 <a:tab algn="l" pos="0"/>
               </a:tabLst>
             </a:pPr>
-            <a:fld id="{9B65463C-8383-45C8-9739-E9B7B1817024}" type="slidenum">
+            <a:fld id="{05FC6DF7-4AF3-4BC7-8F05-015FC2011626}" type="slidenum">
               <a:rPr lang="en-US" sz="1200" b="0" u="none" strike="noStrike">
                 <a:solidFill>
                   <a:schemeClr val="dk1"/>
@@ -2097,7 +2097,7 @@
       </p:grpSpPr>
       <p:sp>
         <p:nvSpPr>
-          <p:cNvPr id="281" name="PlaceHolder 1"/>
+          <p:cNvPr id="262" name="PlaceHolder 1"/>
           <p:cNvSpPr>
             <a:spLocks noGrp="1"/>
           </p:cNvSpPr>
@@ -2108,19 +2108,19 @@
         <p:spPr>
           <a:xfrm>
             <a:off x="685800" y="1143000"/>
-            <a:ext cx="5485680" cy="3085560"/>
-          </a:xfrm>
-          <a:prstGeom prst="rect">
-            <a:avLst/>
-          </a:prstGeom>
-          <a:ln w="0">
-            <a:noFill/>
-          </a:ln>
-        </p:spPr>
-      </p:sp>
-      <p:sp>
-        <p:nvSpPr>
-          <p:cNvPr id="282" name="PlaceHolder 2"/>
+            <a:ext cx="5485320" cy="3085200"/>
+          </a:xfrm>
+          <a:prstGeom prst="rect">
+            <a:avLst/>
+          </a:prstGeom>
+          <a:ln w="0">
+            <a:noFill/>
+          </a:ln>
+        </p:spPr>
+      </p:sp>
+      <p:sp>
+        <p:nvSpPr>
+          <p:cNvPr id="263" name="PlaceHolder 2"/>
           <p:cNvSpPr>
             <a:spLocks noGrp="1"/>
           </p:cNvSpPr>
@@ -2131,7 +2131,7 @@
         <p:spPr>
           <a:xfrm>
             <a:off x="685800" y="4400640"/>
-            <a:ext cx="5485680" cy="3599640"/>
+            <a:ext cx="5485320" cy="3599280"/>
           </a:xfrm>
           <a:prstGeom prst="rect">
             <a:avLst/>
@@ -2162,7 +2162,7 @@
       </p:sp>
       <p:sp>
         <p:nvSpPr>
-          <p:cNvPr id="283" name="PlaceHolder 3"/>
+          <p:cNvPr id="264" name="PlaceHolder 3"/>
           <p:cNvSpPr>
             <a:spLocks noGrp="1"/>
           </p:cNvSpPr>
@@ -2173,7 +2173,7 @@
         <p:spPr>
           <a:xfrm>
             <a:off x="3884760" y="8685360"/>
-            <a:ext cx="2971080" cy="457920"/>
+            <a:ext cx="2970720" cy="457560"/>
           </a:xfrm>
           <a:prstGeom prst="rect">
             <a:avLst/>
@@ -2217,174 +2217,7 @@
                 <a:tab algn="l" pos="0"/>
               </a:tabLst>
             </a:pPr>
-            <a:fld id="{48BA492E-4B67-4A51-A8E7-56A1E4526DE1}" type="slidenum">
-              <a:rPr lang="en-US" sz="1200" b="0" u="none" strike="noStrike">
-                <a:solidFill>
-                  <a:schemeClr val="dk1"/>
-                </a:solidFill>
-                <a:effectLst/>
-                <a:uFillTx/>
-                <a:latin typeface="+mn-lt"/>
-                <a:ea typeface="+mn-ea"/>
-              </a:rPr>
-              <a:t>16</a:t>
-            </a:fld>
-            <a:endParaRPr lang="en-US" sz="1200" b="0" u="none" strike="noStrike">
-              <a:solidFill>
-                <a:srgbClr val="000000"/>
-              </a:solidFill>
-              <a:effectLst/>
-              <a:uFillTx/>
-              <a:latin typeface="Times New Roman"/>
-            </a:endParaRPr>
-          </a:p>
-        </p:txBody>
-      </p:sp>
-    </p:spTree>
-  </p:cSld>
-</p:notes>
-</file>
-
-<file path=ppt/notesSlides/notesSlide8.xml><?xml version="1.0" encoding="utf-8"?>
-<p:notes xmlns:a="http://schemas.openxmlformats.org/drawingml/2006/main" xmlns:p="http://schemas.openxmlformats.org/presentationml/2006/main" xmlns:r="http://schemas.openxmlformats.org/officeDocument/2006/relationships" xmlns:p14="http://schemas.microsoft.com/office/powerpoint/2010/main" xmlns:p15="http://schemas.microsoft.com/office/powerpoint/2012/main" xmlns:mc="http://schemas.openxmlformats.org/markup-compatibility/2006">
-  <p:cSld>
-    <p:spTree>
-      <p:nvGrpSpPr>
-        <p:cNvPr id="1" name=""/>
-        <p:cNvGrpSpPr/>
-        <p:nvPr/>
-      </p:nvGrpSpPr>
-      <p:grpSpPr>
-        <a:xfrm>
-          <a:off x="0" y="0"/>
-          <a:ext cx="0" cy="0"/>
-          <a:chOff x="0" y="0"/>
-          <a:chExt cx="0" cy="0"/>
-        </a:xfrm>
-      </p:grpSpPr>
-      <p:sp>
-        <p:nvSpPr>
-          <p:cNvPr id="284" name="PlaceHolder 1"/>
-          <p:cNvSpPr>
-            <a:spLocks noGrp="1"/>
-          </p:cNvSpPr>
-          <p:nvPr>
-            <p:ph type="sldImg"/>
-          </p:nvPr>
-        </p:nvSpPr>
-        <p:spPr>
-          <a:xfrm>
-            <a:off x="685800" y="1143000"/>
-            <a:ext cx="5485680" cy="3085560"/>
-          </a:xfrm>
-          <a:prstGeom prst="rect">
-            <a:avLst/>
-          </a:prstGeom>
-          <a:ln w="0">
-            <a:noFill/>
-          </a:ln>
-        </p:spPr>
-      </p:sp>
-      <p:sp>
-        <p:nvSpPr>
-          <p:cNvPr id="285" name="PlaceHolder 2"/>
-          <p:cNvSpPr>
-            <a:spLocks noGrp="1"/>
-          </p:cNvSpPr>
-          <p:nvPr>
-            <p:ph type="body"/>
-          </p:nvPr>
-        </p:nvSpPr>
-        <p:spPr>
-          <a:xfrm>
-            <a:off x="685800" y="4400640"/>
-            <a:ext cx="5485680" cy="3599640"/>
-          </a:xfrm>
-          <a:prstGeom prst="rect">
-            <a:avLst/>
-          </a:prstGeom>
-          <a:noFill/>
-          <a:ln w="0">
-            <a:noFill/>
-          </a:ln>
-        </p:spPr>
-        <p:txBody>
-          <a:bodyPr lIns="91440" rIns="91440" tIns="45720" bIns="45720" anchor="t">
-            <a:noAutofit/>
-          </a:bodyPr>
-          <a:p>
-            <a:pPr indent="0">
-              <a:buNone/>
-            </a:pPr>
-            <a:endParaRPr lang="en-US" sz="1800" b="0" u="none" strike="noStrike">
-              <a:solidFill>
-                <a:srgbClr val="000000"/>
-              </a:solidFill>
-              <a:effectLst/>
-              <a:uFillTx/>
-              <a:latin typeface="Arial"/>
-            </a:endParaRPr>
-          </a:p>
-        </p:txBody>
-      </p:sp>
-      <p:sp>
-        <p:nvSpPr>
-          <p:cNvPr id="286" name="PlaceHolder 3"/>
-          <p:cNvSpPr>
-            <a:spLocks noGrp="1"/>
-          </p:cNvSpPr>
-          <p:nvPr>
-            <p:ph type="sldNum" idx="9"/>
-          </p:nvPr>
-        </p:nvSpPr>
-        <p:spPr>
-          <a:xfrm>
-            <a:off x="3884760" y="8685360"/>
-            <a:ext cx="2971080" cy="457920"/>
-          </a:xfrm>
-          <a:prstGeom prst="rect">
-            <a:avLst/>
-          </a:prstGeom>
-          <a:noFill/>
-          <a:ln w="0">
-            <a:noFill/>
-          </a:ln>
-        </p:spPr>
-        <p:txBody>
-          <a:bodyPr lIns="91440" rIns="91440" tIns="45720" bIns="45720" anchor="b">
-            <a:noAutofit/>
-          </a:bodyPr>
-          <a:lstStyle>
-            <a:lvl1pPr indent="0" algn="r" defTabSz="914400">
-              <a:lnSpc>
-                <a:spcPct val="100000"/>
-              </a:lnSpc>
-              <a:buNone/>
-              <a:tabLst>
-                <a:tab algn="l" pos="0"/>
-              </a:tabLst>
-              <a:defRPr lang="en-US" sz="1200" b="0" u="none" strike="noStrike">
-                <a:solidFill>
-                  <a:schemeClr val="dk1"/>
-                </a:solidFill>
-                <a:effectLst/>
-                <a:uFillTx/>
-                <a:latin typeface="+mn-lt"/>
-                <a:ea typeface="+mn-ea"/>
-              </a:defRPr>
-            </a:lvl1pPr>
-          </a:lstStyle>
-          <a:p>
-            <a:pPr indent="0" algn="r" defTabSz="914400">
-              <a:lnSpc>
-                <a:spcPct val="100000"/>
-              </a:lnSpc>
-              <a:buNone/>
-              <a:tabLst>
-                <a:tab algn="l" pos="0"/>
-              </a:tabLst>
-            </a:pPr>
-            <a:fld id="{1DD530B3-519D-4295-AADB-47F9D591E5C1}" type="slidenum">
+            <a:fld id="{648E65CC-15D0-41FA-94BD-C27AC7956700}" type="slidenum">
               <a:rPr lang="en-US" sz="1200" b="0" u="none" strike="noStrike">
                 <a:solidFill>
                   <a:schemeClr val="dk1"/>
@@ -2431,7 +2264,7 @@
       </p:grpSpPr>
       <p:sp>
         <p:nvSpPr>
-          <p:cNvPr id="287" name="PlaceHolder 1"/>
+          <p:cNvPr id="265" name="PlaceHolder 1"/>
           <p:cNvSpPr>
             <a:spLocks noGrp="1"/>
           </p:cNvSpPr>
@@ -2442,19 +2275,19 @@
         <p:spPr>
           <a:xfrm>
             <a:off x="685800" y="1143000"/>
-            <a:ext cx="5485680" cy="3085560"/>
-          </a:xfrm>
-          <a:prstGeom prst="rect">
-            <a:avLst/>
-          </a:prstGeom>
-          <a:ln w="0">
-            <a:noFill/>
-          </a:ln>
-        </p:spPr>
-      </p:sp>
-      <p:sp>
-        <p:nvSpPr>
-          <p:cNvPr id="288" name="PlaceHolder 2"/>
+            <a:ext cx="5485320" cy="3085200"/>
+          </a:xfrm>
+          <a:prstGeom prst="rect">
+            <a:avLst/>
+          </a:prstGeom>
+          <a:ln w="0">
+            <a:noFill/>
+          </a:ln>
+        </p:spPr>
+      </p:sp>
+      <p:sp>
+        <p:nvSpPr>
+          <p:cNvPr id="266" name="PlaceHolder 2"/>
           <p:cNvSpPr>
             <a:spLocks noGrp="1"/>
           </p:cNvSpPr>
@@ -2465,7 +2298,7 @@
         <p:spPr>
           <a:xfrm>
             <a:off x="685800" y="4400640"/>
-            <a:ext cx="5485680" cy="3599640"/>
+            <a:ext cx="5485320" cy="3599280"/>
           </a:xfrm>
           <a:prstGeom prst="rect">
             <a:avLst/>
@@ -2496,18 +2329,18 @@
       </p:sp>
       <p:sp>
         <p:nvSpPr>
-          <p:cNvPr id="289" name="PlaceHolder 3"/>
+          <p:cNvPr id="267" name="PlaceHolder 3"/>
           <p:cNvSpPr>
             <a:spLocks noGrp="1"/>
           </p:cNvSpPr>
           <p:nvPr>
-            <p:ph type="sldNum" idx="10"/>
+            <p:ph type="sldNum" idx="9"/>
           </p:nvPr>
         </p:nvSpPr>
         <p:spPr>
           <a:xfrm>
             <a:off x="3884760" y="8685360"/>
-            <a:ext cx="2971080" cy="457920"/>
+            <a:ext cx="2970720" cy="457560"/>
           </a:xfrm>
           <a:prstGeom prst="rect">
             <a:avLst/>
@@ -2551,7 +2384,7 @@
                 <a:tab algn="l" pos="0"/>
               </a:tabLst>
             </a:pPr>
-            <a:fld id="{75A87B9F-E822-4D38-8B1C-0953678C93A1}" type="slidenum">
+            <a:fld id="{BB6D5BA1-0416-4843-9F02-9A8759AABB5A}" type="slidenum">
               <a:rPr lang="en-US" sz="1200" b="0" u="none" strike="noStrike">
                 <a:solidFill>
                   <a:schemeClr val="dk1"/>
@@ -2665,7 +2498,348 @@
                 <a:uFillTx/>
                 <a:latin typeface="Arial"/>
               </a:rPr>
-              <a:t>Click to edit the title text format</a:t>
+              <a:t>C</a:t>
+            </a:r>
+            <a:r>
+              <a:rPr lang="en-US" sz="4400" b="0" u="none" strike="noStrike">
+                <a:solidFill>
+                  <a:srgbClr val="000000"/>
+                </a:solidFill>
+                <a:effectLst/>
+                <a:uFillTx/>
+                <a:latin typeface="Arial"/>
+              </a:rPr>
+              <a:t>li</a:t>
+            </a:r>
+            <a:r>
+              <a:rPr lang="en-US" sz="4400" b="0" u="none" strike="noStrike">
+                <a:solidFill>
+                  <a:srgbClr val="000000"/>
+                </a:solidFill>
+                <a:effectLst/>
+                <a:uFillTx/>
+                <a:latin typeface="Arial"/>
+              </a:rPr>
+              <a:t>c</a:t>
+            </a:r>
+            <a:r>
+              <a:rPr lang="en-US" sz="4400" b="0" u="none" strike="noStrike">
+                <a:solidFill>
+                  <a:srgbClr val="000000"/>
+                </a:solidFill>
+                <a:effectLst/>
+                <a:uFillTx/>
+                <a:latin typeface="Arial"/>
+              </a:rPr>
+              <a:t>k</a:t>
+            </a:r>
+            <a:r>
+              <a:rPr lang="en-US" sz="4400" b="0" u="none" strike="noStrike">
+                <a:solidFill>
+                  <a:srgbClr val="000000"/>
+                </a:solidFill>
+                <a:effectLst/>
+                <a:uFillTx/>
+                <a:latin typeface="Arial"/>
+              </a:rPr>
+              <a:t> </a:t>
+            </a:r>
+            <a:r>
+              <a:rPr lang="en-US" sz="4400" b="0" u="none" strike="noStrike">
+                <a:solidFill>
+                  <a:srgbClr val="000000"/>
+                </a:solidFill>
+                <a:effectLst/>
+                <a:uFillTx/>
+                <a:latin typeface="Arial"/>
+              </a:rPr>
+              <a:t>t</a:t>
+            </a:r>
+            <a:r>
+              <a:rPr lang="en-US" sz="4400" b="0" u="none" strike="noStrike">
+                <a:solidFill>
+                  <a:srgbClr val="000000"/>
+                </a:solidFill>
+                <a:effectLst/>
+                <a:uFillTx/>
+                <a:latin typeface="Arial"/>
+              </a:rPr>
+              <a:t>o</a:t>
+            </a:r>
+            <a:r>
+              <a:rPr lang="en-US" sz="4400" b="0" u="none" strike="noStrike">
+                <a:solidFill>
+                  <a:srgbClr val="000000"/>
+                </a:solidFill>
+                <a:effectLst/>
+                <a:uFillTx/>
+                <a:latin typeface="Arial"/>
+              </a:rPr>
+              <a:t> </a:t>
+            </a:r>
+            <a:r>
+              <a:rPr lang="en-US" sz="4400" b="0" u="none" strike="noStrike">
+                <a:solidFill>
+                  <a:srgbClr val="000000"/>
+                </a:solidFill>
+                <a:effectLst/>
+                <a:uFillTx/>
+                <a:latin typeface="Arial"/>
+              </a:rPr>
+              <a:t>e</a:t>
+            </a:r>
+            <a:r>
+              <a:rPr lang="en-US" sz="4400" b="0" u="none" strike="noStrike">
+                <a:solidFill>
+                  <a:srgbClr val="000000"/>
+                </a:solidFill>
+                <a:effectLst/>
+                <a:uFillTx/>
+                <a:latin typeface="Arial"/>
+              </a:rPr>
+              <a:t>d</a:t>
+            </a:r>
+            <a:r>
+              <a:rPr lang="en-US" sz="4400" b="0" u="none" strike="noStrike">
+                <a:solidFill>
+                  <a:srgbClr val="000000"/>
+                </a:solidFill>
+                <a:effectLst/>
+                <a:uFillTx/>
+                <a:latin typeface="Arial"/>
+              </a:rPr>
+              <a:t>i</a:t>
+            </a:r>
+            <a:r>
+              <a:rPr lang="en-US" sz="4400" b="0" u="none" strike="noStrike">
+                <a:solidFill>
+                  <a:srgbClr val="000000"/>
+                </a:solidFill>
+                <a:effectLst/>
+                <a:uFillTx/>
+                <a:latin typeface="Arial"/>
+              </a:rPr>
+              <a:t>t </a:t>
+            </a:r>
+            <a:r>
+              <a:rPr lang="en-US" sz="4400" b="0" u="none" strike="noStrike">
+                <a:solidFill>
+                  <a:srgbClr val="000000"/>
+                </a:solidFill>
+                <a:effectLst/>
+                <a:uFillTx/>
+                <a:latin typeface="Arial"/>
+              </a:rPr>
+              <a:t>t</a:t>
+            </a:r>
+            <a:r>
+              <a:rPr lang="en-US" sz="4400" b="0" u="none" strike="noStrike">
+                <a:solidFill>
+                  <a:srgbClr val="000000"/>
+                </a:solidFill>
+                <a:effectLst/>
+                <a:uFillTx/>
+                <a:latin typeface="Arial"/>
+              </a:rPr>
+              <a:t>h</a:t>
+            </a:r>
+            <a:r>
+              <a:rPr lang="en-US" sz="4400" b="0" u="none" strike="noStrike">
+                <a:solidFill>
+                  <a:srgbClr val="000000"/>
+                </a:solidFill>
+                <a:effectLst/>
+                <a:uFillTx/>
+                <a:latin typeface="Arial"/>
+              </a:rPr>
+              <a:t>e</a:t>
+            </a:r>
+            <a:r>
+              <a:rPr lang="en-US" sz="4400" b="0" u="none" strike="noStrike">
+                <a:solidFill>
+                  <a:srgbClr val="000000"/>
+                </a:solidFill>
+                <a:effectLst/>
+                <a:uFillTx/>
+                <a:latin typeface="Arial"/>
+              </a:rPr>
+              <a:t> </a:t>
+            </a:r>
+            <a:r>
+              <a:rPr lang="en-US" sz="4400" b="0" u="none" strike="noStrike">
+                <a:solidFill>
+                  <a:srgbClr val="000000"/>
+                </a:solidFill>
+                <a:effectLst/>
+                <a:uFillTx/>
+                <a:latin typeface="Arial"/>
+              </a:rPr>
+              <a:t>t</a:t>
+            </a:r>
+            <a:r>
+              <a:rPr lang="en-US" sz="4400" b="0" u="none" strike="noStrike">
+                <a:solidFill>
+                  <a:srgbClr val="000000"/>
+                </a:solidFill>
+                <a:effectLst/>
+                <a:uFillTx/>
+                <a:latin typeface="Arial"/>
+              </a:rPr>
+              <a:t>i</a:t>
+            </a:r>
+            <a:r>
+              <a:rPr lang="en-US" sz="4400" b="0" u="none" strike="noStrike">
+                <a:solidFill>
+                  <a:srgbClr val="000000"/>
+                </a:solidFill>
+                <a:effectLst/>
+                <a:uFillTx/>
+                <a:latin typeface="Arial"/>
+              </a:rPr>
+              <a:t>t</a:t>
+            </a:r>
+            <a:r>
+              <a:rPr lang="en-US" sz="4400" b="0" u="none" strike="noStrike">
+                <a:solidFill>
+                  <a:srgbClr val="000000"/>
+                </a:solidFill>
+                <a:effectLst/>
+                <a:uFillTx/>
+                <a:latin typeface="Arial"/>
+              </a:rPr>
+              <a:t>l</a:t>
+            </a:r>
+            <a:r>
+              <a:rPr lang="en-US" sz="4400" b="0" u="none" strike="noStrike">
+                <a:solidFill>
+                  <a:srgbClr val="000000"/>
+                </a:solidFill>
+                <a:effectLst/>
+                <a:uFillTx/>
+                <a:latin typeface="Arial"/>
+              </a:rPr>
+              <a:t>e</a:t>
+            </a:r>
+            <a:r>
+              <a:rPr lang="en-US" sz="4400" b="0" u="none" strike="noStrike">
+                <a:solidFill>
+                  <a:srgbClr val="000000"/>
+                </a:solidFill>
+                <a:effectLst/>
+                <a:uFillTx/>
+                <a:latin typeface="Arial"/>
+              </a:rPr>
+              <a:t> </a:t>
+            </a:r>
+            <a:r>
+              <a:rPr lang="en-US" sz="4400" b="0" u="none" strike="noStrike">
+                <a:solidFill>
+                  <a:srgbClr val="000000"/>
+                </a:solidFill>
+                <a:effectLst/>
+                <a:uFillTx/>
+                <a:latin typeface="Arial"/>
+              </a:rPr>
+              <a:t>t</a:t>
+            </a:r>
+            <a:r>
+              <a:rPr lang="en-US" sz="4400" b="0" u="none" strike="noStrike">
+                <a:solidFill>
+                  <a:srgbClr val="000000"/>
+                </a:solidFill>
+                <a:effectLst/>
+                <a:uFillTx/>
+                <a:latin typeface="Arial"/>
+              </a:rPr>
+              <a:t>e</a:t>
+            </a:r>
+            <a:r>
+              <a:rPr lang="en-US" sz="4400" b="0" u="none" strike="noStrike">
+                <a:solidFill>
+                  <a:srgbClr val="000000"/>
+                </a:solidFill>
+                <a:effectLst/>
+                <a:uFillTx/>
+                <a:latin typeface="Arial"/>
+              </a:rPr>
+              <a:t>x</a:t>
+            </a:r>
+            <a:r>
+              <a:rPr lang="en-US" sz="4400" b="0" u="none" strike="noStrike">
+                <a:solidFill>
+                  <a:srgbClr val="000000"/>
+                </a:solidFill>
+                <a:effectLst/>
+                <a:uFillTx/>
+                <a:latin typeface="Arial"/>
+              </a:rPr>
+              <a:t>t </a:t>
+            </a:r>
+            <a:r>
+              <a:rPr lang="en-US" sz="4400" b="0" u="none" strike="noStrike">
+                <a:solidFill>
+                  <a:srgbClr val="000000"/>
+                </a:solidFill>
+                <a:effectLst/>
+                <a:uFillTx/>
+                <a:latin typeface="Arial"/>
+              </a:rPr>
+              <a:t>f</a:t>
+            </a:r>
+            <a:r>
+              <a:rPr lang="en-US" sz="4400" b="0" u="none" strike="noStrike">
+                <a:solidFill>
+                  <a:srgbClr val="000000"/>
+                </a:solidFill>
+                <a:effectLst/>
+                <a:uFillTx/>
+                <a:latin typeface="Arial"/>
+              </a:rPr>
+              <a:t>o</a:t>
+            </a:r>
+            <a:r>
+              <a:rPr lang="en-US" sz="4400" b="0" u="none" strike="noStrike">
+                <a:solidFill>
+                  <a:srgbClr val="000000"/>
+                </a:solidFill>
+                <a:effectLst/>
+                <a:uFillTx/>
+                <a:latin typeface="Arial"/>
+              </a:rPr>
+              <a:t>r</a:t>
+            </a:r>
+            <a:r>
+              <a:rPr lang="en-US" sz="4400" b="0" u="none" strike="noStrike">
+                <a:solidFill>
+                  <a:srgbClr val="000000"/>
+                </a:solidFill>
+                <a:effectLst/>
+                <a:uFillTx/>
+                <a:latin typeface="Arial"/>
+              </a:rPr>
+              <a:t>m</a:t>
+            </a:r>
+            <a:r>
+              <a:rPr lang="en-US" sz="4400" b="0" u="none" strike="noStrike">
+                <a:solidFill>
+                  <a:srgbClr val="000000"/>
+                </a:solidFill>
+                <a:effectLst/>
+                <a:uFillTx/>
+                <a:latin typeface="Arial"/>
+              </a:rPr>
+              <a:t>a</a:t>
+            </a:r>
+            <a:r>
+              <a:rPr lang="en-US" sz="4400" b="0" u="none" strike="noStrike">
+                <a:solidFill>
+                  <a:srgbClr val="000000"/>
+                </a:solidFill>
+                <a:effectLst/>
+                <a:uFillTx/>
+                <a:latin typeface="Arial"/>
+              </a:rPr>
+              <a:t>t</a:t>
             </a:r>
             <a:endParaRPr lang="en-US" sz="4400" b="0" u="none" strike="noStrike">
               <a:solidFill>
@@ -2973,7 +3147,7 @@
         <p:spPr>
           <a:xfrm>
             <a:off x="9829800" y="777240"/>
-            <a:ext cx="1645200" cy="1645200"/>
+            <a:ext cx="1644840" cy="1644840"/>
           </a:xfrm>
           <a:prstGeom prst="arc">
             <a:avLst>
@@ -3031,7 +3205,7 @@
         <p:spPr>
           <a:xfrm>
             <a:off x="9326880" y="4480560"/>
-            <a:ext cx="1645200" cy="1370880"/>
+            <a:ext cx="1644840" cy="1370520"/>
           </a:xfrm>
           <a:prstGeom prst="arc">
             <a:avLst>
@@ -3089,7 +3263,7 @@
         <p:spPr>
           <a:xfrm>
             <a:off x="777240" y="1828800"/>
-            <a:ext cx="8046000" cy="1096560"/>
+            <a:ext cx="8045640" cy="1096200"/>
           </a:xfrm>
           <a:prstGeom prst="rect">
             <a:avLst/>
@@ -3150,7 +3324,7 @@
         <p:spPr>
           <a:xfrm>
             <a:off x="822960" y="3063240"/>
-            <a:ext cx="7771680" cy="685080"/>
+            <a:ext cx="7771320" cy="684720"/>
           </a:xfrm>
           <a:prstGeom prst="rect">
             <a:avLst/>
@@ -3210,7 +3384,7 @@
         <p:spPr>
           <a:xfrm>
             <a:off x="822960" y="5806440"/>
-            <a:ext cx="2742480" cy="273600"/>
+            <a:ext cx="2742120" cy="273240"/>
           </a:xfrm>
           <a:prstGeom prst="rect">
             <a:avLst/>
@@ -3270,7 +3444,7 @@
         <p:spPr>
           <a:xfrm>
             <a:off x="11475720" y="6473880"/>
-            <a:ext cx="255240" cy="136440"/>
+            <a:ext cx="254880" cy="136080"/>
           </a:xfrm>
           <a:prstGeom prst="rect">
             <a:avLst/>
@@ -3360,14 +3534,14 @@
       </p:grpSpPr>
       <p:sp>
         <p:nvSpPr>
-          <p:cNvPr id="139" name="Shape 0"/>
+          <p:cNvPr id="120" name="Shape 0"/>
           <p:cNvSpPr/>
           <p:nvPr/>
         </p:nvSpPr>
         <p:spPr>
           <a:xfrm>
             <a:off x="0" y="0"/>
-            <a:ext cx="12191040" cy="657720"/>
+            <a:ext cx="12190680" cy="657360"/>
           </a:xfrm>
           <a:prstGeom prst="rect">
             <a:avLst/>
@@ -3411,14 +3585,14 @@
       </p:sp>
       <p:sp>
         <p:nvSpPr>
-          <p:cNvPr id="140" name="Text 1"/>
+          <p:cNvPr id="121" name="Text 1"/>
           <p:cNvSpPr/>
           <p:nvPr/>
         </p:nvSpPr>
         <p:spPr>
           <a:xfrm>
             <a:off x="502920" y="146160"/>
-            <a:ext cx="8868960" cy="346680"/>
+            <a:ext cx="8868600" cy="346320"/>
           </a:xfrm>
           <a:prstGeom prst="rect">
             <a:avLst/>
@@ -3472,14 +3646,14 @@
       </p:sp>
       <p:sp>
         <p:nvSpPr>
-          <p:cNvPr id="141" name="Text 2"/>
+          <p:cNvPr id="122" name="Text 2"/>
           <p:cNvSpPr/>
           <p:nvPr/>
         </p:nvSpPr>
         <p:spPr>
           <a:xfrm>
             <a:off x="9555480" y="173880"/>
-            <a:ext cx="2056680" cy="255240"/>
+            <a:ext cx="2056320" cy="254880"/>
           </a:xfrm>
           <a:prstGeom prst="rect">
             <a:avLst/>
@@ -3532,7 +3706,7 @@
       </p:sp>
       <p:sp>
         <p:nvSpPr>
-          <p:cNvPr id="142" name="Shape 3"/>
+          <p:cNvPr id="123" name="Shape 3"/>
           <p:cNvSpPr/>
           <p:nvPr/>
         </p:nvSpPr>
@@ -3575,14 +3749,14 @@
       </p:sp>
       <p:sp>
         <p:nvSpPr>
-          <p:cNvPr id="143" name="Text 4"/>
+          <p:cNvPr id="124" name="Text 4"/>
           <p:cNvSpPr/>
           <p:nvPr/>
         </p:nvSpPr>
         <p:spPr>
           <a:xfrm>
             <a:off x="502920" y="6473880"/>
-            <a:ext cx="3291120" cy="163800"/>
+            <a:ext cx="3290760" cy="163440"/>
           </a:xfrm>
           <a:prstGeom prst="rect">
             <a:avLst/>
@@ -3635,14 +3809,14 @@
       </p:sp>
       <p:sp>
         <p:nvSpPr>
-          <p:cNvPr id="144" name="Shape 5"/>
+          <p:cNvPr id="125" name="Shape 5"/>
           <p:cNvSpPr/>
           <p:nvPr/>
         </p:nvSpPr>
         <p:spPr>
           <a:xfrm>
             <a:off x="822960" y="1143000"/>
-            <a:ext cx="3382560" cy="4114080"/>
+            <a:ext cx="3382200" cy="4113720"/>
           </a:xfrm>
           <a:prstGeom prst="roundRect">
             <a:avLst>
@@ -3688,14 +3862,14 @@
       </p:sp>
       <p:sp>
         <p:nvSpPr>
-          <p:cNvPr id="145" name="Text 6"/>
+          <p:cNvPr id="126" name="Text 6"/>
           <p:cNvSpPr/>
           <p:nvPr/>
         </p:nvSpPr>
         <p:spPr>
           <a:xfrm>
             <a:off x="1005840" y="1307520"/>
-            <a:ext cx="3016800" cy="227880"/>
+            <a:ext cx="3016440" cy="227520"/>
           </a:xfrm>
           <a:prstGeom prst="rect">
             <a:avLst/>
@@ -3748,14 +3922,14 @@
       </p:sp>
       <p:sp>
         <p:nvSpPr>
-          <p:cNvPr id="146" name="Text 7"/>
+          <p:cNvPr id="127" name="Text 7"/>
           <p:cNvSpPr/>
           <p:nvPr/>
         </p:nvSpPr>
         <p:spPr>
           <a:xfrm>
             <a:off x="1005840" y="1645920"/>
-            <a:ext cx="3016800" cy="3474000"/>
+            <a:ext cx="3016440" cy="3473640"/>
           </a:xfrm>
           <a:prstGeom prst="rect">
             <a:avLst/>
@@ -3895,14 +4069,14 @@
       </p:sp>
       <p:sp>
         <p:nvSpPr>
-          <p:cNvPr id="147" name="Shape 8"/>
+          <p:cNvPr id="128" name="Shape 8"/>
           <p:cNvSpPr/>
           <p:nvPr/>
         </p:nvSpPr>
         <p:spPr>
           <a:xfrm>
             <a:off x="4434840" y="1143000"/>
-            <a:ext cx="3382560" cy="4114080"/>
+            <a:ext cx="3382200" cy="4113720"/>
           </a:xfrm>
           <a:prstGeom prst="roundRect">
             <a:avLst>
@@ -3948,14 +4122,14 @@
       </p:sp>
       <p:sp>
         <p:nvSpPr>
-          <p:cNvPr id="148" name="Text 9"/>
+          <p:cNvPr id="129" name="Text 9"/>
           <p:cNvSpPr/>
           <p:nvPr/>
         </p:nvSpPr>
         <p:spPr>
           <a:xfrm>
             <a:off x="4617720" y="1307520"/>
-            <a:ext cx="3016800" cy="227880"/>
+            <a:ext cx="3016440" cy="227520"/>
           </a:xfrm>
           <a:prstGeom prst="rect">
             <a:avLst/>
@@ -4008,14 +4182,14 @@
       </p:sp>
       <p:sp>
         <p:nvSpPr>
-          <p:cNvPr id="149" name="Text 10"/>
+          <p:cNvPr id="130" name="Text 10"/>
           <p:cNvSpPr/>
           <p:nvPr/>
         </p:nvSpPr>
         <p:spPr>
           <a:xfrm>
             <a:off x="4617720" y="1645920"/>
-            <a:ext cx="3016800" cy="3474000"/>
+            <a:ext cx="3016440" cy="3473640"/>
           </a:xfrm>
           <a:prstGeom prst="rect">
             <a:avLst/>
@@ -4155,14 +4329,14 @@
       </p:sp>
       <p:sp>
         <p:nvSpPr>
-          <p:cNvPr id="150" name="Shape 11"/>
+          <p:cNvPr id="131" name="Shape 11"/>
           <p:cNvSpPr/>
           <p:nvPr/>
         </p:nvSpPr>
         <p:spPr>
           <a:xfrm>
             <a:off x="8046720" y="1143000"/>
-            <a:ext cx="3382560" cy="4114080"/>
+            <a:ext cx="3382200" cy="4113720"/>
           </a:xfrm>
           <a:prstGeom prst="roundRect">
             <a:avLst>
@@ -4208,14 +4382,14 @@
       </p:sp>
       <p:sp>
         <p:nvSpPr>
-          <p:cNvPr id="151" name="Text 12"/>
+          <p:cNvPr id="132" name="Text 12"/>
           <p:cNvSpPr/>
           <p:nvPr/>
         </p:nvSpPr>
         <p:spPr>
           <a:xfrm>
             <a:off x="8229600" y="1307520"/>
-            <a:ext cx="3016800" cy="227880"/>
+            <a:ext cx="3016440" cy="227520"/>
           </a:xfrm>
           <a:prstGeom prst="rect">
             <a:avLst/>
@@ -4268,14 +4442,14 @@
       </p:sp>
       <p:sp>
         <p:nvSpPr>
-          <p:cNvPr id="152" name="Text 13"/>
+          <p:cNvPr id="133" name="Text 13"/>
           <p:cNvSpPr/>
           <p:nvPr/>
         </p:nvSpPr>
         <p:spPr>
           <a:xfrm>
             <a:off x="8229600" y="1645920"/>
-            <a:ext cx="3016800" cy="3474000"/>
+            <a:ext cx="3016440" cy="3473640"/>
           </a:xfrm>
           <a:prstGeom prst="rect">
             <a:avLst/>
@@ -4328,14 +4502,14 @@
       </p:sp>
       <p:sp>
         <p:nvSpPr>
-          <p:cNvPr id="153" name="Text 14"/>
+          <p:cNvPr id="134" name="Text 14"/>
           <p:cNvSpPr/>
           <p:nvPr/>
         </p:nvSpPr>
         <p:spPr>
           <a:xfrm>
             <a:off x="11475720" y="6473880"/>
-            <a:ext cx="255240" cy="136440"/>
+            <a:ext cx="254880" cy="136080"/>
           </a:xfrm>
           <a:prstGeom prst="rect">
             <a:avLst/>
@@ -4425,14 +4599,14 @@
       </p:grpSpPr>
       <p:sp>
         <p:nvSpPr>
-          <p:cNvPr id="154" name="Shape 0"/>
+          <p:cNvPr id="135" name="Shape 0"/>
           <p:cNvSpPr/>
           <p:nvPr/>
         </p:nvSpPr>
         <p:spPr>
           <a:xfrm>
             <a:off x="0" y="0"/>
-            <a:ext cx="12191040" cy="657720"/>
+            <a:ext cx="12190680" cy="657360"/>
           </a:xfrm>
           <a:prstGeom prst="rect">
             <a:avLst/>
@@ -4476,14 +4650,14 @@
       </p:sp>
       <p:sp>
         <p:nvSpPr>
-          <p:cNvPr id="155" name="Text 1"/>
+          <p:cNvPr id="136" name="Text 1"/>
           <p:cNvSpPr/>
           <p:nvPr/>
         </p:nvSpPr>
         <p:spPr>
           <a:xfrm>
             <a:off x="502920" y="146160"/>
-            <a:ext cx="8868960" cy="346680"/>
+            <a:ext cx="8868600" cy="346320"/>
           </a:xfrm>
           <a:prstGeom prst="rect">
             <a:avLst/>
@@ -4537,14 +4711,14 @@
       </p:sp>
       <p:sp>
         <p:nvSpPr>
-          <p:cNvPr id="156" name="Text 2"/>
+          <p:cNvPr id="137" name="Text 2"/>
           <p:cNvSpPr/>
           <p:nvPr/>
         </p:nvSpPr>
         <p:spPr>
           <a:xfrm>
             <a:off x="9555480" y="173880"/>
-            <a:ext cx="2056680" cy="255240"/>
+            <a:ext cx="2056320" cy="254880"/>
           </a:xfrm>
           <a:prstGeom prst="rect">
             <a:avLst/>
@@ -4597,7 +4771,7 @@
       </p:sp>
       <p:sp>
         <p:nvSpPr>
-          <p:cNvPr id="157" name="Shape 3"/>
+          <p:cNvPr id="138" name="Shape 3"/>
           <p:cNvSpPr/>
           <p:nvPr/>
         </p:nvSpPr>
@@ -4640,14 +4814,14 @@
       </p:sp>
       <p:sp>
         <p:nvSpPr>
-          <p:cNvPr id="158" name="Text 4"/>
+          <p:cNvPr id="139" name="Text 4"/>
           <p:cNvSpPr/>
           <p:nvPr/>
         </p:nvSpPr>
         <p:spPr>
           <a:xfrm>
             <a:off x="502920" y="6473880"/>
-            <a:ext cx="3291120" cy="163800"/>
+            <a:ext cx="3290760" cy="163440"/>
           </a:xfrm>
           <a:prstGeom prst="rect">
             <a:avLst/>
@@ -4700,14 +4874,14 @@
       </p:sp>
       <p:sp>
         <p:nvSpPr>
-          <p:cNvPr id="159" name="Shape 5"/>
+          <p:cNvPr id="140" name="Shape 5"/>
           <p:cNvSpPr/>
           <p:nvPr/>
         </p:nvSpPr>
         <p:spPr>
           <a:xfrm>
             <a:off x="822960" y="1051560"/>
-            <a:ext cx="4891320" cy="785520"/>
+            <a:ext cx="4890960" cy="785160"/>
           </a:xfrm>
           <a:prstGeom prst="roundRect">
             <a:avLst>
@@ -4753,14 +4927,14 @@
       </p:sp>
       <p:sp>
         <p:nvSpPr>
-          <p:cNvPr id="160" name="Text 6"/>
+          <p:cNvPr id="141" name="Text 6"/>
           <p:cNvSpPr/>
           <p:nvPr/>
         </p:nvSpPr>
         <p:spPr>
           <a:xfrm>
             <a:off x="987480" y="1216080"/>
-            <a:ext cx="776520" cy="182160"/>
+            <a:ext cx="776160" cy="181800"/>
           </a:xfrm>
           <a:prstGeom prst="rect">
             <a:avLst/>
@@ -4813,14 +4987,14 @@
       </p:sp>
       <p:sp>
         <p:nvSpPr>
-          <p:cNvPr id="161" name="Text 7"/>
+          <p:cNvPr id="142" name="Text 7"/>
           <p:cNvSpPr/>
           <p:nvPr/>
         </p:nvSpPr>
         <p:spPr>
           <a:xfrm>
             <a:off x="1874520" y="1207080"/>
-            <a:ext cx="1690920" cy="182160"/>
+            <a:ext cx="1690560" cy="181800"/>
           </a:xfrm>
           <a:prstGeom prst="rect">
             <a:avLst/>
@@ -4873,14 +5047,14 @@
       </p:sp>
       <p:sp>
         <p:nvSpPr>
-          <p:cNvPr id="162" name="Text 8"/>
+          <p:cNvPr id="143" name="Text 8"/>
           <p:cNvSpPr/>
           <p:nvPr/>
         </p:nvSpPr>
         <p:spPr>
           <a:xfrm>
             <a:off x="3657600" y="1216080"/>
-            <a:ext cx="1828080" cy="182160"/>
+            <a:ext cx="1827720" cy="181800"/>
           </a:xfrm>
           <a:prstGeom prst="rect">
             <a:avLst/>
@@ -4933,14 +5107,14 @@
       </p:sp>
       <p:sp>
         <p:nvSpPr>
-          <p:cNvPr id="163" name="Shape 9"/>
+          <p:cNvPr id="144" name="Shape 9"/>
           <p:cNvSpPr/>
           <p:nvPr/>
         </p:nvSpPr>
         <p:spPr>
           <a:xfrm>
             <a:off x="822960" y="2194560"/>
-            <a:ext cx="4891320" cy="785520"/>
+            <a:ext cx="4890960" cy="785160"/>
           </a:xfrm>
           <a:prstGeom prst="roundRect">
             <a:avLst>
@@ -4986,14 +5160,14 @@
       </p:sp>
       <p:sp>
         <p:nvSpPr>
-          <p:cNvPr id="164" name="Text 10"/>
+          <p:cNvPr id="145" name="Text 10"/>
           <p:cNvSpPr/>
           <p:nvPr/>
         </p:nvSpPr>
         <p:spPr>
           <a:xfrm>
             <a:off x="987480" y="2359080"/>
-            <a:ext cx="776520" cy="182160"/>
+            <a:ext cx="776160" cy="181800"/>
           </a:xfrm>
           <a:prstGeom prst="rect">
             <a:avLst/>
@@ -5046,14 +5220,14 @@
       </p:sp>
       <p:sp>
         <p:nvSpPr>
-          <p:cNvPr id="165" name="Text 11"/>
+          <p:cNvPr id="146" name="Text 11"/>
           <p:cNvSpPr/>
           <p:nvPr/>
         </p:nvSpPr>
         <p:spPr>
           <a:xfrm>
             <a:off x="1874520" y="2350080"/>
-            <a:ext cx="1690920" cy="182160"/>
+            <a:ext cx="1690560" cy="181800"/>
           </a:xfrm>
           <a:prstGeom prst="rect">
             <a:avLst/>
@@ -5106,14 +5280,14 @@
       </p:sp>
       <p:sp>
         <p:nvSpPr>
-          <p:cNvPr id="166" name="Text 12"/>
+          <p:cNvPr id="147" name="Text 12"/>
           <p:cNvSpPr/>
           <p:nvPr/>
         </p:nvSpPr>
         <p:spPr>
           <a:xfrm>
             <a:off x="3657600" y="2359080"/>
-            <a:ext cx="1828080" cy="182160"/>
+            <a:ext cx="1827720" cy="181800"/>
           </a:xfrm>
           <a:prstGeom prst="rect">
             <a:avLst/>
@@ -5166,14 +5340,14 @@
       </p:sp>
       <p:sp>
         <p:nvSpPr>
-          <p:cNvPr id="167" name="Shape 13"/>
+          <p:cNvPr id="148" name="Shape 13"/>
           <p:cNvSpPr/>
           <p:nvPr/>
         </p:nvSpPr>
         <p:spPr>
           <a:xfrm>
             <a:off x="822960" y="3337560"/>
-            <a:ext cx="4891320" cy="785520"/>
+            <a:ext cx="4890960" cy="785160"/>
           </a:xfrm>
           <a:prstGeom prst="roundRect">
             <a:avLst>
@@ -5219,14 +5393,14 @@
       </p:sp>
       <p:sp>
         <p:nvSpPr>
-          <p:cNvPr id="168" name="Text 14"/>
+          <p:cNvPr id="149" name="Text 14"/>
           <p:cNvSpPr/>
           <p:nvPr/>
         </p:nvSpPr>
         <p:spPr>
           <a:xfrm>
             <a:off x="987480" y="3502080"/>
-            <a:ext cx="776520" cy="182160"/>
+            <a:ext cx="776160" cy="181800"/>
           </a:xfrm>
           <a:prstGeom prst="rect">
             <a:avLst/>
@@ -5279,14 +5453,14 @@
       </p:sp>
       <p:sp>
         <p:nvSpPr>
-          <p:cNvPr id="169" name="Text 15"/>
+          <p:cNvPr id="150" name="Text 15"/>
           <p:cNvSpPr/>
           <p:nvPr/>
         </p:nvSpPr>
         <p:spPr>
           <a:xfrm>
             <a:off x="1874520" y="3493080"/>
-            <a:ext cx="1690920" cy="182160"/>
+            <a:ext cx="1690560" cy="181800"/>
           </a:xfrm>
           <a:prstGeom prst="rect">
             <a:avLst/>
@@ -5339,14 +5513,14 @@
       </p:sp>
       <p:sp>
         <p:nvSpPr>
-          <p:cNvPr id="170" name="Text 16"/>
+          <p:cNvPr id="151" name="Text 16"/>
           <p:cNvSpPr/>
           <p:nvPr/>
         </p:nvSpPr>
         <p:spPr>
           <a:xfrm>
             <a:off x="3657600" y="3502080"/>
-            <a:ext cx="1828080" cy="182160"/>
+            <a:ext cx="1827720" cy="181800"/>
           </a:xfrm>
           <a:prstGeom prst="rect">
             <a:avLst/>
@@ -5399,14 +5573,14 @@
       </p:sp>
       <p:sp>
         <p:nvSpPr>
-          <p:cNvPr id="171" name="Shape 17"/>
+          <p:cNvPr id="152" name="Shape 17"/>
           <p:cNvSpPr/>
           <p:nvPr/>
         </p:nvSpPr>
         <p:spPr>
           <a:xfrm>
             <a:off x="822960" y="4480560"/>
-            <a:ext cx="4891320" cy="785520"/>
+            <a:ext cx="4890960" cy="785160"/>
           </a:xfrm>
           <a:prstGeom prst="roundRect">
             <a:avLst>
@@ -5452,14 +5626,14 @@
       </p:sp>
       <p:sp>
         <p:nvSpPr>
-          <p:cNvPr id="172" name="Text 18"/>
+          <p:cNvPr id="153" name="Text 18"/>
           <p:cNvSpPr/>
           <p:nvPr/>
         </p:nvSpPr>
         <p:spPr>
           <a:xfrm>
             <a:off x="987480" y="4645080"/>
-            <a:ext cx="776520" cy="182160"/>
+            <a:ext cx="776160" cy="181800"/>
           </a:xfrm>
           <a:prstGeom prst="rect">
             <a:avLst/>
@@ -5512,14 +5686,14 @@
       </p:sp>
       <p:sp>
         <p:nvSpPr>
-          <p:cNvPr id="173" name="Text 19"/>
+          <p:cNvPr id="154" name="Text 19"/>
           <p:cNvSpPr/>
           <p:nvPr/>
         </p:nvSpPr>
         <p:spPr>
           <a:xfrm>
             <a:off x="1874520" y="4636080"/>
-            <a:ext cx="1690920" cy="182160"/>
+            <a:ext cx="1690560" cy="181800"/>
           </a:xfrm>
           <a:prstGeom prst="rect">
             <a:avLst/>
@@ -5572,14 +5746,14 @@
       </p:sp>
       <p:sp>
         <p:nvSpPr>
-          <p:cNvPr id="174" name="Text 20"/>
+          <p:cNvPr id="155" name="Text 20"/>
           <p:cNvSpPr/>
           <p:nvPr/>
         </p:nvSpPr>
         <p:spPr>
           <a:xfrm>
             <a:off x="3657600" y="4645080"/>
-            <a:ext cx="1828080" cy="182160"/>
+            <a:ext cx="1827720" cy="181800"/>
           </a:xfrm>
           <a:prstGeom prst="rect">
             <a:avLst/>
@@ -5632,14 +5806,14 @@
       </p:sp>
       <p:sp>
         <p:nvSpPr>
-          <p:cNvPr id="175" name="Shape 21"/>
+          <p:cNvPr id="156" name="Shape 21"/>
           <p:cNvSpPr/>
           <p:nvPr/>
         </p:nvSpPr>
         <p:spPr>
           <a:xfrm>
             <a:off x="6309360" y="1051560"/>
-            <a:ext cx="4891320" cy="785520"/>
+            <a:ext cx="4890960" cy="785160"/>
           </a:xfrm>
           <a:prstGeom prst="roundRect">
             <a:avLst>
@@ -5685,14 +5859,14 @@
       </p:sp>
       <p:sp>
         <p:nvSpPr>
-          <p:cNvPr id="176" name="Text 22"/>
+          <p:cNvPr id="157" name="Text 22"/>
           <p:cNvSpPr/>
           <p:nvPr/>
         </p:nvSpPr>
         <p:spPr>
           <a:xfrm>
             <a:off x="6473880" y="1216080"/>
-            <a:ext cx="776520" cy="182160"/>
+            <a:ext cx="776160" cy="181800"/>
           </a:xfrm>
           <a:prstGeom prst="rect">
             <a:avLst/>
@@ -5745,14 +5919,14 @@
       </p:sp>
       <p:sp>
         <p:nvSpPr>
-          <p:cNvPr id="177" name="Text 23"/>
+          <p:cNvPr id="158" name="Text 23"/>
           <p:cNvSpPr/>
           <p:nvPr/>
         </p:nvSpPr>
         <p:spPr>
           <a:xfrm>
             <a:off x="7360920" y="1207080"/>
-            <a:ext cx="1690920" cy="182160"/>
+            <a:ext cx="1690560" cy="181800"/>
           </a:xfrm>
           <a:prstGeom prst="rect">
             <a:avLst/>
@@ -5805,14 +5979,14 @@
       </p:sp>
       <p:sp>
         <p:nvSpPr>
-          <p:cNvPr id="178" name="Text 24"/>
+          <p:cNvPr id="159" name="Text 24"/>
           <p:cNvSpPr/>
           <p:nvPr/>
         </p:nvSpPr>
         <p:spPr>
           <a:xfrm>
             <a:off x="9144000" y="1216080"/>
-            <a:ext cx="1828080" cy="182160"/>
+            <a:ext cx="1827720" cy="181800"/>
           </a:xfrm>
           <a:prstGeom prst="rect">
             <a:avLst/>
@@ -5865,14 +6039,14 @@
       </p:sp>
       <p:sp>
         <p:nvSpPr>
-          <p:cNvPr id="179" name="Shape 25"/>
+          <p:cNvPr id="160" name="Shape 25"/>
           <p:cNvSpPr/>
           <p:nvPr/>
         </p:nvSpPr>
         <p:spPr>
           <a:xfrm>
             <a:off x="6309360" y="2194560"/>
-            <a:ext cx="4891320" cy="785520"/>
+            <a:ext cx="4890960" cy="785160"/>
           </a:xfrm>
           <a:prstGeom prst="roundRect">
             <a:avLst>
@@ -5918,14 +6092,14 @@
       </p:sp>
       <p:sp>
         <p:nvSpPr>
-          <p:cNvPr id="180" name="Text 26"/>
+          <p:cNvPr id="161" name="Text 26"/>
           <p:cNvSpPr/>
           <p:nvPr/>
         </p:nvSpPr>
         <p:spPr>
           <a:xfrm>
             <a:off x="6473880" y="2359080"/>
-            <a:ext cx="776520" cy="182160"/>
+            <a:ext cx="776160" cy="181800"/>
           </a:xfrm>
           <a:prstGeom prst="rect">
             <a:avLst/>
@@ -5978,14 +6152,14 @@
       </p:sp>
       <p:sp>
         <p:nvSpPr>
-          <p:cNvPr id="181" name="Text 27"/>
+          <p:cNvPr id="162" name="Text 27"/>
           <p:cNvSpPr/>
           <p:nvPr/>
         </p:nvSpPr>
         <p:spPr>
           <a:xfrm>
             <a:off x="7360920" y="2350080"/>
-            <a:ext cx="1690920" cy="182160"/>
+            <a:ext cx="1690560" cy="181800"/>
           </a:xfrm>
           <a:prstGeom prst="rect">
             <a:avLst/>
@@ -6038,14 +6212,14 @@
       </p:sp>
       <p:sp>
         <p:nvSpPr>
-          <p:cNvPr id="182" name="Text 28"/>
+          <p:cNvPr id="163" name="Text 28"/>
           <p:cNvSpPr/>
           <p:nvPr/>
         </p:nvSpPr>
         <p:spPr>
           <a:xfrm>
             <a:off x="9144000" y="2359080"/>
-            <a:ext cx="1828080" cy="182160"/>
+            <a:ext cx="1827720" cy="181800"/>
           </a:xfrm>
           <a:prstGeom prst="rect">
             <a:avLst/>
@@ -6098,14 +6272,14 @@
       </p:sp>
       <p:sp>
         <p:nvSpPr>
-          <p:cNvPr id="183" name="Shape 29"/>
+          <p:cNvPr id="164" name="Shape 29"/>
           <p:cNvSpPr/>
           <p:nvPr/>
         </p:nvSpPr>
         <p:spPr>
           <a:xfrm>
             <a:off x="6309360" y="3337560"/>
-            <a:ext cx="4891320" cy="785520"/>
+            <a:ext cx="4890960" cy="785160"/>
           </a:xfrm>
           <a:prstGeom prst="roundRect">
             <a:avLst>
@@ -6151,14 +6325,14 @@
       </p:sp>
       <p:sp>
         <p:nvSpPr>
-          <p:cNvPr id="184" name="Text 30"/>
+          <p:cNvPr id="165" name="Text 30"/>
           <p:cNvSpPr/>
           <p:nvPr/>
         </p:nvSpPr>
         <p:spPr>
           <a:xfrm>
             <a:off x="6473880" y="3502080"/>
-            <a:ext cx="776520" cy="182160"/>
+            <a:ext cx="776160" cy="181800"/>
           </a:xfrm>
           <a:prstGeom prst="rect">
             <a:avLst/>
@@ -6211,14 +6385,14 @@
       </p:sp>
       <p:sp>
         <p:nvSpPr>
-          <p:cNvPr id="185" name="Text 31"/>
+          <p:cNvPr id="166" name="Text 31"/>
           <p:cNvSpPr/>
           <p:nvPr/>
         </p:nvSpPr>
         <p:spPr>
           <a:xfrm>
             <a:off x="7360920" y="3493080"/>
-            <a:ext cx="1690920" cy="182160"/>
+            <a:ext cx="1690560" cy="181800"/>
           </a:xfrm>
           <a:prstGeom prst="rect">
             <a:avLst/>
@@ -6271,14 +6445,14 @@
       </p:sp>
       <p:sp>
         <p:nvSpPr>
-          <p:cNvPr id="186" name="Text 32"/>
+          <p:cNvPr id="167" name="Text 32"/>
           <p:cNvSpPr/>
           <p:nvPr/>
         </p:nvSpPr>
         <p:spPr>
           <a:xfrm>
             <a:off x="9144000" y="3502080"/>
-            <a:ext cx="1828080" cy="182160"/>
+            <a:ext cx="1827720" cy="181800"/>
           </a:xfrm>
           <a:prstGeom prst="rect">
             <a:avLst/>
@@ -6331,14 +6505,14 @@
       </p:sp>
       <p:sp>
         <p:nvSpPr>
-          <p:cNvPr id="187" name="Text 33"/>
+          <p:cNvPr id="168" name="Text 33"/>
           <p:cNvSpPr/>
           <p:nvPr/>
         </p:nvSpPr>
         <p:spPr>
           <a:xfrm>
             <a:off x="960120" y="5760720"/>
-            <a:ext cx="10057680" cy="365040"/>
+            <a:ext cx="10057320" cy="364680"/>
           </a:xfrm>
           <a:prstGeom prst="rect">
             <a:avLst/>
@@ -6391,14 +6565,14 @@
       </p:sp>
       <p:sp>
         <p:nvSpPr>
-          <p:cNvPr id="188" name="Text 34"/>
+          <p:cNvPr id="169" name="Text 34"/>
           <p:cNvSpPr/>
           <p:nvPr/>
         </p:nvSpPr>
         <p:spPr>
           <a:xfrm>
             <a:off x="11475720" y="6473880"/>
-            <a:ext cx="255240" cy="136440"/>
+            <a:ext cx="254880" cy="136080"/>
           </a:xfrm>
           <a:prstGeom prst="rect">
             <a:avLst/>
@@ -6488,14 +6662,14 @@
       </p:grpSpPr>
       <p:sp>
         <p:nvSpPr>
-          <p:cNvPr id="189" name="Shape 0"/>
+          <p:cNvPr id="170" name="Shape 0"/>
           <p:cNvSpPr/>
           <p:nvPr/>
         </p:nvSpPr>
         <p:spPr>
           <a:xfrm>
             <a:off x="0" y="0"/>
-            <a:ext cx="12191040" cy="657720"/>
+            <a:ext cx="12190680" cy="657360"/>
           </a:xfrm>
           <a:prstGeom prst="rect">
             <a:avLst/>
@@ -6539,14 +6713,14 @@
       </p:sp>
       <p:sp>
         <p:nvSpPr>
-          <p:cNvPr id="190" name="Text 1"/>
+          <p:cNvPr id="171" name="Text 1"/>
           <p:cNvSpPr/>
           <p:nvPr/>
         </p:nvSpPr>
         <p:spPr>
           <a:xfrm>
             <a:off x="502920" y="146160"/>
-            <a:ext cx="8868960" cy="346680"/>
+            <a:ext cx="8868600" cy="346320"/>
           </a:xfrm>
           <a:prstGeom prst="rect">
             <a:avLst/>
@@ -6600,14 +6774,14 @@
       </p:sp>
       <p:sp>
         <p:nvSpPr>
-          <p:cNvPr id="191" name="Text 2"/>
+          <p:cNvPr id="172" name="Text 2"/>
           <p:cNvSpPr/>
           <p:nvPr/>
         </p:nvSpPr>
         <p:spPr>
           <a:xfrm>
             <a:off x="9555480" y="173880"/>
-            <a:ext cx="2056680" cy="255240"/>
+            <a:ext cx="2056320" cy="254880"/>
           </a:xfrm>
           <a:prstGeom prst="rect">
             <a:avLst/>
@@ -6660,7 +6834,7 @@
       </p:sp>
       <p:sp>
         <p:nvSpPr>
-          <p:cNvPr id="192" name="Shape 3"/>
+          <p:cNvPr id="173" name="Shape 3"/>
           <p:cNvSpPr/>
           <p:nvPr/>
         </p:nvSpPr>
@@ -6703,14 +6877,14 @@
       </p:sp>
       <p:sp>
         <p:nvSpPr>
-          <p:cNvPr id="193" name="Text 4"/>
+          <p:cNvPr id="174" name="Text 4"/>
           <p:cNvSpPr/>
           <p:nvPr/>
         </p:nvSpPr>
         <p:spPr>
           <a:xfrm>
             <a:off x="502920" y="6473880"/>
-            <a:ext cx="3291120" cy="163800"/>
+            <a:ext cx="3290760" cy="163440"/>
           </a:xfrm>
           <a:prstGeom prst="rect">
             <a:avLst/>
@@ -6763,14 +6937,14 @@
       </p:sp>
       <p:sp>
         <p:nvSpPr>
-          <p:cNvPr id="194" name="Shape 5"/>
+          <p:cNvPr id="175" name="Shape 5"/>
           <p:cNvSpPr/>
           <p:nvPr/>
         </p:nvSpPr>
         <p:spPr>
           <a:xfrm>
             <a:off x="868680" y="1051560"/>
-            <a:ext cx="6400080" cy="4342680"/>
+            <a:ext cx="6399720" cy="4342320"/>
           </a:xfrm>
           <a:prstGeom prst="rect">
             <a:avLst/>
@@ -6814,7 +6988,7 @@
       </p:sp>
       <p:sp>
         <p:nvSpPr>
-          <p:cNvPr id="195" name="Shape 6"/>
+          <p:cNvPr id="176" name="Shape 6"/>
           <p:cNvSpPr/>
           <p:nvPr/>
         </p:nvSpPr>
@@ -6857,7 +7031,7 @@
       </p:sp>
       <p:sp>
         <p:nvSpPr>
-          <p:cNvPr id="196" name="Shape 7"/>
+          <p:cNvPr id="177" name="Shape 7"/>
           <p:cNvSpPr/>
           <p:nvPr/>
         </p:nvSpPr>
@@ -6900,14 +7074,14 @@
       </p:sp>
       <p:sp>
         <p:nvSpPr>
-          <p:cNvPr id="197" name="Text 8"/>
+          <p:cNvPr id="178" name="Text 8"/>
           <p:cNvSpPr/>
           <p:nvPr/>
         </p:nvSpPr>
         <p:spPr>
           <a:xfrm>
             <a:off x="3291840" y="5074920"/>
-            <a:ext cx="1645200" cy="182160"/>
+            <a:ext cx="1644840" cy="181800"/>
           </a:xfrm>
           <a:prstGeom prst="rect">
             <a:avLst/>
@@ -6960,14 +7134,14 @@
       </p:sp>
       <p:sp>
         <p:nvSpPr>
-          <p:cNvPr id="198" name="Text 9"/>
+          <p:cNvPr id="179" name="Text 9"/>
           <p:cNvSpPr/>
           <p:nvPr/>
         </p:nvSpPr>
         <p:spPr>
           <a:xfrm rot="16200000">
-            <a:off x="896040" y="1235160"/>
-            <a:ext cx="913680" cy="182160"/>
+            <a:off x="896040" y="1235520"/>
+            <a:ext cx="913320" cy="181800"/>
           </a:xfrm>
           <a:prstGeom prst="rect">
             <a:avLst/>
@@ -7020,7 +7194,7 @@
       </p:sp>
       <p:sp>
         <p:nvSpPr>
-          <p:cNvPr id="199" name="Shape 10"/>
+          <p:cNvPr id="180" name="Shape 10"/>
           <p:cNvSpPr/>
           <p:nvPr/>
         </p:nvSpPr>
@@ -7063,7 +7237,7 @@
       </p:sp>
       <p:sp>
         <p:nvSpPr>
-          <p:cNvPr id="200" name="Shape 11"/>
+          <p:cNvPr id="181" name="Shape 11"/>
           <p:cNvSpPr/>
           <p:nvPr/>
         </p:nvSpPr>
@@ -7106,7 +7280,7 @@
       </p:sp>
       <p:sp>
         <p:nvSpPr>
-          <p:cNvPr id="201" name="Shape 12"/>
+          <p:cNvPr id="182" name="Shape 12"/>
           <p:cNvSpPr/>
           <p:nvPr/>
         </p:nvSpPr>
@@ -7149,7 +7323,7 @@
       </p:sp>
       <p:sp>
         <p:nvSpPr>
-          <p:cNvPr id="202" name="Shape 13"/>
+          <p:cNvPr id="183" name="Shape 13"/>
           <p:cNvSpPr/>
           <p:nvPr/>
         </p:nvSpPr>
@@ -7192,7 +7366,7 @@
       </p:sp>
       <p:sp>
         <p:nvSpPr>
-          <p:cNvPr id="203" name="Shape 14"/>
+          <p:cNvPr id="184" name="Shape 14"/>
           <p:cNvSpPr/>
           <p:nvPr/>
         </p:nvSpPr>
@@ -7235,7 +7409,7 @@
       </p:sp>
       <p:sp>
         <p:nvSpPr>
-          <p:cNvPr id="204" name="Shape 15"/>
+          <p:cNvPr id="185" name="Shape 15"/>
           <p:cNvSpPr/>
           <p:nvPr/>
         </p:nvSpPr>
@@ -7278,7 +7452,7 @@
       </p:sp>
       <p:sp>
         <p:nvSpPr>
-          <p:cNvPr id="205" name="Shape 16"/>
+          <p:cNvPr id="186" name="Shape 16"/>
           <p:cNvSpPr/>
           <p:nvPr/>
         </p:nvSpPr>
@@ -7321,7 +7495,7 @@
       </p:sp>
       <p:sp>
         <p:nvSpPr>
-          <p:cNvPr id="206" name="Shape 17"/>
+          <p:cNvPr id="187" name="Shape 17"/>
           <p:cNvSpPr/>
           <p:nvPr/>
         </p:nvSpPr>
@@ -7364,14 +7538,14 @@
       </p:sp>
       <p:sp>
         <p:nvSpPr>
-          <p:cNvPr id="207" name="Text 18"/>
+          <p:cNvPr id="188" name="Text 18"/>
           <p:cNvSpPr/>
           <p:nvPr/>
         </p:nvSpPr>
         <p:spPr>
           <a:xfrm>
             <a:off x="5440680" y="1234440"/>
-            <a:ext cx="1508040" cy="200520"/>
+            <a:ext cx="1507680" cy="200160"/>
           </a:xfrm>
           <a:prstGeom prst="rect">
             <a:avLst/>
@@ -7424,14 +7598,14 @@
       </p:sp>
       <p:sp>
         <p:nvSpPr>
-          <p:cNvPr id="208" name="Text 19"/>
+          <p:cNvPr id="189" name="Text 19"/>
           <p:cNvSpPr/>
           <p:nvPr/>
         </p:nvSpPr>
         <p:spPr>
           <a:xfrm>
             <a:off x="5440680" y="1828800"/>
-            <a:ext cx="1005120" cy="182160"/>
+            <a:ext cx="1004760" cy="181800"/>
           </a:xfrm>
           <a:prstGeom prst="rect">
             <a:avLst/>
@@ -7484,14 +7658,14 @@
       </p:sp>
       <p:sp>
         <p:nvSpPr>
-          <p:cNvPr id="209" name="Shape 20"/>
+          <p:cNvPr id="190" name="Shape 20"/>
           <p:cNvSpPr/>
           <p:nvPr/>
         </p:nvSpPr>
         <p:spPr>
           <a:xfrm>
             <a:off x="7635240" y="1188720"/>
-            <a:ext cx="3611160" cy="1508040"/>
+            <a:ext cx="3610800" cy="1507680"/>
           </a:xfrm>
           <a:prstGeom prst="roundRect">
             <a:avLst>
@@ -7537,14 +7711,14 @@
       </p:sp>
       <p:sp>
         <p:nvSpPr>
-          <p:cNvPr id="210" name="Text 21"/>
+          <p:cNvPr id="191" name="Text 21"/>
           <p:cNvSpPr/>
           <p:nvPr/>
         </p:nvSpPr>
         <p:spPr>
           <a:xfrm>
             <a:off x="7818120" y="1353240"/>
-            <a:ext cx="3245400" cy="227880"/>
+            <a:ext cx="3245040" cy="227520"/>
           </a:xfrm>
           <a:prstGeom prst="rect">
             <a:avLst/>
@@ -7597,14 +7771,14 @@
       </p:sp>
       <p:sp>
         <p:nvSpPr>
-          <p:cNvPr id="211" name="Text 22"/>
+          <p:cNvPr id="192" name="Text 22"/>
           <p:cNvSpPr/>
           <p:nvPr/>
         </p:nvSpPr>
         <p:spPr>
           <a:xfrm>
             <a:off x="7818120" y="1691640"/>
-            <a:ext cx="3245400" cy="867960"/>
+            <a:ext cx="3245040" cy="867600"/>
           </a:xfrm>
           <a:prstGeom prst="rect">
             <a:avLst/>
@@ -7657,14 +7831,14 @@
       </p:sp>
       <p:sp>
         <p:nvSpPr>
-          <p:cNvPr id="212" name="Shape 23"/>
+          <p:cNvPr id="193" name="Shape 23"/>
           <p:cNvSpPr/>
           <p:nvPr/>
         </p:nvSpPr>
         <p:spPr>
           <a:xfrm>
             <a:off x="7635240" y="3063240"/>
-            <a:ext cx="3611160" cy="1508040"/>
+            <a:ext cx="3610800" cy="1507680"/>
           </a:xfrm>
           <a:prstGeom prst="roundRect">
             <a:avLst>
@@ -7710,14 +7884,14 @@
       </p:sp>
       <p:sp>
         <p:nvSpPr>
-          <p:cNvPr id="213" name="Text 24"/>
+          <p:cNvPr id="194" name="Text 24"/>
           <p:cNvSpPr/>
           <p:nvPr/>
         </p:nvSpPr>
         <p:spPr>
           <a:xfrm>
             <a:off x="7818120" y="3227760"/>
-            <a:ext cx="3245400" cy="227880"/>
+            <a:ext cx="3245040" cy="227520"/>
           </a:xfrm>
           <a:prstGeom prst="rect">
             <a:avLst/>
@@ -7770,14 +7944,14 @@
       </p:sp>
       <p:sp>
         <p:nvSpPr>
-          <p:cNvPr id="214" name="Text 25"/>
+          <p:cNvPr id="195" name="Text 25"/>
           <p:cNvSpPr/>
           <p:nvPr/>
         </p:nvSpPr>
         <p:spPr>
           <a:xfrm>
             <a:off x="7818120" y="3566160"/>
-            <a:ext cx="3245400" cy="867960"/>
+            <a:ext cx="3245040" cy="867600"/>
           </a:xfrm>
           <a:prstGeom prst="rect">
             <a:avLst/>
@@ -7830,14 +8004,14 @@
       </p:sp>
       <p:sp>
         <p:nvSpPr>
-          <p:cNvPr id="215" name="Text 26"/>
+          <p:cNvPr id="196" name="Text 26"/>
           <p:cNvSpPr/>
           <p:nvPr/>
         </p:nvSpPr>
         <p:spPr>
           <a:xfrm>
             <a:off x="11475720" y="6473880"/>
-            <a:ext cx="255240" cy="136440"/>
+            <a:ext cx="254880" cy="136080"/>
           </a:xfrm>
           <a:prstGeom prst="rect">
             <a:avLst/>
@@ -7927,14 +8101,14 @@
       </p:grpSpPr>
       <p:sp>
         <p:nvSpPr>
-          <p:cNvPr id="216" name="Shape 0"/>
+          <p:cNvPr id="197" name="Shape 0"/>
           <p:cNvSpPr/>
           <p:nvPr/>
         </p:nvSpPr>
         <p:spPr>
           <a:xfrm>
             <a:off x="0" y="0"/>
-            <a:ext cx="12191040" cy="657720"/>
+            <a:ext cx="12190680" cy="657360"/>
           </a:xfrm>
           <a:prstGeom prst="rect">
             <a:avLst/>
@@ -7978,14 +8152,14 @@
       </p:sp>
       <p:sp>
         <p:nvSpPr>
-          <p:cNvPr id="217" name="Text 1"/>
+          <p:cNvPr id="198" name="Text 1"/>
           <p:cNvSpPr/>
           <p:nvPr/>
         </p:nvSpPr>
         <p:spPr>
           <a:xfrm>
             <a:off x="502920" y="146160"/>
-            <a:ext cx="8868960" cy="346680"/>
+            <a:ext cx="8868600" cy="346320"/>
           </a:xfrm>
           <a:prstGeom prst="rect">
             <a:avLst/>
@@ -8039,14 +8213,14 @@
       </p:sp>
       <p:sp>
         <p:nvSpPr>
-          <p:cNvPr id="218" name="Text 2"/>
+          <p:cNvPr id="199" name="Text 2"/>
           <p:cNvSpPr/>
           <p:nvPr/>
         </p:nvSpPr>
         <p:spPr>
           <a:xfrm>
             <a:off x="9555480" y="173880"/>
-            <a:ext cx="2056680" cy="255240"/>
+            <a:ext cx="2056320" cy="254880"/>
           </a:xfrm>
           <a:prstGeom prst="rect">
             <a:avLst/>
@@ -8099,7 +8273,7 @@
       </p:sp>
       <p:sp>
         <p:nvSpPr>
-          <p:cNvPr id="219" name="Shape 3"/>
+          <p:cNvPr id="200" name="Shape 3"/>
           <p:cNvSpPr/>
           <p:nvPr/>
         </p:nvSpPr>
@@ -8142,14 +8316,14 @@
       </p:sp>
       <p:sp>
         <p:nvSpPr>
-          <p:cNvPr id="220" name="Text 4"/>
+          <p:cNvPr id="201" name="Text 4"/>
           <p:cNvSpPr/>
           <p:nvPr/>
         </p:nvSpPr>
         <p:spPr>
           <a:xfrm>
             <a:off x="502920" y="6473880"/>
-            <a:ext cx="3291120" cy="163800"/>
+            <a:ext cx="3290760" cy="163440"/>
           </a:xfrm>
           <a:prstGeom prst="rect">
             <a:avLst/>
@@ -8202,14 +8376,14 @@
       </p:sp>
       <p:sp>
         <p:nvSpPr>
-          <p:cNvPr id="221" name="Shape 5"/>
+          <p:cNvPr id="202" name="Shape 5"/>
           <p:cNvSpPr/>
           <p:nvPr/>
         </p:nvSpPr>
         <p:spPr>
           <a:xfrm>
             <a:off x="868680" y="1005840"/>
-            <a:ext cx="529560" cy="529560"/>
+            <a:ext cx="529200" cy="529200"/>
           </a:xfrm>
           <a:prstGeom prst="ellipse">
             <a:avLst/>
@@ -8253,14 +8427,14 @@
       </p:sp>
       <p:sp>
         <p:nvSpPr>
-          <p:cNvPr id="222" name="Text 6"/>
+          <p:cNvPr id="203" name="Text 6"/>
           <p:cNvSpPr/>
           <p:nvPr/>
         </p:nvSpPr>
         <p:spPr>
           <a:xfrm>
             <a:off x="1024200" y="1152000"/>
-            <a:ext cx="218880" cy="109080"/>
+            <a:ext cx="218520" cy="108720"/>
           </a:xfrm>
           <a:prstGeom prst="rect">
             <a:avLst/>
@@ -8313,14 +8487,14 @@
       </p:sp>
       <p:sp>
         <p:nvSpPr>
-          <p:cNvPr id="223" name="Text 7"/>
+          <p:cNvPr id="204" name="Text 7"/>
           <p:cNvSpPr/>
           <p:nvPr/>
         </p:nvSpPr>
         <p:spPr>
           <a:xfrm>
             <a:off x="1645920" y="1033200"/>
-            <a:ext cx="2742480" cy="227880"/>
+            <a:ext cx="2742120" cy="227520"/>
           </a:xfrm>
           <a:prstGeom prst="rect">
             <a:avLst/>
@@ -8373,14 +8547,14 @@
       </p:sp>
       <p:sp>
         <p:nvSpPr>
-          <p:cNvPr id="224" name="Text 8"/>
+          <p:cNvPr id="205" name="Text 8"/>
           <p:cNvSpPr/>
           <p:nvPr/>
         </p:nvSpPr>
         <p:spPr>
           <a:xfrm>
             <a:off x="4434840" y="1078920"/>
-            <a:ext cx="6308640" cy="182160"/>
+            <a:ext cx="6308280" cy="181800"/>
           </a:xfrm>
           <a:prstGeom prst="rect">
             <a:avLst/>
@@ -8433,14 +8607,14 @@
       </p:sp>
       <p:sp>
         <p:nvSpPr>
-          <p:cNvPr id="225" name="Shape 9"/>
+          <p:cNvPr id="206" name="Shape 9"/>
           <p:cNvSpPr/>
           <p:nvPr/>
         </p:nvSpPr>
         <p:spPr>
           <a:xfrm>
             <a:off x="868680" y="1965960"/>
-            <a:ext cx="529560" cy="529560"/>
+            <a:ext cx="529200" cy="529200"/>
           </a:xfrm>
           <a:prstGeom prst="ellipse">
             <a:avLst/>
@@ -8484,14 +8658,14 @@
       </p:sp>
       <p:sp>
         <p:nvSpPr>
-          <p:cNvPr id="226" name="Text 10"/>
+          <p:cNvPr id="207" name="Text 10"/>
           <p:cNvSpPr/>
           <p:nvPr/>
         </p:nvSpPr>
         <p:spPr>
           <a:xfrm>
             <a:off x="1024200" y="2112120"/>
-            <a:ext cx="218880" cy="109080"/>
+            <a:ext cx="218520" cy="108720"/>
           </a:xfrm>
           <a:prstGeom prst="rect">
             <a:avLst/>
@@ -8544,14 +8718,14 @@
       </p:sp>
       <p:sp>
         <p:nvSpPr>
-          <p:cNvPr id="227" name="Text 11"/>
+          <p:cNvPr id="208" name="Text 11"/>
           <p:cNvSpPr/>
           <p:nvPr/>
         </p:nvSpPr>
         <p:spPr>
           <a:xfrm>
             <a:off x="1645920" y="1993320"/>
-            <a:ext cx="2742480" cy="227880"/>
+            <a:ext cx="2742120" cy="227520"/>
           </a:xfrm>
           <a:prstGeom prst="rect">
             <a:avLst/>
@@ -8604,14 +8778,14 @@
       </p:sp>
       <p:sp>
         <p:nvSpPr>
-          <p:cNvPr id="228" name="Text 12"/>
+          <p:cNvPr id="209" name="Text 12"/>
           <p:cNvSpPr/>
           <p:nvPr/>
         </p:nvSpPr>
         <p:spPr>
           <a:xfrm>
             <a:off x="4434840" y="2039040"/>
-            <a:ext cx="6308640" cy="182160"/>
+            <a:ext cx="6308280" cy="181800"/>
           </a:xfrm>
           <a:prstGeom prst="rect">
             <a:avLst/>
@@ -8664,14 +8838,14 @@
       </p:sp>
       <p:sp>
         <p:nvSpPr>
-          <p:cNvPr id="229" name="Shape 13"/>
+          <p:cNvPr id="210" name="Shape 13"/>
           <p:cNvSpPr/>
           <p:nvPr/>
         </p:nvSpPr>
         <p:spPr>
           <a:xfrm>
             <a:off x="868680" y="2926080"/>
-            <a:ext cx="529560" cy="529560"/>
+            <a:ext cx="529200" cy="529200"/>
           </a:xfrm>
           <a:prstGeom prst="ellipse">
             <a:avLst/>
@@ -8715,14 +8889,14 @@
       </p:sp>
       <p:sp>
         <p:nvSpPr>
-          <p:cNvPr id="230" name="Text 14"/>
+          <p:cNvPr id="211" name="Text 14"/>
           <p:cNvSpPr/>
           <p:nvPr/>
         </p:nvSpPr>
         <p:spPr>
           <a:xfrm>
             <a:off x="1024200" y="3072240"/>
-            <a:ext cx="218880" cy="109080"/>
+            <a:ext cx="218520" cy="108720"/>
           </a:xfrm>
           <a:prstGeom prst="rect">
             <a:avLst/>
@@ -8775,14 +8949,14 @@
       </p:sp>
       <p:sp>
         <p:nvSpPr>
-          <p:cNvPr id="231" name="Text 15"/>
+          <p:cNvPr id="212" name="Text 15"/>
           <p:cNvSpPr/>
           <p:nvPr/>
         </p:nvSpPr>
         <p:spPr>
           <a:xfrm>
             <a:off x="1645920" y="2953440"/>
-            <a:ext cx="2742480" cy="227880"/>
+            <a:ext cx="2742120" cy="227520"/>
           </a:xfrm>
           <a:prstGeom prst="rect">
             <a:avLst/>
@@ -8835,14 +9009,14 @@
       </p:sp>
       <p:sp>
         <p:nvSpPr>
-          <p:cNvPr id="232" name="Text 16"/>
+          <p:cNvPr id="213" name="Text 16"/>
           <p:cNvSpPr/>
           <p:nvPr/>
         </p:nvSpPr>
         <p:spPr>
           <a:xfrm>
             <a:off x="4434840" y="2999160"/>
-            <a:ext cx="6308640" cy="182160"/>
+            <a:ext cx="6308280" cy="181800"/>
           </a:xfrm>
           <a:prstGeom prst="rect">
             <a:avLst/>
@@ -8895,14 +9069,14 @@
       </p:sp>
       <p:sp>
         <p:nvSpPr>
-          <p:cNvPr id="233" name="Shape 17"/>
+          <p:cNvPr id="214" name="Shape 17"/>
           <p:cNvSpPr/>
           <p:nvPr/>
         </p:nvSpPr>
         <p:spPr>
           <a:xfrm>
             <a:off x="868680" y="3886200"/>
-            <a:ext cx="529560" cy="529560"/>
+            <a:ext cx="529200" cy="529200"/>
           </a:xfrm>
           <a:prstGeom prst="ellipse">
             <a:avLst/>
@@ -8946,14 +9120,14 @@
       </p:sp>
       <p:sp>
         <p:nvSpPr>
-          <p:cNvPr id="234" name="Text 18"/>
+          <p:cNvPr id="215" name="Text 18"/>
           <p:cNvSpPr/>
           <p:nvPr/>
         </p:nvSpPr>
         <p:spPr>
           <a:xfrm>
             <a:off x="1024200" y="4032360"/>
-            <a:ext cx="218880" cy="109080"/>
+            <a:ext cx="218520" cy="108720"/>
           </a:xfrm>
           <a:prstGeom prst="rect">
             <a:avLst/>
@@ -9006,14 +9180,14 @@
       </p:sp>
       <p:sp>
         <p:nvSpPr>
-          <p:cNvPr id="235" name="Text 19"/>
+          <p:cNvPr id="216" name="Text 19"/>
           <p:cNvSpPr/>
           <p:nvPr/>
         </p:nvSpPr>
         <p:spPr>
           <a:xfrm>
             <a:off x="1645920" y="3913560"/>
-            <a:ext cx="2742480" cy="227880"/>
+            <a:ext cx="2742120" cy="227520"/>
           </a:xfrm>
           <a:prstGeom prst="rect">
             <a:avLst/>
@@ -9066,14 +9240,14 @@
       </p:sp>
       <p:sp>
         <p:nvSpPr>
-          <p:cNvPr id="236" name="Text 20"/>
+          <p:cNvPr id="217" name="Text 20"/>
           <p:cNvSpPr/>
           <p:nvPr/>
         </p:nvSpPr>
         <p:spPr>
           <a:xfrm>
             <a:off x="4434840" y="3959280"/>
-            <a:ext cx="6308640" cy="182160"/>
+            <a:ext cx="6308280" cy="181800"/>
           </a:xfrm>
           <a:prstGeom prst="rect">
             <a:avLst/>
@@ -9126,14 +9300,14 @@
       </p:sp>
       <p:sp>
         <p:nvSpPr>
-          <p:cNvPr id="237" name="Shape 21"/>
+          <p:cNvPr id="218" name="Shape 21"/>
           <p:cNvSpPr/>
           <p:nvPr/>
         </p:nvSpPr>
         <p:spPr>
           <a:xfrm>
             <a:off x="868680" y="4846320"/>
-            <a:ext cx="529560" cy="529560"/>
+            <a:ext cx="529200" cy="529200"/>
           </a:xfrm>
           <a:prstGeom prst="ellipse">
             <a:avLst/>
@@ -9177,14 +9351,14 @@
       </p:sp>
       <p:sp>
         <p:nvSpPr>
-          <p:cNvPr id="238" name="Text 22"/>
+          <p:cNvPr id="219" name="Text 22"/>
           <p:cNvSpPr/>
           <p:nvPr/>
         </p:nvSpPr>
         <p:spPr>
           <a:xfrm>
             <a:off x="1024200" y="4992480"/>
-            <a:ext cx="218880" cy="109080"/>
+            <a:ext cx="218520" cy="108720"/>
           </a:xfrm>
           <a:prstGeom prst="rect">
             <a:avLst/>
@@ -9237,14 +9411,14 @@
       </p:sp>
       <p:sp>
         <p:nvSpPr>
-          <p:cNvPr id="239" name="Text 23"/>
+          <p:cNvPr id="220" name="Text 23"/>
           <p:cNvSpPr/>
           <p:nvPr/>
         </p:nvSpPr>
         <p:spPr>
           <a:xfrm>
             <a:off x="1645920" y="4873680"/>
-            <a:ext cx="2742480" cy="227880"/>
+            <a:ext cx="2742120" cy="227520"/>
           </a:xfrm>
           <a:prstGeom prst="rect">
             <a:avLst/>
@@ -9297,14 +9471,14 @@
       </p:sp>
       <p:sp>
         <p:nvSpPr>
-          <p:cNvPr id="240" name="Text 24"/>
+          <p:cNvPr id="221" name="Text 24"/>
           <p:cNvSpPr/>
           <p:nvPr/>
         </p:nvSpPr>
         <p:spPr>
           <a:xfrm>
             <a:off x="4434840" y="4919400"/>
-            <a:ext cx="6308640" cy="182160"/>
+            <a:ext cx="6308280" cy="181800"/>
           </a:xfrm>
           <a:prstGeom prst="rect">
             <a:avLst/>
@@ -9357,14 +9531,14 @@
       </p:sp>
       <p:sp>
         <p:nvSpPr>
-          <p:cNvPr id="241" name="Text 25"/>
+          <p:cNvPr id="222" name="Text 25"/>
           <p:cNvSpPr/>
           <p:nvPr/>
         </p:nvSpPr>
         <p:spPr>
           <a:xfrm>
             <a:off x="1097280" y="5806440"/>
-            <a:ext cx="9966240" cy="410760"/>
+            <a:ext cx="9965880" cy="410400"/>
           </a:xfrm>
           <a:prstGeom prst="rect">
             <a:avLst/>
@@ -9417,14 +9591,14 @@
       </p:sp>
       <p:sp>
         <p:nvSpPr>
-          <p:cNvPr id="242" name="Text 26"/>
+          <p:cNvPr id="223" name="Text 26"/>
           <p:cNvSpPr/>
           <p:nvPr/>
         </p:nvSpPr>
         <p:spPr>
           <a:xfrm>
             <a:off x="11475720" y="6473880"/>
-            <a:ext cx="255240" cy="136440"/>
+            <a:ext cx="254880" cy="136080"/>
           </a:xfrm>
           <a:prstGeom prst="rect">
             <a:avLst/>
@@ -9507,7 +9681,7 @@
       </p:grpSpPr>
       <p:pic>
         <p:nvPicPr>
-          <p:cNvPr id="243" name=""/>
+          <p:cNvPr id="224" name=""/>
           <p:cNvPicPr/>
           <p:nvPr/>
         </p:nvPicPr>
@@ -9518,7 +9692,7 @@
         <p:spPr>
           <a:xfrm>
             <a:off x="0" y="3960"/>
-            <a:ext cx="12184920" cy="6857640"/>
+            <a:ext cx="12184560" cy="6857280"/>
           </a:xfrm>
           <a:prstGeom prst="rect">
             <a:avLst/>
@@ -9568,14 +9742,14 @@
       </p:grpSpPr>
       <p:sp>
         <p:nvSpPr>
-          <p:cNvPr id="244" name="Shape 0"/>
+          <p:cNvPr id="225" name="Shape 0"/>
           <p:cNvSpPr/>
           <p:nvPr/>
         </p:nvSpPr>
         <p:spPr>
           <a:xfrm>
             <a:off x="0" y="0"/>
-            <a:ext cx="12191040" cy="657720"/>
+            <a:ext cx="12190680" cy="657360"/>
           </a:xfrm>
           <a:prstGeom prst="rect">
             <a:avLst/>
@@ -9619,14 +9793,14 @@
       </p:sp>
       <p:sp>
         <p:nvSpPr>
-          <p:cNvPr id="245" name="Text 1"/>
+          <p:cNvPr id="226" name="Text 1"/>
           <p:cNvSpPr/>
           <p:nvPr/>
         </p:nvSpPr>
         <p:spPr>
           <a:xfrm>
             <a:off x="502920" y="146160"/>
-            <a:ext cx="8868960" cy="346680"/>
+            <a:ext cx="8868600" cy="346320"/>
           </a:xfrm>
           <a:prstGeom prst="rect">
             <a:avLst/>
@@ -9680,14 +9854,14 @@
       </p:sp>
       <p:sp>
         <p:nvSpPr>
-          <p:cNvPr id="246" name="Text 2"/>
+          <p:cNvPr id="227" name="Text 2"/>
           <p:cNvSpPr/>
           <p:nvPr/>
         </p:nvSpPr>
         <p:spPr>
           <a:xfrm>
             <a:off x="9555480" y="173880"/>
-            <a:ext cx="2056680" cy="255240"/>
+            <a:ext cx="2056320" cy="254880"/>
           </a:xfrm>
           <a:prstGeom prst="rect">
             <a:avLst/>
@@ -9740,7 +9914,7 @@
       </p:sp>
       <p:sp>
         <p:nvSpPr>
-          <p:cNvPr id="247" name="Shape 3"/>
+          <p:cNvPr id="228" name="Shape 3"/>
           <p:cNvSpPr/>
           <p:nvPr/>
         </p:nvSpPr>
@@ -9783,14 +9957,14 @@
       </p:sp>
       <p:sp>
         <p:nvSpPr>
-          <p:cNvPr id="248" name="Text 4"/>
+          <p:cNvPr id="229" name="Text 4"/>
           <p:cNvSpPr/>
           <p:nvPr/>
         </p:nvSpPr>
         <p:spPr>
           <a:xfrm>
             <a:off x="502920" y="6473880"/>
-            <a:ext cx="3291120" cy="163800"/>
+            <a:ext cx="3290760" cy="163440"/>
           </a:xfrm>
           <a:prstGeom prst="rect">
             <a:avLst/>
@@ -9843,14 +10017,14 @@
       </p:sp>
       <p:sp>
         <p:nvSpPr>
-          <p:cNvPr id="249" name="Shape 5"/>
+          <p:cNvPr id="230" name="Shape 5"/>
           <p:cNvSpPr/>
           <p:nvPr/>
         </p:nvSpPr>
         <p:spPr>
           <a:xfrm>
             <a:off x="822960" y="1143000"/>
-            <a:ext cx="3291120" cy="1828080"/>
+            <a:ext cx="3290760" cy="1827720"/>
           </a:xfrm>
           <a:prstGeom prst="roundRect">
             <a:avLst>
@@ -9896,14 +10070,14 @@
       </p:sp>
       <p:sp>
         <p:nvSpPr>
-          <p:cNvPr id="250" name="Text 6"/>
+          <p:cNvPr id="231" name="Text 6"/>
           <p:cNvSpPr/>
           <p:nvPr/>
         </p:nvSpPr>
         <p:spPr>
           <a:xfrm>
             <a:off x="1005840" y="1307520"/>
-            <a:ext cx="2925360" cy="227880"/>
+            <a:ext cx="2925000" cy="227520"/>
           </a:xfrm>
           <a:prstGeom prst="rect">
             <a:avLst/>
@@ -9956,14 +10130,14 @@
       </p:sp>
       <p:sp>
         <p:nvSpPr>
-          <p:cNvPr id="251" name="Text 7"/>
+          <p:cNvPr id="232" name="Text 7"/>
           <p:cNvSpPr/>
           <p:nvPr/>
         </p:nvSpPr>
         <p:spPr>
           <a:xfrm>
             <a:off x="1005840" y="1645920"/>
-            <a:ext cx="2925360" cy="1188000"/>
+            <a:ext cx="2925000" cy="1187640"/>
           </a:xfrm>
           <a:prstGeom prst="rect">
             <a:avLst/>
@@ -10016,14 +10190,14 @@
       </p:sp>
       <p:sp>
         <p:nvSpPr>
-          <p:cNvPr id="252" name="Shape 8"/>
+          <p:cNvPr id="233" name="Shape 8"/>
           <p:cNvSpPr/>
           <p:nvPr/>
         </p:nvSpPr>
         <p:spPr>
           <a:xfrm>
             <a:off x="4434840" y="1143000"/>
-            <a:ext cx="3291120" cy="1828080"/>
+            <a:ext cx="3290760" cy="1827720"/>
           </a:xfrm>
           <a:prstGeom prst="roundRect">
             <a:avLst>
@@ -10069,14 +10243,14 @@
       </p:sp>
       <p:sp>
         <p:nvSpPr>
-          <p:cNvPr id="253" name="Text 9"/>
+          <p:cNvPr id="234" name="Text 9"/>
           <p:cNvSpPr/>
           <p:nvPr/>
         </p:nvSpPr>
         <p:spPr>
           <a:xfrm>
             <a:off x="4617720" y="1307520"/>
-            <a:ext cx="2925360" cy="227880"/>
+            <a:ext cx="2925000" cy="227520"/>
           </a:xfrm>
           <a:prstGeom prst="rect">
             <a:avLst/>
@@ -10129,14 +10303,14 @@
       </p:sp>
       <p:sp>
         <p:nvSpPr>
-          <p:cNvPr id="254" name="Text 10"/>
+          <p:cNvPr id="235" name="Text 10"/>
           <p:cNvSpPr/>
           <p:nvPr/>
         </p:nvSpPr>
         <p:spPr>
           <a:xfrm>
             <a:off x="4617720" y="1645920"/>
-            <a:ext cx="2925360" cy="1188000"/>
+            <a:ext cx="2925000" cy="1187640"/>
           </a:xfrm>
           <a:prstGeom prst="rect">
             <a:avLst/>
@@ -10189,14 +10363,14 @@
       </p:sp>
       <p:sp>
         <p:nvSpPr>
-          <p:cNvPr id="255" name="Shape 11"/>
+          <p:cNvPr id="236" name="Shape 11"/>
           <p:cNvSpPr/>
           <p:nvPr/>
         </p:nvSpPr>
         <p:spPr>
           <a:xfrm>
             <a:off x="8046720" y="1143000"/>
-            <a:ext cx="3291120" cy="1828080"/>
+            <a:ext cx="3290760" cy="1827720"/>
           </a:xfrm>
           <a:prstGeom prst="roundRect">
             <a:avLst>
@@ -10242,14 +10416,14 @@
       </p:sp>
       <p:sp>
         <p:nvSpPr>
-          <p:cNvPr id="256" name="Text 12"/>
+          <p:cNvPr id="237" name="Text 12"/>
           <p:cNvSpPr/>
           <p:nvPr/>
         </p:nvSpPr>
         <p:spPr>
           <a:xfrm>
             <a:off x="8229600" y="1307520"/>
-            <a:ext cx="2925360" cy="227880"/>
+            <a:ext cx="2925000" cy="227520"/>
           </a:xfrm>
           <a:prstGeom prst="rect">
             <a:avLst/>
@@ -10302,14 +10476,14 @@
       </p:sp>
       <p:sp>
         <p:nvSpPr>
-          <p:cNvPr id="257" name="Text 13"/>
+          <p:cNvPr id="238" name="Text 13"/>
           <p:cNvSpPr/>
           <p:nvPr/>
         </p:nvSpPr>
         <p:spPr>
           <a:xfrm>
             <a:off x="8229600" y="1645920"/>
-            <a:ext cx="2925360" cy="1188000"/>
+            <a:ext cx="2925000" cy="1187640"/>
           </a:xfrm>
           <a:prstGeom prst="rect">
             <a:avLst/>
@@ -10362,14 +10536,14 @@
       </p:sp>
       <p:sp>
         <p:nvSpPr>
-          <p:cNvPr id="258" name="Text 14"/>
+          <p:cNvPr id="239" name="Text 14"/>
           <p:cNvSpPr/>
           <p:nvPr/>
         </p:nvSpPr>
         <p:spPr>
           <a:xfrm>
             <a:off x="1143000" y="3977640"/>
-            <a:ext cx="9874800" cy="502200"/>
+            <a:ext cx="9874440" cy="501840"/>
           </a:xfrm>
           <a:prstGeom prst="rect">
             <a:avLst/>
@@ -10423,14 +10597,14 @@
       </p:sp>
       <p:sp>
         <p:nvSpPr>
-          <p:cNvPr id="259" name="Text 15"/>
+          <p:cNvPr id="240" name="Text 15"/>
           <p:cNvSpPr/>
           <p:nvPr/>
         </p:nvSpPr>
         <p:spPr>
           <a:xfrm>
             <a:off x="1463040" y="4983480"/>
-            <a:ext cx="9143280" cy="502200"/>
+            <a:ext cx="9142920" cy="501840"/>
           </a:xfrm>
           <a:prstGeom prst="rect">
             <a:avLst/>
@@ -10483,14 +10657,14 @@
       </p:sp>
       <p:sp>
         <p:nvSpPr>
-          <p:cNvPr id="260" name="Text 16"/>
+          <p:cNvPr id="241" name="Text 16"/>
           <p:cNvSpPr/>
           <p:nvPr/>
         </p:nvSpPr>
         <p:spPr>
           <a:xfrm>
             <a:off x="11475720" y="6473880"/>
-            <a:ext cx="255240" cy="136440"/>
+            <a:ext cx="254880" cy="136080"/>
           </a:xfrm>
           <a:prstGeom prst="rect">
             <a:avLst/>
@@ -10580,14 +10754,14 @@
       </p:grpSpPr>
       <p:sp>
         <p:nvSpPr>
-          <p:cNvPr id="261" name="Shape 0"/>
+          <p:cNvPr id="242" name="Shape 0"/>
           <p:cNvSpPr/>
           <p:nvPr/>
         </p:nvSpPr>
         <p:spPr>
           <a:xfrm>
             <a:off x="0" y="0"/>
-            <a:ext cx="12191040" cy="657720"/>
+            <a:ext cx="12190680" cy="657360"/>
           </a:xfrm>
           <a:prstGeom prst="rect">
             <a:avLst/>
@@ -10631,14 +10805,14 @@
       </p:sp>
       <p:sp>
         <p:nvSpPr>
-          <p:cNvPr id="262" name="Text 1"/>
+          <p:cNvPr id="243" name="Text 1"/>
           <p:cNvSpPr/>
           <p:nvPr/>
         </p:nvSpPr>
         <p:spPr>
           <a:xfrm>
             <a:off x="502920" y="146160"/>
-            <a:ext cx="8868960" cy="346680"/>
+            <a:ext cx="8868600" cy="346320"/>
           </a:xfrm>
           <a:prstGeom prst="rect">
             <a:avLst/>
@@ -10692,14 +10866,14 @@
       </p:sp>
       <p:sp>
         <p:nvSpPr>
-          <p:cNvPr id="263" name="Text 2"/>
+          <p:cNvPr id="244" name="Text 2"/>
           <p:cNvSpPr/>
           <p:nvPr/>
         </p:nvSpPr>
         <p:spPr>
           <a:xfrm>
             <a:off x="9555480" y="173880"/>
-            <a:ext cx="2056680" cy="255240"/>
+            <a:ext cx="2056320" cy="254880"/>
           </a:xfrm>
           <a:prstGeom prst="rect">
             <a:avLst/>
@@ -10752,7 +10926,7 @@
       </p:sp>
       <p:sp>
         <p:nvSpPr>
-          <p:cNvPr id="264" name="Shape 3"/>
+          <p:cNvPr id="245" name="Shape 3"/>
           <p:cNvSpPr/>
           <p:nvPr/>
         </p:nvSpPr>
@@ -10795,14 +10969,14 @@
       </p:sp>
       <p:sp>
         <p:nvSpPr>
-          <p:cNvPr id="265" name="Text 4"/>
+          <p:cNvPr id="246" name="Text 4"/>
           <p:cNvSpPr/>
           <p:nvPr/>
         </p:nvSpPr>
         <p:spPr>
           <a:xfrm>
             <a:off x="502920" y="6473880"/>
-            <a:ext cx="3291120" cy="163800"/>
+            <a:ext cx="3290760" cy="163440"/>
           </a:xfrm>
           <a:prstGeom prst="rect">
             <a:avLst/>
@@ -10855,14 +11029,14 @@
       </p:sp>
       <p:sp>
         <p:nvSpPr>
-          <p:cNvPr id="266" name="Text 5"/>
+          <p:cNvPr id="247" name="Text 5"/>
           <p:cNvSpPr/>
           <p:nvPr/>
         </p:nvSpPr>
         <p:spPr>
           <a:xfrm>
             <a:off x="914400" y="1188720"/>
-            <a:ext cx="10240560" cy="2010960"/>
+            <a:ext cx="10240200" cy="2010600"/>
           </a:xfrm>
           <a:prstGeom prst="rect">
             <a:avLst/>
@@ -11031,14 +11205,14 @@
       </p:sp>
       <p:sp>
         <p:nvSpPr>
-          <p:cNvPr id="267" name="Text 6"/>
+          <p:cNvPr id="248" name="Text 6"/>
           <p:cNvSpPr/>
           <p:nvPr/>
         </p:nvSpPr>
         <p:spPr>
           <a:xfrm>
             <a:off x="914400" y="4160520"/>
-            <a:ext cx="10240560" cy="502200"/>
+            <a:ext cx="10240200" cy="501840"/>
           </a:xfrm>
           <a:prstGeom prst="rect">
             <a:avLst/>
@@ -11091,14 +11265,14 @@
       </p:sp>
       <p:sp>
         <p:nvSpPr>
-          <p:cNvPr id="268" name="Text 7"/>
+          <p:cNvPr id="249" name="Text 7"/>
           <p:cNvSpPr/>
           <p:nvPr/>
         </p:nvSpPr>
         <p:spPr>
           <a:xfrm>
             <a:off x="11475720" y="6473880"/>
-            <a:ext cx="255240" cy="136440"/>
+            <a:ext cx="254880" cy="136080"/>
           </a:xfrm>
           <a:prstGeom prst="rect">
             <a:avLst/>
@@ -11195,7 +11369,7 @@
         <p:spPr>
           <a:xfrm>
             <a:off x="0" y="0"/>
-            <a:ext cx="12191040" cy="657720"/>
+            <a:ext cx="12190680" cy="657360"/>
           </a:xfrm>
           <a:prstGeom prst="rect">
             <a:avLst/>
@@ -11221,6 +11395,11 @@
             <a:noAutofit/>
           </a:bodyPr>
           <a:p>
+            <a:pPr>
+              <a:lnSpc>
+                <a:spcPct val="100000"/>
+              </a:lnSpc>
+            </a:pPr>
             <a:endParaRPr lang="en-US" sz="1800" b="0" u="none" strike="noStrike">
               <a:solidFill>
                 <a:srgbClr val="ffffff"/>
@@ -11241,7 +11420,7 @@
         <p:spPr>
           <a:xfrm>
             <a:off x="457200" y="457200"/>
-            <a:ext cx="8868960" cy="346680"/>
+            <a:ext cx="8868600" cy="346320"/>
           </a:xfrm>
           <a:prstGeom prst="rect">
             <a:avLst/>
@@ -11332,7 +11511,7 @@
         <p:spPr>
           <a:xfrm>
             <a:off x="9555480" y="173880"/>
-            <a:ext cx="2056680" cy="255240"/>
+            <a:ext cx="2056320" cy="254880"/>
           </a:xfrm>
           <a:prstGeom prst="rect">
             <a:avLst/>
@@ -11435,7 +11614,7 @@
         <p:spPr>
           <a:xfrm>
             <a:off x="502920" y="6473880"/>
-            <a:ext cx="3291120" cy="163800"/>
+            <a:ext cx="3290760" cy="163440"/>
           </a:xfrm>
           <a:prstGeom prst="rect">
             <a:avLst/>
@@ -11495,7 +11674,7 @@
         <p:spPr>
           <a:xfrm>
             <a:off x="-685800" y="803880"/>
-            <a:ext cx="5577120" cy="685080"/>
+            <a:ext cx="5576760" cy="684720"/>
           </a:xfrm>
           <a:prstGeom prst="rect">
             <a:avLst/>
@@ -11556,7 +11735,7 @@
         <p:spPr>
           <a:xfrm>
             <a:off x="2240280" y="2651760"/>
-            <a:ext cx="3474720" cy="1463040"/>
+            <a:ext cx="3474360" cy="1462680"/>
           </a:xfrm>
           <a:prstGeom prst="roundRect">
             <a:avLst>
@@ -11584,6 +11763,11 @@
             <a:noAutofit/>
           </a:bodyPr>
           <a:p>
+            <a:pPr>
+              <a:lnSpc>
+                <a:spcPct val="100000"/>
+              </a:lnSpc>
+            </a:pPr>
             <a:endParaRPr lang="en-US" sz="1800" b="0" u="none" strike="noStrike">
               <a:solidFill>
                 <a:srgbClr val="000000"/>
@@ -11604,7 +11788,7 @@
         <p:spPr>
           <a:xfrm>
             <a:off x="2423160" y="2816280"/>
-            <a:ext cx="3291840" cy="227880"/>
+            <a:ext cx="3291480" cy="227520"/>
           </a:xfrm>
           <a:prstGeom prst="rect">
             <a:avLst/>
@@ -11646,7 +11830,7 @@
             </a:r>
             <a:endParaRPr lang="en-US" sz="1300" b="0" u="none" strike="noStrike">
               <a:solidFill>
-                <a:srgbClr val="355269"/>
+                <a:srgbClr val="000000"/>
               </a:solidFill>
               <a:effectLst/>
               <a:uFillTx/>
@@ -11664,7 +11848,7 @@
         <p:spPr>
           <a:xfrm>
             <a:off x="2423160" y="3429000"/>
-            <a:ext cx="2834640" cy="227880"/>
+            <a:ext cx="2834280" cy="227520"/>
           </a:xfrm>
           <a:prstGeom prst="rect">
             <a:avLst/>
@@ -11754,7 +11938,7 @@
         <p:spPr>
           <a:xfrm>
             <a:off x="457200" y="1828800"/>
-            <a:ext cx="8503200" cy="822240"/>
+            <a:ext cx="8502840" cy="821880"/>
           </a:xfrm>
           <a:prstGeom prst="rect">
             <a:avLst/>
@@ -11844,7 +12028,7 @@
         <p:spPr>
           <a:xfrm>
             <a:off x="11475720" y="6473880"/>
-            <a:ext cx="255240" cy="136440"/>
+            <a:ext cx="254880" cy="136080"/>
           </a:xfrm>
           <a:prstGeom prst="rect">
             <a:avLst/>
@@ -11904,7 +12088,7 @@
         <p:spPr>
           <a:xfrm>
             <a:off x="6629400" y="2651760"/>
-            <a:ext cx="3474720" cy="1463040"/>
+            <a:ext cx="3474360" cy="1462680"/>
           </a:xfrm>
           <a:prstGeom prst="roundRect">
             <a:avLst>
@@ -11990,18 +12174,7 @@
                 <a:uFillTx/>
                 <a:latin typeface="Arial"/>
               </a:rPr>
-              <a:t>A taxa de crescimento passou a depender diretamente da </a:t>
-            </a:r>
-            <a:r>
-              <a:rPr lang="en-US" sz="1000" b="0" u="none" strike="noStrike">
-                <a:solidFill>
-                  <a:srgbClr val="000000"/>
-                </a:solidFill>
-                <a:effectLst/>
-                <a:uFillTx/>
-                <a:latin typeface="Arial"/>
-              </a:rPr>
-              <a:t>temperatura da água</a:t>
+              <a:t>A taxa de crescimento passou a depender diretamente da temperatura da água</a:t>
             </a:r>
             <a:endParaRPr lang="en-US" sz="1000" b="0" u="none" strike="noStrike">
               <a:solidFill>
@@ -12023,7 +12196,7 @@
         <p:spPr>
           <a:xfrm>
             <a:off x="2240280" y="4480560"/>
-            <a:ext cx="3474720" cy="1463040"/>
+            <a:ext cx="3474360" cy="1462680"/>
           </a:xfrm>
           <a:prstGeom prst="roundRect">
             <a:avLst>
@@ -12155,7 +12328,7 @@
         <p:spPr>
           <a:xfrm>
             <a:off x="6583680" y="4480560"/>
-            <a:ext cx="3474720" cy="1463040"/>
+            <a:ext cx="3474360" cy="1462680"/>
           </a:xfrm>
           <a:prstGeom prst="roundRect">
             <a:avLst>
@@ -12241,18 +12414,7 @@
                 <a:uFillTx/>
                 <a:latin typeface="Arial"/>
               </a:rPr>
-              <a:t>Na faixa típica do verão carioca, o modelo indicou maior </a:t>
-            </a:r>
-            <a:r>
-              <a:rPr lang="en-US" sz="1000" b="0" u="none" strike="noStrike">
-                <a:solidFill>
-                  <a:srgbClr val="000000"/>
-                </a:solidFill>
-                <a:effectLst/>
-                <a:uFillTx/>
-                <a:latin typeface="Arial"/>
-              </a:rPr>
-              <a:t>chance de exceder limites seguros. </a:t>
+              <a:t>Na faixa típica do verão carioca, o modelo indicou maior chance de exceder limites seguros. </a:t>
             </a:r>
             <a:endParaRPr lang="en-US" sz="1000" b="0" u="none" strike="noStrike">
               <a:solidFill>
@@ -12356,7 +12518,7 @@
         <p:spPr>
           <a:xfrm>
             <a:off x="18720" y="3960"/>
-            <a:ext cx="12184560" cy="6857280"/>
+            <a:ext cx="12184200" cy="6856920"/>
           </a:xfrm>
           <a:prstGeom prst="rect">
             <a:avLst/>
@@ -12410,7 +12572,7 @@
         <p:spPr>
           <a:xfrm>
             <a:off x="18720" y="3960"/>
-            <a:ext cx="12184560" cy="6857280"/>
+            <a:ext cx="12184200" cy="6856920"/>
           </a:xfrm>
           <a:prstGeom prst="rect">
             <a:avLst/>
@@ -12460,14 +12622,14 @@
       </p:grpSpPr>
       <p:sp>
         <p:nvSpPr>
-          <p:cNvPr id="32" name="Shape 2"/>
+          <p:cNvPr id="32" name="Shape 0"/>
           <p:cNvSpPr/>
           <p:nvPr/>
         </p:nvSpPr>
         <p:spPr>
           <a:xfrm>
             <a:off x="0" y="0"/>
-            <a:ext cx="12191040" cy="657720"/>
+            <a:ext cx="12190680" cy="657360"/>
           </a:xfrm>
           <a:prstGeom prst="rect">
             <a:avLst/>
@@ -12493,6 +12655,11 @@
             <a:noAutofit/>
           </a:bodyPr>
           <a:p>
+            <a:pPr>
+              <a:lnSpc>
+                <a:spcPct val="100000"/>
+              </a:lnSpc>
+            </a:pPr>
             <a:endParaRPr lang="en-US" sz="1800" b="0" u="none" strike="noStrike">
               <a:solidFill>
                 <a:srgbClr val="ffffff"/>
@@ -12506,14 +12673,14 @@
       </p:sp>
       <p:sp>
         <p:nvSpPr>
-          <p:cNvPr id="33" name="Text 29"/>
+          <p:cNvPr id="33" name="Text 1"/>
           <p:cNvSpPr/>
           <p:nvPr/>
         </p:nvSpPr>
         <p:spPr>
           <a:xfrm>
             <a:off x="502920" y="146160"/>
-            <a:ext cx="8868960" cy="346680"/>
+            <a:ext cx="8868600" cy="346320"/>
           </a:xfrm>
           <a:prstGeom prst="rect">
             <a:avLst/>
@@ -12552,223 +12719,7 @@
                 <a:latin typeface="Aptos Display"/>
                 <a:ea typeface="Aptos Display"/>
               </a:rPr>
-              <a:t>P</a:t>
-            </a:r>
-            <a:r>
-              <a:rPr lang="en-US" sz="2000" b="1" u="none" strike="noStrike">
-                <a:solidFill>
-                  <a:srgbClr val="ffffff"/>
-                </a:solidFill>
-                <a:effectLst/>
-                <a:uFillTx/>
-                <a:latin typeface="Aptos Display"/>
-                <a:ea typeface="Aptos Display"/>
-              </a:rPr>
-              <a:t>o</a:t>
-            </a:r>
-            <a:r>
-              <a:rPr lang="en-US" sz="2000" b="1" u="none" strike="noStrike">
-                <a:solidFill>
-                  <a:srgbClr val="ffffff"/>
-                </a:solidFill>
-                <a:effectLst/>
-                <a:uFillTx/>
-                <a:latin typeface="Aptos Display"/>
-                <a:ea typeface="Aptos Display"/>
-              </a:rPr>
-              <a:t>r </a:t>
-            </a:r>
-            <a:r>
-              <a:rPr lang="en-US" sz="2000" b="1" u="none" strike="noStrike">
-                <a:solidFill>
-                  <a:srgbClr val="ffffff"/>
-                </a:solidFill>
-                <a:effectLst/>
-                <a:uFillTx/>
-                <a:latin typeface="Aptos Display"/>
-                <a:ea typeface="Aptos Display"/>
-              </a:rPr>
-              <a:t>q</a:t>
-            </a:r>
-            <a:r>
-              <a:rPr lang="en-US" sz="2000" b="1" u="none" strike="noStrike">
-                <a:solidFill>
-                  <a:srgbClr val="ffffff"/>
-                </a:solidFill>
-                <a:effectLst/>
-                <a:uFillTx/>
-                <a:latin typeface="Aptos Display"/>
-                <a:ea typeface="Aptos Display"/>
-              </a:rPr>
-              <a:t>u</a:t>
-            </a:r>
-            <a:r>
-              <a:rPr lang="en-US" sz="2000" b="1" u="none" strike="noStrike">
-                <a:solidFill>
-                  <a:srgbClr val="ffffff"/>
-                </a:solidFill>
-                <a:effectLst/>
-                <a:uFillTx/>
-                <a:latin typeface="Aptos Display"/>
-                <a:ea typeface="Aptos Display"/>
-              </a:rPr>
-              <a:t>e </a:t>
-            </a:r>
-            <a:r>
-              <a:rPr lang="en-US" sz="2000" b="1" u="none" strike="noStrike">
-                <a:solidFill>
-                  <a:srgbClr val="ffffff"/>
-                </a:solidFill>
-                <a:effectLst/>
-                <a:uFillTx/>
-                <a:latin typeface="Aptos Display"/>
-                <a:ea typeface="Aptos Display"/>
-              </a:rPr>
-              <a:t>tr</a:t>
-            </a:r>
-            <a:r>
-              <a:rPr lang="en-US" sz="2000" b="1" u="none" strike="noStrike">
-                <a:solidFill>
-                  <a:srgbClr val="ffffff"/>
-                </a:solidFill>
-                <a:effectLst/>
-                <a:uFillTx/>
-                <a:latin typeface="Aptos Display"/>
-                <a:ea typeface="Aptos Display"/>
-              </a:rPr>
-              <a:t>o</a:t>
-            </a:r>
-            <a:r>
-              <a:rPr lang="en-US" sz="2000" b="1" u="none" strike="noStrike">
-                <a:solidFill>
-                  <a:srgbClr val="ffffff"/>
-                </a:solidFill>
-                <a:effectLst/>
-                <a:uFillTx/>
-                <a:latin typeface="Aptos Display"/>
-                <a:ea typeface="Aptos Display"/>
-              </a:rPr>
-              <a:t>c</a:t>
-            </a:r>
-            <a:r>
-              <a:rPr lang="en-US" sz="2000" b="1" u="none" strike="noStrike">
-                <a:solidFill>
-                  <a:srgbClr val="ffffff"/>
-                </a:solidFill>
-                <a:effectLst/>
-                <a:uFillTx/>
-                <a:latin typeface="Aptos Display"/>
-                <a:ea typeface="Aptos Display"/>
-              </a:rPr>
-              <a:t>a</a:t>
-            </a:r>
-            <a:r>
-              <a:rPr lang="en-US" sz="2000" b="1" u="none" strike="noStrike">
-                <a:solidFill>
-                  <a:srgbClr val="ffffff"/>
-                </a:solidFill>
-                <a:effectLst/>
-                <a:uFillTx/>
-                <a:latin typeface="Aptos Display"/>
-                <a:ea typeface="Aptos Display"/>
-              </a:rPr>
-              <a:t>r </a:t>
-            </a:r>
-            <a:r>
-              <a:rPr lang="en-US" sz="2000" b="1" u="none" strike="noStrike">
-                <a:solidFill>
-                  <a:srgbClr val="ffffff"/>
-                </a:solidFill>
-                <a:effectLst/>
-                <a:uFillTx/>
-                <a:latin typeface="Aptos Display"/>
-                <a:ea typeface="Aptos Display"/>
-              </a:rPr>
-              <a:t>d</a:t>
-            </a:r>
-            <a:r>
-              <a:rPr lang="en-US" sz="2000" b="1" u="none" strike="noStrike">
-                <a:solidFill>
-                  <a:srgbClr val="ffffff"/>
-                </a:solidFill>
-                <a:effectLst/>
-                <a:uFillTx/>
-                <a:latin typeface="Aptos Display"/>
-                <a:ea typeface="Aptos Display"/>
-              </a:rPr>
-              <a:t>e </a:t>
-            </a:r>
-            <a:r>
-              <a:rPr lang="en-US" sz="2000" b="1" u="none" strike="noStrike">
-                <a:solidFill>
-                  <a:srgbClr val="ffffff"/>
-                </a:solidFill>
-                <a:effectLst/>
-                <a:uFillTx/>
-                <a:latin typeface="Aptos Display"/>
-                <a:ea typeface="Aptos Display"/>
-              </a:rPr>
-              <a:t>m</a:t>
-            </a:r>
-            <a:r>
-              <a:rPr lang="en-US" sz="2000" b="1" u="none" strike="noStrike">
-                <a:solidFill>
-                  <a:srgbClr val="ffffff"/>
-                </a:solidFill>
-                <a:effectLst/>
-                <a:uFillTx/>
-                <a:latin typeface="Aptos Display"/>
-                <a:ea typeface="Aptos Display"/>
-              </a:rPr>
-              <a:t>o</a:t>
-            </a:r>
-            <a:r>
-              <a:rPr lang="en-US" sz="2000" b="1" u="none" strike="noStrike">
-                <a:solidFill>
-                  <a:srgbClr val="ffffff"/>
-                </a:solidFill>
-                <a:effectLst/>
-                <a:uFillTx/>
-                <a:latin typeface="Aptos Display"/>
-                <a:ea typeface="Aptos Display"/>
-              </a:rPr>
-              <a:t>d</a:t>
-            </a:r>
-            <a:r>
-              <a:rPr lang="en-US" sz="2000" b="1" u="none" strike="noStrike">
-                <a:solidFill>
-                  <a:srgbClr val="ffffff"/>
-                </a:solidFill>
-                <a:effectLst/>
-                <a:uFillTx/>
-                <a:latin typeface="Aptos Display"/>
-                <a:ea typeface="Aptos Display"/>
-              </a:rPr>
-              <a:t>el</a:t>
-            </a:r>
-            <a:r>
-              <a:rPr lang="en-US" sz="2000" b="1" u="none" strike="noStrike">
-                <a:solidFill>
-                  <a:srgbClr val="ffffff"/>
-                </a:solidFill>
-                <a:effectLst/>
-                <a:uFillTx/>
-                <a:latin typeface="Aptos Display"/>
-                <a:ea typeface="Aptos Display"/>
-              </a:rPr>
-              <a:t>o</a:t>
-            </a:r>
-            <a:r>
-              <a:rPr lang="en-US" sz="2000" b="1" u="none" strike="noStrike">
-                <a:solidFill>
-                  <a:srgbClr val="ffffff"/>
-                </a:solidFill>
-                <a:effectLst/>
-                <a:uFillTx/>
-                <a:latin typeface="Aptos Display"/>
-                <a:ea typeface="Aptos Display"/>
-              </a:rPr>
-              <a:t>?</a:t>
+              <a:t>Novo Modelo 1: crescimento logístico</a:t>
             </a:r>
             <a:endParaRPr lang="en-US" sz="2000" b="0" u="none" strike="noStrike">
               <a:solidFill>
@@ -12783,14 +12734,14 @@
       </p:sp>
       <p:sp>
         <p:nvSpPr>
-          <p:cNvPr id="34" name="Text 35"/>
+          <p:cNvPr id="34" name="Text 2"/>
           <p:cNvSpPr/>
           <p:nvPr/>
         </p:nvSpPr>
         <p:spPr>
           <a:xfrm>
             <a:off x="9555480" y="173880"/>
-            <a:ext cx="2056680" cy="255240"/>
+            <a:ext cx="2056320" cy="254880"/>
           </a:xfrm>
           <a:prstGeom prst="rect">
             <a:avLst/>
@@ -12843,7 +12794,7 @@
       </p:sp>
       <p:sp>
         <p:nvSpPr>
-          <p:cNvPr id="35" name="Shape 4"/>
+          <p:cNvPr id="35" name="Shape 3"/>
           <p:cNvSpPr/>
           <p:nvPr/>
         </p:nvSpPr>
@@ -12886,14 +12837,14 @@
       </p:sp>
       <p:sp>
         <p:nvSpPr>
-          <p:cNvPr id="36" name="Text 36"/>
+          <p:cNvPr id="36" name="Text 4"/>
           <p:cNvSpPr/>
           <p:nvPr/>
         </p:nvSpPr>
         <p:spPr>
           <a:xfrm>
             <a:off x="502920" y="6473880"/>
-            <a:ext cx="3291120" cy="163800"/>
+            <a:ext cx="3290760" cy="163440"/>
           </a:xfrm>
           <a:prstGeom prst="rect">
             <a:avLst/>
@@ -12946,14 +12897,14 @@
       </p:sp>
       <p:sp>
         <p:nvSpPr>
-          <p:cNvPr id="37" name="Text 37"/>
-          <p:cNvSpPr/>
-          <p:nvPr/>
-        </p:nvSpPr>
-        <p:spPr>
-          <a:xfrm>
-            <a:off x="137880" y="915120"/>
-            <a:ext cx="5577120" cy="685080"/>
+          <p:cNvPr id="37" name="Text 5"/>
+          <p:cNvSpPr/>
+          <p:nvPr/>
+        </p:nvSpPr>
+        <p:spPr>
+          <a:xfrm>
+            <a:off x="685800" y="1143000"/>
+            <a:ext cx="5576760" cy="684720"/>
           </a:xfrm>
           <a:prstGeom prst="rect">
             <a:avLst/>
@@ -12983,7 +12934,7 @@
               </a:tabLst>
             </a:pPr>
             <a:r>
-              <a:rPr lang="en-US" sz="2600" b="1" u="none" strike="noStrike">
+              <a:rPr lang="en-US" sz="2400" b="1" u="none" strike="noStrike">
                 <a:solidFill>
                   <a:srgbClr val="16324f"/>
                 </a:solidFill>
@@ -12992,65 +12943,89 @@
                 <a:latin typeface="Aptos Display"/>
                 <a:ea typeface="Aptos Display"/>
               </a:rPr>
-              <a:t>Limita</a:t>
-            </a:r>
-            <a:r>
-              <a:rPr lang="en-US" sz="2600" b="1" u="none" strike="noStrike">
-                <a:solidFill>
-                  <a:srgbClr val="16324f"/>
+              <a:t>dN/dt = r(T) · N · (1 − N/K)</a:t>
+            </a:r>
+            <a:endParaRPr lang="en-US" sz="2400" b="0" u="none" strike="noStrike">
+              <a:solidFill>
+                <a:srgbClr val="000000"/>
+              </a:solidFill>
+              <a:effectLst/>
+              <a:uFillTx/>
+              <a:latin typeface="Arial"/>
+            </a:endParaRPr>
+          </a:p>
+        </p:txBody>
+      </p:sp>
+      <p:sp>
+        <p:nvSpPr>
+          <p:cNvPr id="38" name="Text 6"/>
+          <p:cNvSpPr/>
+          <p:nvPr/>
+        </p:nvSpPr>
+        <p:spPr>
+          <a:xfrm>
+            <a:off x="868680" y="1993320"/>
+            <a:ext cx="5211000" cy="501840"/>
+          </a:xfrm>
+          <a:prstGeom prst="rect">
+            <a:avLst/>
+          </a:prstGeom>
+          <a:noFill/>
+          <a:ln w="0">
+            <a:noFill/>
+          </a:ln>
+        </p:spPr>
+        <p:style>
+          <a:lnRef idx="0"/>
+          <a:fillRef idx="0"/>
+          <a:effectRef idx="0"/>
+          <a:fontRef idx="minor"/>
+        </p:style>
+        <p:txBody>
+          <a:bodyPr lIns="360" rIns="360" tIns="360" bIns="360" anchor="ctr">
+            <a:normAutofit/>
+          </a:bodyPr>
+          <a:p>
+            <a:pPr defTabSz="914400">
+              <a:lnSpc>
+                <a:spcPct val="100000"/>
+              </a:lnSpc>
+              <a:tabLst>
+                <a:tab algn="l" pos="0"/>
+              </a:tabLst>
+            </a:pPr>
+            <a:r>
+              <a:rPr lang="en-US" sz="1400" b="0" u="none" strike="noStrike">
+                <a:solidFill>
+                  <a:srgbClr val="1f2937"/>
                 </a:solidFill>
                 <a:effectLst/>
                 <a:uFillTx/>
                 <a:latin typeface="Aptos"/>
-                <a:ea typeface="Aptos Display"/>
-              </a:rPr>
-              <a:t>ç</a:t>
-            </a:r>
-            <a:r>
-              <a:rPr lang="en-US" sz="2600" b="1" u="none" strike="noStrike">
-                <a:solidFill>
-                  <a:srgbClr val="1f2937"/>
-                </a:solidFill>
-                <a:effectLst/>
-                <a:uFillTx/>
-                <a:latin typeface="Aptos"/>
-                <a:ea typeface="Aptos Display"/>
-              </a:rPr>
-              <a:t>ã</a:t>
-            </a:r>
-            <a:r>
-              <a:rPr lang="en-US" sz="2600" b="1" u="none" strike="noStrike">
-                <a:solidFill>
-                  <a:srgbClr val="16324f"/>
-                </a:solidFill>
-                <a:effectLst/>
-                <a:uFillTx/>
-                <a:latin typeface="Aptos Display"/>
-                <a:ea typeface="Aptos Display"/>
-              </a:rPr>
-              <a:t>o 1 – crescimento infinito</a:t>
-            </a:r>
-            <a:endParaRPr lang="en-US" sz="2600" b="0" u="none" strike="noStrike">
-              <a:solidFill>
-                <a:srgbClr val="000000"/>
-              </a:solidFill>
-              <a:effectLst/>
-              <a:uFillTx/>
-              <a:latin typeface="Arial"/>
-            </a:endParaRPr>
-          </a:p>
-        </p:txBody>
-      </p:sp>
-      <p:sp>
-        <p:nvSpPr>
-          <p:cNvPr id="38" name="Shape 19"/>
+              </a:rPr>
+              <a:t>O termo (1 − N/K) reduz o crescimento quando a população se aproxima da capacidade de suporte do ambiente.</a:t>
+            </a:r>
+            <a:endParaRPr lang="en-US" sz="1400" b="0" u="none" strike="noStrike">
+              <a:solidFill>
+                <a:srgbClr val="000000"/>
+              </a:solidFill>
+              <a:effectLst/>
+              <a:uFillTx/>
+              <a:latin typeface="Arial"/>
+            </a:endParaRPr>
+          </a:p>
+        </p:txBody>
+      </p:sp>
+      <p:sp>
+        <p:nvSpPr>
+          <p:cNvPr id="39" name="Shape 7"/>
           <p:cNvSpPr/>
           <p:nvPr/>
         </p:nvSpPr>
         <p:spPr>
           <a:xfrm>
             <a:off x="868680" y="2880360"/>
-            <a:ext cx="2331000" cy="867960"/>
+            <a:ext cx="2330640" cy="867600"/>
           </a:xfrm>
           <a:prstGeom prst="roundRect">
             <a:avLst>
@@ -13078,6 +13053,11 @@
             <a:noAutofit/>
           </a:bodyPr>
           <a:p>
+            <a:pPr>
+              <a:lnSpc>
+                <a:spcPct val="100000"/>
+              </a:lnSpc>
+            </a:pPr>
             <a:endParaRPr lang="en-US" sz="1800" b="0" u="none" strike="noStrike">
               <a:solidFill>
                 <a:srgbClr val="000000"/>
@@ -13091,14 +13071,14 @@
       </p:sp>
       <p:sp>
         <p:nvSpPr>
-          <p:cNvPr id="39" name="Text 39"/>
+          <p:cNvPr id="40" name="Text 8"/>
           <p:cNvSpPr/>
           <p:nvPr/>
         </p:nvSpPr>
         <p:spPr>
           <a:xfrm>
             <a:off x="1051560" y="3044880"/>
-            <a:ext cx="1965240" cy="227880"/>
+            <a:ext cx="1964880" cy="227520"/>
           </a:xfrm>
           <a:prstGeom prst="rect">
             <a:avLst/>
@@ -13151,14 +13131,14 @@
       </p:sp>
       <p:sp>
         <p:nvSpPr>
-          <p:cNvPr id="40" name="Text 40"/>
+          <p:cNvPr id="41" name="Text 9"/>
           <p:cNvSpPr/>
           <p:nvPr/>
         </p:nvSpPr>
         <p:spPr>
           <a:xfrm>
             <a:off x="1051560" y="3383280"/>
-            <a:ext cx="1965240" cy="227880"/>
+            <a:ext cx="1964880" cy="227520"/>
           </a:xfrm>
           <a:prstGeom prst="rect">
             <a:avLst/>
@@ -13211,14 +13191,14 @@
       </p:sp>
       <p:sp>
         <p:nvSpPr>
-          <p:cNvPr id="41" name="Shape 22"/>
+          <p:cNvPr id="42" name="Shape 10"/>
           <p:cNvSpPr/>
           <p:nvPr/>
         </p:nvSpPr>
         <p:spPr>
           <a:xfrm>
             <a:off x="3429000" y="2880360"/>
-            <a:ext cx="2422440" cy="867960"/>
+            <a:ext cx="2422080" cy="867600"/>
           </a:xfrm>
           <a:prstGeom prst="roundRect">
             <a:avLst>
@@ -13246,6 +13226,11 @@
             <a:noAutofit/>
           </a:bodyPr>
           <a:p>
+            <a:pPr>
+              <a:lnSpc>
+                <a:spcPct val="100000"/>
+              </a:lnSpc>
+            </a:pPr>
             <a:endParaRPr lang="en-US" sz="1800" b="0" u="none" strike="noStrike">
               <a:solidFill>
                 <a:srgbClr val="000000"/>
@@ -13259,14 +13244,14 @@
       </p:sp>
       <p:sp>
         <p:nvSpPr>
-          <p:cNvPr id="42" name="Text 41"/>
+          <p:cNvPr id="43" name="Text 11"/>
           <p:cNvSpPr/>
           <p:nvPr/>
         </p:nvSpPr>
         <p:spPr>
           <a:xfrm>
             <a:off x="3611880" y="3044880"/>
-            <a:ext cx="2056680" cy="227880"/>
+            <a:ext cx="2056320" cy="227520"/>
           </a:xfrm>
           <a:prstGeom prst="rect">
             <a:avLst/>
@@ -13319,14 +13304,14 @@
       </p:sp>
       <p:sp>
         <p:nvSpPr>
-          <p:cNvPr id="43" name="Text 42"/>
+          <p:cNvPr id="44" name="Text 12"/>
           <p:cNvSpPr/>
           <p:nvPr/>
         </p:nvSpPr>
         <p:spPr>
           <a:xfrm>
             <a:off x="3611880" y="3383280"/>
-            <a:ext cx="2056680" cy="227880"/>
+            <a:ext cx="2056320" cy="227520"/>
           </a:xfrm>
           <a:prstGeom prst="rect">
             <a:avLst/>
@@ -13379,14 +13364,14 @@
       </p:sp>
       <p:sp>
         <p:nvSpPr>
-          <p:cNvPr id="44" name="Shape 24"/>
+          <p:cNvPr id="45" name="Shape 13"/>
           <p:cNvSpPr/>
           <p:nvPr/>
         </p:nvSpPr>
         <p:spPr>
           <a:xfrm>
             <a:off x="868680" y="4023360"/>
-            <a:ext cx="2331000" cy="867960"/>
+            <a:ext cx="2330640" cy="867600"/>
           </a:xfrm>
           <a:prstGeom prst="roundRect">
             <a:avLst>
@@ -13414,6 +13399,11 @@
             <a:noAutofit/>
           </a:bodyPr>
           <a:p>
+            <a:pPr>
+              <a:lnSpc>
+                <a:spcPct val="100000"/>
+              </a:lnSpc>
+            </a:pPr>
             <a:endParaRPr lang="en-US" sz="1800" b="0" u="none" strike="noStrike">
               <a:solidFill>
                 <a:srgbClr val="000000"/>
@@ -13427,14 +13417,14 @@
       </p:sp>
       <p:sp>
         <p:nvSpPr>
-          <p:cNvPr id="45" name="Text 43"/>
+          <p:cNvPr id="46" name="Text 14"/>
           <p:cNvSpPr/>
           <p:nvPr/>
         </p:nvSpPr>
         <p:spPr>
           <a:xfrm>
             <a:off x="1051560" y="4187880"/>
-            <a:ext cx="1965240" cy="227880"/>
+            <a:ext cx="1964880" cy="227520"/>
           </a:xfrm>
           <a:prstGeom prst="rect">
             <a:avLst/>
@@ -13487,14 +13477,14 @@
       </p:sp>
       <p:sp>
         <p:nvSpPr>
-          <p:cNvPr id="46" name="Text 44"/>
+          <p:cNvPr id="47" name="Text 15"/>
           <p:cNvSpPr/>
           <p:nvPr/>
         </p:nvSpPr>
         <p:spPr>
           <a:xfrm>
             <a:off x="1051560" y="4526280"/>
-            <a:ext cx="1965240" cy="227880"/>
+            <a:ext cx="1964880" cy="227520"/>
           </a:xfrm>
           <a:prstGeom prst="rect">
             <a:avLst/>
@@ -13547,14 +13537,14 @@
       </p:sp>
       <p:sp>
         <p:nvSpPr>
-          <p:cNvPr id="47" name="Shape 26"/>
+          <p:cNvPr id="48" name="Shape 16"/>
           <p:cNvSpPr/>
           <p:nvPr/>
         </p:nvSpPr>
         <p:spPr>
           <a:xfrm>
             <a:off x="3429000" y="4023360"/>
-            <a:ext cx="2422440" cy="1325160"/>
+            <a:ext cx="2422080" cy="1324800"/>
           </a:xfrm>
           <a:prstGeom prst="roundRect">
             <a:avLst>
@@ -13582,6 +13572,11 @@
             <a:noAutofit/>
           </a:bodyPr>
           <a:p>
+            <a:pPr>
+              <a:lnSpc>
+                <a:spcPct val="100000"/>
+              </a:lnSpc>
+            </a:pPr>
             <a:endParaRPr lang="en-US" sz="1800" b="0" u="none" strike="noStrike">
               <a:solidFill>
                 <a:srgbClr val="000000"/>
@@ -13595,14 +13590,14 @@
       </p:sp>
       <p:sp>
         <p:nvSpPr>
-          <p:cNvPr id="48" name="Text 45"/>
+          <p:cNvPr id="49" name="Text 17"/>
           <p:cNvSpPr/>
           <p:nvPr/>
         </p:nvSpPr>
         <p:spPr>
           <a:xfrm>
             <a:off x="3611880" y="4187880"/>
-            <a:ext cx="2056680" cy="227880"/>
+            <a:ext cx="2056320" cy="227520"/>
           </a:xfrm>
           <a:prstGeom prst="rect">
             <a:avLst/>
@@ -13655,14 +13650,14 @@
       </p:sp>
       <p:sp>
         <p:nvSpPr>
-          <p:cNvPr id="49" name="Text 46"/>
+          <p:cNvPr id="50" name="Text 18"/>
           <p:cNvSpPr/>
           <p:nvPr/>
         </p:nvSpPr>
         <p:spPr>
           <a:xfrm>
             <a:off x="3611880" y="4526280"/>
-            <a:ext cx="2056680" cy="685080"/>
+            <a:ext cx="2056320" cy="684720"/>
           </a:xfrm>
           <a:prstGeom prst="rect">
             <a:avLst/>
@@ -13713,16 +13708,46 @@
           </a:p>
         </p:txBody>
       </p:sp>
-      <p:sp>
-        <p:nvSpPr>
-          <p:cNvPr id="50" name="Text 47"/>
-          <p:cNvSpPr/>
-          <p:nvPr/>
-        </p:nvSpPr>
-        <p:spPr>
-          <a:xfrm>
-            <a:off x="412200" y="1828800"/>
-            <a:ext cx="4617000" cy="822240"/>
+      <p:pic>
+        <p:nvPicPr>
+          <p:cNvPr id="51" name="Image 0" descr="/mnt/data/logistico_vs_exp.svg"/>
+          <p:cNvPicPr/>
+          <p:nvPr/>
+        </p:nvPicPr>
+        <p:blipFill>
+          <a:blip r:embed="rId1">
+            <a:extLst>
+              <a:ext uri="{96DAC541-7B7A-43D3-8B79-37D633B846F1}">
+                <asvg:svgBlip xmlns:asvg="http://schemas.microsoft.com/office/drawing/2016/SVG/main" r:embed="rId2"/>
+              </a:ext>
+            </a:extLst>
+          </a:blip>
+          <a:stretch/>
+        </p:blipFill>
+        <p:spPr>
+          <a:xfrm>
+            <a:off x="6492240" y="1143000"/>
+            <a:ext cx="4982400" cy="2486160"/>
+          </a:xfrm>
+          <a:prstGeom prst="rect">
+            <a:avLst/>
+          </a:prstGeom>
+          <a:noFill/>
+          <a:ln w="0">
+            <a:noFill/>
+          </a:ln>
+        </p:spPr>
+      </p:pic>
+      <p:sp>
+        <p:nvSpPr>
+          <p:cNvPr id="52" name="Text 19"/>
+          <p:cNvSpPr/>
+          <p:nvPr/>
+        </p:nvSpPr>
+        <p:spPr>
+          <a:xfrm>
+            <a:off x="6629400" y="3977640"/>
+            <a:ext cx="4616640" cy="821880"/>
           </a:xfrm>
           <a:prstGeom prst="rect">
             <a:avLst/>
@@ -13760,7 +13785,7 @@
                 <a:uFillTx/>
                 <a:latin typeface="Aptos"/>
               </a:rPr>
-              <a:t>Na primeira etapa, o modelo </a:t>
+              <a:t>Resultado esperado: a curva cresce rápido no início, mas desacelera até estabilizar em K, evitando previsões irreais para tempos longos.</a:t>
             </a:r>
             <a:endParaRPr lang="en-US" sz="1400" b="0" u="none" strike="noStrike">
               <a:solidFill>
@@ -13775,14 +13800,14 @@
       </p:sp>
       <p:sp>
         <p:nvSpPr>
-          <p:cNvPr id="51" name="Text 48"/>
+          <p:cNvPr id="53" name="Text 20"/>
           <p:cNvSpPr/>
           <p:nvPr/>
         </p:nvSpPr>
         <p:spPr>
           <a:xfrm>
             <a:off x="11475720" y="6473880"/>
-            <a:ext cx="255240" cy="136440"/>
+            <a:ext cx="254880" cy="136080"/>
           </a:xfrm>
           <a:prstGeom prst="rect">
             <a:avLst/>
@@ -13872,14 +13897,14 @@
       </p:grpSpPr>
       <p:sp>
         <p:nvSpPr>
-          <p:cNvPr id="52" name="Shape 0"/>
+          <p:cNvPr id="54" name="Shape 33"/>
           <p:cNvSpPr/>
           <p:nvPr/>
         </p:nvSpPr>
         <p:spPr>
           <a:xfrm>
             <a:off x="0" y="0"/>
-            <a:ext cx="12191040" cy="657720"/>
+            <a:ext cx="12190680" cy="657360"/>
           </a:xfrm>
           <a:prstGeom prst="rect">
             <a:avLst/>
@@ -13923,14 +13948,14 @@
       </p:sp>
       <p:sp>
         <p:nvSpPr>
-          <p:cNvPr id="53" name="Text 1"/>
+          <p:cNvPr id="55" name="Text 54"/>
           <p:cNvSpPr/>
           <p:nvPr/>
         </p:nvSpPr>
         <p:spPr>
           <a:xfrm>
             <a:off x="502920" y="146160"/>
-            <a:ext cx="8868960" cy="346680"/>
+            <a:ext cx="8868600" cy="346320"/>
           </a:xfrm>
           <a:prstGeom prst="rect">
             <a:avLst/>
@@ -13969,7 +13994,7 @@
                 <a:latin typeface="Aptos Display"/>
                 <a:ea typeface="Aptos Display"/>
               </a:rPr>
-              <a:t>Novo Modelo 1: crescimento logístico</a:t>
+              <a:t>Mantendo Ratkowsky: temperatura entra em r(T)</a:t>
             </a:r>
             <a:endParaRPr lang="en-US" sz="2000" b="0" u="none" strike="noStrike">
               <a:solidFill>
@@ -13984,14 +14009,14 @@
       </p:sp>
       <p:sp>
         <p:nvSpPr>
-          <p:cNvPr id="54" name="Text 2"/>
+          <p:cNvPr id="56" name="Text 55"/>
           <p:cNvSpPr/>
           <p:nvPr/>
         </p:nvSpPr>
         <p:spPr>
           <a:xfrm>
             <a:off x="9555480" y="173880"/>
-            <a:ext cx="2056680" cy="255240"/>
+            <a:ext cx="2056320" cy="254880"/>
           </a:xfrm>
           <a:prstGeom prst="rect">
             <a:avLst/>
@@ -14029,7 +14054,7 @@
                 <a:uFillTx/>
                 <a:latin typeface="Aptos"/>
               </a:rPr>
-              <a:t>substitui o exponencial</a:t>
+              <a:t>ponte entre clima e crescimento</a:t>
             </a:r>
             <a:endParaRPr lang="en-US" sz="900" b="0" u="none" strike="noStrike">
               <a:solidFill>
@@ -14044,7 +14069,7 @@
       </p:sp>
       <p:sp>
         <p:nvSpPr>
-          <p:cNvPr id="55" name="Shape 3"/>
+          <p:cNvPr id="57" name="Shape 35"/>
           <p:cNvSpPr/>
           <p:nvPr/>
         </p:nvSpPr>
@@ -14087,14 +14112,14 @@
       </p:sp>
       <p:sp>
         <p:nvSpPr>
-          <p:cNvPr id="56" name="Text 4"/>
+          <p:cNvPr id="58" name="Text 56"/>
           <p:cNvSpPr/>
           <p:nvPr/>
         </p:nvSpPr>
         <p:spPr>
           <a:xfrm>
             <a:off x="502920" y="6473880"/>
-            <a:ext cx="3291120" cy="163800"/>
+            <a:ext cx="3290760" cy="163440"/>
           </a:xfrm>
           <a:prstGeom prst="rect">
             <a:avLst/>
@@ -14147,14 +14172,14 @@
       </p:sp>
       <p:sp>
         <p:nvSpPr>
-          <p:cNvPr id="57" name="Text 5"/>
-          <p:cNvSpPr/>
-          <p:nvPr/>
-        </p:nvSpPr>
-        <p:spPr>
-          <a:xfrm>
-            <a:off x="685800" y="1143000"/>
-            <a:ext cx="5577120" cy="685080"/>
+          <p:cNvPr id="59" name="Text 57"/>
+          <p:cNvSpPr/>
+          <p:nvPr/>
+        </p:nvSpPr>
+        <p:spPr>
+          <a:xfrm>
+            <a:off x="731520" y="1051560"/>
+            <a:ext cx="5348160" cy="501840"/>
           </a:xfrm>
           <a:prstGeom prst="rect">
             <a:avLst/>
@@ -14184,7 +14209,7 @@
               </a:tabLst>
             </a:pPr>
             <a:r>
-              <a:rPr lang="en-US" sz="2400" b="1" u="none" strike="noStrike">
+              <a:rPr lang="en-US" sz="2200" b="1" u="none" strike="noStrike">
                 <a:solidFill>
                   <a:srgbClr val="16324f"/>
                 </a:solidFill>
@@ -14193,29 +14218,90 @@
                 <a:latin typeface="Aptos Display"/>
                 <a:ea typeface="Aptos Display"/>
               </a:rPr>
-              <a:t>dN/dt = r(T) · N · (1 − N/K)</a:t>
-            </a:r>
-            <a:endParaRPr lang="en-US" sz="2400" b="0" u="none" strike="noStrike">
-              <a:solidFill>
-                <a:srgbClr val="000000"/>
-              </a:solidFill>
-              <a:effectLst/>
-              <a:uFillTx/>
-              <a:latin typeface="Arial"/>
-            </a:endParaRPr>
-          </a:p>
-        </p:txBody>
-      </p:sp>
-      <p:sp>
-        <p:nvSpPr>
-          <p:cNvPr id="58" name="Text 6"/>
-          <p:cNvSpPr/>
-          <p:nvPr/>
-        </p:nvSpPr>
-        <p:spPr>
-          <a:xfrm>
-            <a:off x="868680" y="1993320"/>
-            <a:ext cx="5211360" cy="502200"/>
+              <a:t>√r(T) = a · (T − T_min)</a:t>
+            </a:r>
+            <a:endParaRPr lang="en-US" sz="2200" b="0" u="none" strike="noStrike">
+              <a:solidFill>
+                <a:srgbClr val="000000"/>
+              </a:solidFill>
+              <a:effectLst/>
+              <a:uFillTx/>
+              <a:latin typeface="Arial"/>
+            </a:endParaRPr>
+          </a:p>
+        </p:txBody>
+      </p:sp>
+      <p:sp>
+        <p:nvSpPr>
+          <p:cNvPr id="60" name="Text 58"/>
+          <p:cNvSpPr/>
+          <p:nvPr/>
+        </p:nvSpPr>
+        <p:spPr>
+          <a:xfrm>
+            <a:off x="731520" y="1691640"/>
+            <a:ext cx="5348160" cy="501840"/>
+          </a:xfrm>
+          <a:prstGeom prst="rect">
+            <a:avLst/>
+          </a:prstGeom>
+          <a:noFill/>
+          <a:ln w="0">
+            <a:noFill/>
+          </a:ln>
+        </p:spPr>
+        <p:style>
+          <a:lnRef idx="0"/>
+          <a:fillRef idx="0"/>
+          <a:effectRef idx="0"/>
+          <a:fontRef idx="minor"/>
+        </p:style>
+        <p:txBody>
+          <a:bodyPr lIns="0" rIns="0" tIns="0" bIns="0" anchor="ctr">
+            <a:normAutofit/>
+          </a:bodyPr>
+          <a:p>
+            <a:pPr algn="ctr" defTabSz="914400">
+              <a:lnSpc>
+                <a:spcPct val="100000"/>
+              </a:lnSpc>
+              <a:tabLst>
+                <a:tab algn="l" pos="0"/>
+              </a:tabLst>
+            </a:pPr>
+            <a:r>
+              <a:rPr lang="en-US" sz="2200" b="1" u="none" strike="noStrike">
+                <a:solidFill>
+                  <a:srgbClr val="0e6ba8"/>
+                </a:solidFill>
+                <a:effectLst/>
+                <a:uFillTx/>
+                <a:latin typeface="Aptos Display"/>
+                <a:ea typeface="Aptos Display"/>
+              </a:rPr>
+              <a:t>r(T) = [a · (T − T_min)]²</a:t>
+            </a:r>
+            <a:endParaRPr lang="en-US" sz="2200" b="0" u="none" strike="noStrike">
+              <a:solidFill>
+                <a:srgbClr val="000000"/>
+              </a:solidFill>
+              <a:effectLst/>
+              <a:uFillTx/>
+              <a:latin typeface="Arial"/>
+            </a:endParaRPr>
+          </a:p>
+        </p:txBody>
+      </p:sp>
+      <p:sp>
+        <p:nvSpPr>
+          <p:cNvPr id="61" name="Text 59"/>
+          <p:cNvSpPr/>
+          <p:nvPr/>
+        </p:nvSpPr>
+        <p:spPr>
+          <a:xfrm>
+            <a:off x="868680" y="2487240"/>
+            <a:ext cx="5073840" cy="684720"/>
           </a:xfrm>
           <a:prstGeom prst="rect">
             <a:avLst/>
@@ -14253,7 +14339,7 @@
                 <a:uFillTx/>
                 <a:latin typeface="Aptos"/>
               </a:rPr>
-              <a:t>O termo (1 − N/K) reduz o crescimento quando a população se aproxima da capacidade de suporte do ambiente.</a:t>
+              <a:t>A diferença agora é que r(T) não alimenta mais um crescimento ilimitado. Ele acelera a chegada à saturação K.</a:t>
             </a:r>
             <a:endParaRPr lang="en-US" sz="1400" b="0" u="none" strike="noStrike">
               <a:solidFill>
@@ -14268,18 +14354,18 @@
       </p:sp>
       <p:sp>
         <p:nvSpPr>
-          <p:cNvPr id="59" name="Shape 7"/>
-          <p:cNvSpPr/>
-          <p:nvPr/>
-        </p:nvSpPr>
-        <p:spPr>
-          <a:xfrm>
-            <a:off x="868680" y="2880360"/>
-            <a:ext cx="2331000" cy="867960"/>
+          <p:cNvPr id="62" name="Shape 36"/>
+          <p:cNvSpPr/>
+          <p:nvPr/>
+        </p:nvSpPr>
+        <p:spPr>
+          <a:xfrm>
+            <a:off x="868680" y="3657600"/>
+            <a:ext cx="5073840" cy="1050480"/>
           </a:xfrm>
           <a:prstGeom prst="roundRect">
             <a:avLst>
-              <a:gd name="adj" fmla="val 4211"/>
+              <a:gd name="adj" fmla="val 3478"/>
             </a:avLst>
           </a:prstGeom>
           <a:solidFill>
@@ -14321,14 +14407,14 @@
       </p:sp>
       <p:sp>
         <p:nvSpPr>
-          <p:cNvPr id="60" name="Text 8"/>
-          <p:cNvSpPr/>
-          <p:nvPr/>
-        </p:nvSpPr>
-        <p:spPr>
-          <a:xfrm>
-            <a:off x="1051560" y="3044880"/>
-            <a:ext cx="1965240" cy="227880"/>
+          <p:cNvPr id="63" name="Text 62"/>
+          <p:cNvSpPr/>
+          <p:nvPr/>
+        </p:nvSpPr>
+        <p:spPr>
+          <a:xfrm>
+            <a:off x="1051560" y="3822120"/>
+            <a:ext cx="4708080" cy="227520"/>
           </a:xfrm>
           <a:prstGeom prst="rect">
             <a:avLst/>
@@ -14366,7 +14452,7 @@
                 <a:uFillTx/>
                 <a:latin typeface="Aptos"/>
               </a:rPr>
-              <a:t>N(t)</a:t>
+              <a:t>Leitura ambiental</a:t>
             </a:r>
             <a:endParaRPr lang="en-US" sz="1300" b="0" u="none" strike="noStrike">
               <a:solidFill>
@@ -14381,14 +14467,14 @@
       </p:sp>
       <p:sp>
         <p:nvSpPr>
-          <p:cNvPr id="61" name="Text 9"/>
-          <p:cNvSpPr/>
-          <p:nvPr/>
-        </p:nvSpPr>
-        <p:spPr>
-          <a:xfrm>
-            <a:off x="1051560" y="3383280"/>
-            <a:ext cx="1965240" cy="227880"/>
+          <p:cNvPr id="64" name="Text 63"/>
+          <p:cNvSpPr/>
+          <p:nvPr/>
+        </p:nvSpPr>
+        <p:spPr>
+          <a:xfrm>
+            <a:off x="1051560" y="4160520"/>
+            <a:ext cx="4708080" cy="410400"/>
           </a:xfrm>
           <a:prstGeom prst="rect">
             <a:avLst/>
@@ -14406,7 +14492,7 @@
         </p:style>
         <p:txBody>
           <a:bodyPr lIns="0" rIns="0" tIns="0" bIns="0" anchor="ctr">
-            <a:normAutofit fontScale="85000" lnSpcReduction="9999"/>
+            <a:normAutofit/>
           </a:bodyPr>
           <a:p>
             <a:pPr defTabSz="914400">
@@ -14426,7 +14512,7 @@
                 <a:uFillTx/>
                 <a:latin typeface="Aptos"/>
               </a:rPr>
-              <a:t>concentração bacteriana no tempo</a:t>
+              <a:t>temperaturas maiores aumentam a velocidade de crescimento, mas não eliminam limites ecológicos.</a:t>
             </a:r>
             <a:endParaRPr lang="en-US" sz="1100" b="0" u="none" strike="noStrike">
               <a:solidFill>
@@ -14441,18 +14527,18 @@
       </p:sp>
       <p:sp>
         <p:nvSpPr>
-          <p:cNvPr id="62" name="Shape 10"/>
-          <p:cNvSpPr/>
-          <p:nvPr/>
-        </p:nvSpPr>
-        <p:spPr>
-          <a:xfrm>
-            <a:off x="3429000" y="2880360"/>
-            <a:ext cx="2422440" cy="867960"/>
+          <p:cNvPr id="65" name="Shape 37"/>
+          <p:cNvSpPr/>
+          <p:nvPr/>
+        </p:nvSpPr>
+        <p:spPr>
+          <a:xfrm>
+            <a:off x="6400800" y="1097280"/>
+            <a:ext cx="4708080" cy="1233360"/>
           </a:xfrm>
           <a:prstGeom prst="roundRect">
             <a:avLst>
-              <a:gd name="adj" fmla="val 4211"/>
+              <a:gd name="adj" fmla="val 2963"/>
             </a:avLst>
           </a:prstGeom>
           <a:solidFill>
@@ -14494,14 +14580,14 @@
       </p:sp>
       <p:sp>
         <p:nvSpPr>
-          <p:cNvPr id="63" name="Text 11"/>
-          <p:cNvSpPr/>
-          <p:nvPr/>
-        </p:nvSpPr>
-        <p:spPr>
-          <a:xfrm>
-            <a:off x="3611880" y="3044880"/>
-            <a:ext cx="2056680" cy="227880"/>
+          <p:cNvPr id="66" name="Text 64"/>
+          <p:cNvSpPr/>
+          <p:nvPr/>
+        </p:nvSpPr>
+        <p:spPr>
+          <a:xfrm>
+            <a:off x="6583680" y="1261800"/>
+            <a:ext cx="4342320" cy="227520"/>
           </a:xfrm>
           <a:prstGeom prst="rect">
             <a:avLst/>
@@ -14539,7 +14625,7 @@
                 <a:uFillTx/>
                 <a:latin typeface="Aptos"/>
               </a:rPr>
-              <a:t>r(T)</a:t>
+              <a:t>Equação integrada</a:t>
             </a:r>
             <a:endParaRPr lang="en-US" sz="1300" b="0" u="none" strike="noStrike">
               <a:solidFill>
@@ -14554,14 +14640,14 @@
       </p:sp>
       <p:sp>
         <p:nvSpPr>
-          <p:cNvPr id="64" name="Text 12"/>
-          <p:cNvSpPr/>
-          <p:nvPr/>
-        </p:nvSpPr>
-        <p:spPr>
-          <a:xfrm>
-            <a:off x="3611880" y="3383280"/>
-            <a:ext cx="2056680" cy="227880"/>
+          <p:cNvPr id="67" name="Text 65"/>
+          <p:cNvSpPr/>
+          <p:nvPr/>
+        </p:nvSpPr>
+        <p:spPr>
+          <a:xfrm>
+            <a:off x="6583680" y="1600200"/>
+            <a:ext cx="4342320" cy="593280"/>
           </a:xfrm>
           <a:prstGeom prst="rect">
             <a:avLst/>
@@ -14579,7 +14665,7 @@
         </p:style>
         <p:txBody>
           <a:bodyPr lIns="0" rIns="0" tIns="0" bIns="0" anchor="ctr">
-            <a:normAutofit fontScale="85000" lnSpcReduction="19999"/>
+            <a:normAutofit/>
           </a:bodyPr>
           <a:p>
             <a:pPr defTabSz="914400">
@@ -14599,7 +14685,7 @@
                 <a:uFillTx/>
                 <a:latin typeface="Aptos"/>
               </a:rPr>
-              <a:t>taxa de crescimento dependente da temperatura</a:t>
+              <a:t>N(t,T) = K / [1 + ((K−N₀)/N₀) · e^(−r(T)t)]</a:t>
             </a:r>
             <a:endParaRPr lang="en-US" sz="1100" b="0" u="none" strike="noStrike">
               <a:solidFill>
@@ -14614,18 +14700,18 @@
       </p:sp>
       <p:sp>
         <p:nvSpPr>
-          <p:cNvPr id="65" name="Shape 13"/>
-          <p:cNvSpPr/>
-          <p:nvPr/>
-        </p:nvSpPr>
-        <p:spPr>
-          <a:xfrm>
-            <a:off x="868680" y="4023360"/>
-            <a:ext cx="2331000" cy="867960"/>
+          <p:cNvPr id="68" name="Shape 38"/>
+          <p:cNvSpPr/>
+          <p:nvPr/>
+        </p:nvSpPr>
+        <p:spPr>
+          <a:xfrm>
+            <a:off x="6400800" y="2743200"/>
+            <a:ext cx="4708080" cy="1324800"/>
           </a:xfrm>
           <a:prstGeom prst="roundRect">
             <a:avLst>
-              <a:gd name="adj" fmla="val 4211"/>
+              <a:gd name="adj" fmla="val 2759"/>
             </a:avLst>
           </a:prstGeom>
           <a:solidFill>
@@ -14667,14 +14753,14 @@
       </p:sp>
       <p:sp>
         <p:nvSpPr>
-          <p:cNvPr id="66" name="Text 14"/>
-          <p:cNvSpPr/>
-          <p:nvPr/>
-        </p:nvSpPr>
-        <p:spPr>
-          <a:xfrm>
-            <a:off x="1051560" y="4187880"/>
-            <a:ext cx="1965240" cy="227880"/>
+          <p:cNvPr id="69" name="Text 66"/>
+          <p:cNvSpPr/>
+          <p:nvPr/>
+        </p:nvSpPr>
+        <p:spPr>
+          <a:xfrm>
+            <a:off x="6583680" y="2907720"/>
+            <a:ext cx="4342320" cy="227520"/>
           </a:xfrm>
           <a:prstGeom prst="rect">
             <a:avLst/>
@@ -14712,7 +14798,7 @@
                 <a:uFillTx/>
                 <a:latin typeface="Aptos"/>
               </a:rPr>
-              <a:t>K</a:t>
+              <a:t>Comparação com a Parte 1</a:t>
             </a:r>
             <a:endParaRPr lang="en-US" sz="1300" b="0" u="none" strike="noStrike">
               <a:solidFill>
@@ -14727,14 +14813,14 @@
       </p:sp>
       <p:sp>
         <p:nvSpPr>
-          <p:cNvPr id="67" name="Text 15"/>
-          <p:cNvSpPr/>
-          <p:nvPr/>
-        </p:nvSpPr>
-        <p:spPr>
-          <a:xfrm>
-            <a:off x="1051560" y="4526280"/>
-            <a:ext cx="1965240" cy="227880"/>
+          <p:cNvPr id="70" name="Text 67"/>
+          <p:cNvSpPr/>
+          <p:nvPr/>
+        </p:nvSpPr>
+        <p:spPr>
+          <a:xfrm>
+            <a:off x="6583680" y="3246120"/>
+            <a:ext cx="4342320" cy="684720"/>
           </a:xfrm>
           <a:prstGeom prst="rect">
             <a:avLst/>
@@ -14752,7 +14838,7 @@
         </p:style>
         <p:txBody>
           <a:bodyPr lIns="0" rIns="0" tIns="0" bIns="0" anchor="ctr">
-            <a:normAutofit fontScale="85000" lnSpcReduction="19999"/>
+            <a:normAutofit/>
           </a:bodyPr>
           <a:p>
             <a:pPr defTabSz="914400">
@@ -14772,7 +14858,7 @@
                 <a:uFillTx/>
                 <a:latin typeface="Aptos"/>
               </a:rPr>
-              <a:t>capacidade de suporte do ambiente costeiro</a:t>
+              <a:t>Antes: λ crescia exponencialmente sem limite. Agora: λ cresce até uma concentração máxima plausível definida por K.</a:t>
             </a:r>
             <a:endParaRPr lang="en-US" sz="1100" b="0" u="none" strike="noStrike">
               <a:solidFill>
@@ -14787,18 +14873,18 @@
       </p:sp>
       <p:sp>
         <p:nvSpPr>
-          <p:cNvPr id="68" name="Shape 16"/>
-          <p:cNvSpPr/>
-          <p:nvPr/>
-        </p:nvSpPr>
-        <p:spPr>
-          <a:xfrm>
-            <a:off x="3429000" y="4023360"/>
-            <a:ext cx="2422440" cy="1325160"/>
+          <p:cNvPr id="71" name="Shape 39"/>
+          <p:cNvSpPr/>
+          <p:nvPr/>
+        </p:nvSpPr>
+        <p:spPr>
+          <a:xfrm>
+            <a:off x="6400800" y="4526280"/>
+            <a:ext cx="4708080" cy="1096200"/>
           </a:xfrm>
           <a:prstGeom prst="roundRect">
             <a:avLst>
-              <a:gd name="adj" fmla="val 2759"/>
+              <a:gd name="adj" fmla="val 3333"/>
             </a:avLst>
           </a:prstGeom>
           <a:solidFill>
@@ -14840,14 +14926,14 @@
       </p:sp>
       <p:sp>
         <p:nvSpPr>
-          <p:cNvPr id="69" name="Text 17"/>
-          <p:cNvSpPr/>
-          <p:nvPr/>
-        </p:nvSpPr>
-        <p:spPr>
-          <a:xfrm>
-            <a:off x="3611880" y="4187880"/>
-            <a:ext cx="2056680" cy="227880"/>
+          <p:cNvPr id="72" name="Text 68"/>
+          <p:cNvSpPr/>
+          <p:nvPr/>
+        </p:nvSpPr>
+        <p:spPr>
+          <a:xfrm>
+            <a:off x="6583680" y="4690800"/>
+            <a:ext cx="4342320" cy="227520"/>
           </a:xfrm>
           <a:prstGeom prst="rect">
             <a:avLst/>
@@ -14885,7 +14971,7 @@
                 <a:uFillTx/>
                 <a:latin typeface="Aptos"/>
               </a:rPr>
-              <a:t>Interpretação</a:t>
+              <a:t>Mensagem para apresentar</a:t>
             </a:r>
             <a:endParaRPr lang="en-US" sz="1300" b="0" u="none" strike="noStrike">
               <a:solidFill>
@@ -14900,14 +14986,14 @@
       </p:sp>
       <p:sp>
         <p:nvSpPr>
-          <p:cNvPr id="70" name="Text 18"/>
-          <p:cNvSpPr/>
-          <p:nvPr/>
-        </p:nvSpPr>
-        <p:spPr>
-          <a:xfrm>
-            <a:off x="3611880" y="4526280"/>
-            <a:ext cx="2056680" cy="685080"/>
+          <p:cNvPr id="73" name="Text 69"/>
+          <p:cNvSpPr/>
+          <p:nvPr/>
+        </p:nvSpPr>
+        <p:spPr>
+          <a:xfrm>
+            <a:off x="6583680" y="5029200"/>
+            <a:ext cx="4342320" cy="456120"/>
           </a:xfrm>
           <a:prstGeom prst="rect">
             <a:avLst/>
@@ -14945,7 +15031,7 @@
                 <a:uFillTx/>
                 <a:latin typeface="Aptos"/>
               </a:rPr>
-              <a:t>K resume recursos disponíveis: nutrientes, espaço, oxigênio, luz, salinidade e competição microbiana.</a:t>
+              <a:t>O aquecimento continua importante, mas o novo modelo separa velocidade de crescimento e limite ambiental.</a:t>
             </a:r>
             <a:endParaRPr lang="en-US" sz="1100" b="0" u="none" strike="noStrike">
               <a:solidFill>
@@ -14958,146 +15044,101 @@
           </a:p>
         </p:txBody>
       </p:sp>
-      <p:pic>
-        <p:nvPicPr>
-          <p:cNvPr id="71" name="Image 0" descr="/mnt/data/logistico_vs_exp.svg"/>
-          <p:cNvPicPr/>
-          <p:nvPr/>
-        </p:nvPicPr>
-        <p:blipFill>
-          <a:blip r:embed="rId1">
-            <a:extLst>
-              <a:ext uri="{96DAC541-7B7A-43D3-8B79-37D633B846F1}">
-                <asvg:svgBlip xmlns:asvg="http://schemas.microsoft.com/office/drawing/2016/SVG/main" r:embed="rId2"/>
-              </a:ext>
-            </a:extLst>
-          </a:blip>
-          <a:stretch/>
-        </p:blipFill>
-        <p:spPr>
-          <a:xfrm>
-            <a:off x="6492240" y="1143000"/>
-            <a:ext cx="4982760" cy="2486520"/>
-          </a:xfrm>
-          <a:prstGeom prst="rect">
-            <a:avLst/>
-          </a:prstGeom>
-          <a:noFill/>
-          <a:ln w="0">
-            <a:noFill/>
-          </a:ln>
-        </p:spPr>
-      </p:pic>
-      <p:sp>
-        <p:nvSpPr>
-          <p:cNvPr id="72" name="Text 19"/>
-          <p:cNvSpPr/>
-          <p:nvPr/>
-        </p:nvSpPr>
-        <p:spPr>
-          <a:xfrm>
-            <a:off x="6629400" y="3977640"/>
-            <a:ext cx="4617000" cy="822240"/>
-          </a:xfrm>
-          <a:prstGeom prst="rect">
-            <a:avLst/>
-          </a:prstGeom>
-          <a:noFill/>
-          <a:ln w="0">
-            <a:noFill/>
-          </a:ln>
-        </p:spPr>
-        <p:style>
-          <a:lnRef idx="0"/>
-          <a:fillRef idx="0"/>
-          <a:effectRef idx="0"/>
-          <a:fontRef idx="minor"/>
-        </p:style>
-        <p:txBody>
-          <a:bodyPr lIns="360" rIns="360" tIns="360" bIns="360" anchor="ctr">
-            <a:normAutofit/>
-          </a:bodyPr>
-          <a:p>
-            <a:pPr defTabSz="914400">
-              <a:lnSpc>
-                <a:spcPct val="100000"/>
-              </a:lnSpc>
-              <a:tabLst>
-                <a:tab algn="l" pos="0"/>
-              </a:tabLst>
-            </a:pPr>
-            <a:r>
-              <a:rPr lang="en-US" sz="1400" b="0" u="none" strike="noStrike">
-                <a:solidFill>
-                  <a:srgbClr val="1f2937"/>
+      <p:sp>
+        <p:nvSpPr>
+          <p:cNvPr id="74" name="Text 70"/>
+          <p:cNvSpPr/>
+          <p:nvPr/>
+        </p:nvSpPr>
+        <p:spPr>
+          <a:xfrm>
+            <a:off x="11475720" y="6473880"/>
+            <a:ext cx="254880" cy="136080"/>
+          </a:xfrm>
+          <a:prstGeom prst="rect">
+            <a:avLst/>
+          </a:prstGeom>
+          <a:noFill/>
+          <a:ln w="0">
+            <a:noFill/>
+          </a:ln>
+        </p:spPr>
+        <p:style>
+          <a:lnRef idx="0"/>
+          <a:fillRef idx="0"/>
+          <a:effectRef idx="0"/>
+          <a:fontRef idx="minor"/>
+        </p:style>
+        <p:txBody>
+          <a:bodyPr lIns="0" rIns="0" tIns="0" bIns="0" anchor="ctr">
+            <a:noAutofit/>
+          </a:bodyPr>
+          <a:p>
+            <a:pPr algn="r" defTabSz="914400">
+              <a:lnSpc>
+                <a:spcPct val="100000"/>
+              </a:lnSpc>
+              <a:tabLst>
+                <a:tab algn="l" pos="0"/>
+              </a:tabLst>
+            </a:pPr>
+            <a:r>
+              <a:rPr lang="en-US" sz="700" b="0" u="none" strike="noStrike">
+                <a:solidFill>
+                  <a:srgbClr val="64748b"/>
                 </a:solidFill>
                 <a:effectLst/>
                 <a:uFillTx/>
                 <a:latin typeface="Aptos"/>
               </a:rPr>
-              <a:t>Resultado esperado: a curva cresce rápido no início, mas desacelera até estabilizar em K, evitando previsões irreais para tempos longos.</a:t>
-            </a:r>
-            <a:endParaRPr lang="en-US" sz="1400" b="0" u="none" strike="noStrike">
-              <a:solidFill>
-                <a:srgbClr val="000000"/>
-              </a:solidFill>
-              <a:effectLst/>
-              <a:uFillTx/>
-              <a:latin typeface="Arial"/>
-            </a:endParaRPr>
-          </a:p>
-        </p:txBody>
-      </p:sp>
-      <p:sp>
-        <p:nvSpPr>
-          <p:cNvPr id="73" name="Text 20"/>
-          <p:cNvSpPr/>
-          <p:nvPr/>
-        </p:nvSpPr>
-        <p:spPr>
-          <a:xfrm>
-            <a:off x="11475720" y="6473880"/>
-            <a:ext cx="255240" cy="136440"/>
-          </a:xfrm>
-          <a:prstGeom prst="rect">
-            <a:avLst/>
-          </a:prstGeom>
-          <a:noFill/>
-          <a:ln w="0">
-            <a:noFill/>
-          </a:ln>
-        </p:spPr>
-        <p:style>
-          <a:lnRef idx="0"/>
-          <a:fillRef idx="0"/>
-          <a:effectRef idx="0"/>
-          <a:fontRef idx="minor"/>
-        </p:style>
-        <p:txBody>
-          <a:bodyPr lIns="0" rIns="0" tIns="0" bIns="0" anchor="ctr">
-            <a:noAutofit/>
-          </a:bodyPr>
-          <a:p>
-            <a:pPr algn="r" defTabSz="914400">
-              <a:lnSpc>
-                <a:spcPct val="100000"/>
-              </a:lnSpc>
-              <a:tabLst>
-                <a:tab algn="l" pos="0"/>
-              </a:tabLst>
-            </a:pPr>
-            <a:r>
-              <a:rPr lang="en-US" sz="700" b="0" u="none" strike="noStrike">
-                <a:solidFill>
-                  <a:srgbClr val="64748b"/>
-                </a:solidFill>
-                <a:effectLst/>
-                <a:uFillTx/>
-                <a:latin typeface="Aptos"/>
-              </a:rPr>
-              <a:t>3</a:t>
+              <a:t>4</a:t>
             </a:r>
             <a:endParaRPr lang="en-US" sz="700" b="0" u="none" strike="noStrike">
+              <a:solidFill>
+                <a:srgbClr val="000000"/>
+              </a:solidFill>
+              <a:effectLst/>
+              <a:uFillTx/>
+              <a:latin typeface="Arial"/>
+            </a:endParaRPr>
+          </a:p>
+        </p:txBody>
+      </p:sp>
+      <p:sp>
+        <p:nvSpPr>
+          <p:cNvPr id="75" name=""/>
+          <p:cNvSpPr/>
+          <p:nvPr/>
+        </p:nvSpPr>
+        <p:spPr>
+          <a:xfrm>
+            <a:off x="5476320" y="3115440"/>
+            <a:ext cx="1269360" cy="634320"/>
+          </a:xfrm>
+          <a:prstGeom prst="rect">
+            <a:avLst/>
+          </a:prstGeom>
+          <a:blipFill rotWithShape="0">
+            <a:blip r:embed="rId1"/>
+            <a:srcRect/>
+            <a:stretch/>
+          </a:blipFill>
+          <a:ln w="0">
+            <a:noFill/>
+          </a:ln>
+        </p:spPr>
+        <p:style>
+          <a:lnRef idx="0"/>
+          <a:fillRef idx="0"/>
+          <a:effectRef idx="0"/>
+          <a:fontRef idx="minor"/>
+        </p:style>
+        <p:txBody>
+          <a:bodyPr lIns="90000" rIns="90000" tIns="45000" bIns="45000" anchor="t">
+            <a:noAutofit/>
+          </a:bodyPr>
+          <a:p>
+            <a:endParaRPr lang="en-US" sz="1800" b="0" u="none" strike="noStrike">
               <a:solidFill>
                 <a:srgbClr val="000000"/>
               </a:solidFill>
@@ -15147,14 +15188,14 @@
       </p:grpSpPr>
       <p:sp>
         <p:nvSpPr>
-          <p:cNvPr id="74" name="Shape 0"/>
+          <p:cNvPr id="76" name="Shape 0"/>
           <p:cNvSpPr/>
           <p:nvPr/>
         </p:nvSpPr>
         <p:spPr>
           <a:xfrm>
             <a:off x="0" y="0"/>
-            <a:ext cx="12191040" cy="657720"/>
+            <a:ext cx="12190680" cy="657360"/>
           </a:xfrm>
           <a:prstGeom prst="rect">
             <a:avLst/>
@@ -15198,14 +15239,14 @@
       </p:sp>
       <p:sp>
         <p:nvSpPr>
-          <p:cNvPr id="75" name="Text 1"/>
+          <p:cNvPr id="77" name="Text 1"/>
           <p:cNvSpPr/>
           <p:nvPr/>
         </p:nvSpPr>
         <p:spPr>
           <a:xfrm>
             <a:off x="502920" y="146160"/>
-            <a:ext cx="8868960" cy="346680"/>
+            <a:ext cx="8868600" cy="346320"/>
           </a:xfrm>
           <a:prstGeom prst="rect">
             <a:avLst/>
@@ -15244,7 +15285,7 @@
                 <a:latin typeface="Aptos Display"/>
                 <a:ea typeface="Aptos Display"/>
               </a:rPr>
-              <a:t>Mantendo Ratkowsky: temperatura entra em r(T)</a:t>
+              <a:t>Novo Modelo 2: binomial negativa</a:t>
             </a:r>
             <a:endParaRPr lang="en-US" sz="2000" b="0" u="none" strike="noStrike">
               <a:solidFill>
@@ -15259,14 +15300,14 @@
       </p:sp>
       <p:sp>
         <p:nvSpPr>
-          <p:cNvPr id="76" name="Text 2"/>
+          <p:cNvPr id="78" name="Text 2"/>
           <p:cNvSpPr/>
           <p:nvPr/>
         </p:nvSpPr>
         <p:spPr>
           <a:xfrm>
             <a:off x="9555480" y="173880"/>
-            <a:ext cx="2056680" cy="255240"/>
+            <a:ext cx="2056320" cy="254880"/>
           </a:xfrm>
           <a:prstGeom prst="rect">
             <a:avLst/>
@@ -15304,7 +15345,7 @@
                 <a:uFillTx/>
                 <a:latin typeface="Aptos"/>
               </a:rPr>
-              <a:t>ponte entre clima e crescimento</a:t>
+              <a:t>substitui a Poisson</a:t>
             </a:r>
             <a:endParaRPr lang="en-US" sz="900" b="0" u="none" strike="noStrike">
               <a:solidFill>
@@ -15319,7 +15360,7 @@
       </p:sp>
       <p:sp>
         <p:nvSpPr>
-          <p:cNvPr id="77" name="Shape 3"/>
+          <p:cNvPr id="79" name="Shape 3"/>
           <p:cNvSpPr/>
           <p:nvPr/>
         </p:nvSpPr>
@@ -15362,14 +15403,14 @@
       </p:sp>
       <p:sp>
         <p:nvSpPr>
-          <p:cNvPr id="78" name="Text 4"/>
+          <p:cNvPr id="80" name="Text 4"/>
           <p:cNvSpPr/>
           <p:nvPr/>
         </p:nvSpPr>
         <p:spPr>
           <a:xfrm>
             <a:off x="502920" y="6473880"/>
-            <a:ext cx="3291120" cy="163800"/>
+            <a:ext cx="3290760" cy="163440"/>
           </a:xfrm>
           <a:prstGeom prst="rect">
             <a:avLst/>
@@ -15422,14 +15463,14 @@
       </p:sp>
       <p:sp>
         <p:nvSpPr>
-          <p:cNvPr id="79" name="Text 5"/>
-          <p:cNvSpPr/>
-          <p:nvPr/>
-        </p:nvSpPr>
-        <p:spPr>
-          <a:xfrm>
-            <a:off x="731520" y="1051560"/>
-            <a:ext cx="5348520" cy="502200"/>
+          <p:cNvPr id="81" name="Text 5"/>
+          <p:cNvSpPr/>
+          <p:nvPr/>
+        </p:nvSpPr>
+        <p:spPr>
+          <a:xfrm>
+            <a:off x="777240" y="1078920"/>
+            <a:ext cx="4388040" cy="501840"/>
           </a:xfrm>
           <a:prstGeom prst="rect">
             <a:avLst/>
@@ -15459,99 +15500,38 @@
               </a:tabLst>
             </a:pPr>
             <a:r>
-              <a:rPr lang="en-US" sz="2200" b="1" u="none" strike="noStrike">
-                <a:solidFill>
-                  <a:srgbClr val="16324f"/>
+              <a:rPr lang="en-US" sz="2400" b="1" u="none" strike="noStrike">
+                <a:solidFill>
+                  <a:srgbClr val="4c956c"/>
                 </a:solidFill>
                 <a:effectLst/>
                 <a:uFillTx/>
                 <a:latin typeface="Aptos Display"/>
                 <a:ea typeface="Aptos Display"/>
               </a:rPr>
-              <a:t>√r(T) = a · (T − T_min)</a:t>
-            </a:r>
-            <a:endParaRPr lang="en-US" sz="2200" b="0" u="none" strike="noStrike">
-              <a:solidFill>
-                <a:srgbClr val="000000"/>
-              </a:solidFill>
-              <a:effectLst/>
-              <a:uFillTx/>
-              <a:latin typeface="Arial"/>
-            </a:endParaRPr>
-          </a:p>
-        </p:txBody>
-      </p:sp>
-      <p:sp>
-        <p:nvSpPr>
-          <p:cNvPr id="80" name="Text 6"/>
-          <p:cNvSpPr/>
-          <p:nvPr/>
-        </p:nvSpPr>
-        <p:spPr>
-          <a:xfrm>
-            <a:off x="731520" y="1691640"/>
-            <a:ext cx="5348520" cy="502200"/>
-          </a:xfrm>
-          <a:prstGeom prst="rect">
-            <a:avLst/>
-          </a:prstGeom>
-          <a:noFill/>
-          <a:ln w="0">
-            <a:noFill/>
-          </a:ln>
-        </p:spPr>
-        <p:style>
-          <a:lnRef idx="0"/>
-          <a:fillRef idx="0"/>
-          <a:effectRef idx="0"/>
-          <a:fontRef idx="minor"/>
-        </p:style>
-        <p:txBody>
-          <a:bodyPr lIns="0" rIns="0" tIns="0" bIns="0" anchor="ctr">
-            <a:normAutofit/>
-          </a:bodyPr>
-          <a:p>
-            <a:pPr algn="ctr" defTabSz="914400">
-              <a:lnSpc>
-                <a:spcPct val="100000"/>
-              </a:lnSpc>
-              <a:tabLst>
-                <a:tab algn="l" pos="0"/>
-              </a:tabLst>
-            </a:pPr>
-            <a:r>
-              <a:rPr lang="en-US" sz="2200" b="1" u="none" strike="noStrike">
-                <a:solidFill>
-                  <a:srgbClr val="0e6ba8"/>
-                </a:solidFill>
-                <a:effectLst/>
-                <a:uFillTx/>
-                <a:latin typeface="Aptos Display"/>
-                <a:ea typeface="Aptos Display"/>
-              </a:rPr>
-              <a:t>r(T) = [a · (T − T_min)]²</a:t>
-            </a:r>
-            <a:endParaRPr lang="en-US" sz="2200" b="0" u="none" strike="noStrike">
-              <a:solidFill>
-                <a:srgbClr val="000000"/>
-              </a:solidFill>
-              <a:effectLst/>
-              <a:uFillTx/>
-              <a:latin typeface="Arial"/>
-            </a:endParaRPr>
-          </a:p>
-        </p:txBody>
-      </p:sp>
-      <p:sp>
-        <p:nvSpPr>
-          <p:cNvPr id="81" name="Text 7"/>
-          <p:cNvSpPr/>
-          <p:nvPr/>
-        </p:nvSpPr>
-        <p:spPr>
-          <a:xfrm>
-            <a:off x="868680" y="2487240"/>
-            <a:ext cx="5074200" cy="685080"/>
+              <a:t>X ~ NegBin(μ, k)</a:t>
+            </a:r>
+            <a:endParaRPr lang="en-US" sz="2400" b="0" u="none" strike="noStrike">
+              <a:solidFill>
+                <a:srgbClr val="000000"/>
+              </a:solidFill>
+              <a:effectLst/>
+              <a:uFillTx/>
+              <a:latin typeface="Arial"/>
+            </a:endParaRPr>
+          </a:p>
+        </p:txBody>
+      </p:sp>
+      <p:sp>
+        <p:nvSpPr>
+          <p:cNvPr id="82" name="Text 6"/>
+          <p:cNvSpPr/>
+          <p:nvPr/>
+        </p:nvSpPr>
+        <p:spPr>
+          <a:xfrm>
+            <a:off x="868680" y="1828800"/>
+            <a:ext cx="4662360" cy="547560"/>
           </a:xfrm>
           <a:prstGeom prst="rect">
             <a:avLst/>
@@ -15581,7 +15561,7 @@
               </a:tabLst>
             </a:pPr>
             <a:r>
-              <a:rPr lang="en-US" sz="1400" b="0" u="none" strike="noStrike">
+              <a:rPr lang="en-US" sz="1500" b="0" u="none" strike="noStrike">
                 <a:solidFill>
                   <a:srgbClr val="1f2937"/>
                 </a:solidFill>
@@ -15589,33 +15569,33 @@
                 <a:uFillTx/>
                 <a:latin typeface="Aptos"/>
               </a:rPr>
-              <a:t>A diferença agora é que r(T) não alimenta mais um crescimento ilimitado. Ele acelera a chegada à saturação K.</a:t>
-            </a:r>
-            <a:endParaRPr lang="en-US" sz="1400" b="0" u="none" strike="noStrike">
-              <a:solidFill>
-                <a:srgbClr val="000000"/>
-              </a:solidFill>
-              <a:effectLst/>
-              <a:uFillTx/>
-              <a:latin typeface="Arial"/>
-            </a:endParaRPr>
-          </a:p>
-        </p:txBody>
-      </p:sp>
-      <p:sp>
-        <p:nvSpPr>
-          <p:cNvPr id="82" name="Shape 8"/>
-          <p:cNvSpPr/>
-          <p:nvPr/>
-        </p:nvSpPr>
-        <p:spPr>
-          <a:xfrm>
-            <a:off x="868680" y="3657600"/>
-            <a:ext cx="5074200" cy="1050840"/>
+              <a:t>A binomial negativa modela contagens quando os dados apresentam superdispersão: Var(X) &gt; E[X].</a:t>
+            </a:r>
+            <a:endParaRPr lang="en-US" sz="1500" b="0" u="none" strike="noStrike">
+              <a:solidFill>
+                <a:srgbClr val="000000"/>
+              </a:solidFill>
+              <a:effectLst/>
+              <a:uFillTx/>
+              <a:latin typeface="Arial"/>
+            </a:endParaRPr>
+          </a:p>
+        </p:txBody>
+      </p:sp>
+      <p:sp>
+        <p:nvSpPr>
+          <p:cNvPr id="83" name="Shape 7"/>
+          <p:cNvSpPr/>
+          <p:nvPr/>
+        </p:nvSpPr>
+        <p:spPr>
+          <a:xfrm>
+            <a:off x="868680" y="2788920"/>
+            <a:ext cx="2056320" cy="730440"/>
           </a:xfrm>
           <a:prstGeom prst="roundRect">
             <a:avLst>
-              <a:gd name="adj" fmla="val 3478"/>
+              <a:gd name="adj" fmla="val 5000"/>
             </a:avLst>
           </a:prstGeom>
           <a:solidFill>
@@ -15657,14 +15637,14 @@
       </p:sp>
       <p:sp>
         <p:nvSpPr>
-          <p:cNvPr id="83" name="Text 9"/>
-          <p:cNvSpPr/>
-          <p:nvPr/>
-        </p:nvSpPr>
-        <p:spPr>
-          <a:xfrm>
-            <a:off x="1051560" y="3822120"/>
-            <a:ext cx="4708440" cy="227880"/>
+          <p:cNvPr id="84" name="Text 8"/>
+          <p:cNvSpPr/>
+          <p:nvPr/>
+        </p:nvSpPr>
+        <p:spPr>
+          <a:xfrm>
+            <a:off x="1051560" y="2953440"/>
+            <a:ext cx="1690560" cy="227520"/>
           </a:xfrm>
           <a:prstGeom prst="rect">
             <a:avLst/>
@@ -15702,7 +15682,7 @@
                 <a:uFillTx/>
                 <a:latin typeface="Aptos"/>
               </a:rPr>
-              <a:t>Leitura ambiental</a:t>
+              <a:t>Média</a:t>
             </a:r>
             <a:endParaRPr lang="en-US" sz="1300" b="0" u="none" strike="noStrike">
               <a:solidFill>
@@ -15717,14 +15697,14 @@
       </p:sp>
       <p:sp>
         <p:nvSpPr>
-          <p:cNvPr id="84" name="Text 10"/>
-          <p:cNvSpPr/>
-          <p:nvPr/>
-        </p:nvSpPr>
-        <p:spPr>
-          <a:xfrm>
-            <a:off x="1051560" y="4160520"/>
-            <a:ext cx="4708440" cy="410760"/>
+          <p:cNvPr id="85" name="Text 9"/>
+          <p:cNvSpPr/>
+          <p:nvPr/>
+        </p:nvSpPr>
+        <p:spPr>
+          <a:xfrm>
+            <a:off x="1051560" y="3291840"/>
+            <a:ext cx="1690560" cy="90360"/>
           </a:xfrm>
           <a:prstGeom prst="rect">
             <a:avLst/>
@@ -15742,7 +15722,7 @@
         </p:style>
         <p:txBody>
           <a:bodyPr lIns="0" rIns="0" tIns="0" bIns="0" anchor="ctr">
-            <a:normAutofit/>
+            <a:normAutofit fontScale="62500" lnSpcReduction="19999"/>
           </a:bodyPr>
           <a:p>
             <a:pPr defTabSz="914400">
@@ -15762,7 +15742,7 @@
                 <a:uFillTx/>
                 <a:latin typeface="Aptos"/>
               </a:rPr>
-              <a:t>temperaturas maiores aumentam a velocidade de crescimento, mas não eliminam limites ecológicos.</a:t>
+              <a:t>E[X] = μ</a:t>
             </a:r>
             <a:endParaRPr lang="en-US" sz="1100" b="0" u="none" strike="noStrike">
               <a:solidFill>
@@ -15777,18 +15757,18 @@
       </p:sp>
       <p:sp>
         <p:nvSpPr>
-          <p:cNvPr id="85" name="Shape 11"/>
-          <p:cNvSpPr/>
-          <p:nvPr/>
-        </p:nvSpPr>
-        <p:spPr>
-          <a:xfrm>
-            <a:off x="6400800" y="1097280"/>
-            <a:ext cx="4708440" cy="1233720"/>
+          <p:cNvPr id="86" name="Shape 10"/>
+          <p:cNvSpPr/>
+          <p:nvPr/>
+        </p:nvSpPr>
+        <p:spPr>
+          <a:xfrm>
+            <a:off x="3246120" y="2788920"/>
+            <a:ext cx="2239200" cy="730440"/>
           </a:xfrm>
           <a:prstGeom prst="roundRect">
             <a:avLst>
-              <a:gd name="adj" fmla="val 2963"/>
+              <a:gd name="adj" fmla="val 5000"/>
             </a:avLst>
           </a:prstGeom>
           <a:solidFill>
@@ -15830,14 +15810,14 @@
       </p:sp>
       <p:sp>
         <p:nvSpPr>
-          <p:cNvPr id="86" name="Text 12"/>
-          <p:cNvSpPr/>
-          <p:nvPr/>
-        </p:nvSpPr>
-        <p:spPr>
-          <a:xfrm>
-            <a:off x="6583680" y="1261800"/>
-            <a:ext cx="4342680" cy="227880"/>
+          <p:cNvPr id="87" name="Text 11"/>
+          <p:cNvSpPr/>
+          <p:nvPr/>
+        </p:nvSpPr>
+        <p:spPr>
+          <a:xfrm>
+            <a:off x="3429000" y="2953440"/>
+            <a:ext cx="1873440" cy="227520"/>
           </a:xfrm>
           <a:prstGeom prst="rect">
             <a:avLst/>
@@ -15875,7 +15855,7 @@
                 <a:uFillTx/>
                 <a:latin typeface="Aptos"/>
               </a:rPr>
-              <a:t>Equação integrada</a:t>
+              <a:t>Variância</a:t>
             </a:r>
             <a:endParaRPr lang="en-US" sz="1300" b="0" u="none" strike="noStrike">
               <a:solidFill>
@@ -15890,14 +15870,14 @@
       </p:sp>
       <p:sp>
         <p:nvSpPr>
-          <p:cNvPr id="87" name="Text 13"/>
-          <p:cNvSpPr/>
-          <p:nvPr/>
-        </p:nvSpPr>
-        <p:spPr>
-          <a:xfrm>
-            <a:off x="6583680" y="1600200"/>
-            <a:ext cx="4342680" cy="593640"/>
+          <p:cNvPr id="88" name="Text 12"/>
+          <p:cNvSpPr/>
+          <p:nvPr/>
+        </p:nvSpPr>
+        <p:spPr>
+          <a:xfrm>
+            <a:off x="3429000" y="3291840"/>
+            <a:ext cx="1873440" cy="90360"/>
           </a:xfrm>
           <a:prstGeom prst="rect">
             <a:avLst/>
@@ -15915,7 +15895,7 @@
         </p:style>
         <p:txBody>
           <a:bodyPr lIns="0" rIns="0" tIns="0" bIns="0" anchor="ctr">
-            <a:normAutofit/>
+            <a:normAutofit fontScale="62500" lnSpcReduction="19999"/>
           </a:bodyPr>
           <a:p>
             <a:pPr defTabSz="914400">
@@ -15935,7 +15915,7 @@
                 <a:uFillTx/>
                 <a:latin typeface="Aptos"/>
               </a:rPr>
-              <a:t>N(t,T) = K / [1 + ((K−N₀)/N₀) · e^(−r(T)t)]</a:t>
+              <a:t>Var(X) = μ + μ²/k</a:t>
             </a:r>
             <a:endParaRPr lang="en-US" sz="1100" b="0" u="none" strike="noStrike">
               <a:solidFill>
@@ -15950,18 +15930,18 @@
       </p:sp>
       <p:sp>
         <p:nvSpPr>
-          <p:cNvPr id="88" name="Shape 14"/>
-          <p:cNvSpPr/>
-          <p:nvPr/>
-        </p:nvSpPr>
-        <p:spPr>
-          <a:xfrm>
-            <a:off x="6400800" y="2743200"/>
-            <a:ext cx="4708440" cy="1325160"/>
+          <p:cNvPr id="89" name="Shape 13"/>
+          <p:cNvSpPr/>
+          <p:nvPr/>
+        </p:nvSpPr>
+        <p:spPr>
+          <a:xfrm>
+            <a:off x="868680" y="3886200"/>
+            <a:ext cx="4616640" cy="1050480"/>
           </a:xfrm>
           <a:prstGeom prst="roundRect">
             <a:avLst>
-              <a:gd name="adj" fmla="val 2759"/>
+              <a:gd name="adj" fmla="val 3478"/>
             </a:avLst>
           </a:prstGeom>
           <a:solidFill>
@@ -16003,14 +15983,14 @@
       </p:sp>
       <p:sp>
         <p:nvSpPr>
-          <p:cNvPr id="89" name="Text 15"/>
-          <p:cNvSpPr/>
-          <p:nvPr/>
-        </p:nvSpPr>
-        <p:spPr>
-          <a:xfrm>
-            <a:off x="6583680" y="2907720"/>
-            <a:ext cx="4342680" cy="227880"/>
+          <p:cNvPr id="90" name="Text 14"/>
+          <p:cNvSpPr/>
+          <p:nvPr/>
+        </p:nvSpPr>
+        <p:spPr>
+          <a:xfrm>
+            <a:off x="1051560" y="4050720"/>
+            <a:ext cx="4250880" cy="227520"/>
           </a:xfrm>
           <a:prstGeom prst="rect">
             <a:avLst/>
@@ -16048,7 +16028,7 @@
                 <a:uFillTx/>
                 <a:latin typeface="Aptos"/>
               </a:rPr>
-              <a:t>Comparação com a Parte 1</a:t>
+              <a:t>Papel de k</a:t>
             </a:r>
             <a:endParaRPr lang="en-US" sz="1300" b="0" u="none" strike="noStrike">
               <a:solidFill>
@@ -16063,14 +16043,14 @@
       </p:sp>
       <p:sp>
         <p:nvSpPr>
-          <p:cNvPr id="90" name="Text 16"/>
-          <p:cNvSpPr/>
-          <p:nvPr/>
-        </p:nvSpPr>
-        <p:spPr>
-          <a:xfrm>
-            <a:off x="6583680" y="3246120"/>
-            <a:ext cx="4342680" cy="685080"/>
+          <p:cNvPr id="91" name="Text 15"/>
+          <p:cNvSpPr/>
+          <p:nvPr/>
+        </p:nvSpPr>
+        <p:spPr>
+          <a:xfrm>
+            <a:off x="1051560" y="4389120"/>
+            <a:ext cx="4250880" cy="410400"/>
           </a:xfrm>
           <a:prstGeom prst="rect">
             <a:avLst/>
@@ -16108,7 +16088,7 @@
                 <a:uFillTx/>
                 <a:latin typeface="Aptos"/>
               </a:rPr>
-              <a:t>Antes: λ crescia exponencialmente sem limite. Agora: λ cresce até uma concentração máxima plausível definida por K.</a:t>
+              <a:t>quanto menor k, maior a agregação e a incerteza nas contagens.</a:t>
             </a:r>
             <a:endParaRPr lang="en-US" sz="1100" b="0" u="none" strike="noStrike">
               <a:solidFill>
@@ -16121,69 +16101,106 @@
           </a:p>
         </p:txBody>
       </p:sp>
-      <p:sp>
-        <p:nvSpPr>
-          <p:cNvPr id="91" name="Shape 17"/>
-          <p:cNvSpPr/>
-          <p:nvPr/>
-        </p:nvSpPr>
-        <p:spPr>
-          <a:xfrm>
-            <a:off x="6400800" y="4526280"/>
-            <a:ext cx="4708440" cy="1096560"/>
-          </a:xfrm>
-          <a:prstGeom prst="roundRect">
-            <a:avLst>
-              <a:gd name="adj" fmla="val 3333"/>
-            </a:avLst>
-          </a:prstGeom>
-          <a:solidFill>
-            <a:srgbClr val="ffffff"/>
-          </a:solidFill>
-          <a:ln w="10160">
-            <a:solidFill>
-              <a:srgbClr val="d9e2ec"/>
-            </a:solidFill>
-            <a:round/>
-          </a:ln>
-        </p:spPr>
-        <p:style>
-          <a:lnRef idx="0"/>
-          <a:fillRef idx="0"/>
-          <a:effectRef idx="0"/>
-          <a:fontRef idx="minor"/>
-        </p:style>
-        <p:txBody>
-          <a:bodyPr lIns="90000" rIns="90000" tIns="45000" bIns="45000" anchor="t">
-            <a:noAutofit/>
-          </a:bodyPr>
-          <a:p>
-            <a:pPr>
-              <a:lnSpc>
-                <a:spcPct val="100000"/>
-              </a:lnSpc>
-            </a:pPr>
-            <a:endParaRPr lang="en-US" sz="1800" b="0" u="none" strike="noStrike">
-              <a:solidFill>
-                <a:srgbClr val="000000"/>
-              </a:solidFill>
-              <a:effectLst/>
-              <a:uFillTx/>
-              <a:latin typeface="Arial"/>
-            </a:endParaRPr>
-          </a:p>
-        </p:txBody>
-      </p:sp>
-      <p:sp>
-        <p:nvSpPr>
-          <p:cNvPr id="92" name="Text 18"/>
-          <p:cNvSpPr/>
-          <p:nvPr/>
-        </p:nvSpPr>
-        <p:spPr>
-          <a:xfrm>
-            <a:off x="6583680" y="4690800"/>
-            <a:ext cx="4342680" cy="227880"/>
+      <p:pic>
+        <p:nvPicPr>
+          <p:cNvPr id="92" name="Image 0" descr="/mnt/data/poisson_vs_nb.svg"/>
+          <p:cNvPicPr/>
+          <p:nvPr/>
+        </p:nvPicPr>
+        <p:blipFill>
+          <a:blip r:embed="rId1">
+            <a:extLst>
+              <a:ext uri="{96DAC541-7B7A-43D3-8B79-37D633B846F1}">
+                <asvg:svgBlip xmlns:asvg="http://schemas.microsoft.com/office/drawing/2016/SVG/main" r:embed="rId2"/>
+              </a:ext>
+            </a:extLst>
+          </a:blip>
+          <a:stretch/>
+        </p:blipFill>
+        <p:spPr>
+          <a:xfrm>
+            <a:off x="6172200" y="1024200"/>
+            <a:ext cx="5256720" cy="2632320"/>
+          </a:xfrm>
+          <a:prstGeom prst="rect">
+            <a:avLst/>
+          </a:prstGeom>
+          <a:noFill/>
+          <a:ln w="0">
+            <a:noFill/>
+          </a:ln>
+        </p:spPr>
+      </p:pic>
+      <p:sp>
+        <p:nvSpPr>
+          <p:cNvPr id="93" name="Text 16"/>
+          <p:cNvSpPr/>
+          <p:nvPr/>
+        </p:nvSpPr>
+        <p:spPr>
+          <a:xfrm>
+            <a:off x="6355080" y="3977640"/>
+            <a:ext cx="4799520" cy="1050480"/>
+          </a:xfrm>
+          <a:prstGeom prst="rect">
+            <a:avLst/>
+          </a:prstGeom>
+          <a:noFill/>
+          <a:ln w="0">
+            <a:noFill/>
+          </a:ln>
+        </p:spPr>
+        <p:style>
+          <a:lnRef idx="0"/>
+          <a:fillRef idx="0"/>
+          <a:effectRef idx="0"/>
+          <a:fontRef idx="minor"/>
+        </p:style>
+        <p:txBody>
+          <a:bodyPr lIns="360" rIns="360" tIns="360" bIns="360" anchor="ctr">
+            <a:normAutofit/>
+          </a:bodyPr>
+          <a:p>
+            <a:pPr defTabSz="914400">
+              <a:lnSpc>
+                <a:spcPct val="100000"/>
+              </a:lnSpc>
+              <a:tabLst>
+                <a:tab algn="l" pos="0"/>
+              </a:tabLst>
+            </a:pPr>
+            <a:r>
+              <a:rPr lang="en-US" sz="1400" b="0" u="none" strike="noStrike">
+                <a:solidFill>
+                  <a:srgbClr val="1f2937"/>
+                </a:solidFill>
+                <a:effectLst/>
+                <a:uFillTx/>
+                <a:latin typeface="Aptos"/>
+              </a:rPr>
+              <a:t>Interpretação: mesmo com a mesma média μ, a binomial negativa coloca mais probabilidade em valores extremos. Isso é essencial para estimar risco de ultrapassar limites sanitários.</a:t>
+            </a:r>
+            <a:endParaRPr lang="en-US" sz="1400" b="0" u="none" strike="noStrike">
+              <a:solidFill>
+                <a:srgbClr val="000000"/>
+              </a:solidFill>
+              <a:effectLst/>
+              <a:uFillTx/>
+              <a:latin typeface="Arial"/>
+            </a:endParaRPr>
+          </a:p>
+        </p:txBody>
+      </p:sp>
+      <p:sp>
+        <p:nvSpPr>
+          <p:cNvPr id="94" name="Text 17"/>
+          <p:cNvSpPr/>
+          <p:nvPr/>
+        </p:nvSpPr>
+        <p:spPr>
+          <a:xfrm>
+            <a:off x="11475720" y="6473880"/>
+            <a:ext cx="254880" cy="136080"/>
           </a:xfrm>
           <a:prstGeom prst="rect">
             <a:avLst/>
@@ -16204,144 +16221,24 @@
             <a:noAutofit/>
           </a:bodyPr>
           <a:p>
-            <a:pPr defTabSz="914400">
-              <a:lnSpc>
-                <a:spcPct val="100000"/>
-              </a:lnSpc>
-              <a:tabLst>
-                <a:tab algn="l" pos="0"/>
-              </a:tabLst>
-            </a:pPr>
-            <a:r>
-              <a:rPr lang="en-US" sz="1300" b="1" u="none" strike="noStrike">
-                <a:solidFill>
-                  <a:srgbClr val="16324f"/>
+            <a:pPr algn="r" defTabSz="914400">
+              <a:lnSpc>
+                <a:spcPct val="100000"/>
+              </a:lnSpc>
+              <a:tabLst>
+                <a:tab algn="l" pos="0"/>
+              </a:tabLst>
+            </a:pPr>
+            <a:r>
+              <a:rPr lang="en-US" sz="700" b="0" u="none" strike="noStrike">
+                <a:solidFill>
+                  <a:srgbClr val="64748b"/>
                 </a:solidFill>
                 <a:effectLst/>
                 <a:uFillTx/>
                 <a:latin typeface="Aptos"/>
               </a:rPr>
-              <a:t>Mensagem para apresentar</a:t>
-            </a:r>
-            <a:endParaRPr lang="en-US" sz="1300" b="0" u="none" strike="noStrike">
-              <a:solidFill>
-                <a:srgbClr val="000000"/>
-              </a:solidFill>
-              <a:effectLst/>
-              <a:uFillTx/>
-              <a:latin typeface="Arial"/>
-            </a:endParaRPr>
-          </a:p>
-        </p:txBody>
-      </p:sp>
-      <p:sp>
-        <p:nvSpPr>
-          <p:cNvPr id="93" name="Text 19"/>
-          <p:cNvSpPr/>
-          <p:nvPr/>
-        </p:nvSpPr>
-        <p:spPr>
-          <a:xfrm>
-            <a:off x="6583680" y="5029200"/>
-            <a:ext cx="4342680" cy="456480"/>
-          </a:xfrm>
-          <a:prstGeom prst="rect">
-            <a:avLst/>
-          </a:prstGeom>
-          <a:noFill/>
-          <a:ln w="0">
-            <a:noFill/>
-          </a:ln>
-        </p:spPr>
-        <p:style>
-          <a:lnRef idx="0"/>
-          <a:fillRef idx="0"/>
-          <a:effectRef idx="0"/>
-          <a:fontRef idx="minor"/>
-        </p:style>
-        <p:txBody>
-          <a:bodyPr lIns="0" rIns="0" tIns="0" bIns="0" anchor="ctr">
-            <a:normAutofit/>
-          </a:bodyPr>
-          <a:p>
-            <a:pPr defTabSz="914400">
-              <a:lnSpc>
-                <a:spcPct val="100000"/>
-              </a:lnSpc>
-              <a:tabLst>
-                <a:tab algn="l" pos="0"/>
-              </a:tabLst>
-            </a:pPr>
-            <a:r>
-              <a:rPr lang="en-US" sz="1100" b="0" u="none" strike="noStrike">
-                <a:solidFill>
-                  <a:srgbClr val="1f2937"/>
-                </a:solidFill>
-                <a:effectLst/>
-                <a:uFillTx/>
-                <a:latin typeface="Aptos"/>
-              </a:rPr>
-              <a:t>O aquecimento continua importante, mas o novo modelo separa velocidade de crescimento e limite ambiental.</a:t>
-            </a:r>
-            <a:endParaRPr lang="en-US" sz="1100" b="0" u="none" strike="noStrike">
-              <a:solidFill>
-                <a:srgbClr val="000000"/>
-              </a:solidFill>
-              <a:effectLst/>
-              <a:uFillTx/>
-              <a:latin typeface="Arial"/>
-            </a:endParaRPr>
-          </a:p>
-        </p:txBody>
-      </p:sp>
-      <p:sp>
-        <p:nvSpPr>
-          <p:cNvPr id="94" name="Text 20"/>
-          <p:cNvSpPr/>
-          <p:nvPr/>
-        </p:nvSpPr>
-        <p:spPr>
-          <a:xfrm>
-            <a:off x="11475720" y="6473880"/>
-            <a:ext cx="255240" cy="136440"/>
-          </a:xfrm>
-          <a:prstGeom prst="rect">
-            <a:avLst/>
-          </a:prstGeom>
-          <a:noFill/>
-          <a:ln w="0">
-            <a:noFill/>
-          </a:ln>
-        </p:spPr>
-        <p:style>
-          <a:lnRef idx="0"/>
-          <a:fillRef idx="0"/>
-          <a:effectRef idx="0"/>
-          <a:fontRef idx="minor"/>
-        </p:style>
-        <p:txBody>
-          <a:bodyPr lIns="0" rIns="0" tIns="0" bIns="0" anchor="ctr">
-            <a:noAutofit/>
-          </a:bodyPr>
-          <a:p>
-            <a:pPr algn="r" defTabSz="914400">
-              <a:lnSpc>
-                <a:spcPct val="100000"/>
-              </a:lnSpc>
-              <a:tabLst>
-                <a:tab algn="l" pos="0"/>
-              </a:tabLst>
-            </a:pPr>
-            <a:r>
-              <a:rPr lang="en-US" sz="700" b="0" u="none" strike="noStrike">
-                <a:solidFill>
-                  <a:srgbClr val="64748b"/>
-                </a:solidFill>
-                <a:effectLst/>
-                <a:uFillTx/>
-                <a:latin typeface="Aptos"/>
-              </a:rPr>
-              <a:t>4</a:t>
+              <a:t>5</a:t>
             </a:r>
             <a:endParaRPr lang="en-US" sz="700" b="0" u="none" strike="noStrike">
               <a:solidFill>
@@ -16354,58 +16251,6 @@
           </a:p>
         </p:txBody>
       </p:sp>
-      <mc:AlternateContent>
-        <mc:Choice xmlns:a14="http://schemas.microsoft.com/office/drawing/2010/main" Requires="a14">
-          <p:sp>
-            <p:nvSpPr>
-              <p:cNvPr id="95" name=""/>
-              <p:cNvSpPr txBox="1"/>
-              <p:nvPr/>
-            </p:nvSpPr>
-            <p:spPr>
-              <a:xfrm>
-                <a:off x="5476320" y="3115440"/>
-                <a:ext cx="1269720" cy="634680"/>
-              </a:xfrm>
-              <a:prstGeom prst="rect">
-                <a:avLst/>
-              </a:prstGeom>
-            </p:spPr>
-            <p:txBody>
-              <a:bodyPr/>
-              <a:p>
-                <a14:m>
-                  <m:oMath xmlns:m="http://schemas.openxmlformats.org/officeDocument/2006/math"/>
-                </a14:m>
-              </a:p>
-            </p:txBody>
-          </p:sp>
-        </mc:Choice>
-        <mc:Fallback>
-          <p:sp>
-            <p:nvSpPr>
-              <p:cNvPr id="95" name=""/>
-              <p:cNvSpPr txBox="1"/>
-              <p:nvPr/>
-            </p:nvSpPr>
-            <p:spPr>
-              <a:xfrm>
-                <a:off x="5476320" y="3115440"/>
-                <a:ext cx="1269720" cy="634680"/>
-              </a:xfrm>
-              <a:prstGeom prst="rect">
-                <a:avLst/>
-              </a:prstGeom>
-              <a:blipFill>
-                <a:blip r:embed="rId1"/>
-                <a:stretch>
-                  <a:fillRect/>
-                </a:stretch>
-              </a:blipFill>
-            </p:spPr>
-          </p:sp>
-        </mc:Fallback>
-      </mc:AlternateContent>
     </p:spTree>
   </p:cSld>
   <mc:AlternateContent>
@@ -16422,13 +16267,6 @@
 <file path=ppt/slides/slide8.xml><?xml version="1.0" encoding="utf-8"?>
 <p:sld xmlns:a="http://schemas.openxmlformats.org/drawingml/2006/main" xmlns:p="http://schemas.openxmlformats.org/presentationml/2006/main" xmlns:r="http://schemas.openxmlformats.org/officeDocument/2006/relationships" xmlns:p14="http://schemas.microsoft.com/office/powerpoint/2010/main" xmlns:p15="http://schemas.microsoft.com/office/powerpoint/2012/main" xmlns:mc="http://schemas.openxmlformats.org/markup-compatibility/2006">
   <p:cSld>
-    <p:bg>
-      <p:bgPr>
-        <a:solidFill>
-          <a:srgbClr val="f8fafc"/>
-        </a:solidFill>
-      </p:bgPr>
-    </p:bg>
     <p:spTree>
       <p:nvGrpSpPr>
         <p:cNvPr id="1" name=""/>
@@ -16443,941 +16281,20 @@
           <a:chExt cx="0" cy="0"/>
         </a:xfrm>
       </p:grpSpPr>
-      <p:sp>
-        <p:nvSpPr>
-          <p:cNvPr id="96" name="Shape 0"/>
-          <p:cNvSpPr/>
-          <p:nvPr/>
-        </p:nvSpPr>
-        <p:spPr>
-          <a:xfrm>
-            <a:off x="0" y="0"/>
-            <a:ext cx="12191040" cy="657720"/>
-          </a:xfrm>
-          <a:prstGeom prst="rect">
-            <a:avLst/>
-          </a:prstGeom>
-          <a:solidFill>
-            <a:srgbClr val="16324f"/>
-          </a:solidFill>
-          <a:ln w="12700">
-            <a:solidFill>
-              <a:srgbClr val="16324f"/>
-            </a:solidFill>
-            <a:round/>
-          </a:ln>
-        </p:spPr>
-        <p:style>
-          <a:lnRef idx="0"/>
-          <a:fillRef idx="0"/>
-          <a:effectRef idx="0"/>
-          <a:fontRef idx="minor"/>
-        </p:style>
-        <p:txBody>
-          <a:bodyPr lIns="90000" rIns="90000" tIns="45000" bIns="45000" anchor="t">
-            <a:noAutofit/>
-          </a:bodyPr>
-          <a:p>
-            <a:pPr>
-              <a:lnSpc>
-                <a:spcPct val="100000"/>
-              </a:lnSpc>
-            </a:pPr>
-            <a:endParaRPr lang="en-US" sz="1800" b="0" u="none" strike="noStrike">
-              <a:solidFill>
-                <a:srgbClr val="ffffff"/>
-              </a:solidFill>
-              <a:effectLst/>
-              <a:uFillTx/>
-              <a:latin typeface="Arial"/>
-            </a:endParaRPr>
-          </a:p>
-        </p:txBody>
-      </p:sp>
-      <p:sp>
-        <p:nvSpPr>
-          <p:cNvPr id="97" name="Text 1"/>
-          <p:cNvSpPr/>
-          <p:nvPr/>
-        </p:nvSpPr>
-        <p:spPr>
-          <a:xfrm>
-            <a:off x="502920" y="146160"/>
-            <a:ext cx="8868960" cy="346680"/>
-          </a:xfrm>
-          <a:prstGeom prst="rect">
-            <a:avLst/>
-          </a:prstGeom>
-          <a:noFill/>
-          <a:ln w="0">
-            <a:noFill/>
-          </a:ln>
-        </p:spPr>
-        <p:style>
-          <a:lnRef idx="0"/>
-          <a:fillRef idx="0"/>
-          <a:effectRef idx="0"/>
-          <a:fontRef idx="minor"/>
-        </p:style>
-        <p:txBody>
-          <a:bodyPr lIns="0" rIns="0" tIns="0" bIns="0" anchor="ctr">
-            <a:noAutofit/>
-          </a:bodyPr>
-          <a:p>
-            <a:pPr defTabSz="914400">
-              <a:lnSpc>
-                <a:spcPct val="100000"/>
-              </a:lnSpc>
-              <a:tabLst>
-                <a:tab algn="l" pos="0"/>
-              </a:tabLst>
-            </a:pPr>
-            <a:r>
-              <a:rPr lang="en-US" sz="2000" b="1" u="none" strike="noStrike">
-                <a:solidFill>
-                  <a:srgbClr val="ffffff"/>
-                </a:solidFill>
-                <a:effectLst/>
-                <a:uFillTx/>
-                <a:latin typeface="Aptos Display"/>
-                <a:ea typeface="Aptos Display"/>
-              </a:rPr>
-              <a:t>Novo Modelo 2: binomial negativa</a:t>
-            </a:r>
-            <a:endParaRPr lang="en-US" sz="2000" b="0" u="none" strike="noStrike">
-              <a:solidFill>
-                <a:srgbClr val="000000"/>
-              </a:solidFill>
-              <a:effectLst/>
-              <a:uFillTx/>
-              <a:latin typeface="Arial"/>
-            </a:endParaRPr>
-          </a:p>
-        </p:txBody>
-      </p:sp>
-      <p:sp>
-        <p:nvSpPr>
-          <p:cNvPr id="98" name="Text 2"/>
-          <p:cNvSpPr/>
-          <p:nvPr/>
-        </p:nvSpPr>
-        <p:spPr>
-          <a:xfrm>
-            <a:off x="9555480" y="173880"/>
-            <a:ext cx="2056680" cy="255240"/>
-          </a:xfrm>
-          <a:prstGeom prst="rect">
-            <a:avLst/>
-          </a:prstGeom>
-          <a:noFill/>
-          <a:ln w="0">
-            <a:noFill/>
-          </a:ln>
-        </p:spPr>
-        <p:style>
-          <a:lnRef idx="0"/>
-          <a:fillRef idx="0"/>
-          <a:effectRef idx="0"/>
-          <a:fontRef idx="minor"/>
-        </p:style>
-        <p:txBody>
-          <a:bodyPr lIns="0" rIns="0" tIns="0" bIns="0" anchor="ctr">
-            <a:noAutofit/>
-          </a:bodyPr>
-          <a:p>
-            <a:pPr algn="r" defTabSz="914400">
-              <a:lnSpc>
-                <a:spcPct val="100000"/>
-              </a:lnSpc>
-              <a:tabLst>
-                <a:tab algn="l" pos="0"/>
-              </a:tabLst>
-            </a:pPr>
-            <a:r>
-              <a:rPr lang="en-US" sz="900" b="0" u="none" strike="noStrike">
-                <a:solidFill>
-                  <a:srgbClr val="ddeaf6"/>
-                </a:solidFill>
-                <a:effectLst/>
-                <a:uFillTx/>
-                <a:latin typeface="Aptos"/>
-              </a:rPr>
-              <a:t>substitui a Poisson</a:t>
-            </a:r>
-            <a:endParaRPr lang="en-US" sz="900" b="0" u="none" strike="noStrike">
-              <a:solidFill>
-                <a:srgbClr val="000000"/>
-              </a:solidFill>
-              <a:effectLst/>
-              <a:uFillTx/>
-              <a:latin typeface="Arial"/>
-            </a:endParaRPr>
-          </a:p>
-        </p:txBody>
-      </p:sp>
-      <p:sp>
-        <p:nvSpPr>
-          <p:cNvPr id="99" name="Shape 3"/>
-          <p:cNvSpPr/>
-          <p:nvPr/>
-        </p:nvSpPr>
-        <p:spPr>
-          <a:xfrm>
-            <a:off x="502920" y="6382440"/>
-            <a:ext cx="11201400" cy="360"/>
-          </a:xfrm>
-          <a:prstGeom prst="line">
-            <a:avLst/>
-          </a:prstGeom>
-          <a:ln w="10160">
-            <a:solidFill>
-              <a:srgbClr val="cbd5e1"/>
-            </a:solidFill>
-            <a:round/>
-          </a:ln>
-        </p:spPr>
-        <p:style>
-          <a:lnRef idx="0"/>
-          <a:fillRef idx="0"/>
-          <a:effectRef idx="0"/>
-          <a:fontRef idx="minor"/>
-        </p:style>
-        <p:txBody>
-          <a:bodyPr lIns="90000" rIns="90000" tIns="-44640" bIns="-44640" anchor="t" anchorCtr="1">
-            <a:noAutofit/>
-          </a:bodyPr>
-          <a:p>
-            <a:endParaRPr lang="en-US" sz="1800" b="0" u="none" strike="noStrike">
-              <a:solidFill>
-                <a:srgbClr val="000000"/>
-              </a:solidFill>
-              <a:effectLst/>
-              <a:uFillTx/>
-              <a:latin typeface="Arial"/>
-            </a:endParaRPr>
-          </a:p>
-        </p:txBody>
-      </p:sp>
-      <p:sp>
-        <p:nvSpPr>
-          <p:cNvPr id="100" name="Text 4"/>
-          <p:cNvSpPr/>
-          <p:nvPr/>
-        </p:nvSpPr>
-        <p:spPr>
-          <a:xfrm>
-            <a:off x="502920" y="6473880"/>
-            <a:ext cx="3291120" cy="163800"/>
-          </a:xfrm>
-          <a:prstGeom prst="rect">
-            <a:avLst/>
-          </a:prstGeom>
-          <a:noFill/>
-          <a:ln w="0">
-            <a:noFill/>
-          </a:ln>
-        </p:spPr>
-        <p:style>
-          <a:lnRef idx="0"/>
-          <a:fillRef idx="0"/>
-          <a:effectRef idx="0"/>
-          <a:fontRef idx="minor"/>
-        </p:style>
-        <p:txBody>
-          <a:bodyPr lIns="0" rIns="0" tIns="0" bIns="0" anchor="ctr">
-            <a:noAutofit/>
-          </a:bodyPr>
-          <a:p>
-            <a:pPr defTabSz="914400">
-              <a:lnSpc>
-                <a:spcPct val="100000"/>
-              </a:lnSpc>
-              <a:tabLst>
-                <a:tab algn="l" pos="0"/>
-              </a:tabLst>
-            </a:pPr>
-            <a:r>
-              <a:rPr lang="en-US" sz="700" b="0" u="none" strike="noStrike">
-                <a:solidFill>
-                  <a:srgbClr val="64748b"/>
-                </a:solidFill>
-                <a:effectLst/>
-                <a:uFillTx/>
-                <a:latin typeface="Aptos"/>
-              </a:rPr>
-              <a:t>Modelo logístico + binomial negativa</a:t>
-            </a:r>
-            <a:endParaRPr lang="en-US" sz="700" b="0" u="none" strike="noStrike">
-              <a:solidFill>
-                <a:srgbClr val="000000"/>
-              </a:solidFill>
-              <a:effectLst/>
-              <a:uFillTx/>
-              <a:latin typeface="Arial"/>
-            </a:endParaRPr>
-          </a:p>
-        </p:txBody>
-      </p:sp>
-      <p:sp>
-        <p:nvSpPr>
-          <p:cNvPr id="101" name="Text 5"/>
-          <p:cNvSpPr/>
-          <p:nvPr/>
-        </p:nvSpPr>
-        <p:spPr>
-          <a:xfrm>
-            <a:off x="777240" y="1078920"/>
-            <a:ext cx="4388400" cy="502200"/>
-          </a:xfrm>
-          <a:prstGeom prst="rect">
-            <a:avLst/>
-          </a:prstGeom>
-          <a:noFill/>
-          <a:ln w="0">
-            <a:noFill/>
-          </a:ln>
-        </p:spPr>
-        <p:style>
-          <a:lnRef idx="0"/>
-          <a:fillRef idx="0"/>
-          <a:effectRef idx="0"/>
-          <a:fontRef idx="minor"/>
-        </p:style>
-        <p:txBody>
-          <a:bodyPr lIns="0" rIns="0" tIns="0" bIns="0" anchor="ctr">
-            <a:normAutofit/>
-          </a:bodyPr>
-          <a:p>
-            <a:pPr algn="ctr" defTabSz="914400">
-              <a:lnSpc>
-                <a:spcPct val="100000"/>
-              </a:lnSpc>
-              <a:tabLst>
-                <a:tab algn="l" pos="0"/>
-              </a:tabLst>
-            </a:pPr>
-            <a:r>
-              <a:rPr lang="en-US" sz="2400" b="1" u="none" strike="noStrike">
-                <a:solidFill>
-                  <a:srgbClr val="4c956c"/>
-                </a:solidFill>
-                <a:effectLst/>
-                <a:uFillTx/>
-                <a:latin typeface="Aptos Display"/>
-                <a:ea typeface="Aptos Display"/>
-              </a:rPr>
-              <a:t>X ~ NegBin(μ, k)</a:t>
-            </a:r>
-            <a:endParaRPr lang="en-US" sz="2400" b="0" u="none" strike="noStrike">
-              <a:solidFill>
-                <a:srgbClr val="000000"/>
-              </a:solidFill>
-              <a:effectLst/>
-              <a:uFillTx/>
-              <a:latin typeface="Arial"/>
-            </a:endParaRPr>
-          </a:p>
-        </p:txBody>
-      </p:sp>
-      <p:sp>
-        <p:nvSpPr>
-          <p:cNvPr id="102" name="Text 6"/>
-          <p:cNvSpPr/>
-          <p:nvPr/>
-        </p:nvSpPr>
-        <p:spPr>
-          <a:xfrm>
-            <a:off x="868680" y="1828800"/>
-            <a:ext cx="4662720" cy="547920"/>
-          </a:xfrm>
-          <a:prstGeom prst="rect">
-            <a:avLst/>
-          </a:prstGeom>
-          <a:noFill/>
-          <a:ln w="0">
-            <a:noFill/>
-          </a:ln>
-        </p:spPr>
-        <p:style>
-          <a:lnRef idx="0"/>
-          <a:fillRef idx="0"/>
-          <a:effectRef idx="0"/>
-          <a:fontRef idx="minor"/>
-        </p:style>
-        <p:txBody>
-          <a:bodyPr lIns="360" rIns="360" tIns="360" bIns="360" anchor="ctr">
-            <a:normAutofit/>
-          </a:bodyPr>
-          <a:p>
-            <a:pPr defTabSz="914400">
-              <a:lnSpc>
-                <a:spcPct val="100000"/>
-              </a:lnSpc>
-              <a:tabLst>
-                <a:tab algn="l" pos="0"/>
-              </a:tabLst>
-            </a:pPr>
-            <a:r>
-              <a:rPr lang="en-US" sz="1500" b="0" u="none" strike="noStrike">
-                <a:solidFill>
-                  <a:srgbClr val="1f2937"/>
-                </a:solidFill>
-                <a:effectLst/>
-                <a:uFillTx/>
-                <a:latin typeface="Aptos"/>
-              </a:rPr>
-              <a:t>A binomial negativa modela contagens quando os dados apresentam superdispersão: Var(X) &gt; E[X].</a:t>
-            </a:r>
-            <a:endParaRPr lang="en-US" sz="1500" b="0" u="none" strike="noStrike">
-              <a:solidFill>
-                <a:srgbClr val="000000"/>
-              </a:solidFill>
-              <a:effectLst/>
-              <a:uFillTx/>
-              <a:latin typeface="Arial"/>
-            </a:endParaRPr>
-          </a:p>
-        </p:txBody>
-      </p:sp>
-      <p:sp>
-        <p:nvSpPr>
-          <p:cNvPr id="103" name="Shape 7"/>
-          <p:cNvSpPr/>
-          <p:nvPr/>
-        </p:nvSpPr>
-        <p:spPr>
-          <a:xfrm>
-            <a:off x="868680" y="2788920"/>
-            <a:ext cx="2056680" cy="730800"/>
-          </a:xfrm>
-          <a:prstGeom prst="roundRect">
-            <a:avLst>
-              <a:gd name="adj" fmla="val 5000"/>
-            </a:avLst>
-          </a:prstGeom>
-          <a:solidFill>
-            <a:srgbClr val="ffffff"/>
-          </a:solidFill>
-          <a:ln w="10160">
-            <a:solidFill>
-              <a:srgbClr val="d9e2ec"/>
-            </a:solidFill>
-            <a:round/>
-          </a:ln>
-        </p:spPr>
-        <p:style>
-          <a:lnRef idx="0"/>
-          <a:fillRef idx="0"/>
-          <a:effectRef idx="0"/>
-          <a:fontRef idx="minor"/>
-        </p:style>
-        <p:txBody>
-          <a:bodyPr lIns="90000" rIns="90000" tIns="45000" bIns="45000" anchor="t">
-            <a:noAutofit/>
-          </a:bodyPr>
-          <a:p>
-            <a:pPr>
-              <a:lnSpc>
-                <a:spcPct val="100000"/>
-              </a:lnSpc>
-            </a:pPr>
-            <a:endParaRPr lang="en-US" sz="1800" b="0" u="none" strike="noStrike">
-              <a:solidFill>
-                <a:srgbClr val="000000"/>
-              </a:solidFill>
-              <a:effectLst/>
-              <a:uFillTx/>
-              <a:latin typeface="Arial"/>
-            </a:endParaRPr>
-          </a:p>
-        </p:txBody>
-      </p:sp>
-      <p:sp>
-        <p:nvSpPr>
-          <p:cNvPr id="104" name="Text 8"/>
-          <p:cNvSpPr/>
-          <p:nvPr/>
-        </p:nvSpPr>
-        <p:spPr>
-          <a:xfrm>
-            <a:off x="1051560" y="2953440"/>
-            <a:ext cx="1690920" cy="227880"/>
-          </a:xfrm>
-          <a:prstGeom prst="rect">
-            <a:avLst/>
-          </a:prstGeom>
-          <a:noFill/>
-          <a:ln w="0">
-            <a:noFill/>
-          </a:ln>
-        </p:spPr>
-        <p:style>
-          <a:lnRef idx="0"/>
-          <a:fillRef idx="0"/>
-          <a:effectRef idx="0"/>
-          <a:fontRef idx="minor"/>
-        </p:style>
-        <p:txBody>
-          <a:bodyPr lIns="0" rIns="0" tIns="0" bIns="0" anchor="ctr">
-            <a:noAutofit/>
-          </a:bodyPr>
-          <a:p>
-            <a:pPr defTabSz="914400">
-              <a:lnSpc>
-                <a:spcPct val="100000"/>
-              </a:lnSpc>
-              <a:tabLst>
-                <a:tab algn="l" pos="0"/>
-              </a:tabLst>
-            </a:pPr>
-            <a:r>
-              <a:rPr lang="en-US" sz="1300" b="1" u="none" strike="noStrike">
-                <a:solidFill>
-                  <a:srgbClr val="16324f"/>
-                </a:solidFill>
-                <a:effectLst/>
-                <a:uFillTx/>
-                <a:latin typeface="Aptos"/>
-              </a:rPr>
-              <a:t>Média</a:t>
-            </a:r>
-            <a:endParaRPr lang="en-US" sz="1300" b="0" u="none" strike="noStrike">
-              <a:solidFill>
-                <a:srgbClr val="000000"/>
-              </a:solidFill>
-              <a:effectLst/>
-              <a:uFillTx/>
-              <a:latin typeface="Arial"/>
-            </a:endParaRPr>
-          </a:p>
-        </p:txBody>
-      </p:sp>
-      <p:sp>
-        <p:nvSpPr>
-          <p:cNvPr id="105" name="Text 9"/>
-          <p:cNvSpPr/>
-          <p:nvPr/>
-        </p:nvSpPr>
-        <p:spPr>
-          <a:xfrm>
-            <a:off x="1051560" y="3291840"/>
-            <a:ext cx="1690920" cy="90720"/>
-          </a:xfrm>
-          <a:prstGeom prst="rect">
-            <a:avLst/>
-          </a:prstGeom>
-          <a:noFill/>
-          <a:ln w="0">
-            <a:noFill/>
-          </a:ln>
-        </p:spPr>
-        <p:style>
-          <a:lnRef idx="0"/>
-          <a:fillRef idx="0"/>
-          <a:effectRef idx="0"/>
-          <a:fontRef idx="minor"/>
-        </p:style>
-        <p:txBody>
-          <a:bodyPr lIns="0" rIns="0" tIns="0" bIns="0" anchor="ctr">
-            <a:normAutofit fontScale="62500" lnSpcReduction="19999"/>
-          </a:bodyPr>
-          <a:p>
-            <a:pPr defTabSz="914400">
-              <a:lnSpc>
-                <a:spcPct val="100000"/>
-              </a:lnSpc>
-              <a:tabLst>
-                <a:tab algn="l" pos="0"/>
-              </a:tabLst>
-            </a:pPr>
-            <a:r>
-              <a:rPr lang="en-US" sz="1100" b="0" u="none" strike="noStrike">
-                <a:solidFill>
-                  <a:srgbClr val="1f2937"/>
-                </a:solidFill>
-                <a:effectLst/>
-                <a:uFillTx/>
-                <a:latin typeface="Aptos"/>
-              </a:rPr>
-              <a:t>E[X] = μ</a:t>
-            </a:r>
-            <a:endParaRPr lang="en-US" sz="1100" b="0" u="none" strike="noStrike">
-              <a:solidFill>
-                <a:srgbClr val="000000"/>
-              </a:solidFill>
-              <a:effectLst/>
-              <a:uFillTx/>
-              <a:latin typeface="Arial"/>
-            </a:endParaRPr>
-          </a:p>
-        </p:txBody>
-      </p:sp>
-      <p:sp>
-        <p:nvSpPr>
-          <p:cNvPr id="106" name="Shape 10"/>
-          <p:cNvSpPr/>
-          <p:nvPr/>
-        </p:nvSpPr>
-        <p:spPr>
-          <a:xfrm>
-            <a:off x="3246120" y="2788920"/>
-            <a:ext cx="2239560" cy="730800"/>
-          </a:xfrm>
-          <a:prstGeom prst="roundRect">
-            <a:avLst>
-              <a:gd name="adj" fmla="val 5000"/>
-            </a:avLst>
-          </a:prstGeom>
-          <a:solidFill>
-            <a:srgbClr val="ffffff"/>
-          </a:solidFill>
-          <a:ln w="10160">
-            <a:solidFill>
-              <a:srgbClr val="d9e2ec"/>
-            </a:solidFill>
-            <a:round/>
-          </a:ln>
-        </p:spPr>
-        <p:style>
-          <a:lnRef idx="0"/>
-          <a:fillRef idx="0"/>
-          <a:effectRef idx="0"/>
-          <a:fontRef idx="minor"/>
-        </p:style>
-        <p:txBody>
-          <a:bodyPr lIns="90000" rIns="90000" tIns="45000" bIns="45000" anchor="t">
-            <a:noAutofit/>
-          </a:bodyPr>
-          <a:p>
-            <a:pPr>
-              <a:lnSpc>
-                <a:spcPct val="100000"/>
-              </a:lnSpc>
-            </a:pPr>
-            <a:endParaRPr lang="en-US" sz="1800" b="0" u="none" strike="noStrike">
-              <a:solidFill>
-                <a:srgbClr val="000000"/>
-              </a:solidFill>
-              <a:effectLst/>
-              <a:uFillTx/>
-              <a:latin typeface="Arial"/>
-            </a:endParaRPr>
-          </a:p>
-        </p:txBody>
-      </p:sp>
-      <p:sp>
-        <p:nvSpPr>
-          <p:cNvPr id="107" name="Text 11"/>
-          <p:cNvSpPr/>
-          <p:nvPr/>
-        </p:nvSpPr>
-        <p:spPr>
-          <a:xfrm>
-            <a:off x="3429000" y="2953440"/>
-            <a:ext cx="1873800" cy="227880"/>
-          </a:xfrm>
-          <a:prstGeom prst="rect">
-            <a:avLst/>
-          </a:prstGeom>
-          <a:noFill/>
-          <a:ln w="0">
-            <a:noFill/>
-          </a:ln>
-        </p:spPr>
-        <p:style>
-          <a:lnRef idx="0"/>
-          <a:fillRef idx="0"/>
-          <a:effectRef idx="0"/>
-          <a:fontRef idx="minor"/>
-        </p:style>
-        <p:txBody>
-          <a:bodyPr lIns="0" rIns="0" tIns="0" bIns="0" anchor="ctr">
-            <a:noAutofit/>
-          </a:bodyPr>
-          <a:p>
-            <a:pPr defTabSz="914400">
-              <a:lnSpc>
-                <a:spcPct val="100000"/>
-              </a:lnSpc>
-              <a:tabLst>
-                <a:tab algn="l" pos="0"/>
-              </a:tabLst>
-            </a:pPr>
-            <a:r>
-              <a:rPr lang="en-US" sz="1300" b="1" u="none" strike="noStrike">
-                <a:solidFill>
-                  <a:srgbClr val="16324f"/>
-                </a:solidFill>
-                <a:effectLst/>
-                <a:uFillTx/>
-                <a:latin typeface="Aptos"/>
-              </a:rPr>
-              <a:t>Variância</a:t>
-            </a:r>
-            <a:endParaRPr lang="en-US" sz="1300" b="0" u="none" strike="noStrike">
-              <a:solidFill>
-                <a:srgbClr val="000000"/>
-              </a:solidFill>
-              <a:effectLst/>
-              <a:uFillTx/>
-              <a:latin typeface="Arial"/>
-            </a:endParaRPr>
-          </a:p>
-        </p:txBody>
-      </p:sp>
-      <p:sp>
-        <p:nvSpPr>
-          <p:cNvPr id="108" name="Text 12"/>
-          <p:cNvSpPr/>
-          <p:nvPr/>
-        </p:nvSpPr>
-        <p:spPr>
-          <a:xfrm>
-            <a:off x="3429000" y="3291840"/>
-            <a:ext cx="1873800" cy="90720"/>
-          </a:xfrm>
-          <a:prstGeom prst="rect">
-            <a:avLst/>
-          </a:prstGeom>
-          <a:noFill/>
-          <a:ln w="0">
-            <a:noFill/>
-          </a:ln>
-        </p:spPr>
-        <p:style>
-          <a:lnRef idx="0"/>
-          <a:fillRef idx="0"/>
-          <a:effectRef idx="0"/>
-          <a:fontRef idx="minor"/>
-        </p:style>
-        <p:txBody>
-          <a:bodyPr lIns="0" rIns="0" tIns="0" bIns="0" anchor="ctr">
-            <a:normAutofit fontScale="62500" lnSpcReduction="19999"/>
-          </a:bodyPr>
-          <a:p>
-            <a:pPr defTabSz="914400">
-              <a:lnSpc>
-                <a:spcPct val="100000"/>
-              </a:lnSpc>
-              <a:tabLst>
-                <a:tab algn="l" pos="0"/>
-              </a:tabLst>
-            </a:pPr>
-            <a:r>
-              <a:rPr lang="en-US" sz="1100" b="0" u="none" strike="noStrike">
-                <a:solidFill>
-                  <a:srgbClr val="1f2937"/>
-                </a:solidFill>
-                <a:effectLst/>
-                <a:uFillTx/>
-                <a:latin typeface="Aptos"/>
-              </a:rPr>
-              <a:t>Var(X) = μ + μ²/k</a:t>
-            </a:r>
-            <a:endParaRPr lang="en-US" sz="1100" b="0" u="none" strike="noStrike">
-              <a:solidFill>
-                <a:srgbClr val="000000"/>
-              </a:solidFill>
-              <a:effectLst/>
-              <a:uFillTx/>
-              <a:latin typeface="Arial"/>
-            </a:endParaRPr>
-          </a:p>
-        </p:txBody>
-      </p:sp>
-      <p:sp>
-        <p:nvSpPr>
-          <p:cNvPr id="109" name="Shape 13"/>
-          <p:cNvSpPr/>
-          <p:nvPr/>
-        </p:nvSpPr>
-        <p:spPr>
-          <a:xfrm>
-            <a:off x="868680" y="3886200"/>
-            <a:ext cx="4617000" cy="1050840"/>
-          </a:xfrm>
-          <a:prstGeom prst="roundRect">
-            <a:avLst>
-              <a:gd name="adj" fmla="val 3478"/>
-            </a:avLst>
-          </a:prstGeom>
-          <a:solidFill>
-            <a:srgbClr val="ffffff"/>
-          </a:solidFill>
-          <a:ln w="10160">
-            <a:solidFill>
-              <a:srgbClr val="d9e2ec"/>
-            </a:solidFill>
-            <a:round/>
-          </a:ln>
-        </p:spPr>
-        <p:style>
-          <a:lnRef idx="0"/>
-          <a:fillRef idx="0"/>
-          <a:effectRef idx="0"/>
-          <a:fontRef idx="minor"/>
-        </p:style>
-        <p:txBody>
-          <a:bodyPr lIns="90000" rIns="90000" tIns="45000" bIns="45000" anchor="t">
-            <a:noAutofit/>
-          </a:bodyPr>
-          <a:p>
-            <a:pPr>
-              <a:lnSpc>
-                <a:spcPct val="100000"/>
-              </a:lnSpc>
-            </a:pPr>
-            <a:endParaRPr lang="en-US" sz="1800" b="0" u="none" strike="noStrike">
-              <a:solidFill>
-                <a:srgbClr val="000000"/>
-              </a:solidFill>
-              <a:effectLst/>
-              <a:uFillTx/>
-              <a:latin typeface="Arial"/>
-            </a:endParaRPr>
-          </a:p>
-        </p:txBody>
-      </p:sp>
-      <p:sp>
-        <p:nvSpPr>
-          <p:cNvPr id="110" name="Text 14"/>
-          <p:cNvSpPr/>
-          <p:nvPr/>
-        </p:nvSpPr>
-        <p:spPr>
-          <a:xfrm>
-            <a:off x="1051560" y="4050720"/>
-            <a:ext cx="4251240" cy="227880"/>
-          </a:xfrm>
-          <a:prstGeom prst="rect">
-            <a:avLst/>
-          </a:prstGeom>
-          <a:noFill/>
-          <a:ln w="0">
-            <a:noFill/>
-          </a:ln>
-        </p:spPr>
-        <p:style>
-          <a:lnRef idx="0"/>
-          <a:fillRef idx="0"/>
-          <a:effectRef idx="0"/>
-          <a:fontRef idx="minor"/>
-        </p:style>
-        <p:txBody>
-          <a:bodyPr lIns="0" rIns="0" tIns="0" bIns="0" anchor="ctr">
-            <a:noAutofit/>
-          </a:bodyPr>
-          <a:p>
-            <a:pPr defTabSz="914400">
-              <a:lnSpc>
-                <a:spcPct val="100000"/>
-              </a:lnSpc>
-              <a:tabLst>
-                <a:tab algn="l" pos="0"/>
-              </a:tabLst>
-            </a:pPr>
-            <a:r>
-              <a:rPr lang="en-US" sz="1300" b="1" u="none" strike="noStrike">
-                <a:solidFill>
-                  <a:srgbClr val="16324f"/>
-                </a:solidFill>
-                <a:effectLst/>
-                <a:uFillTx/>
-                <a:latin typeface="Aptos"/>
-              </a:rPr>
-              <a:t>Papel de k</a:t>
-            </a:r>
-            <a:endParaRPr lang="en-US" sz="1300" b="0" u="none" strike="noStrike">
-              <a:solidFill>
-                <a:srgbClr val="000000"/>
-              </a:solidFill>
-              <a:effectLst/>
-              <a:uFillTx/>
-              <a:latin typeface="Arial"/>
-            </a:endParaRPr>
-          </a:p>
-        </p:txBody>
-      </p:sp>
-      <p:sp>
-        <p:nvSpPr>
-          <p:cNvPr id="111" name="Text 15"/>
-          <p:cNvSpPr/>
-          <p:nvPr/>
-        </p:nvSpPr>
-        <p:spPr>
-          <a:xfrm>
-            <a:off x="1051560" y="4389120"/>
-            <a:ext cx="4251240" cy="410760"/>
-          </a:xfrm>
-          <a:prstGeom prst="rect">
-            <a:avLst/>
-          </a:prstGeom>
-          <a:noFill/>
-          <a:ln w="0">
-            <a:noFill/>
-          </a:ln>
-        </p:spPr>
-        <p:style>
-          <a:lnRef idx="0"/>
-          <a:fillRef idx="0"/>
-          <a:effectRef idx="0"/>
-          <a:fontRef idx="minor"/>
-        </p:style>
-        <p:txBody>
-          <a:bodyPr lIns="0" rIns="0" tIns="0" bIns="0" anchor="ctr">
-            <a:normAutofit/>
-          </a:bodyPr>
-          <a:p>
-            <a:pPr defTabSz="914400">
-              <a:lnSpc>
-                <a:spcPct val="100000"/>
-              </a:lnSpc>
-              <a:tabLst>
-                <a:tab algn="l" pos="0"/>
-              </a:tabLst>
-            </a:pPr>
-            <a:r>
-              <a:rPr lang="en-US" sz="1100" b="0" u="none" strike="noStrike">
-                <a:solidFill>
-                  <a:srgbClr val="1f2937"/>
-                </a:solidFill>
-                <a:effectLst/>
-                <a:uFillTx/>
-                <a:latin typeface="Aptos"/>
-              </a:rPr>
-              <a:t>quanto menor k, maior a agregação e a incerteza nas contagens.</a:t>
-            </a:r>
-            <a:endParaRPr lang="en-US" sz="1100" b="0" u="none" strike="noStrike">
-              <a:solidFill>
-                <a:srgbClr val="000000"/>
-              </a:solidFill>
-              <a:effectLst/>
-              <a:uFillTx/>
-              <a:latin typeface="Arial"/>
-            </a:endParaRPr>
-          </a:p>
-        </p:txBody>
-      </p:sp>
       <p:pic>
         <p:nvPicPr>
-          <p:cNvPr id="112" name="Image 0" descr="/mnt/data/poisson_vs_nb.svg"/>
+          <p:cNvPr id="95" name=""/>
           <p:cNvPicPr/>
           <p:nvPr/>
         </p:nvPicPr>
         <p:blipFill>
-          <a:blip r:embed="rId1">
-            <a:extLst>
-              <a:ext uri="{96DAC541-7B7A-43D3-8B79-37D633B846F1}">
-                <asvg:svgBlip xmlns:asvg="http://schemas.microsoft.com/office/drawing/2016/SVG/main" r:embed="rId2"/>
-              </a:ext>
-            </a:extLst>
-          </a:blip>
+          <a:blip r:embed="rId1"/>
           <a:stretch/>
         </p:blipFill>
         <p:spPr>
           <a:xfrm>
-            <a:off x="6172200" y="1024200"/>
-            <a:ext cx="5257080" cy="2632680"/>
+            <a:off x="18720" y="3960"/>
+            <a:ext cx="12184920" cy="6857640"/>
           </a:xfrm>
           <a:prstGeom prst="rect">
             <a:avLst/>
@@ -17388,126 +16305,6 @@
           </a:ln>
         </p:spPr>
       </p:pic>
-      <p:sp>
-        <p:nvSpPr>
-          <p:cNvPr id="113" name="Text 16"/>
-          <p:cNvSpPr/>
-          <p:nvPr/>
-        </p:nvSpPr>
-        <p:spPr>
-          <a:xfrm>
-            <a:off x="6355080" y="3977640"/>
-            <a:ext cx="4799880" cy="1050840"/>
-          </a:xfrm>
-          <a:prstGeom prst="rect">
-            <a:avLst/>
-          </a:prstGeom>
-          <a:noFill/>
-          <a:ln w="0">
-            <a:noFill/>
-          </a:ln>
-        </p:spPr>
-        <p:style>
-          <a:lnRef idx="0"/>
-          <a:fillRef idx="0"/>
-          <a:effectRef idx="0"/>
-          <a:fontRef idx="minor"/>
-        </p:style>
-        <p:txBody>
-          <a:bodyPr lIns="360" rIns="360" tIns="360" bIns="360" anchor="ctr">
-            <a:normAutofit/>
-          </a:bodyPr>
-          <a:p>
-            <a:pPr defTabSz="914400">
-              <a:lnSpc>
-                <a:spcPct val="100000"/>
-              </a:lnSpc>
-              <a:tabLst>
-                <a:tab algn="l" pos="0"/>
-              </a:tabLst>
-            </a:pPr>
-            <a:r>
-              <a:rPr lang="en-US" sz="1400" b="0" u="none" strike="noStrike">
-                <a:solidFill>
-                  <a:srgbClr val="1f2937"/>
-                </a:solidFill>
-                <a:effectLst/>
-                <a:uFillTx/>
-                <a:latin typeface="Aptos"/>
-              </a:rPr>
-              <a:t>Interpretação: mesmo com a mesma média μ, a binomial negativa coloca mais probabilidade em valores extremos. Isso é essencial para estimar risco de ultrapassar limites sanitários.</a:t>
-            </a:r>
-            <a:endParaRPr lang="en-US" sz="1400" b="0" u="none" strike="noStrike">
-              <a:solidFill>
-                <a:srgbClr val="000000"/>
-              </a:solidFill>
-              <a:effectLst/>
-              <a:uFillTx/>
-              <a:latin typeface="Arial"/>
-            </a:endParaRPr>
-          </a:p>
-        </p:txBody>
-      </p:sp>
-      <p:sp>
-        <p:nvSpPr>
-          <p:cNvPr id="114" name="Text 17"/>
-          <p:cNvSpPr/>
-          <p:nvPr/>
-        </p:nvSpPr>
-        <p:spPr>
-          <a:xfrm>
-            <a:off x="11475720" y="6473880"/>
-            <a:ext cx="255240" cy="136440"/>
-          </a:xfrm>
-          <a:prstGeom prst="rect">
-            <a:avLst/>
-          </a:prstGeom>
-          <a:noFill/>
-          <a:ln w="0">
-            <a:noFill/>
-          </a:ln>
-        </p:spPr>
-        <p:style>
-          <a:lnRef idx="0"/>
-          <a:fillRef idx="0"/>
-          <a:effectRef idx="0"/>
-          <a:fontRef idx="minor"/>
-        </p:style>
-        <p:txBody>
-          <a:bodyPr lIns="0" rIns="0" tIns="0" bIns="0" anchor="ctr">
-            <a:noAutofit/>
-          </a:bodyPr>
-          <a:p>
-            <a:pPr algn="r" defTabSz="914400">
-              <a:lnSpc>
-                <a:spcPct val="100000"/>
-              </a:lnSpc>
-              <a:tabLst>
-                <a:tab algn="l" pos="0"/>
-              </a:tabLst>
-            </a:pPr>
-            <a:r>
-              <a:rPr lang="en-US" sz="700" b="0" u="none" strike="noStrike">
-                <a:solidFill>
-                  <a:srgbClr val="64748b"/>
-                </a:solidFill>
-                <a:effectLst/>
-                <a:uFillTx/>
-                <a:latin typeface="Aptos"/>
-              </a:rPr>
-              <a:t>5</a:t>
-            </a:r>
-            <a:endParaRPr lang="en-US" sz="700" b="0" u="none" strike="noStrike">
-              <a:solidFill>
-                <a:srgbClr val="000000"/>
-              </a:solidFill>
-              <a:effectLst/>
-              <a:uFillTx/>
-              <a:latin typeface="Arial"/>
-            </a:endParaRPr>
-          </a:p>
-        </p:txBody>
-      </p:sp>
     </p:spTree>
   </p:cSld>
   <mc:AlternateContent>
@@ -17547,14 +16344,14 @@
       </p:grpSpPr>
       <p:sp>
         <p:nvSpPr>
-          <p:cNvPr id="115" name="Shape 0"/>
+          <p:cNvPr id="96" name="Shape 0"/>
           <p:cNvSpPr/>
           <p:nvPr/>
         </p:nvSpPr>
         <p:spPr>
           <a:xfrm>
             <a:off x="0" y="0"/>
-            <a:ext cx="12191040" cy="657720"/>
+            <a:ext cx="12190680" cy="657360"/>
           </a:xfrm>
           <a:prstGeom prst="rect">
             <a:avLst/>
@@ -17598,14 +16395,14 @@
       </p:sp>
       <p:sp>
         <p:nvSpPr>
-          <p:cNvPr id="116" name="Text 1"/>
+          <p:cNvPr id="97" name="Text 1"/>
           <p:cNvSpPr/>
           <p:nvPr/>
         </p:nvSpPr>
         <p:spPr>
           <a:xfrm>
             <a:off x="502920" y="146160"/>
-            <a:ext cx="8868960" cy="346680"/>
+            <a:ext cx="8868600" cy="346320"/>
           </a:xfrm>
           <a:prstGeom prst="rect">
             <a:avLst/>
@@ -17659,14 +16456,14 @@
       </p:sp>
       <p:sp>
         <p:nvSpPr>
-          <p:cNvPr id="117" name="Text 2"/>
+          <p:cNvPr id="98" name="Text 2"/>
           <p:cNvSpPr/>
           <p:nvPr/>
         </p:nvSpPr>
         <p:spPr>
           <a:xfrm>
             <a:off x="9555480" y="173880"/>
-            <a:ext cx="2056680" cy="255240"/>
+            <a:ext cx="2056320" cy="254880"/>
           </a:xfrm>
           <a:prstGeom prst="rect">
             <a:avLst/>
@@ -17719,7 +16516,7 @@
       </p:sp>
       <p:sp>
         <p:nvSpPr>
-          <p:cNvPr id="118" name="Shape 3"/>
+          <p:cNvPr id="99" name="Shape 3"/>
           <p:cNvSpPr/>
           <p:nvPr/>
         </p:nvSpPr>
@@ -17762,14 +16559,14 @@
       </p:sp>
       <p:sp>
         <p:nvSpPr>
-          <p:cNvPr id="119" name="Text 4"/>
+          <p:cNvPr id="100" name="Text 4"/>
           <p:cNvSpPr/>
           <p:nvPr/>
         </p:nvSpPr>
         <p:spPr>
           <a:xfrm>
             <a:off x="502920" y="6473880"/>
-            <a:ext cx="3291120" cy="163800"/>
+            <a:ext cx="3290760" cy="163440"/>
           </a:xfrm>
           <a:prstGeom prst="rect">
             <a:avLst/>
@@ -17822,14 +16619,14 @@
       </p:sp>
       <p:sp>
         <p:nvSpPr>
-          <p:cNvPr id="120" name="Text 5"/>
+          <p:cNvPr id="101" name="Text 5"/>
           <p:cNvSpPr/>
           <p:nvPr/>
         </p:nvSpPr>
         <p:spPr>
           <a:xfrm>
             <a:off x="731520" y="960120"/>
-            <a:ext cx="10606320" cy="456480"/>
+            <a:ext cx="10605960" cy="456120"/>
           </a:xfrm>
           <a:prstGeom prst="rect">
             <a:avLst/>
@@ -17882,14 +16679,14 @@
       </p:sp>
       <p:sp>
         <p:nvSpPr>
-          <p:cNvPr id="121" name="Shape 6"/>
+          <p:cNvPr id="102" name="Shape 6"/>
           <p:cNvSpPr/>
           <p:nvPr/>
         </p:nvSpPr>
         <p:spPr>
           <a:xfrm>
             <a:off x="822960" y="2011680"/>
-            <a:ext cx="1965240" cy="1416600"/>
+            <a:ext cx="1964880" cy="1416240"/>
           </a:xfrm>
           <a:prstGeom prst="roundRect">
             <a:avLst>
@@ -17935,14 +16732,14 @@
       </p:sp>
       <p:sp>
         <p:nvSpPr>
-          <p:cNvPr id="122" name="Text 7"/>
+          <p:cNvPr id="103" name="Text 7"/>
           <p:cNvSpPr/>
           <p:nvPr/>
         </p:nvSpPr>
         <p:spPr>
           <a:xfrm>
             <a:off x="960120" y="2240280"/>
-            <a:ext cx="1690920" cy="227880"/>
+            <a:ext cx="1690560" cy="227520"/>
           </a:xfrm>
           <a:prstGeom prst="rect">
             <a:avLst/>
@@ -17995,14 +16792,14 @@
       </p:sp>
       <p:sp>
         <p:nvSpPr>
-          <p:cNvPr id="123" name="Text 8"/>
+          <p:cNvPr id="104" name="Text 8"/>
           <p:cNvSpPr/>
           <p:nvPr/>
         </p:nvSpPr>
         <p:spPr>
           <a:xfrm>
             <a:off x="987480" y="2697480"/>
-            <a:ext cx="1645200" cy="410760"/>
+            <a:ext cx="1644840" cy="410400"/>
           </a:xfrm>
           <a:prstGeom prst="rect">
             <a:avLst/>
@@ -18055,14 +16852,14 @@
       </p:sp>
       <p:sp>
         <p:nvSpPr>
-          <p:cNvPr id="124" name="Shape 9"/>
+          <p:cNvPr id="105" name="Shape 9"/>
           <p:cNvSpPr/>
           <p:nvPr/>
         </p:nvSpPr>
         <p:spPr>
           <a:xfrm>
             <a:off x="2834640" y="2423160"/>
-            <a:ext cx="319320" cy="547920"/>
+            <a:ext cx="318960" cy="547560"/>
           </a:xfrm>
           <a:prstGeom prst="chevron">
             <a:avLst>
@@ -18108,14 +16905,14 @@
       </p:sp>
       <p:sp>
         <p:nvSpPr>
-          <p:cNvPr id="125" name="Shape 10"/>
+          <p:cNvPr id="106" name="Shape 10"/>
           <p:cNvSpPr/>
           <p:nvPr/>
         </p:nvSpPr>
         <p:spPr>
           <a:xfrm>
             <a:off x="3291840" y="2011680"/>
-            <a:ext cx="1965240" cy="1416600"/>
+            <a:ext cx="1964880" cy="1416240"/>
           </a:xfrm>
           <a:prstGeom prst="roundRect">
             <a:avLst>
@@ -18161,14 +16958,14 @@
       </p:sp>
       <p:sp>
         <p:nvSpPr>
-          <p:cNvPr id="126" name="Text 11"/>
+          <p:cNvPr id="107" name="Text 11"/>
           <p:cNvSpPr/>
           <p:nvPr/>
         </p:nvSpPr>
         <p:spPr>
           <a:xfrm>
             <a:off x="3429000" y="2240280"/>
-            <a:ext cx="1690920" cy="227880"/>
+            <a:ext cx="1690560" cy="227520"/>
           </a:xfrm>
           <a:prstGeom prst="rect">
             <a:avLst/>
@@ -18221,14 +17018,14 @@
       </p:sp>
       <p:sp>
         <p:nvSpPr>
-          <p:cNvPr id="127" name="Text 12"/>
+          <p:cNvPr id="108" name="Text 12"/>
           <p:cNvSpPr/>
           <p:nvPr/>
         </p:nvSpPr>
         <p:spPr>
           <a:xfrm>
             <a:off x="3456360" y="2697480"/>
-            <a:ext cx="1645200" cy="410760"/>
+            <a:ext cx="1644840" cy="410400"/>
           </a:xfrm>
           <a:prstGeom prst="rect">
             <a:avLst/>
@@ -18281,14 +17078,14 @@
       </p:sp>
       <p:sp>
         <p:nvSpPr>
-          <p:cNvPr id="128" name="Shape 13"/>
+          <p:cNvPr id="109" name="Shape 13"/>
           <p:cNvSpPr/>
           <p:nvPr/>
         </p:nvSpPr>
         <p:spPr>
           <a:xfrm>
             <a:off x="5303520" y="2423160"/>
-            <a:ext cx="319320" cy="547920"/>
+            <a:ext cx="318960" cy="547560"/>
           </a:xfrm>
           <a:prstGeom prst="chevron">
             <a:avLst>
@@ -18334,14 +17131,14 @@
       </p:sp>
       <p:sp>
         <p:nvSpPr>
-          <p:cNvPr id="129" name="Shape 14"/>
+          <p:cNvPr id="110" name="Shape 14"/>
           <p:cNvSpPr/>
           <p:nvPr/>
         </p:nvSpPr>
         <p:spPr>
           <a:xfrm>
             <a:off x="5760720" y="2011680"/>
-            <a:ext cx="1965240" cy="1416600"/>
+            <a:ext cx="1964880" cy="1416240"/>
           </a:xfrm>
           <a:prstGeom prst="roundRect">
             <a:avLst>
@@ -18387,14 +17184,14 @@
       </p:sp>
       <p:sp>
         <p:nvSpPr>
-          <p:cNvPr id="130" name="Text 15"/>
+          <p:cNvPr id="111" name="Text 15"/>
           <p:cNvSpPr/>
           <p:nvPr/>
         </p:nvSpPr>
         <p:spPr>
           <a:xfrm>
             <a:off x="5897880" y="2240280"/>
-            <a:ext cx="1690920" cy="227880"/>
+            <a:ext cx="1690560" cy="227520"/>
           </a:xfrm>
           <a:prstGeom prst="rect">
             <a:avLst/>
@@ -18447,14 +17244,14 @@
       </p:sp>
       <p:sp>
         <p:nvSpPr>
-          <p:cNvPr id="131" name="Text 16"/>
+          <p:cNvPr id="112" name="Text 16"/>
           <p:cNvSpPr/>
           <p:nvPr/>
         </p:nvSpPr>
         <p:spPr>
           <a:xfrm>
             <a:off x="5925240" y="2697480"/>
-            <a:ext cx="1645200" cy="410760"/>
+            <a:ext cx="1644840" cy="410400"/>
           </a:xfrm>
           <a:prstGeom prst="rect">
             <a:avLst/>
@@ -18507,14 +17304,14 @@
       </p:sp>
       <p:sp>
         <p:nvSpPr>
-          <p:cNvPr id="132" name="Shape 17"/>
+          <p:cNvPr id="113" name="Shape 17"/>
           <p:cNvSpPr/>
           <p:nvPr/>
         </p:nvSpPr>
         <p:spPr>
           <a:xfrm>
             <a:off x="7772400" y="2423160"/>
-            <a:ext cx="319320" cy="547920"/>
+            <a:ext cx="318960" cy="547560"/>
           </a:xfrm>
           <a:prstGeom prst="chevron">
             <a:avLst>
@@ -18560,14 +17357,14 @@
       </p:sp>
       <p:sp>
         <p:nvSpPr>
-          <p:cNvPr id="133" name="Shape 18"/>
+          <p:cNvPr id="114" name="Shape 18"/>
           <p:cNvSpPr/>
           <p:nvPr/>
         </p:nvSpPr>
         <p:spPr>
           <a:xfrm>
             <a:off x="8229600" y="2011680"/>
-            <a:ext cx="1965240" cy="1416600"/>
+            <a:ext cx="1964880" cy="1416240"/>
           </a:xfrm>
           <a:prstGeom prst="roundRect">
             <a:avLst>
@@ -18613,14 +17410,14 @@
       </p:sp>
       <p:sp>
         <p:nvSpPr>
-          <p:cNvPr id="134" name="Text 19"/>
+          <p:cNvPr id="115" name="Text 19"/>
           <p:cNvSpPr/>
           <p:nvPr/>
         </p:nvSpPr>
         <p:spPr>
           <a:xfrm>
             <a:off x="8366760" y="2240280"/>
-            <a:ext cx="1690920" cy="227880"/>
+            <a:ext cx="1690560" cy="227520"/>
           </a:xfrm>
           <a:prstGeom prst="rect">
             <a:avLst/>
@@ -18673,14 +17470,14 @@
       </p:sp>
       <p:sp>
         <p:nvSpPr>
-          <p:cNvPr id="135" name="Text 20"/>
+          <p:cNvPr id="116" name="Text 20"/>
           <p:cNvSpPr/>
           <p:nvPr/>
         </p:nvSpPr>
         <p:spPr>
           <a:xfrm>
             <a:off x="8394120" y="2697480"/>
-            <a:ext cx="1645200" cy="410760"/>
+            <a:ext cx="1644840" cy="410400"/>
           </a:xfrm>
           <a:prstGeom prst="rect">
             <a:avLst/>
@@ -18733,14 +17530,14 @@
       </p:sp>
       <p:sp>
         <p:nvSpPr>
-          <p:cNvPr id="136" name="Text 21"/>
+          <p:cNvPr id="117" name="Text 21"/>
           <p:cNvSpPr/>
           <p:nvPr/>
         </p:nvSpPr>
         <p:spPr>
           <a:xfrm>
             <a:off x="1965960" y="4297680"/>
-            <a:ext cx="8228880" cy="593640"/>
+            <a:ext cx="8228520" cy="593280"/>
           </a:xfrm>
           <a:prstGeom prst="rect">
             <a:avLst/>
@@ -18794,14 +17591,14 @@
       </p:sp>
       <p:sp>
         <p:nvSpPr>
-          <p:cNvPr id="137" name="Text 22"/>
+          <p:cNvPr id="118" name="Text 22"/>
           <p:cNvSpPr/>
           <p:nvPr/>
         </p:nvSpPr>
         <p:spPr>
           <a:xfrm>
             <a:off x="1645920" y="5120640"/>
-            <a:ext cx="8960400" cy="547920"/>
+            <a:ext cx="8960040" cy="547560"/>
           </a:xfrm>
           <a:prstGeom prst="rect">
             <a:avLst/>
@@ -18854,14 +17651,14 @@
       </p:sp>
       <p:sp>
         <p:nvSpPr>
-          <p:cNvPr id="138" name="Text 23"/>
+          <p:cNvPr id="119" name="Text 23"/>
           <p:cNvSpPr/>
           <p:nvPr/>
         </p:nvSpPr>
         <p:spPr>
           <a:xfrm>
             <a:off x="11475720" y="6473880"/>
-            <a:ext cx="255240" cy="136440"/>
+            <a:ext cx="254880" cy="136080"/>
           </a:xfrm>
           <a:prstGeom prst="rect">
             <a:avLst/>

--- a/parte_2_modelo_logistico_binomial_negativa.pptx
+++ b/parte_2_modelo_logistico_binomial_negativa.pptx
@@ -85,51 +85,7 @@
                 <a:uFillTx/>
                 <a:latin typeface="Arial"/>
               </a:rPr>
-              <a:t>Click </a:t>
-            </a:r>
-            <a:r>
-              <a:rPr lang="en-US" sz="4400" b="0" u="none" strike="noStrike">
-                <a:solidFill>
-                  <a:srgbClr val="000000"/>
-                </a:solidFill>
-                <a:effectLst/>
-                <a:uFillTx/>
-                <a:latin typeface="Arial"/>
-              </a:rPr>
-              <a:t>to </a:t>
-            </a:r>
-            <a:r>
-              <a:rPr lang="en-US" sz="4400" b="0" u="none" strike="noStrike">
-                <a:solidFill>
-                  <a:srgbClr val="000000"/>
-                </a:solidFill>
-                <a:effectLst/>
-                <a:uFillTx/>
-                <a:latin typeface="Arial"/>
-              </a:rPr>
-              <a:t>move </a:t>
-            </a:r>
-            <a:r>
-              <a:rPr lang="en-US" sz="4400" b="0" u="none" strike="noStrike">
-                <a:solidFill>
-                  <a:srgbClr val="000000"/>
-                </a:solidFill>
-                <a:effectLst/>
-                <a:uFillTx/>
-                <a:latin typeface="Arial"/>
-              </a:rPr>
-              <a:t>the </a:t>
-            </a:r>
-            <a:r>
-              <a:rPr lang="en-US" sz="4400" b="0" u="none" strike="noStrike">
-                <a:solidFill>
-                  <a:srgbClr val="000000"/>
-                </a:solidFill>
-                <a:effectLst/>
-                <a:uFillTx/>
-                <a:latin typeface="Arial"/>
-              </a:rPr>
-              <a:t>slide</a:t>
+              <a:t>Click to move the slide</a:t>
             </a:r>
             <a:endParaRPr lang="en-US" sz="4400" b="0" u="none" strike="noStrike">
               <a:solidFill>
@@ -182,29 +138,7 @@
                 <a:uFillTx/>
                 <a:latin typeface="Arial"/>
               </a:rPr>
-              <a:t>Click to edit </a:t>
-            </a:r>
-            <a:r>
-              <a:rPr lang="en-US" sz="2000" b="0" u="none" strike="noStrike">
-                <a:solidFill>
-                  <a:srgbClr val="000000"/>
-                </a:solidFill>
-                <a:effectLst/>
-                <a:uFillTx/>
-                <a:latin typeface="Arial"/>
-              </a:rPr>
-              <a:t>the notes </a:t>
-            </a:r>
-            <a:r>
-              <a:rPr lang="en-US" sz="2000" b="0" u="none" strike="noStrike">
-                <a:solidFill>
-                  <a:srgbClr val="000000"/>
-                </a:solidFill>
-                <a:effectLst/>
-                <a:uFillTx/>
-                <a:latin typeface="Arial"/>
-              </a:rPr>
-              <a:t>format</a:t>
+              <a:t>Click to edit the notes format</a:t>
             </a:r>
             <a:endParaRPr lang="en-US" sz="2000" b="0" u="none" strike="noStrike">
               <a:solidFill>
@@ -446,7 +380,7 @@
             <a:pPr indent="0" algn="r">
               <a:buNone/>
             </a:pPr>
-            <a:fld id="{16A882B3-E29A-48D3-A1C0-AD36F5E7BDF9}" type="slidenum">
+            <a:fld id="{495BACDD-F097-4977-8C77-DACC96BF4565}" type="slidenum">
               <a:rPr lang="en-US" sz="1400" b="0" u="none" strike="noStrike">
                 <a:solidFill>
                   <a:srgbClr val="000000"/>
@@ -493,7 +427,7 @@
       </p:grpSpPr>
       <p:sp>
         <p:nvSpPr>
-          <p:cNvPr id="232" name="PlaceHolder 1"/>
+          <p:cNvPr id="223" name="PlaceHolder 1"/>
           <p:cNvSpPr>
             <a:spLocks noGrp="1"/>
           </p:cNvSpPr>
@@ -504,19 +438,19 @@
         <p:spPr>
           <a:xfrm>
             <a:off x="685800" y="1143000"/>
-            <a:ext cx="5485320" cy="3085200"/>
-          </a:xfrm>
-          <a:prstGeom prst="rect">
-            <a:avLst/>
-          </a:prstGeom>
-          <a:ln w="0">
-            <a:noFill/>
-          </a:ln>
-        </p:spPr>
-      </p:sp>
-      <p:sp>
-        <p:nvSpPr>
-          <p:cNvPr id="233" name="PlaceHolder 2"/>
+            <a:ext cx="5484960" cy="3084840"/>
+          </a:xfrm>
+          <a:prstGeom prst="rect">
+            <a:avLst/>
+          </a:prstGeom>
+          <a:ln w="0">
+            <a:noFill/>
+          </a:ln>
+        </p:spPr>
+      </p:sp>
+      <p:sp>
+        <p:nvSpPr>
+          <p:cNvPr id="224" name="PlaceHolder 2"/>
           <p:cNvSpPr>
             <a:spLocks noGrp="1"/>
           </p:cNvSpPr>
@@ -527,7 +461,7 @@
         <p:spPr>
           <a:xfrm>
             <a:off x="685800" y="4400640"/>
-            <a:ext cx="5485320" cy="3599280"/>
+            <a:ext cx="5484960" cy="3598920"/>
           </a:xfrm>
           <a:prstGeom prst="rect">
             <a:avLst/>
@@ -558,7 +492,7 @@
       </p:sp>
       <p:sp>
         <p:nvSpPr>
-          <p:cNvPr id="234" name="PlaceHolder 3"/>
+          <p:cNvPr id="225" name="PlaceHolder 3"/>
           <p:cNvSpPr>
             <a:spLocks noGrp="1"/>
           </p:cNvSpPr>
@@ -569,7 +503,7 @@
         <p:spPr>
           <a:xfrm>
             <a:off x="3884760" y="8685360"/>
-            <a:ext cx="2970720" cy="457560"/>
+            <a:ext cx="2970360" cy="457200"/>
           </a:xfrm>
           <a:prstGeom prst="rect">
             <a:avLst/>
@@ -613,7 +547,7 @@
                 <a:tab algn="l" pos="0"/>
               </a:tabLst>
             </a:pPr>
-            <a:fld id="{1A411FC2-498F-4B04-AC1E-65C71F44DE5D}" type="slidenum">
+            <a:fld id="{33C713F2-EF97-4E58-ACB1-3ECC46B1647C}" type="slidenum">
               <a:rPr lang="en-US" sz="1200" b="0" u="none" strike="noStrike">
                 <a:solidFill>
                   <a:schemeClr val="dk1"/>
@@ -660,7 +594,7 @@
       </p:grpSpPr>
       <p:sp>
         <p:nvSpPr>
-          <p:cNvPr id="250" name="PlaceHolder 1"/>
+          <p:cNvPr id="241" name="PlaceHolder 1"/>
           <p:cNvSpPr>
             <a:spLocks noGrp="1"/>
           </p:cNvSpPr>
@@ -671,19 +605,19 @@
         <p:spPr>
           <a:xfrm>
             <a:off x="685800" y="1143000"/>
-            <a:ext cx="5485320" cy="3085200"/>
-          </a:xfrm>
-          <a:prstGeom prst="rect">
-            <a:avLst/>
-          </a:prstGeom>
-          <a:ln w="0">
-            <a:noFill/>
-          </a:ln>
-        </p:spPr>
-      </p:sp>
-      <p:sp>
-        <p:nvSpPr>
-          <p:cNvPr id="251" name="PlaceHolder 2"/>
+            <a:ext cx="5484960" cy="3084840"/>
+          </a:xfrm>
+          <a:prstGeom prst="rect">
+            <a:avLst/>
+          </a:prstGeom>
+          <a:ln w="0">
+            <a:noFill/>
+          </a:ln>
+        </p:spPr>
+      </p:sp>
+      <p:sp>
+        <p:nvSpPr>
+          <p:cNvPr id="242" name="PlaceHolder 2"/>
           <p:cNvSpPr>
             <a:spLocks noGrp="1"/>
           </p:cNvSpPr>
@@ -694,7 +628,7 @@
         <p:spPr>
           <a:xfrm>
             <a:off x="685800" y="4400640"/>
-            <a:ext cx="5485320" cy="3599280"/>
+            <a:ext cx="5484960" cy="3598920"/>
           </a:xfrm>
           <a:prstGeom prst="rect">
             <a:avLst/>
@@ -725,7 +659,7 @@
       </p:sp>
       <p:sp>
         <p:nvSpPr>
-          <p:cNvPr id="252" name="PlaceHolder 3"/>
+          <p:cNvPr id="243" name="PlaceHolder 3"/>
           <p:cNvSpPr>
             <a:spLocks noGrp="1"/>
           </p:cNvSpPr>
@@ -736,7 +670,7 @@
         <p:spPr>
           <a:xfrm>
             <a:off x="3884760" y="8685360"/>
-            <a:ext cx="2970720" cy="457560"/>
+            <a:ext cx="2970360" cy="457200"/>
           </a:xfrm>
           <a:prstGeom prst="rect">
             <a:avLst/>
@@ -780,7 +714,7 @@
                 <a:tab algn="l" pos="0"/>
               </a:tabLst>
             </a:pPr>
-            <a:fld id="{77CAA849-27D9-469F-A7E1-7BC781570B00}" type="slidenum">
+            <a:fld id="{E49A45FB-E90D-4289-970F-77A7BCAE140A}" type="slidenum">
               <a:rPr lang="en-US" sz="1200" b="0" u="none" strike="noStrike">
                 <a:solidFill>
                   <a:schemeClr val="dk1"/>
@@ -827,7 +761,7 @@
       </p:grpSpPr>
       <p:sp>
         <p:nvSpPr>
-          <p:cNvPr id="253" name="PlaceHolder 1"/>
+          <p:cNvPr id="244" name="PlaceHolder 1"/>
           <p:cNvSpPr>
             <a:spLocks noGrp="1"/>
           </p:cNvSpPr>
@@ -838,19 +772,19 @@
         <p:spPr>
           <a:xfrm>
             <a:off x="685800" y="1143000"/>
-            <a:ext cx="5485320" cy="3085200"/>
-          </a:xfrm>
-          <a:prstGeom prst="rect">
-            <a:avLst/>
-          </a:prstGeom>
-          <a:ln w="0">
-            <a:noFill/>
-          </a:ln>
-        </p:spPr>
-      </p:sp>
-      <p:sp>
-        <p:nvSpPr>
-          <p:cNvPr id="254" name="PlaceHolder 2"/>
+            <a:ext cx="5484960" cy="3084840"/>
+          </a:xfrm>
+          <a:prstGeom prst="rect">
+            <a:avLst/>
+          </a:prstGeom>
+          <a:ln w="0">
+            <a:noFill/>
+          </a:ln>
+        </p:spPr>
+      </p:sp>
+      <p:sp>
+        <p:nvSpPr>
+          <p:cNvPr id="245" name="PlaceHolder 2"/>
           <p:cNvSpPr>
             <a:spLocks noGrp="1"/>
           </p:cNvSpPr>
@@ -861,7 +795,7 @@
         <p:spPr>
           <a:xfrm>
             <a:off x="685800" y="4400640"/>
-            <a:ext cx="5485320" cy="3599280"/>
+            <a:ext cx="5484960" cy="3598920"/>
           </a:xfrm>
           <a:prstGeom prst="rect">
             <a:avLst/>
@@ -892,7 +826,7 @@
       </p:sp>
       <p:sp>
         <p:nvSpPr>
-          <p:cNvPr id="255" name="PlaceHolder 3"/>
+          <p:cNvPr id="246" name="PlaceHolder 3"/>
           <p:cNvSpPr>
             <a:spLocks noGrp="1"/>
           </p:cNvSpPr>
@@ -903,7 +837,7 @@
         <p:spPr>
           <a:xfrm>
             <a:off x="3884760" y="8685360"/>
-            <a:ext cx="2970720" cy="457560"/>
+            <a:ext cx="2970360" cy="457200"/>
           </a:xfrm>
           <a:prstGeom prst="rect">
             <a:avLst/>
@@ -947,7 +881,7 @@
                 <a:tab algn="l" pos="0"/>
               </a:tabLst>
             </a:pPr>
-            <a:fld id="{C8BD9EFB-AB10-45BB-A971-50EA93E322D5}" type="slidenum">
+            <a:fld id="{B8509609-D28E-4732-ABF9-B1E871700810}" type="slidenum">
               <a:rPr lang="en-US" sz="1200" b="0" u="none" strike="noStrike">
                 <a:solidFill>
                   <a:schemeClr val="dk1"/>
@@ -957,7 +891,7 @@
                 <a:latin typeface="+mn-lt"/>
                 <a:ea typeface="+mn-ea"/>
               </a:rPr>
-              <a:t>&lt;number&gt;</a:t>
+              <a:t>15</a:t>
             </a:fld>
             <a:endParaRPr lang="en-US" sz="1200" b="0" u="none" strike="noStrike">
               <a:solidFill>
@@ -994,7 +928,7 @@
       </p:grpSpPr>
       <p:sp>
         <p:nvSpPr>
-          <p:cNvPr id="256" name="PlaceHolder 1"/>
+          <p:cNvPr id="247" name="PlaceHolder 1"/>
           <p:cNvSpPr>
             <a:spLocks noGrp="1"/>
           </p:cNvSpPr>
@@ -1005,19 +939,19 @@
         <p:spPr>
           <a:xfrm>
             <a:off x="685800" y="1143000"/>
-            <a:ext cx="5485320" cy="3085200"/>
-          </a:xfrm>
-          <a:prstGeom prst="rect">
-            <a:avLst/>
-          </a:prstGeom>
-          <a:ln w="0">
-            <a:noFill/>
-          </a:ln>
-        </p:spPr>
-      </p:sp>
-      <p:sp>
-        <p:nvSpPr>
-          <p:cNvPr id="257" name="PlaceHolder 2"/>
+            <a:ext cx="5484960" cy="3084840"/>
+          </a:xfrm>
+          <a:prstGeom prst="rect">
+            <a:avLst/>
+          </a:prstGeom>
+          <a:ln w="0">
+            <a:noFill/>
+          </a:ln>
+        </p:spPr>
+      </p:sp>
+      <p:sp>
+        <p:nvSpPr>
+          <p:cNvPr id="248" name="PlaceHolder 2"/>
           <p:cNvSpPr>
             <a:spLocks noGrp="1"/>
           </p:cNvSpPr>
@@ -1028,7 +962,7 @@
         <p:spPr>
           <a:xfrm>
             <a:off x="685800" y="4400640"/>
-            <a:ext cx="5485320" cy="3599280"/>
+            <a:ext cx="5484960" cy="3598920"/>
           </a:xfrm>
           <a:prstGeom prst="rect">
             <a:avLst/>
@@ -1059,7 +993,7 @@
       </p:sp>
       <p:sp>
         <p:nvSpPr>
-          <p:cNvPr id="258" name="PlaceHolder 3"/>
+          <p:cNvPr id="249" name="PlaceHolder 3"/>
           <p:cNvSpPr>
             <a:spLocks noGrp="1"/>
           </p:cNvSpPr>
@@ -1070,7 +1004,7 @@
         <p:spPr>
           <a:xfrm>
             <a:off x="3884760" y="8685360"/>
-            <a:ext cx="2970720" cy="457560"/>
+            <a:ext cx="2970360" cy="457200"/>
           </a:xfrm>
           <a:prstGeom prst="rect">
             <a:avLst/>
@@ -1114,7 +1048,7 @@
                 <a:tab algn="l" pos="0"/>
               </a:tabLst>
             </a:pPr>
-            <a:fld id="{FE103269-8235-4640-8D76-774AF8492AC5}" type="slidenum">
+            <a:fld id="{1B70995C-F851-45B0-99B3-17A0A9F79F4A}" type="slidenum">
               <a:rPr lang="en-US" sz="1200" b="0" u="none" strike="noStrike">
                 <a:solidFill>
                   <a:schemeClr val="dk1"/>
@@ -1124,7 +1058,7 @@
                 <a:latin typeface="+mn-lt"/>
                 <a:ea typeface="+mn-ea"/>
               </a:rPr>
-              <a:t>&lt;number&gt;</a:t>
+              <a:t>15</a:t>
             </a:fld>
             <a:endParaRPr lang="en-US" sz="1200" b="0" u="none" strike="noStrike">
               <a:solidFill>
@@ -1161,7 +1095,7 @@
       </p:grpSpPr>
       <p:sp>
         <p:nvSpPr>
-          <p:cNvPr id="259" name="PlaceHolder 1"/>
+          <p:cNvPr id="250" name="PlaceHolder 1"/>
           <p:cNvSpPr>
             <a:spLocks noGrp="1"/>
           </p:cNvSpPr>
@@ -1172,19 +1106,19 @@
         <p:spPr>
           <a:xfrm>
             <a:off x="685800" y="1143000"/>
-            <a:ext cx="5485320" cy="3085200"/>
-          </a:xfrm>
-          <a:prstGeom prst="rect">
-            <a:avLst/>
-          </a:prstGeom>
-          <a:ln w="0">
-            <a:noFill/>
-          </a:ln>
-        </p:spPr>
-      </p:sp>
-      <p:sp>
-        <p:nvSpPr>
-          <p:cNvPr id="260" name="PlaceHolder 2"/>
+            <a:ext cx="5484960" cy="3084840"/>
+          </a:xfrm>
+          <a:prstGeom prst="rect">
+            <a:avLst/>
+          </a:prstGeom>
+          <a:ln w="0">
+            <a:noFill/>
+          </a:ln>
+        </p:spPr>
+      </p:sp>
+      <p:sp>
+        <p:nvSpPr>
+          <p:cNvPr id="251" name="PlaceHolder 2"/>
           <p:cNvSpPr>
             <a:spLocks noGrp="1"/>
           </p:cNvSpPr>
@@ -1195,7 +1129,7 @@
         <p:spPr>
           <a:xfrm>
             <a:off x="685800" y="4400640"/>
-            <a:ext cx="5485320" cy="3599280"/>
+            <a:ext cx="5484960" cy="3598920"/>
           </a:xfrm>
           <a:prstGeom prst="rect">
             <a:avLst/>
@@ -1226,7 +1160,7 @@
       </p:sp>
       <p:sp>
         <p:nvSpPr>
-          <p:cNvPr id="261" name="PlaceHolder 3"/>
+          <p:cNvPr id="252" name="PlaceHolder 3"/>
           <p:cNvSpPr>
             <a:spLocks noGrp="1"/>
           </p:cNvSpPr>
@@ -1237,7 +1171,7 @@
         <p:spPr>
           <a:xfrm>
             <a:off x="3884760" y="8685360"/>
-            <a:ext cx="2970720" cy="457560"/>
+            <a:ext cx="2970360" cy="457200"/>
           </a:xfrm>
           <a:prstGeom prst="rect">
             <a:avLst/>
@@ -1281,7 +1215,7 @@
                 <a:tab algn="l" pos="0"/>
               </a:tabLst>
             </a:pPr>
-            <a:fld id="{7634A568-B68D-4B32-AA8C-E04645B045E9}" type="slidenum">
+            <a:fld id="{A41A073B-DB7A-45F7-B1E7-3FF375632BAE}" type="slidenum">
               <a:rPr lang="en-US" sz="1200" b="0" u="none" strike="noStrike">
                 <a:solidFill>
                   <a:schemeClr val="dk1"/>
@@ -1291,7 +1225,7 @@
                 <a:latin typeface="+mn-lt"/>
                 <a:ea typeface="+mn-ea"/>
               </a:rPr>
-              <a:t>&lt;number&gt;</a:t>
+              <a:t>15</a:t>
             </a:fld>
             <a:endParaRPr lang="en-US" sz="1200" b="0" u="none" strike="noStrike">
               <a:solidFill>
@@ -1328,7 +1262,7 @@
       </p:grpSpPr>
       <p:sp>
         <p:nvSpPr>
-          <p:cNvPr id="235" name="PlaceHolder 1"/>
+          <p:cNvPr id="226" name="PlaceHolder 1"/>
           <p:cNvSpPr>
             <a:spLocks noGrp="1"/>
           </p:cNvSpPr>
@@ -1339,19 +1273,19 @@
         <p:spPr>
           <a:xfrm>
             <a:off x="685800" y="1143000"/>
-            <a:ext cx="5485320" cy="3085200"/>
-          </a:xfrm>
-          <a:prstGeom prst="rect">
-            <a:avLst/>
-          </a:prstGeom>
-          <a:ln w="0">
-            <a:noFill/>
-          </a:ln>
-        </p:spPr>
-      </p:sp>
-      <p:sp>
-        <p:nvSpPr>
-          <p:cNvPr id="236" name="PlaceHolder 2"/>
+            <a:ext cx="5484960" cy="3084840"/>
+          </a:xfrm>
+          <a:prstGeom prst="rect">
+            <a:avLst/>
+          </a:prstGeom>
+          <a:ln w="0">
+            <a:noFill/>
+          </a:ln>
+        </p:spPr>
+      </p:sp>
+      <p:sp>
+        <p:nvSpPr>
+          <p:cNvPr id="227" name="PlaceHolder 2"/>
           <p:cNvSpPr>
             <a:spLocks noGrp="1"/>
           </p:cNvSpPr>
@@ -1362,7 +1296,7 @@
         <p:spPr>
           <a:xfrm>
             <a:off x="685800" y="4400640"/>
-            <a:ext cx="5485320" cy="3599280"/>
+            <a:ext cx="5484960" cy="3598920"/>
           </a:xfrm>
           <a:prstGeom prst="rect">
             <a:avLst/>
@@ -1393,7 +1327,7 @@
       </p:sp>
       <p:sp>
         <p:nvSpPr>
-          <p:cNvPr id="237" name="PlaceHolder 3"/>
+          <p:cNvPr id="228" name="PlaceHolder 3"/>
           <p:cNvSpPr>
             <a:spLocks noGrp="1"/>
           </p:cNvSpPr>
@@ -1404,7 +1338,7 @@
         <p:spPr>
           <a:xfrm>
             <a:off x="3884760" y="8685360"/>
-            <a:ext cx="2970720" cy="457560"/>
+            <a:ext cx="2970360" cy="457200"/>
           </a:xfrm>
           <a:prstGeom prst="rect">
             <a:avLst/>
@@ -1448,7 +1382,7 @@
                 <a:tab algn="l" pos="0"/>
               </a:tabLst>
             </a:pPr>
-            <a:fld id="{64A301C1-6B27-47E9-A7D4-E03D277D18FE}" type="slidenum">
+            <a:fld id="{283074A2-2E10-407A-B614-C6C13EB01422}" type="slidenum">
               <a:rPr lang="en-US" sz="1200" b="0" u="none" strike="noStrike">
                 <a:solidFill>
                   <a:schemeClr val="dk1"/>
@@ -1495,7 +1429,7 @@
       </p:grpSpPr>
       <p:sp>
         <p:nvSpPr>
-          <p:cNvPr id="238" name="PlaceHolder 1"/>
+          <p:cNvPr id="229" name="PlaceHolder 1"/>
           <p:cNvSpPr>
             <a:spLocks noGrp="1"/>
           </p:cNvSpPr>
@@ -1506,19 +1440,19 @@
         <p:spPr>
           <a:xfrm>
             <a:off x="685800" y="1143000"/>
-            <a:ext cx="5485320" cy="3085200"/>
-          </a:xfrm>
-          <a:prstGeom prst="rect">
-            <a:avLst/>
-          </a:prstGeom>
-          <a:ln w="0">
-            <a:noFill/>
-          </a:ln>
-        </p:spPr>
-      </p:sp>
-      <p:sp>
-        <p:nvSpPr>
-          <p:cNvPr id="239" name="PlaceHolder 2"/>
+            <a:ext cx="5484960" cy="3084840"/>
+          </a:xfrm>
+          <a:prstGeom prst="rect">
+            <a:avLst/>
+          </a:prstGeom>
+          <a:ln w="0">
+            <a:noFill/>
+          </a:ln>
+        </p:spPr>
+      </p:sp>
+      <p:sp>
+        <p:nvSpPr>
+          <p:cNvPr id="230" name="PlaceHolder 2"/>
           <p:cNvSpPr>
             <a:spLocks noGrp="1"/>
           </p:cNvSpPr>
@@ -1529,7 +1463,7 @@
         <p:spPr>
           <a:xfrm>
             <a:off x="685800" y="4400640"/>
-            <a:ext cx="5485320" cy="3599280"/>
+            <a:ext cx="5484960" cy="3598920"/>
           </a:xfrm>
           <a:prstGeom prst="rect">
             <a:avLst/>
@@ -1560,7 +1494,7 @@
       </p:sp>
       <p:sp>
         <p:nvSpPr>
-          <p:cNvPr id="240" name="PlaceHolder 3"/>
+          <p:cNvPr id="231" name="PlaceHolder 3"/>
           <p:cNvSpPr>
             <a:spLocks noGrp="1"/>
           </p:cNvSpPr>
@@ -1571,7 +1505,7 @@
         <p:spPr>
           <a:xfrm>
             <a:off x="3884760" y="8685360"/>
-            <a:ext cx="2970720" cy="457560"/>
+            <a:ext cx="2970360" cy="457200"/>
           </a:xfrm>
           <a:prstGeom prst="rect">
             <a:avLst/>
@@ -1615,7 +1549,7 @@
                 <a:tab algn="l" pos="0"/>
               </a:tabLst>
             </a:pPr>
-            <a:fld id="{B798D398-EA68-4974-8EEB-6D5A400B305E}" type="slidenum">
+            <a:fld id="{4B0F0614-67CB-4E2C-AA72-5C038E2B4488}" type="slidenum">
               <a:rPr lang="en-US" sz="1200" b="0" u="none" strike="noStrike">
                 <a:solidFill>
                   <a:schemeClr val="dk1"/>
@@ -1662,7 +1596,7 @@
       </p:grpSpPr>
       <p:sp>
         <p:nvSpPr>
-          <p:cNvPr id="241" name="PlaceHolder 1"/>
+          <p:cNvPr id="232" name="PlaceHolder 1"/>
           <p:cNvSpPr>
             <a:spLocks noGrp="1"/>
           </p:cNvSpPr>
@@ -1673,19 +1607,19 @@
         <p:spPr>
           <a:xfrm>
             <a:off x="685800" y="1143000"/>
-            <a:ext cx="5485320" cy="3085200"/>
-          </a:xfrm>
-          <a:prstGeom prst="rect">
-            <a:avLst/>
-          </a:prstGeom>
-          <a:ln w="0">
-            <a:noFill/>
-          </a:ln>
-        </p:spPr>
-      </p:sp>
-      <p:sp>
-        <p:nvSpPr>
-          <p:cNvPr id="242" name="PlaceHolder 2"/>
+            <a:ext cx="5484960" cy="3084840"/>
+          </a:xfrm>
+          <a:prstGeom prst="rect">
+            <a:avLst/>
+          </a:prstGeom>
+          <a:ln w="0">
+            <a:noFill/>
+          </a:ln>
+        </p:spPr>
+      </p:sp>
+      <p:sp>
+        <p:nvSpPr>
+          <p:cNvPr id="233" name="PlaceHolder 2"/>
           <p:cNvSpPr>
             <a:spLocks noGrp="1"/>
           </p:cNvSpPr>
@@ -1696,7 +1630,7 @@
         <p:spPr>
           <a:xfrm>
             <a:off x="685800" y="4400640"/>
-            <a:ext cx="5485320" cy="3599280"/>
+            <a:ext cx="5484960" cy="3598920"/>
           </a:xfrm>
           <a:prstGeom prst="rect">
             <a:avLst/>
@@ -1727,7 +1661,7 @@
       </p:sp>
       <p:sp>
         <p:nvSpPr>
-          <p:cNvPr id="243" name="PlaceHolder 3"/>
+          <p:cNvPr id="234" name="PlaceHolder 3"/>
           <p:cNvSpPr>
             <a:spLocks noGrp="1"/>
           </p:cNvSpPr>
@@ -1738,7 +1672,7 @@
         <p:spPr>
           <a:xfrm>
             <a:off x="3884760" y="8685360"/>
-            <a:ext cx="2970720" cy="457560"/>
+            <a:ext cx="2970360" cy="457200"/>
           </a:xfrm>
           <a:prstGeom prst="rect">
             <a:avLst/>
@@ -1782,7 +1716,7 @@
                 <a:tab algn="l" pos="0"/>
               </a:tabLst>
             </a:pPr>
-            <a:fld id="{998002CF-FED6-477C-8A7B-6946906C3151}" type="slidenum">
+            <a:fld id="{4E24E9C4-7822-42A6-BE53-18101B4ED5BA}" type="slidenum">
               <a:rPr lang="en-US" sz="1200" b="0" u="none" strike="noStrike">
                 <a:solidFill>
                   <a:schemeClr val="dk1"/>
@@ -1829,7 +1763,7 @@
       </p:grpSpPr>
       <p:sp>
         <p:nvSpPr>
-          <p:cNvPr id="244" name="PlaceHolder 1"/>
+          <p:cNvPr id="235" name="PlaceHolder 1"/>
           <p:cNvSpPr>
             <a:spLocks noGrp="1"/>
           </p:cNvSpPr>
@@ -1840,19 +1774,19 @@
         <p:spPr>
           <a:xfrm>
             <a:off x="685800" y="1143000"/>
-            <a:ext cx="5485320" cy="3085200"/>
-          </a:xfrm>
-          <a:prstGeom prst="rect">
-            <a:avLst/>
-          </a:prstGeom>
-          <a:ln w="0">
-            <a:noFill/>
-          </a:ln>
-        </p:spPr>
-      </p:sp>
-      <p:sp>
-        <p:nvSpPr>
-          <p:cNvPr id="245" name="PlaceHolder 2"/>
+            <a:ext cx="5484960" cy="3084840"/>
+          </a:xfrm>
+          <a:prstGeom prst="rect">
+            <a:avLst/>
+          </a:prstGeom>
+          <a:ln w="0">
+            <a:noFill/>
+          </a:ln>
+        </p:spPr>
+      </p:sp>
+      <p:sp>
+        <p:nvSpPr>
+          <p:cNvPr id="236" name="PlaceHolder 2"/>
           <p:cNvSpPr>
             <a:spLocks noGrp="1"/>
           </p:cNvSpPr>
@@ -1863,7 +1797,7 @@
         <p:spPr>
           <a:xfrm>
             <a:off x="685800" y="4400640"/>
-            <a:ext cx="5485320" cy="3599280"/>
+            <a:ext cx="5484960" cy="3598920"/>
           </a:xfrm>
           <a:prstGeom prst="rect">
             <a:avLst/>
@@ -1894,7 +1828,7 @@
       </p:sp>
       <p:sp>
         <p:nvSpPr>
-          <p:cNvPr id="246" name="PlaceHolder 3"/>
+          <p:cNvPr id="237" name="PlaceHolder 3"/>
           <p:cNvSpPr>
             <a:spLocks noGrp="1"/>
           </p:cNvSpPr>
@@ -1905,7 +1839,7 @@
         <p:spPr>
           <a:xfrm>
             <a:off x="3884760" y="8685360"/>
-            <a:ext cx="2970720" cy="457560"/>
+            <a:ext cx="2970360" cy="457200"/>
           </a:xfrm>
           <a:prstGeom prst="rect">
             <a:avLst/>
@@ -1949,7 +1883,7 @@
                 <a:tab algn="l" pos="0"/>
               </a:tabLst>
             </a:pPr>
-            <a:fld id="{3DA3C54E-6010-41BE-808B-3A23442E7396}" type="slidenum">
+            <a:fld id="{EB06916A-AE22-4F37-9F55-D1EA72C06C00}" type="slidenum">
               <a:rPr lang="en-US" sz="1200" b="0" u="none" strike="noStrike">
                 <a:solidFill>
                   <a:schemeClr val="dk1"/>
@@ -1996,7 +1930,7 @@
       </p:grpSpPr>
       <p:sp>
         <p:nvSpPr>
-          <p:cNvPr id="247" name="PlaceHolder 1"/>
+          <p:cNvPr id="238" name="PlaceHolder 1"/>
           <p:cNvSpPr>
             <a:spLocks noGrp="1"/>
           </p:cNvSpPr>
@@ -2007,19 +1941,19 @@
         <p:spPr>
           <a:xfrm>
             <a:off x="685800" y="1143000"/>
-            <a:ext cx="5485320" cy="3085200"/>
-          </a:xfrm>
-          <a:prstGeom prst="rect">
-            <a:avLst/>
-          </a:prstGeom>
-          <a:ln w="0">
-            <a:noFill/>
-          </a:ln>
-        </p:spPr>
-      </p:sp>
-      <p:sp>
-        <p:nvSpPr>
-          <p:cNvPr id="248" name="PlaceHolder 2"/>
+            <a:ext cx="5484960" cy="3084840"/>
+          </a:xfrm>
+          <a:prstGeom prst="rect">
+            <a:avLst/>
+          </a:prstGeom>
+          <a:ln w="0">
+            <a:noFill/>
+          </a:ln>
+        </p:spPr>
+      </p:sp>
+      <p:sp>
+        <p:nvSpPr>
+          <p:cNvPr id="239" name="PlaceHolder 2"/>
           <p:cNvSpPr>
             <a:spLocks noGrp="1"/>
           </p:cNvSpPr>
@@ -2030,7 +1964,7 @@
         <p:spPr>
           <a:xfrm>
             <a:off x="685800" y="4400640"/>
-            <a:ext cx="5485320" cy="3599280"/>
+            <a:ext cx="5484960" cy="3598920"/>
           </a:xfrm>
           <a:prstGeom prst="rect">
             <a:avLst/>
@@ -2061,7 +1995,7 @@
       </p:sp>
       <p:sp>
         <p:nvSpPr>
-          <p:cNvPr id="249" name="PlaceHolder 3"/>
+          <p:cNvPr id="240" name="PlaceHolder 3"/>
           <p:cNvSpPr>
             <a:spLocks noGrp="1"/>
           </p:cNvSpPr>
@@ -2072,7 +2006,7 @@
         <p:spPr>
           <a:xfrm>
             <a:off x="3884760" y="8685360"/>
-            <a:ext cx="2970720" cy="457560"/>
+            <a:ext cx="2970360" cy="457200"/>
           </a:xfrm>
           <a:prstGeom prst="rect">
             <a:avLst/>
@@ -2116,7 +2050,7 @@
                 <a:tab algn="l" pos="0"/>
               </a:tabLst>
             </a:pPr>
-            <a:fld id="{DF53BA2D-F552-442D-BD34-8D0DFCF38090}" type="slidenum">
+            <a:fld id="{DDBEEFE5-337E-455F-BFFA-C725EDFAEF34}" type="slidenum">
               <a:rPr lang="en-US" sz="1200" b="0" u="none" strike="noStrike">
                 <a:solidFill>
                   <a:schemeClr val="dk1"/>
@@ -2190,7 +2124,7 @@
             <a:spLocks noGrp="1"/>
           </p:cNvSpPr>
           <p:nvPr>
-            <p:ph type="ftr" idx="2"/>
+            <p:ph type="ftr" idx="1"/>
           </p:nvPr>
         </p:nvSpPr>
         <p:spPr/>
@@ -2210,14 +2144,14 @@
             <a:spLocks noGrp="1"/>
           </p:cNvSpPr>
           <p:nvPr>
-            <p:ph type="sldNum" idx="3"/>
+            <p:ph type="sldNum" idx="2"/>
           </p:nvPr>
         </p:nvSpPr>
         <p:spPr/>
         <p:txBody>
           <a:bodyPr/>
           <a:p>
-            <a:fld id="{18F45B27-6824-4AE7-8E0E-737391E6ED77}" type="slidenum">
+            <a:fld id="{D58325E3-6F1E-479B-941C-7A605F44DCC5}" type="slidenum">
               <a:t>&lt;#&gt;</a:t>
             </a:fld>
           </a:p>
@@ -2230,7 +2164,7 @@
             <a:spLocks noGrp="1"/>
           </p:cNvSpPr>
           <p:nvPr>
-            <p:ph type="dt" idx="1"/>
+            <p:ph type="dt" idx="3"/>
           </p:nvPr>
         </p:nvSpPr>
         <p:spPr/>
@@ -2313,40 +2247,7 @@
                 <a:uFillTx/>
                 <a:latin typeface="Arial"/>
               </a:rPr>
-              <a:t>Click to </a:t>
-            </a:r>
-            <a:r>
-              <a:rPr lang="en-US" sz="4400" b="0" u="none" strike="noStrike">
-                <a:solidFill>
-                  <a:srgbClr val="000000"/>
-                </a:solidFill>
-                <a:effectLst/>
-                <a:uFillTx/>
-                <a:latin typeface="Arial"/>
-              </a:rPr>
-              <a:t>edit the </a:t>
-            </a:r>
-            <a:r>
-              <a:rPr lang="en-US" sz="4400" b="0" u="none" strike="noStrike">
-                <a:solidFill>
-                  <a:srgbClr val="000000"/>
-                </a:solidFill>
-                <a:effectLst/>
-                <a:uFillTx/>
-                <a:latin typeface="Arial"/>
-              </a:rPr>
-              <a:t>title text </a:t>
-            </a:r>
-            <a:r>
-              <a:rPr lang="en-US" sz="4400" b="0" u="none" strike="noStrike">
-                <a:solidFill>
-                  <a:srgbClr val="000000"/>
-                </a:solidFill>
-                <a:effectLst/>
-                <a:uFillTx/>
-                <a:latin typeface="Arial"/>
-              </a:rPr>
-              <a:t>format</a:t>
+              <a:t>Click to edit the title text format</a:t>
             </a:r>
             <a:endParaRPr lang="en-US" sz="4400" b="0" u="none" strike="noStrike">
               <a:solidFill>
@@ -2652,13 +2553,13 @@
             <a:spLocks noGrp="1"/>
           </p:cNvSpPr>
           <p:nvPr>
-            <p:ph type="dt" idx="1"/>
+            <p:ph type="ftr" idx="1"/>
           </p:nvPr>
         </p:nvSpPr>
         <p:spPr>
           <a:xfrm>
-            <a:off x="457200" y="6356520"/>
-            <a:ext cx="2133360" cy="364680"/>
+            <a:off x="3124080" y="6356520"/>
+            <a:ext cx="2894760" cy="364320"/>
           </a:xfrm>
           <a:prstGeom prst="rect">
             <a:avLst/>
@@ -2673,44 +2574,46 @@
             <a:noAutofit/>
           </a:bodyPr>
           <a:lstStyle>
-            <a:lvl1pPr indent="0" defTabSz="457200">
+            <a:lvl1pPr indent="0" algn="ctr">
               <a:lnSpc>
                 <a:spcPct val="100000"/>
               </a:lnSpc>
               <a:buNone/>
-              <a:defRPr lang="en-US" sz="1200" b="0" u="none" strike="noStrike">
-                <a:solidFill>
-                  <a:schemeClr val="dk1">
-                    <a:tint val="75000"/>
-                  </a:schemeClr>
-                </a:solidFill>
-                <a:effectLst/>
-                <a:uFillTx/>
-                <a:latin typeface="Calibri"/>
+              <a:tabLst>
+                <a:tab algn="l" pos="0"/>
+              </a:tabLst>
+              <a:defRPr lang="en-US" sz="1400" b="0" u="none" strike="noStrike">
+                <a:solidFill>
+                  <a:srgbClr val="000000"/>
+                </a:solidFill>
+                <a:effectLst/>
+                <a:uFillTx/>
+                <a:latin typeface="Times New Roman"/>
               </a:defRPr>
             </a:lvl1pPr>
           </a:lstStyle>
           <a:p>
-            <a:pPr indent="0" defTabSz="457200">
+            <a:pPr indent="0" algn="ctr">
               <a:lnSpc>
                 <a:spcPct val="100000"/>
               </a:lnSpc>
               <a:buNone/>
-            </a:pPr>
-            <a:r>
-              <a:rPr lang="en-US" sz="1200" b="0" u="none" strike="noStrike">
-                <a:solidFill>
-                  <a:schemeClr val="dk1">
-                    <a:tint val="75000"/>
-                  </a:schemeClr>
-                </a:solidFill>
-                <a:effectLst/>
-                <a:uFillTx/>
-                <a:latin typeface="Calibri"/>
+              <a:tabLst>
+                <a:tab algn="l" pos="0"/>
+              </a:tabLst>
+            </a:pPr>
+            <a:r>
+              <a:rPr lang="en-US" sz="1400" b="0" u="none" strike="noStrike">
+                <a:solidFill>
+                  <a:srgbClr val="000000"/>
+                </a:solidFill>
+                <a:effectLst/>
+                <a:uFillTx/>
+                <a:latin typeface="Times New Roman"/>
               </a:rPr>
               <a:t> </a:t>
             </a:r>
-            <a:endParaRPr lang="en-US" sz="1200" b="0" u="none" strike="noStrike">
+            <a:endParaRPr lang="en-US" sz="1400" b="0" u="none" strike="noStrike">
               <a:solidFill>
                 <a:srgbClr val="000000"/>
               </a:solidFill>
@@ -2728,13 +2631,13 @@
             <a:spLocks noGrp="1"/>
           </p:cNvSpPr>
           <p:nvPr>
-            <p:ph type="ftr" idx="2"/>
+            <p:ph type="sldNum" idx="2"/>
           </p:nvPr>
         </p:nvSpPr>
         <p:spPr>
           <a:xfrm>
-            <a:off x="3124080" y="6356520"/>
-            <a:ext cx="2895120" cy="364680"/>
+            <a:off x="6553080" y="6356520"/>
+            <a:ext cx="2133000" cy="364320"/>
           </a:xfrm>
           <a:prstGeom prst="rect">
             <a:avLst/>
@@ -2749,34 +2652,50 @@
             <a:noAutofit/>
           </a:bodyPr>
           <a:lstStyle>
-            <a:lvl1pPr indent="0" algn="ctr">
+            <a:lvl1pPr indent="0" algn="r" defTabSz="457200">
+              <a:lnSpc>
+                <a:spcPct val="100000"/>
+              </a:lnSpc>
               <a:buNone/>
-              <a:defRPr lang="en-US" sz="1400" b="0" u="none" strike="noStrike">
-                <a:solidFill>
-                  <a:srgbClr val="000000"/>
-                </a:solidFill>
-                <a:effectLst/>
-                <a:uFillTx/>
-                <a:latin typeface="Times New Roman"/>
+              <a:tabLst>
+                <a:tab algn="l" pos="0"/>
+              </a:tabLst>
+              <a:defRPr lang="en-US" sz="1200" b="0" u="none" strike="noStrike">
+                <a:solidFill>
+                  <a:schemeClr val="dk1">
+                    <a:tint val="75000"/>
+                  </a:schemeClr>
+                </a:solidFill>
+                <a:effectLst/>
+                <a:uFillTx/>
+                <a:latin typeface="Calibri"/>
               </a:defRPr>
             </a:lvl1pPr>
           </a:lstStyle>
           <a:p>
-            <a:pPr indent="0" algn="ctr">
+            <a:pPr indent="0" algn="r" defTabSz="457200">
+              <a:lnSpc>
+                <a:spcPct val="100000"/>
+              </a:lnSpc>
               <a:buNone/>
-            </a:pPr>
-            <a:r>
-              <a:rPr lang="en-US" sz="1400" b="0" u="none" strike="noStrike">
-                <a:solidFill>
-                  <a:srgbClr val="000000"/>
-                </a:solidFill>
-                <a:effectLst/>
-                <a:uFillTx/>
-                <a:latin typeface="Times New Roman"/>
-              </a:rPr>
-              <a:t> </a:t>
-            </a:r>
-            <a:endParaRPr lang="en-US" sz="1400" b="0" u="none" strike="noStrike">
+              <a:tabLst>
+                <a:tab algn="l" pos="0"/>
+              </a:tabLst>
+            </a:pPr>
+            <a:fld id="{A72E497D-078C-4EB9-B38E-60354EFBEC9A}" type="slidenum">
+              <a:rPr lang="en-US" sz="1200" b="0" u="none" strike="noStrike">
+                <a:solidFill>
+                  <a:schemeClr val="dk1">
+                    <a:tint val="75000"/>
+                  </a:schemeClr>
+                </a:solidFill>
+                <a:effectLst/>
+                <a:uFillTx/>
+                <a:latin typeface="Calibri"/>
+              </a:rPr>
+              <a:t>1</a:t>
+            </a:fld>
+            <a:endParaRPr lang="en-US" sz="1200" b="0" u="none" strike="noStrike">
               <a:solidFill>
                 <a:srgbClr val="000000"/>
               </a:solidFill>
@@ -2794,13 +2713,13 @@
             <a:spLocks noGrp="1"/>
           </p:cNvSpPr>
           <p:nvPr>
-            <p:ph type="sldNum" idx="3"/>
+            <p:ph type="dt" idx="3"/>
           </p:nvPr>
         </p:nvSpPr>
         <p:spPr>
           <a:xfrm>
-            <a:off x="6553080" y="6356520"/>
-            <a:ext cx="2133360" cy="364680"/>
+            <a:off x="457200" y="6356520"/>
+            <a:ext cx="2133000" cy="364320"/>
           </a:xfrm>
           <a:prstGeom prst="rect">
             <a:avLst/>
@@ -2815,44 +2734,34 @@
             <a:noAutofit/>
           </a:bodyPr>
           <a:lstStyle>
-            <a:lvl1pPr indent="0" algn="r" defTabSz="457200">
-              <a:lnSpc>
-                <a:spcPct val="100000"/>
-              </a:lnSpc>
+            <a:lvl1pPr indent="0">
               <a:buNone/>
-              <a:defRPr lang="en-US" sz="1200" b="0" u="none" strike="noStrike">
-                <a:solidFill>
-                  <a:schemeClr val="dk1">
-                    <a:tint val="75000"/>
-                  </a:schemeClr>
-                </a:solidFill>
-                <a:effectLst/>
-                <a:uFillTx/>
-                <a:latin typeface="Calibri"/>
+              <a:defRPr lang="en-US" sz="1400" b="0" u="none" strike="noStrike">
+                <a:solidFill>
+                  <a:srgbClr val="000000"/>
+                </a:solidFill>
+                <a:effectLst/>
+                <a:uFillTx/>
+                <a:latin typeface="Times New Roman"/>
               </a:defRPr>
             </a:lvl1pPr>
           </a:lstStyle>
           <a:p>
-            <a:pPr indent="0" algn="r" defTabSz="457200">
-              <a:lnSpc>
-                <a:spcPct val="100000"/>
-              </a:lnSpc>
+            <a:pPr indent="0">
               <a:buNone/>
             </a:pPr>
-            <a:fld id="{DD7835F1-7968-48D2-BB10-DC7C7C5ED1DF}" type="slidenum">
-              <a:rPr lang="en-US" sz="1200" b="0" u="none" strike="noStrike">
-                <a:solidFill>
-                  <a:schemeClr val="dk1">
-                    <a:tint val="75000"/>
-                  </a:schemeClr>
-                </a:solidFill>
-                <a:effectLst/>
-                <a:uFillTx/>
-                <a:latin typeface="Calibri"/>
-              </a:rPr>
-              <a:t>1</a:t>
-            </a:fld>
-            <a:endParaRPr lang="en-US" sz="1200" b="0" u="none" strike="noStrike">
+            <a:r>
+              <a:rPr lang="en-US" sz="1400" b="0" u="none" strike="noStrike">
+                <a:solidFill>
+                  <a:srgbClr val="000000"/>
+                </a:solidFill>
+                <a:effectLst/>
+                <a:uFillTx/>
+                <a:latin typeface="Times New Roman"/>
+              </a:rPr>
+              <a:t> </a:t>
+            </a:r>
+            <a:endParaRPr lang="en-US" sz="1400" b="0" u="none" strike="noStrike">
               <a:solidFill>
                 <a:srgbClr val="000000"/>
               </a:solidFill>
@@ -2876,7 +2785,7 @@
         <p:spPr>
           <a:xfrm>
             <a:off x="609480" y="273600"/>
-            <a:ext cx="10972080" cy="1144800"/>
+            <a:ext cx="10972440" cy="1144800"/>
           </a:xfrm>
           <a:prstGeom prst="rect">
             <a:avLst/>
@@ -2891,38 +2800,170 @@
             <a:noAutofit/>
           </a:bodyPr>
           <a:p>
-            <a:pPr indent="0">
+            <a:pPr indent="0" algn="ctr">
               <a:buNone/>
             </a:pPr>
             <a:r>
-              <a:rPr lang="en-US" sz="1800" b="0" u="none" strike="noStrike">
-                <a:solidFill>
-                  <a:schemeClr val="dk1"/>
-                </a:solidFill>
-                <a:effectLst/>
-                <a:uFillTx/>
-                <a:latin typeface="Calibri"/>
-              </a:rPr>
-              <a:t>Click to edit the </a:t>
-            </a:r>
-            <a:r>
-              <a:rPr lang="en-US" sz="1800" b="0" u="none" strike="noStrike">
-                <a:solidFill>
-                  <a:schemeClr val="dk1"/>
-                </a:solidFill>
-                <a:effectLst/>
-                <a:uFillTx/>
-                <a:latin typeface="Calibri"/>
-              </a:rPr>
-              <a:t>title text format</a:t>
-            </a:r>
-            <a:endParaRPr lang="en-US" sz="1800" b="0" u="none" strike="noStrike">
-              <a:solidFill>
-                <a:schemeClr val="dk1"/>
-              </a:solidFill>
-              <a:effectLst/>
-              <a:uFillTx/>
-              <a:latin typeface="Calibri"/>
+              <a:rPr lang="en-US" sz="4400" b="0" u="none" strike="noStrike">
+                <a:solidFill>
+                  <a:srgbClr val="000000"/>
+                </a:solidFill>
+                <a:effectLst/>
+                <a:uFillTx/>
+                <a:latin typeface="Arial"/>
+              </a:rPr>
+              <a:t>Cli</a:t>
+            </a:r>
+            <a:r>
+              <a:rPr lang="en-US" sz="4400" b="0" u="none" strike="noStrike">
+                <a:solidFill>
+                  <a:srgbClr val="000000"/>
+                </a:solidFill>
+                <a:effectLst/>
+                <a:uFillTx/>
+                <a:latin typeface="Arial"/>
+              </a:rPr>
+              <a:t>ck </a:t>
+            </a:r>
+            <a:r>
+              <a:rPr lang="en-US" sz="4400" b="0" u="none" strike="noStrike">
+                <a:solidFill>
+                  <a:srgbClr val="000000"/>
+                </a:solidFill>
+                <a:effectLst/>
+                <a:uFillTx/>
+                <a:latin typeface="Arial"/>
+              </a:rPr>
+              <a:t>to </a:t>
+            </a:r>
+            <a:r>
+              <a:rPr lang="en-US" sz="4400" b="0" u="none" strike="noStrike">
+                <a:solidFill>
+                  <a:srgbClr val="000000"/>
+                </a:solidFill>
+                <a:effectLst/>
+                <a:uFillTx/>
+                <a:latin typeface="Arial"/>
+              </a:rPr>
+              <a:t>edi</a:t>
+            </a:r>
+            <a:r>
+              <a:rPr lang="en-US" sz="4400" b="0" u="none" strike="noStrike">
+                <a:solidFill>
+                  <a:srgbClr val="000000"/>
+                </a:solidFill>
+                <a:effectLst/>
+                <a:uFillTx/>
+                <a:latin typeface="Arial"/>
+              </a:rPr>
+              <a:t>t </a:t>
+            </a:r>
+            <a:r>
+              <a:rPr lang="en-US" sz="4400" b="0" u="none" strike="noStrike">
+                <a:solidFill>
+                  <a:srgbClr val="000000"/>
+                </a:solidFill>
+                <a:effectLst/>
+                <a:uFillTx/>
+                <a:latin typeface="Arial"/>
+              </a:rPr>
+              <a:t>th</a:t>
+            </a:r>
+            <a:r>
+              <a:rPr lang="en-US" sz="4400" b="0" u="none" strike="noStrike">
+                <a:solidFill>
+                  <a:srgbClr val="000000"/>
+                </a:solidFill>
+                <a:effectLst/>
+                <a:uFillTx/>
+                <a:latin typeface="Arial"/>
+              </a:rPr>
+              <a:t>e </a:t>
+            </a:r>
+            <a:r>
+              <a:rPr lang="en-US" sz="4400" b="0" u="none" strike="noStrike">
+                <a:solidFill>
+                  <a:srgbClr val="000000"/>
+                </a:solidFill>
+                <a:effectLst/>
+                <a:uFillTx/>
+                <a:latin typeface="Arial"/>
+              </a:rPr>
+              <a:t>titl</a:t>
+            </a:r>
+            <a:r>
+              <a:rPr lang="en-US" sz="4400" b="0" u="none" strike="noStrike">
+                <a:solidFill>
+                  <a:srgbClr val="000000"/>
+                </a:solidFill>
+                <a:effectLst/>
+                <a:uFillTx/>
+                <a:latin typeface="Arial"/>
+              </a:rPr>
+              <a:t>e </a:t>
+            </a:r>
+            <a:r>
+              <a:rPr lang="en-US" sz="4400" b="0" u="none" strike="noStrike">
+                <a:solidFill>
+                  <a:srgbClr val="000000"/>
+                </a:solidFill>
+                <a:effectLst/>
+                <a:uFillTx/>
+                <a:latin typeface="Arial"/>
+              </a:rPr>
+              <a:t>tex</a:t>
+            </a:r>
+            <a:r>
+              <a:rPr lang="en-US" sz="4400" b="0" u="none" strike="noStrike">
+                <a:solidFill>
+                  <a:srgbClr val="000000"/>
+                </a:solidFill>
+                <a:effectLst/>
+                <a:uFillTx/>
+                <a:latin typeface="Arial"/>
+              </a:rPr>
+              <a:t>t </a:t>
+            </a:r>
+            <a:r>
+              <a:rPr lang="en-US" sz="4400" b="0" u="none" strike="noStrike">
+                <a:solidFill>
+                  <a:srgbClr val="000000"/>
+                </a:solidFill>
+                <a:effectLst/>
+                <a:uFillTx/>
+                <a:latin typeface="Arial"/>
+              </a:rPr>
+              <a:t>for</a:t>
+            </a:r>
+            <a:r>
+              <a:rPr lang="en-US" sz="4400" b="0" u="none" strike="noStrike">
+                <a:solidFill>
+                  <a:srgbClr val="000000"/>
+                </a:solidFill>
+                <a:effectLst/>
+                <a:uFillTx/>
+                <a:latin typeface="Arial"/>
+              </a:rPr>
+              <a:t>m</a:t>
+            </a:r>
+            <a:r>
+              <a:rPr lang="en-US" sz="4400" b="0" u="none" strike="noStrike">
+                <a:solidFill>
+                  <a:srgbClr val="000000"/>
+                </a:solidFill>
+                <a:effectLst/>
+                <a:uFillTx/>
+                <a:latin typeface="Arial"/>
+              </a:rPr>
+              <a:t>at</a:t>
+            </a:r>
+            <a:endParaRPr lang="en-US" sz="4400" b="0" u="none" strike="noStrike">
+              <a:solidFill>
+                <a:srgbClr val="000000"/>
+              </a:solidFill>
+              <a:effectLst/>
+              <a:uFillTx/>
+              <a:latin typeface="Arial"/>
             </a:endParaRPr>
           </a:p>
         </p:txBody>
@@ -2940,7 +2981,7 @@
         <p:spPr>
           <a:xfrm>
             <a:off x="609480" y="1604520"/>
-            <a:ext cx="10972080" cy="3977280"/>
+            <a:ext cx="10972440" cy="3977280"/>
           </a:xfrm>
           <a:prstGeom prst="rect">
             <a:avLst/>
@@ -2969,21 +3010,21 @@
             <a:r>
               <a:rPr lang="en-US" sz="3200" b="0" u="none" strike="noStrike">
                 <a:solidFill>
-                  <a:schemeClr val="dk1"/>
-                </a:solidFill>
-                <a:effectLst/>
-                <a:uFillTx/>
-                <a:latin typeface="Calibri"/>
+                  <a:srgbClr val="000000"/>
+                </a:solidFill>
+                <a:effectLst/>
+                <a:uFillTx/>
+                <a:latin typeface="Arial"/>
               </a:rPr>
               <a:t>Click to edit the outline text format</a:t>
             </a:r>
             <a:endParaRPr lang="en-US" sz="3200" b="0" u="none" strike="noStrike">
               <a:solidFill>
-                <a:schemeClr val="dk1"/>
-              </a:solidFill>
-              <a:effectLst/>
-              <a:uFillTx/>
-              <a:latin typeface="Calibri"/>
+                <a:srgbClr val="000000"/>
+              </a:solidFill>
+              <a:effectLst/>
+              <a:uFillTx/>
+              <a:latin typeface="Arial"/>
             </a:endParaRPr>
           </a:p>
           <a:p>
@@ -2999,23 +3040,23 @@
               <a:buChar char=""/>
             </a:pPr>
             <a:r>
-              <a:rPr lang="en-US" sz="2400" b="0" u="none" strike="noStrike">
-                <a:solidFill>
-                  <a:schemeClr val="dk1"/>
-                </a:solidFill>
-                <a:effectLst/>
-                <a:uFillTx/>
-                <a:latin typeface="Calibri"/>
+              <a:rPr lang="en-US" sz="2800" b="0" u="none" strike="noStrike">
+                <a:solidFill>
+                  <a:srgbClr val="000000"/>
+                </a:solidFill>
+                <a:effectLst/>
+                <a:uFillTx/>
+                <a:latin typeface="Arial"/>
               </a:rPr>
               <a:t>Second Outline Level</a:t>
             </a:r>
-            <a:endParaRPr lang="en-US" sz="2400" b="0" u="none" strike="noStrike">
-              <a:solidFill>
-                <a:schemeClr val="dk1"/>
-              </a:solidFill>
-              <a:effectLst/>
-              <a:uFillTx/>
-              <a:latin typeface="Calibri"/>
+            <a:endParaRPr lang="en-US" sz="2800" b="0" u="none" strike="noStrike">
+              <a:solidFill>
+                <a:srgbClr val="000000"/>
+              </a:solidFill>
+              <a:effectLst/>
+              <a:uFillTx/>
+              <a:latin typeface="Arial"/>
             </a:endParaRPr>
           </a:p>
           <a:p>
@@ -3031,23 +3072,23 @@
               <a:buChar char=""/>
             </a:pPr>
             <a:r>
-              <a:rPr lang="en-US" sz="2000" b="0" u="none" strike="noStrike">
-                <a:solidFill>
-                  <a:schemeClr val="dk1"/>
-                </a:solidFill>
-                <a:effectLst/>
-                <a:uFillTx/>
-                <a:latin typeface="Calibri"/>
+              <a:rPr lang="en-US" sz="2400" b="0" u="none" strike="noStrike">
+                <a:solidFill>
+                  <a:srgbClr val="000000"/>
+                </a:solidFill>
+                <a:effectLst/>
+                <a:uFillTx/>
+                <a:latin typeface="Arial"/>
               </a:rPr>
               <a:t>Third Outline Level</a:t>
             </a:r>
-            <a:endParaRPr lang="en-US" sz="2000" b="0" u="none" strike="noStrike">
-              <a:solidFill>
-                <a:schemeClr val="dk1"/>
-              </a:solidFill>
-              <a:effectLst/>
-              <a:uFillTx/>
-              <a:latin typeface="Calibri"/>
+            <a:endParaRPr lang="en-US" sz="2400" b="0" u="none" strike="noStrike">
+              <a:solidFill>
+                <a:srgbClr val="000000"/>
+              </a:solidFill>
+              <a:effectLst/>
+              <a:uFillTx/>
+              <a:latin typeface="Arial"/>
             </a:endParaRPr>
           </a:p>
           <a:p>
@@ -3065,21 +3106,21 @@
             <a:r>
               <a:rPr lang="en-US" sz="2000" b="0" u="none" strike="noStrike">
                 <a:solidFill>
-                  <a:schemeClr val="dk1"/>
-                </a:solidFill>
-                <a:effectLst/>
-                <a:uFillTx/>
-                <a:latin typeface="Calibri"/>
+                  <a:srgbClr val="000000"/>
+                </a:solidFill>
+                <a:effectLst/>
+                <a:uFillTx/>
+                <a:latin typeface="Arial"/>
               </a:rPr>
               <a:t>Fourth Outline Level</a:t>
             </a:r>
             <a:endParaRPr lang="en-US" sz="2000" b="0" u="none" strike="noStrike">
               <a:solidFill>
-                <a:schemeClr val="dk1"/>
-              </a:solidFill>
-              <a:effectLst/>
-              <a:uFillTx/>
-              <a:latin typeface="Calibri"/>
+                <a:srgbClr val="000000"/>
+              </a:solidFill>
+              <a:effectLst/>
+              <a:uFillTx/>
+              <a:latin typeface="Arial"/>
             </a:endParaRPr>
           </a:p>
           <a:p>
@@ -3097,21 +3138,21 @@
             <a:r>
               <a:rPr lang="en-US" sz="2000" b="0" u="none" strike="noStrike">
                 <a:solidFill>
-                  <a:schemeClr val="dk1"/>
-                </a:solidFill>
-                <a:effectLst/>
-                <a:uFillTx/>
-                <a:latin typeface="Calibri"/>
+                  <a:srgbClr val="000000"/>
+                </a:solidFill>
+                <a:effectLst/>
+                <a:uFillTx/>
+                <a:latin typeface="Arial"/>
               </a:rPr>
               <a:t>Fifth Outline Level</a:t>
             </a:r>
             <a:endParaRPr lang="en-US" sz="2000" b="0" u="none" strike="noStrike">
               <a:solidFill>
-                <a:schemeClr val="dk1"/>
-              </a:solidFill>
-              <a:effectLst/>
-              <a:uFillTx/>
-              <a:latin typeface="Calibri"/>
+                <a:srgbClr val="000000"/>
+              </a:solidFill>
+              <a:effectLst/>
+              <a:uFillTx/>
+              <a:latin typeface="Arial"/>
             </a:endParaRPr>
           </a:p>
           <a:p>
@@ -3129,21 +3170,21 @@
             <a:r>
               <a:rPr lang="en-US" sz="2000" b="0" u="none" strike="noStrike">
                 <a:solidFill>
-                  <a:schemeClr val="dk1"/>
-                </a:solidFill>
-                <a:effectLst/>
-                <a:uFillTx/>
-                <a:latin typeface="Calibri"/>
+                  <a:srgbClr val="000000"/>
+                </a:solidFill>
+                <a:effectLst/>
+                <a:uFillTx/>
+                <a:latin typeface="Arial"/>
               </a:rPr>
               <a:t>Sixth Outline Level</a:t>
             </a:r>
             <a:endParaRPr lang="en-US" sz="2000" b="0" u="none" strike="noStrike">
               <a:solidFill>
-                <a:schemeClr val="dk1"/>
-              </a:solidFill>
-              <a:effectLst/>
-              <a:uFillTx/>
-              <a:latin typeface="Calibri"/>
+                <a:srgbClr val="000000"/>
+              </a:solidFill>
+              <a:effectLst/>
+              <a:uFillTx/>
+              <a:latin typeface="Arial"/>
             </a:endParaRPr>
           </a:p>
           <a:p>
@@ -3161,21 +3202,21 @@
             <a:r>
               <a:rPr lang="en-US" sz="2000" b="0" u="none" strike="noStrike">
                 <a:solidFill>
-                  <a:schemeClr val="dk1"/>
-                </a:solidFill>
-                <a:effectLst/>
-                <a:uFillTx/>
-                <a:latin typeface="Calibri"/>
+                  <a:srgbClr val="000000"/>
+                </a:solidFill>
+                <a:effectLst/>
+                <a:uFillTx/>
+                <a:latin typeface="Arial"/>
               </a:rPr>
               <a:t>Seventh Outline Level</a:t>
             </a:r>
             <a:endParaRPr lang="en-US" sz="2000" b="0" u="none" strike="noStrike">
               <a:solidFill>
-                <a:schemeClr val="dk1"/>
-              </a:solidFill>
-              <a:effectLst/>
-              <a:uFillTx/>
-              <a:latin typeface="Calibri"/>
+                <a:srgbClr val="000000"/>
+              </a:solidFill>
+              <a:effectLst/>
+              <a:uFillTx/>
+              <a:latin typeface="Arial"/>
             </a:endParaRPr>
           </a:p>
         </p:txBody>
@@ -3215,130 +3256,14 @@
       </p:grpSpPr>
       <p:sp>
         <p:nvSpPr>
-          <p:cNvPr id="15" name="Shape 0"/>
-          <p:cNvSpPr/>
-          <p:nvPr/>
-        </p:nvSpPr>
-        <p:spPr>
-          <a:xfrm>
-            <a:off x="9829800" y="777240"/>
-            <a:ext cx="1644840" cy="1644840"/>
-          </a:xfrm>
-          <a:prstGeom prst="arc">
-            <a:avLst>
-              <a:gd name="adj1" fmla="val 16200000"/>
-              <a:gd name="adj2" fmla="val 0"/>
-            </a:avLst>
-          </a:prstGeom>
-          <a:solidFill>
-            <a:srgbClr val="0e6ba8">
-              <a:alpha val="65000"/>
-            </a:srgbClr>
-          </a:solidFill>
-          <a:ln w="12700">
-            <a:solidFill>
-              <a:srgbClr val="0e6ba8">
-                <a:alpha val="0"/>
-              </a:srgbClr>
-            </a:solidFill>
-            <a:round/>
-          </a:ln>
-        </p:spPr>
-        <p:style>
-          <a:lnRef idx="0"/>
-          <a:fillRef idx="0"/>
-          <a:effectRef idx="0"/>
-          <a:fontRef idx="minor"/>
-        </p:style>
-        <p:txBody>
-          <a:bodyPr lIns="90000" rIns="90000" tIns="45000" bIns="45000" anchor="t">
-            <a:noAutofit/>
-          </a:bodyPr>
-          <a:p>
-            <a:pPr>
-              <a:lnSpc>
-                <a:spcPct val="100000"/>
-              </a:lnSpc>
-            </a:pPr>
-            <a:endParaRPr lang="en-US" sz="1800" b="0" u="none" strike="noStrike">
-              <a:solidFill>
-                <a:srgbClr val="ffffff"/>
-              </a:solidFill>
-              <a:effectLst/>
-              <a:uFillTx/>
-              <a:latin typeface="Arial"/>
-            </a:endParaRPr>
-          </a:p>
-        </p:txBody>
-      </p:sp>
-      <p:sp>
-        <p:nvSpPr>
-          <p:cNvPr id="16" name="Shape 1"/>
-          <p:cNvSpPr/>
-          <p:nvPr/>
-        </p:nvSpPr>
-        <p:spPr>
-          <a:xfrm>
-            <a:off x="9326880" y="4480560"/>
-            <a:ext cx="1644840" cy="1370520"/>
-          </a:xfrm>
-          <a:prstGeom prst="arc">
-            <a:avLst>
-              <a:gd name="adj1" fmla="val 16200000"/>
-              <a:gd name="adj2" fmla="val 0"/>
-            </a:avLst>
-          </a:prstGeom>
-          <a:solidFill>
-            <a:srgbClr val="00a6a6">
-              <a:alpha val="35000"/>
-            </a:srgbClr>
-          </a:solidFill>
-          <a:ln w="12700">
-            <a:solidFill>
-              <a:srgbClr val="00a6a6">
-                <a:alpha val="0"/>
-              </a:srgbClr>
-            </a:solidFill>
-            <a:round/>
-          </a:ln>
-        </p:spPr>
-        <p:style>
-          <a:lnRef idx="0"/>
-          <a:fillRef idx="0"/>
-          <a:effectRef idx="0"/>
-          <a:fontRef idx="minor"/>
-        </p:style>
-        <p:txBody>
-          <a:bodyPr lIns="90000" rIns="90000" tIns="45000" bIns="45000" anchor="t">
-            <a:noAutofit/>
-          </a:bodyPr>
-          <a:p>
-            <a:pPr>
-              <a:lnSpc>
-                <a:spcPct val="100000"/>
-              </a:lnSpc>
-            </a:pPr>
-            <a:endParaRPr lang="en-US" sz="1800" b="0" u="none" strike="noStrike">
-              <a:solidFill>
-                <a:srgbClr val="ffffff"/>
-              </a:solidFill>
-              <a:effectLst/>
-              <a:uFillTx/>
-              <a:latin typeface="Arial"/>
-            </a:endParaRPr>
-          </a:p>
-        </p:txBody>
-      </p:sp>
-      <p:sp>
-        <p:nvSpPr>
-          <p:cNvPr id="17" name="Text 2"/>
+          <p:cNvPr id="15" name="Text 2"/>
           <p:cNvSpPr/>
           <p:nvPr/>
         </p:nvSpPr>
         <p:spPr>
           <a:xfrm>
             <a:off x="777240" y="1828800"/>
-            <a:ext cx="8045640" cy="1096200"/>
+            <a:ext cx="8045280" cy="1095840"/>
           </a:xfrm>
           <a:prstGeom prst="rect">
             <a:avLst/>
@@ -3392,14 +3317,14 @@
       </p:sp>
       <p:sp>
         <p:nvSpPr>
-          <p:cNvPr id="18" name="Text 3"/>
+          <p:cNvPr id="16" name="Text 3"/>
           <p:cNvSpPr/>
           <p:nvPr/>
         </p:nvSpPr>
         <p:spPr>
           <a:xfrm>
             <a:off x="822960" y="3063240"/>
-            <a:ext cx="7771320" cy="684720"/>
+            <a:ext cx="7770960" cy="684360"/>
           </a:xfrm>
           <a:prstGeom prst="rect">
             <a:avLst/>
@@ -3452,14 +3377,14 @@
       </p:sp>
       <p:sp>
         <p:nvSpPr>
-          <p:cNvPr id="19" name="Text 4"/>
+          <p:cNvPr id="17" name="Text 4"/>
           <p:cNvSpPr/>
           <p:nvPr/>
         </p:nvSpPr>
         <p:spPr>
           <a:xfrm>
             <a:off x="822960" y="5806440"/>
-            <a:ext cx="2742120" cy="273240"/>
+            <a:ext cx="2741760" cy="272880"/>
           </a:xfrm>
           <a:prstGeom prst="rect">
             <a:avLst/>
@@ -3500,66 +3425,6 @@
               <a:t>Bruno Cavalli</a:t>
             </a:r>
             <a:endParaRPr lang="en-US" sz="1400" b="0" u="none" strike="noStrike">
-              <a:solidFill>
-                <a:srgbClr val="ffffff"/>
-              </a:solidFill>
-              <a:effectLst/>
-              <a:uFillTx/>
-              <a:latin typeface="Arial"/>
-            </a:endParaRPr>
-          </a:p>
-        </p:txBody>
-      </p:sp>
-      <p:sp>
-        <p:nvSpPr>
-          <p:cNvPr id="20" name="Text 5"/>
-          <p:cNvSpPr/>
-          <p:nvPr/>
-        </p:nvSpPr>
-        <p:spPr>
-          <a:xfrm>
-            <a:off x="11475720" y="6473880"/>
-            <a:ext cx="254880" cy="136080"/>
-          </a:xfrm>
-          <a:prstGeom prst="rect">
-            <a:avLst/>
-          </a:prstGeom>
-          <a:noFill/>
-          <a:ln w="0">
-            <a:noFill/>
-          </a:ln>
-        </p:spPr>
-        <p:style>
-          <a:lnRef idx="0"/>
-          <a:fillRef idx="0"/>
-          <a:effectRef idx="0"/>
-          <a:fontRef idx="minor"/>
-        </p:style>
-        <p:txBody>
-          <a:bodyPr lIns="0" rIns="0" tIns="0" bIns="0" anchor="ctr">
-            <a:noAutofit/>
-          </a:bodyPr>
-          <a:p>
-            <a:pPr algn="r" defTabSz="914400">
-              <a:lnSpc>
-                <a:spcPct val="100000"/>
-              </a:lnSpc>
-              <a:tabLst>
-                <a:tab algn="l" pos="0"/>
-              </a:tabLst>
-            </a:pPr>
-            <a:r>
-              <a:rPr lang="en-US" sz="700" b="0" u="none" strike="noStrike">
-                <a:solidFill>
-                  <a:srgbClr val="64748b"/>
-                </a:solidFill>
-                <a:effectLst/>
-                <a:uFillTx/>
-                <a:latin typeface="Aptos"/>
-              </a:rPr>
-              <a:t>1</a:t>
-            </a:r>
-            <a:endParaRPr lang="en-US" sz="700" b="0" u="none" strike="noStrike">
               <a:solidFill>
                 <a:srgbClr val="ffffff"/>
               </a:solidFill>
@@ -3602,7 +3467,7 @@
       </p:grpSpPr>
       <p:pic>
         <p:nvPicPr>
-          <p:cNvPr id="125" name=""/>
+          <p:cNvPr id="117" name=""/>
           <p:cNvPicPr/>
           <p:nvPr/>
         </p:nvPicPr>
@@ -3613,7 +3478,7 @@
         <p:spPr>
           <a:xfrm>
             <a:off x="0" y="3960"/>
-            <a:ext cx="12184560" cy="6857280"/>
+            <a:ext cx="12184200" cy="6856920"/>
           </a:xfrm>
           <a:prstGeom prst="rect">
             <a:avLst/>
@@ -3626,7 +3491,7 @@
       </p:pic>
       <p:pic>
         <p:nvPicPr>
-          <p:cNvPr id="126" name=""/>
+          <p:cNvPr id="118" name=""/>
           <p:cNvPicPr/>
           <p:nvPr/>
         </p:nvPicPr>
@@ -3637,7 +3502,7 @@
         <p:spPr>
           <a:xfrm>
             <a:off x="1467720" y="5486400"/>
-            <a:ext cx="9047880" cy="685800"/>
+            <a:ext cx="9047520" cy="685440"/>
           </a:xfrm>
           <a:prstGeom prst="rect">
             <a:avLst/>
@@ -3650,7 +3515,7 @@
       </p:pic>
       <p:pic>
         <p:nvPicPr>
-          <p:cNvPr id="127" name=""/>
+          <p:cNvPr id="119" name=""/>
           <p:cNvPicPr/>
           <p:nvPr/>
         </p:nvPicPr>
@@ -3661,7 +3526,7 @@
         <p:spPr>
           <a:xfrm>
             <a:off x="11144880" y="6363360"/>
-            <a:ext cx="970920" cy="494640"/>
+            <a:ext cx="970560" cy="494280"/>
           </a:xfrm>
           <a:prstGeom prst="rect">
             <a:avLst/>
@@ -3711,14 +3576,14 @@
       </p:grpSpPr>
       <p:sp>
         <p:nvSpPr>
-          <p:cNvPr id="128" name="Shape 2"/>
+          <p:cNvPr id="120" name="Shape 2"/>
           <p:cNvSpPr/>
           <p:nvPr/>
         </p:nvSpPr>
         <p:spPr>
           <a:xfrm>
             <a:off x="0" y="0"/>
-            <a:ext cx="12190680" cy="657360"/>
+            <a:ext cx="12190320" cy="657000"/>
           </a:xfrm>
           <a:prstGeom prst="rect">
             <a:avLst/>
@@ -3744,6 +3609,11 @@
             <a:noAutofit/>
           </a:bodyPr>
           <a:p>
+            <a:pPr>
+              <a:lnSpc>
+                <a:spcPct val="100000"/>
+              </a:lnSpc>
+            </a:pPr>
             <a:endParaRPr lang="en-US" sz="1800" b="0" u="none" strike="noStrike">
               <a:solidFill>
                 <a:srgbClr val="ffffff"/>
@@ -3757,14 +3627,14 @@
       </p:sp>
       <p:sp>
         <p:nvSpPr>
-          <p:cNvPr id="129" name="Text 29"/>
+          <p:cNvPr id="121" name="Text 29"/>
           <p:cNvSpPr/>
           <p:nvPr/>
         </p:nvSpPr>
         <p:spPr>
           <a:xfrm>
             <a:off x="502920" y="146160"/>
-            <a:ext cx="8868600" cy="346320"/>
+            <a:ext cx="8868240" cy="345960"/>
           </a:xfrm>
           <a:prstGeom prst="rect">
             <a:avLst/>
@@ -3803,31 +3673,7 @@
                 <a:latin typeface="Aptos Display"/>
                 <a:ea typeface="Aptos Display"/>
               </a:rPr>
-              <a:t>O que muda </a:t>
-            </a:r>
-            <a:r>
-              <a:rPr lang="en-US" sz="2000" b="1" u="none" strike="noStrike">
-                <a:solidFill>
-                  <a:srgbClr val="ffffff"/>
-                </a:solidFill>
-                <a:effectLst/>
-                <a:uFillTx/>
-                <a:latin typeface="Aptos Display"/>
-                <a:ea typeface="Aptos Display"/>
-              </a:rPr>
-              <a:t>nos </a:t>
-            </a:r>
-            <a:r>
-              <a:rPr lang="en-US" sz="2000" b="1" u="none" strike="noStrike">
-                <a:solidFill>
-                  <a:srgbClr val="ffffff"/>
-                </a:solidFill>
-                <a:effectLst/>
-                <a:uFillTx/>
-                <a:latin typeface="Aptos Display"/>
-                <a:ea typeface="Aptos Display"/>
-              </a:rPr>
-              <a:t>resultados?</a:t>
+              <a:t>O que muda nos resultados?</a:t>
             </a:r>
             <a:endParaRPr lang="en-US" sz="2000" b="0" u="none" strike="noStrike">
               <a:solidFill>
@@ -3842,14 +3688,14 @@
       </p:sp>
       <p:sp>
         <p:nvSpPr>
-          <p:cNvPr id="130" name="Text 35"/>
+          <p:cNvPr id="122" name="Text 35"/>
           <p:cNvSpPr/>
           <p:nvPr/>
         </p:nvSpPr>
         <p:spPr>
           <a:xfrm>
             <a:off x="9555480" y="173880"/>
-            <a:ext cx="2056320" cy="254880"/>
+            <a:ext cx="2055960" cy="254520"/>
           </a:xfrm>
           <a:prstGeom prst="rect">
             <a:avLst/>
@@ -3902,7 +3748,7 @@
       </p:sp>
       <p:sp>
         <p:nvSpPr>
-          <p:cNvPr id="131" name="Shape 4"/>
+          <p:cNvPr id="123" name="Shape 4"/>
           <p:cNvSpPr/>
           <p:nvPr/>
         </p:nvSpPr>
@@ -3945,14 +3791,14 @@
       </p:sp>
       <p:sp>
         <p:nvSpPr>
-          <p:cNvPr id="132" name="Text 36"/>
+          <p:cNvPr id="124" name="Text 36"/>
           <p:cNvSpPr/>
           <p:nvPr/>
         </p:nvSpPr>
         <p:spPr>
           <a:xfrm>
             <a:off x="502920" y="6473880"/>
-            <a:ext cx="3290760" cy="163440"/>
+            <a:ext cx="3290400" cy="163080"/>
           </a:xfrm>
           <a:prstGeom prst="rect">
             <a:avLst/>
@@ -4005,14 +3851,14 @@
       </p:sp>
       <p:sp>
         <p:nvSpPr>
-          <p:cNvPr id="133" name="Shape 19"/>
+          <p:cNvPr id="125" name="Shape 19"/>
           <p:cNvSpPr/>
           <p:nvPr/>
         </p:nvSpPr>
         <p:spPr>
           <a:xfrm>
             <a:off x="822960" y="1143000"/>
-            <a:ext cx="3382200" cy="4113720"/>
+            <a:ext cx="3381840" cy="4113360"/>
           </a:xfrm>
           <a:prstGeom prst="roundRect">
             <a:avLst>
@@ -4040,6 +3886,11 @@
             <a:noAutofit/>
           </a:bodyPr>
           <a:p>
+            <a:pPr>
+              <a:lnSpc>
+                <a:spcPct val="100000"/>
+              </a:lnSpc>
+            </a:pPr>
             <a:endParaRPr lang="en-US" sz="1800" b="0" u="none" strike="noStrike">
               <a:solidFill>
                 <a:srgbClr val="000000"/>
@@ -4053,14 +3904,14 @@
       </p:sp>
       <p:sp>
         <p:nvSpPr>
-          <p:cNvPr id="134" name="Text 37"/>
+          <p:cNvPr id="126" name="Text 37"/>
           <p:cNvSpPr/>
           <p:nvPr/>
         </p:nvSpPr>
         <p:spPr>
           <a:xfrm>
             <a:off x="1005840" y="1307520"/>
-            <a:ext cx="3016440" cy="227520"/>
+            <a:ext cx="3016080" cy="227160"/>
           </a:xfrm>
           <a:prstGeom prst="rect">
             <a:avLst/>
@@ -4113,14 +3964,14 @@
       </p:sp>
       <p:sp>
         <p:nvSpPr>
-          <p:cNvPr id="135" name="Text 39"/>
+          <p:cNvPr id="127" name="Text 39"/>
           <p:cNvSpPr/>
           <p:nvPr/>
         </p:nvSpPr>
         <p:spPr>
           <a:xfrm>
             <a:off x="1005840" y="1645920"/>
-            <a:ext cx="3016440" cy="3473640"/>
+            <a:ext cx="3016080" cy="3473280"/>
           </a:xfrm>
           <a:prstGeom prst="rect">
             <a:avLst/>
@@ -4260,14 +4111,14 @@
       </p:sp>
       <p:sp>
         <p:nvSpPr>
-          <p:cNvPr id="136" name="Shape 22"/>
+          <p:cNvPr id="128" name="Shape 22"/>
           <p:cNvSpPr/>
           <p:nvPr/>
         </p:nvSpPr>
         <p:spPr>
           <a:xfrm>
             <a:off x="4434840" y="1143000"/>
-            <a:ext cx="3382200" cy="4113720"/>
+            <a:ext cx="3381840" cy="4113360"/>
           </a:xfrm>
           <a:prstGeom prst="roundRect">
             <a:avLst>
@@ -4295,6 +4146,11 @@
             <a:noAutofit/>
           </a:bodyPr>
           <a:p>
+            <a:pPr>
+              <a:lnSpc>
+                <a:spcPct val="100000"/>
+              </a:lnSpc>
+            </a:pPr>
             <a:endParaRPr lang="en-US" sz="1800" b="0" u="none" strike="noStrike">
               <a:solidFill>
                 <a:srgbClr val="000000"/>
@@ -4308,14 +4164,14 @@
       </p:sp>
       <p:sp>
         <p:nvSpPr>
-          <p:cNvPr id="137" name="Text 40"/>
+          <p:cNvPr id="129" name="Text 40"/>
           <p:cNvSpPr/>
           <p:nvPr/>
         </p:nvSpPr>
         <p:spPr>
           <a:xfrm>
             <a:off x="4617720" y="1307520"/>
-            <a:ext cx="3016440" cy="227520"/>
+            <a:ext cx="3016080" cy="227160"/>
           </a:xfrm>
           <a:prstGeom prst="rect">
             <a:avLst/>
@@ -4368,14 +4224,14 @@
       </p:sp>
       <p:sp>
         <p:nvSpPr>
-          <p:cNvPr id="138" name="Text 41"/>
+          <p:cNvPr id="130" name="Text 41"/>
           <p:cNvSpPr/>
           <p:nvPr/>
         </p:nvSpPr>
         <p:spPr>
           <a:xfrm>
             <a:off x="4617720" y="1645920"/>
-            <a:ext cx="3016440" cy="3473640"/>
+            <a:ext cx="3016080" cy="3473280"/>
           </a:xfrm>
           <a:prstGeom prst="rect">
             <a:avLst/>
@@ -4500,29 +4356,7 @@
                 <a:uFillTx/>
                 <a:latin typeface="Aptos"/>
               </a:rPr>
-              <a:t>• risco extremo fica mais </a:t>
-            </a:r>
-            <a:r>
-              <a:rPr lang="en-US" sz="1100" b="0" u="none" strike="noStrike">
-                <a:solidFill>
-                  <a:srgbClr val="1f2937"/>
-                </a:solidFill>
-                <a:effectLst/>
-                <a:uFillTx/>
-                <a:latin typeface="Aptos"/>
-              </a:rPr>
-              <a:t>realista para amostras </a:t>
-            </a:r>
-            <a:r>
-              <a:rPr lang="en-US" sz="1100" b="0" u="none" strike="noStrike">
-                <a:solidFill>
-                  <a:srgbClr val="1f2937"/>
-                </a:solidFill>
-                <a:effectLst/>
-                <a:uFillTx/>
-                <a:latin typeface="Aptos"/>
-              </a:rPr>
-              <a:t>ambientais</a:t>
+              <a:t>• risco extremo fica mais realista para amostras ambientais</a:t>
             </a:r>
             <a:endParaRPr lang="en-US" sz="1100" b="0" u="none" strike="noStrike">
               <a:solidFill>
@@ -4537,14 +4371,14 @@
       </p:sp>
       <p:sp>
         <p:nvSpPr>
-          <p:cNvPr id="139" name="Shape 24"/>
+          <p:cNvPr id="131" name="Shape 24"/>
           <p:cNvSpPr/>
           <p:nvPr/>
         </p:nvSpPr>
         <p:spPr>
           <a:xfrm>
             <a:off x="8046720" y="1143000"/>
-            <a:ext cx="3382200" cy="4113720"/>
+            <a:ext cx="3381840" cy="4113360"/>
           </a:xfrm>
           <a:prstGeom prst="roundRect">
             <a:avLst>
@@ -4572,6 +4406,11 @@
             <a:noAutofit/>
           </a:bodyPr>
           <a:p>
+            <a:pPr>
+              <a:lnSpc>
+                <a:spcPct val="100000"/>
+              </a:lnSpc>
+            </a:pPr>
             <a:endParaRPr lang="en-US" sz="1800" b="0" u="none" strike="noStrike">
               <a:solidFill>
                 <a:srgbClr val="000000"/>
@@ -4585,14 +4424,14 @@
       </p:sp>
       <p:sp>
         <p:nvSpPr>
-          <p:cNvPr id="140" name="Text 42"/>
+          <p:cNvPr id="132" name="Text 42"/>
           <p:cNvSpPr/>
           <p:nvPr/>
         </p:nvSpPr>
         <p:spPr>
           <a:xfrm>
             <a:off x="8229600" y="1307520"/>
-            <a:ext cx="3016440" cy="227520"/>
+            <a:ext cx="3016080" cy="227160"/>
           </a:xfrm>
           <a:prstGeom prst="rect">
             <a:avLst/>
@@ -4630,150 +4469,7 @@
                 <a:uFillTx/>
                 <a:latin typeface="Aptos"/>
               </a:rPr>
-              <a:t>C</a:t>
-            </a:r>
-            <a:r>
-              <a:rPr lang="en-US" sz="1300" b="1" u="none" strike="noStrike">
-                <a:solidFill>
-                  <a:srgbClr val="16324f"/>
-                </a:solidFill>
-                <a:effectLst/>
-                <a:uFillTx/>
-                <a:latin typeface="Aptos"/>
-              </a:rPr>
-              <a:t>o</a:t>
-            </a:r>
-            <a:r>
-              <a:rPr lang="en-US" sz="1300" b="1" u="none" strike="noStrike">
-                <a:solidFill>
-                  <a:srgbClr val="16324f"/>
-                </a:solidFill>
-                <a:effectLst/>
-                <a:uFillTx/>
-                <a:latin typeface="Aptos"/>
-              </a:rPr>
-              <a:t>n</a:t>
-            </a:r>
-            <a:r>
-              <a:rPr lang="en-US" sz="1300" b="1" u="none" strike="noStrike">
-                <a:solidFill>
-                  <a:srgbClr val="16324f"/>
-                </a:solidFill>
-                <a:effectLst/>
-                <a:uFillTx/>
-                <a:latin typeface="Aptos"/>
-              </a:rPr>
-              <a:t>cl</a:t>
-            </a:r>
-            <a:r>
-              <a:rPr lang="en-US" sz="1300" b="1" u="none" strike="noStrike">
-                <a:solidFill>
-                  <a:srgbClr val="16324f"/>
-                </a:solidFill>
-                <a:effectLst/>
-                <a:uFillTx/>
-                <a:latin typeface="Aptos"/>
-              </a:rPr>
-              <a:t>u</a:t>
-            </a:r>
-            <a:r>
-              <a:rPr lang="en-US" sz="1300" b="1" u="none" strike="noStrike">
-                <a:solidFill>
-                  <a:srgbClr val="16324f"/>
-                </a:solidFill>
-                <a:effectLst/>
-                <a:uFillTx/>
-                <a:latin typeface="Aptos"/>
-              </a:rPr>
-              <a:t>s</a:t>
-            </a:r>
-            <a:r>
-              <a:rPr lang="en-US" sz="1300" b="1" u="none" strike="noStrike">
-                <a:solidFill>
-                  <a:srgbClr val="16324f"/>
-                </a:solidFill>
-                <a:effectLst/>
-                <a:uFillTx/>
-                <a:latin typeface="Aptos"/>
-              </a:rPr>
-              <a:t>ã</a:t>
-            </a:r>
-            <a:r>
-              <a:rPr lang="en-US" sz="1300" b="1" u="none" strike="noStrike">
-                <a:solidFill>
-                  <a:srgbClr val="16324f"/>
-                </a:solidFill>
-                <a:effectLst/>
-                <a:uFillTx/>
-                <a:latin typeface="Aptos"/>
-              </a:rPr>
-              <a:t>o </a:t>
-            </a:r>
-            <a:r>
-              <a:rPr lang="en-US" sz="1300" b="1" u="none" strike="noStrike">
-                <a:solidFill>
-                  <a:srgbClr val="16324f"/>
-                </a:solidFill>
-                <a:effectLst/>
-                <a:uFillTx/>
-                <a:latin typeface="Aptos"/>
-              </a:rPr>
-              <a:t>p</a:t>
-            </a:r>
-            <a:r>
-              <a:rPr lang="en-US" sz="1300" b="1" u="none" strike="noStrike">
-                <a:solidFill>
-                  <a:srgbClr val="16324f"/>
-                </a:solidFill>
-                <a:effectLst/>
-                <a:uFillTx/>
-                <a:latin typeface="Aptos"/>
-              </a:rPr>
-              <a:t>r</a:t>
-            </a:r>
-            <a:r>
-              <a:rPr lang="en-US" sz="1300" b="1" u="none" strike="noStrike">
-                <a:solidFill>
-                  <a:srgbClr val="16324f"/>
-                </a:solidFill>
-                <a:effectLst/>
-                <a:uFillTx/>
-                <a:latin typeface="Aptos"/>
-              </a:rPr>
-              <a:t>á</a:t>
-            </a:r>
-            <a:r>
-              <a:rPr lang="en-US" sz="1300" b="1" u="none" strike="noStrike">
-                <a:solidFill>
-                  <a:srgbClr val="16324f"/>
-                </a:solidFill>
-                <a:effectLst/>
-                <a:uFillTx/>
-                <a:latin typeface="Aptos"/>
-              </a:rPr>
-              <a:t>ti</a:t>
-            </a:r>
-            <a:r>
-              <a:rPr lang="en-US" sz="1300" b="1" u="none" strike="noStrike">
-                <a:solidFill>
-                  <a:srgbClr val="16324f"/>
-                </a:solidFill>
-                <a:effectLst/>
-                <a:uFillTx/>
-                <a:latin typeface="Aptos"/>
-              </a:rPr>
-              <a:t>c</a:t>
-            </a:r>
-            <a:r>
-              <a:rPr lang="en-US" sz="1300" b="1" u="none" strike="noStrike">
-                <a:solidFill>
-                  <a:srgbClr val="16324f"/>
-                </a:solidFill>
-                <a:effectLst/>
-                <a:uFillTx/>
-                <a:latin typeface="Aptos"/>
-              </a:rPr>
-              <a:t>a</a:t>
+              <a:t>Conclusão prática</a:t>
             </a:r>
             <a:endParaRPr lang="en-US" sz="1300" b="0" u="none" strike="noStrike">
               <a:solidFill>
@@ -4788,14 +4484,14 @@
       </p:sp>
       <p:sp>
         <p:nvSpPr>
-          <p:cNvPr id="141" name="Text 43"/>
+          <p:cNvPr id="133" name="Text 43"/>
           <p:cNvSpPr/>
           <p:nvPr/>
         </p:nvSpPr>
         <p:spPr>
           <a:xfrm>
             <a:off x="8229600" y="1645920"/>
-            <a:ext cx="3016440" cy="3473640"/>
+            <a:ext cx="3016080" cy="3473280"/>
           </a:xfrm>
           <a:prstGeom prst="rect">
             <a:avLst/>
@@ -4848,14 +4544,14 @@
       </p:sp>
       <p:sp>
         <p:nvSpPr>
-          <p:cNvPr id="142" name="Text 44"/>
+          <p:cNvPr id="134" name="Text 44"/>
           <p:cNvSpPr/>
           <p:nvPr/>
         </p:nvSpPr>
         <p:spPr>
           <a:xfrm>
             <a:off x="11475720" y="6473880"/>
-            <a:ext cx="254880" cy="136080"/>
+            <a:ext cx="254520" cy="135720"/>
           </a:xfrm>
           <a:prstGeom prst="rect">
             <a:avLst/>
@@ -4908,7 +4604,7 @@
       </p:sp>
       <p:pic>
         <p:nvPicPr>
-          <p:cNvPr id="143" name=""/>
+          <p:cNvPr id="135" name=""/>
           <p:cNvPicPr/>
           <p:nvPr/>
         </p:nvPicPr>
@@ -4919,7 +4615,7 @@
         <p:spPr>
           <a:xfrm>
             <a:off x="11201400" y="6473880"/>
-            <a:ext cx="970920" cy="384120"/>
+            <a:ext cx="970560" cy="383760"/>
           </a:xfrm>
           <a:prstGeom prst="rect">
             <a:avLst/>
@@ -4969,14 +4665,14 @@
       </p:grpSpPr>
       <p:sp>
         <p:nvSpPr>
-          <p:cNvPr id="144" name="Shape 0"/>
+          <p:cNvPr id="136" name="Shape 0"/>
           <p:cNvSpPr/>
           <p:nvPr/>
         </p:nvSpPr>
         <p:spPr>
           <a:xfrm>
             <a:off x="0" y="0"/>
-            <a:ext cx="12190680" cy="657360"/>
+            <a:ext cx="12190320" cy="657000"/>
           </a:xfrm>
           <a:prstGeom prst="rect">
             <a:avLst/>
@@ -5020,14 +4716,14 @@
       </p:sp>
       <p:sp>
         <p:nvSpPr>
-          <p:cNvPr id="145" name="Text 1"/>
+          <p:cNvPr id="137" name="Text 1"/>
           <p:cNvSpPr/>
           <p:nvPr/>
         </p:nvSpPr>
         <p:spPr>
           <a:xfrm>
             <a:off x="502920" y="146160"/>
-            <a:ext cx="8868600" cy="346320"/>
+            <a:ext cx="8868240" cy="345960"/>
           </a:xfrm>
           <a:prstGeom prst="rect">
             <a:avLst/>
@@ -5081,14 +4777,14 @@
       </p:sp>
       <p:sp>
         <p:nvSpPr>
-          <p:cNvPr id="146" name="Text 2"/>
+          <p:cNvPr id="138" name="Text 2"/>
           <p:cNvSpPr/>
           <p:nvPr/>
         </p:nvSpPr>
         <p:spPr>
           <a:xfrm>
             <a:off x="9555480" y="173880"/>
-            <a:ext cx="2056320" cy="254880"/>
+            <a:ext cx="2055960" cy="254520"/>
           </a:xfrm>
           <a:prstGeom prst="rect">
             <a:avLst/>
@@ -5141,7 +4837,7 @@
       </p:sp>
       <p:sp>
         <p:nvSpPr>
-          <p:cNvPr id="147" name="Shape 3"/>
+          <p:cNvPr id="139" name="Shape 3"/>
           <p:cNvSpPr/>
           <p:nvPr/>
         </p:nvSpPr>
@@ -5184,14 +4880,14 @@
       </p:sp>
       <p:sp>
         <p:nvSpPr>
-          <p:cNvPr id="148" name="Text 4"/>
+          <p:cNvPr id="140" name="Text 4"/>
           <p:cNvSpPr/>
           <p:nvPr/>
         </p:nvSpPr>
         <p:spPr>
           <a:xfrm>
             <a:off x="502920" y="6473880"/>
-            <a:ext cx="3290760" cy="163440"/>
+            <a:ext cx="3290400" cy="163080"/>
           </a:xfrm>
           <a:prstGeom prst="rect">
             <a:avLst/>
@@ -5244,14 +4940,14 @@
       </p:sp>
       <p:sp>
         <p:nvSpPr>
-          <p:cNvPr id="149" name="Shape 5"/>
+          <p:cNvPr id="141" name="Shape 5"/>
           <p:cNvSpPr/>
           <p:nvPr/>
         </p:nvSpPr>
         <p:spPr>
           <a:xfrm>
             <a:off x="822960" y="1051560"/>
-            <a:ext cx="4890960" cy="785160"/>
+            <a:ext cx="4890600" cy="784800"/>
           </a:xfrm>
           <a:prstGeom prst="roundRect">
             <a:avLst>
@@ -5297,14 +4993,14 @@
       </p:sp>
       <p:sp>
         <p:nvSpPr>
-          <p:cNvPr id="150" name="Text 6"/>
+          <p:cNvPr id="142" name="Text 6"/>
           <p:cNvSpPr/>
           <p:nvPr/>
         </p:nvSpPr>
         <p:spPr>
           <a:xfrm>
             <a:off x="987480" y="1216080"/>
-            <a:ext cx="776160" cy="181800"/>
+            <a:ext cx="775800" cy="181440"/>
           </a:xfrm>
           <a:prstGeom prst="rect">
             <a:avLst/>
@@ -5357,14 +5053,14 @@
       </p:sp>
       <p:sp>
         <p:nvSpPr>
-          <p:cNvPr id="151" name="Text 7"/>
+          <p:cNvPr id="143" name="Text 7"/>
           <p:cNvSpPr/>
           <p:nvPr/>
         </p:nvSpPr>
         <p:spPr>
           <a:xfrm>
             <a:off x="1874520" y="1207080"/>
-            <a:ext cx="1690560" cy="181800"/>
+            <a:ext cx="1690200" cy="181440"/>
           </a:xfrm>
           <a:prstGeom prst="rect">
             <a:avLst/>
@@ -5417,14 +5113,14 @@
       </p:sp>
       <p:sp>
         <p:nvSpPr>
-          <p:cNvPr id="152" name="Text 8"/>
+          <p:cNvPr id="144" name="Text 8"/>
           <p:cNvSpPr/>
           <p:nvPr/>
         </p:nvSpPr>
         <p:spPr>
           <a:xfrm>
             <a:off x="3657600" y="1216080"/>
-            <a:ext cx="1827720" cy="181800"/>
+            <a:ext cx="1827360" cy="181440"/>
           </a:xfrm>
           <a:prstGeom prst="rect">
             <a:avLst/>
@@ -5477,14 +5173,14 @@
       </p:sp>
       <p:sp>
         <p:nvSpPr>
-          <p:cNvPr id="153" name="Shape 9"/>
+          <p:cNvPr id="145" name="Shape 9"/>
           <p:cNvSpPr/>
           <p:nvPr/>
         </p:nvSpPr>
         <p:spPr>
           <a:xfrm>
             <a:off x="822960" y="2194560"/>
-            <a:ext cx="4890960" cy="785160"/>
+            <a:ext cx="4890600" cy="784800"/>
           </a:xfrm>
           <a:prstGeom prst="roundRect">
             <a:avLst>
@@ -5530,14 +5226,14 @@
       </p:sp>
       <p:sp>
         <p:nvSpPr>
-          <p:cNvPr id="154" name="Text 10"/>
+          <p:cNvPr id="146" name="Text 10"/>
           <p:cNvSpPr/>
           <p:nvPr/>
         </p:nvSpPr>
         <p:spPr>
           <a:xfrm>
             <a:off x="987480" y="2359080"/>
-            <a:ext cx="776160" cy="181800"/>
+            <a:ext cx="775800" cy="181440"/>
           </a:xfrm>
           <a:prstGeom prst="rect">
             <a:avLst/>
@@ -5590,14 +5286,14 @@
       </p:sp>
       <p:sp>
         <p:nvSpPr>
-          <p:cNvPr id="155" name="Text 11"/>
+          <p:cNvPr id="147" name="Text 11"/>
           <p:cNvSpPr/>
           <p:nvPr/>
         </p:nvSpPr>
         <p:spPr>
           <a:xfrm>
             <a:off x="1874520" y="2350080"/>
-            <a:ext cx="1690560" cy="181800"/>
+            <a:ext cx="1690200" cy="181440"/>
           </a:xfrm>
           <a:prstGeom prst="rect">
             <a:avLst/>
@@ -5650,14 +5346,14 @@
       </p:sp>
       <p:sp>
         <p:nvSpPr>
-          <p:cNvPr id="156" name="Text 12"/>
+          <p:cNvPr id="148" name="Text 12"/>
           <p:cNvSpPr/>
           <p:nvPr/>
         </p:nvSpPr>
         <p:spPr>
           <a:xfrm>
             <a:off x="3657600" y="2359080"/>
-            <a:ext cx="1827720" cy="181800"/>
+            <a:ext cx="1827360" cy="181440"/>
           </a:xfrm>
           <a:prstGeom prst="rect">
             <a:avLst/>
@@ -5710,14 +5406,14 @@
       </p:sp>
       <p:sp>
         <p:nvSpPr>
-          <p:cNvPr id="157" name="Shape 13"/>
+          <p:cNvPr id="149" name="Shape 13"/>
           <p:cNvSpPr/>
           <p:nvPr/>
         </p:nvSpPr>
         <p:spPr>
           <a:xfrm>
             <a:off x="822960" y="3337560"/>
-            <a:ext cx="4890960" cy="785160"/>
+            <a:ext cx="4890600" cy="784800"/>
           </a:xfrm>
           <a:prstGeom prst="roundRect">
             <a:avLst>
@@ -5763,14 +5459,14 @@
       </p:sp>
       <p:sp>
         <p:nvSpPr>
-          <p:cNvPr id="158" name="Text 14"/>
+          <p:cNvPr id="150" name="Text 14"/>
           <p:cNvSpPr/>
           <p:nvPr/>
         </p:nvSpPr>
         <p:spPr>
           <a:xfrm>
             <a:off x="987480" y="3502080"/>
-            <a:ext cx="776160" cy="181800"/>
+            <a:ext cx="775800" cy="181440"/>
           </a:xfrm>
           <a:prstGeom prst="rect">
             <a:avLst/>
@@ -5823,14 +5519,14 @@
       </p:sp>
       <p:sp>
         <p:nvSpPr>
-          <p:cNvPr id="159" name="Text 15"/>
+          <p:cNvPr id="151" name="Text 15"/>
           <p:cNvSpPr/>
           <p:nvPr/>
         </p:nvSpPr>
         <p:spPr>
           <a:xfrm>
             <a:off x="1874520" y="3493080"/>
-            <a:ext cx="1690560" cy="181800"/>
+            <a:ext cx="1690200" cy="181440"/>
           </a:xfrm>
           <a:prstGeom prst="rect">
             <a:avLst/>
@@ -5883,14 +5579,14 @@
       </p:sp>
       <p:sp>
         <p:nvSpPr>
-          <p:cNvPr id="160" name="Text 16"/>
+          <p:cNvPr id="152" name="Text 16"/>
           <p:cNvSpPr/>
           <p:nvPr/>
         </p:nvSpPr>
         <p:spPr>
           <a:xfrm>
             <a:off x="3657600" y="3502080"/>
-            <a:ext cx="1827720" cy="181800"/>
+            <a:ext cx="1827360" cy="181440"/>
           </a:xfrm>
           <a:prstGeom prst="rect">
             <a:avLst/>
@@ -5943,14 +5639,14 @@
       </p:sp>
       <p:sp>
         <p:nvSpPr>
-          <p:cNvPr id="161" name="Shape 17"/>
+          <p:cNvPr id="153" name="Shape 17"/>
           <p:cNvSpPr/>
           <p:nvPr/>
         </p:nvSpPr>
         <p:spPr>
           <a:xfrm>
             <a:off x="822960" y="4480560"/>
-            <a:ext cx="4890960" cy="785160"/>
+            <a:ext cx="4890600" cy="784800"/>
           </a:xfrm>
           <a:prstGeom prst="roundRect">
             <a:avLst>
@@ -5996,14 +5692,14 @@
       </p:sp>
       <p:sp>
         <p:nvSpPr>
-          <p:cNvPr id="162" name="Text 18"/>
+          <p:cNvPr id="154" name="Text 18"/>
           <p:cNvSpPr/>
           <p:nvPr/>
         </p:nvSpPr>
         <p:spPr>
           <a:xfrm>
             <a:off x="987480" y="4645080"/>
-            <a:ext cx="776160" cy="181800"/>
+            <a:ext cx="775800" cy="181440"/>
           </a:xfrm>
           <a:prstGeom prst="rect">
             <a:avLst/>
@@ -6056,14 +5752,14 @@
       </p:sp>
       <p:sp>
         <p:nvSpPr>
-          <p:cNvPr id="163" name="Text 19"/>
+          <p:cNvPr id="155" name="Text 19"/>
           <p:cNvSpPr/>
           <p:nvPr/>
         </p:nvSpPr>
         <p:spPr>
           <a:xfrm>
             <a:off x="1874520" y="4636080"/>
-            <a:ext cx="1690560" cy="181800"/>
+            <a:ext cx="1690200" cy="181440"/>
           </a:xfrm>
           <a:prstGeom prst="rect">
             <a:avLst/>
@@ -6116,14 +5812,14 @@
       </p:sp>
       <p:sp>
         <p:nvSpPr>
-          <p:cNvPr id="164" name="Text 20"/>
+          <p:cNvPr id="156" name="Text 20"/>
           <p:cNvSpPr/>
           <p:nvPr/>
         </p:nvSpPr>
         <p:spPr>
           <a:xfrm>
             <a:off x="3657600" y="4645080"/>
-            <a:ext cx="1827720" cy="181800"/>
+            <a:ext cx="1827360" cy="181440"/>
           </a:xfrm>
           <a:prstGeom prst="rect">
             <a:avLst/>
@@ -6176,14 +5872,14 @@
       </p:sp>
       <p:sp>
         <p:nvSpPr>
-          <p:cNvPr id="165" name="Shape 21"/>
+          <p:cNvPr id="157" name="Shape 21"/>
           <p:cNvSpPr/>
           <p:nvPr/>
         </p:nvSpPr>
         <p:spPr>
           <a:xfrm>
             <a:off x="6309360" y="1051560"/>
-            <a:ext cx="4890960" cy="785160"/>
+            <a:ext cx="4890600" cy="784800"/>
           </a:xfrm>
           <a:prstGeom prst="roundRect">
             <a:avLst>
@@ -6229,14 +5925,14 @@
       </p:sp>
       <p:sp>
         <p:nvSpPr>
-          <p:cNvPr id="166" name="Text 22"/>
+          <p:cNvPr id="158" name="Text 22"/>
           <p:cNvSpPr/>
           <p:nvPr/>
         </p:nvSpPr>
         <p:spPr>
           <a:xfrm>
             <a:off x="6473880" y="1216080"/>
-            <a:ext cx="776160" cy="181800"/>
+            <a:ext cx="775800" cy="181440"/>
           </a:xfrm>
           <a:prstGeom prst="rect">
             <a:avLst/>
@@ -6289,14 +5985,14 @@
       </p:sp>
       <p:sp>
         <p:nvSpPr>
-          <p:cNvPr id="167" name="Text 23"/>
+          <p:cNvPr id="159" name="Text 23"/>
           <p:cNvSpPr/>
           <p:nvPr/>
         </p:nvSpPr>
         <p:spPr>
           <a:xfrm>
             <a:off x="7360920" y="1207080"/>
-            <a:ext cx="1690560" cy="181800"/>
+            <a:ext cx="1690200" cy="181440"/>
           </a:xfrm>
           <a:prstGeom prst="rect">
             <a:avLst/>
@@ -6349,14 +6045,14 @@
       </p:sp>
       <p:sp>
         <p:nvSpPr>
-          <p:cNvPr id="168" name="Text 24"/>
+          <p:cNvPr id="160" name="Text 24"/>
           <p:cNvSpPr/>
           <p:nvPr/>
         </p:nvSpPr>
         <p:spPr>
           <a:xfrm>
             <a:off x="9144000" y="1216080"/>
-            <a:ext cx="1827720" cy="181800"/>
+            <a:ext cx="1827360" cy="181440"/>
           </a:xfrm>
           <a:prstGeom prst="rect">
             <a:avLst/>
@@ -6409,14 +6105,14 @@
       </p:sp>
       <p:sp>
         <p:nvSpPr>
-          <p:cNvPr id="169" name="Shape 25"/>
+          <p:cNvPr id="161" name="Shape 25"/>
           <p:cNvSpPr/>
           <p:nvPr/>
         </p:nvSpPr>
         <p:spPr>
           <a:xfrm>
             <a:off x="6309360" y="2194560"/>
-            <a:ext cx="4890960" cy="785160"/>
+            <a:ext cx="4890600" cy="784800"/>
           </a:xfrm>
           <a:prstGeom prst="roundRect">
             <a:avLst>
@@ -6462,14 +6158,14 @@
       </p:sp>
       <p:sp>
         <p:nvSpPr>
-          <p:cNvPr id="170" name="Text 26"/>
+          <p:cNvPr id="162" name="Text 26"/>
           <p:cNvSpPr/>
           <p:nvPr/>
         </p:nvSpPr>
         <p:spPr>
           <a:xfrm>
             <a:off x="6473880" y="2359080"/>
-            <a:ext cx="776160" cy="181800"/>
+            <a:ext cx="775800" cy="181440"/>
           </a:xfrm>
           <a:prstGeom prst="rect">
             <a:avLst/>
@@ -6522,14 +6218,14 @@
       </p:sp>
       <p:sp>
         <p:nvSpPr>
-          <p:cNvPr id="171" name="Text 27"/>
+          <p:cNvPr id="163" name="Text 27"/>
           <p:cNvSpPr/>
           <p:nvPr/>
         </p:nvSpPr>
         <p:spPr>
           <a:xfrm>
             <a:off x="7360920" y="2350080"/>
-            <a:ext cx="1690560" cy="181800"/>
+            <a:ext cx="1690200" cy="181440"/>
           </a:xfrm>
           <a:prstGeom prst="rect">
             <a:avLst/>
@@ -6582,14 +6278,14 @@
       </p:sp>
       <p:sp>
         <p:nvSpPr>
-          <p:cNvPr id="172" name="Text 28"/>
+          <p:cNvPr id="164" name="Text 28"/>
           <p:cNvSpPr/>
           <p:nvPr/>
         </p:nvSpPr>
         <p:spPr>
           <a:xfrm>
             <a:off x="9144000" y="2359080"/>
-            <a:ext cx="1827720" cy="181800"/>
+            <a:ext cx="1827360" cy="181440"/>
           </a:xfrm>
           <a:prstGeom prst="rect">
             <a:avLst/>
@@ -6642,14 +6338,14 @@
       </p:sp>
       <p:sp>
         <p:nvSpPr>
-          <p:cNvPr id="173" name="Shape 29"/>
+          <p:cNvPr id="165" name="Shape 29"/>
           <p:cNvSpPr/>
           <p:nvPr/>
         </p:nvSpPr>
         <p:spPr>
           <a:xfrm>
             <a:off x="6309360" y="3337560"/>
-            <a:ext cx="4890960" cy="785160"/>
+            <a:ext cx="4890600" cy="784800"/>
           </a:xfrm>
           <a:prstGeom prst="roundRect">
             <a:avLst>
@@ -6695,14 +6391,14 @@
       </p:sp>
       <p:sp>
         <p:nvSpPr>
-          <p:cNvPr id="174" name="Text 30"/>
+          <p:cNvPr id="166" name="Text 30"/>
           <p:cNvSpPr/>
           <p:nvPr/>
         </p:nvSpPr>
         <p:spPr>
           <a:xfrm>
             <a:off x="6473880" y="3502080"/>
-            <a:ext cx="776160" cy="181800"/>
+            <a:ext cx="775800" cy="181440"/>
           </a:xfrm>
           <a:prstGeom prst="rect">
             <a:avLst/>
@@ -6755,14 +6451,14 @@
       </p:sp>
       <p:sp>
         <p:nvSpPr>
-          <p:cNvPr id="175" name="Text 31"/>
+          <p:cNvPr id="167" name="Text 31"/>
           <p:cNvSpPr/>
           <p:nvPr/>
         </p:nvSpPr>
         <p:spPr>
           <a:xfrm>
             <a:off x="7360920" y="3493080"/>
-            <a:ext cx="1690560" cy="181800"/>
+            <a:ext cx="1690200" cy="181440"/>
           </a:xfrm>
           <a:prstGeom prst="rect">
             <a:avLst/>
@@ -6815,14 +6511,14 @@
       </p:sp>
       <p:sp>
         <p:nvSpPr>
-          <p:cNvPr id="176" name="Text 32"/>
+          <p:cNvPr id="168" name="Text 32"/>
           <p:cNvSpPr/>
           <p:nvPr/>
         </p:nvSpPr>
         <p:spPr>
           <a:xfrm>
             <a:off x="9144000" y="3502080"/>
-            <a:ext cx="1827720" cy="181800"/>
+            <a:ext cx="1827360" cy="181440"/>
           </a:xfrm>
           <a:prstGeom prst="rect">
             <a:avLst/>
@@ -6875,14 +6571,14 @@
       </p:sp>
       <p:sp>
         <p:nvSpPr>
-          <p:cNvPr id="177" name="Text 33"/>
+          <p:cNvPr id="169" name="Text 33"/>
           <p:cNvSpPr/>
           <p:nvPr/>
         </p:nvSpPr>
         <p:spPr>
           <a:xfrm>
             <a:off x="960120" y="5760720"/>
-            <a:ext cx="10057320" cy="364680"/>
+            <a:ext cx="10056960" cy="364320"/>
           </a:xfrm>
           <a:prstGeom prst="rect">
             <a:avLst/>
@@ -6900,7 +6596,7 @@
         </p:style>
         <p:txBody>
           <a:bodyPr lIns="360" rIns="360" tIns="360" bIns="360" anchor="ctr">
-            <a:normAutofit/>
+            <a:normAutofit fontScale="92500" lnSpcReduction="9999"/>
           </a:bodyPr>
           <a:p>
             <a:pPr defTabSz="914400">
@@ -6924,14 +6620,14 @@
       </p:sp>
       <p:sp>
         <p:nvSpPr>
-          <p:cNvPr id="178" name="Text 34"/>
+          <p:cNvPr id="170" name="Text 34"/>
           <p:cNvSpPr/>
           <p:nvPr/>
         </p:nvSpPr>
         <p:spPr>
           <a:xfrm>
             <a:off x="11475720" y="6473880"/>
-            <a:ext cx="254880" cy="136080"/>
+            <a:ext cx="254520" cy="135720"/>
           </a:xfrm>
           <a:prstGeom prst="rect">
             <a:avLst/>
@@ -6984,7 +6680,7 @@
       </p:sp>
       <p:pic>
         <p:nvPicPr>
-          <p:cNvPr id="179" name=""/>
+          <p:cNvPr id="171" name=""/>
           <p:cNvPicPr/>
           <p:nvPr/>
         </p:nvPicPr>
@@ -6995,7 +6691,7 @@
         <p:spPr>
           <a:xfrm>
             <a:off x="11221200" y="6363360"/>
-            <a:ext cx="970920" cy="494640"/>
+            <a:ext cx="970560" cy="494280"/>
           </a:xfrm>
           <a:prstGeom prst="rect">
             <a:avLst/>
@@ -7045,14 +6741,14 @@
       </p:grpSpPr>
       <p:sp>
         <p:nvSpPr>
-          <p:cNvPr id="180" name="Shape 0"/>
+          <p:cNvPr id="172" name="Shape 0"/>
           <p:cNvSpPr/>
           <p:nvPr/>
         </p:nvSpPr>
         <p:spPr>
           <a:xfrm>
             <a:off x="0" y="0"/>
-            <a:ext cx="12190680" cy="657360"/>
+            <a:ext cx="12190320" cy="657000"/>
           </a:xfrm>
           <a:prstGeom prst="rect">
             <a:avLst/>
@@ -7096,14 +6792,14 @@
       </p:sp>
       <p:sp>
         <p:nvSpPr>
-          <p:cNvPr id="181" name="Text 1"/>
+          <p:cNvPr id="173" name="Text 1"/>
           <p:cNvSpPr/>
           <p:nvPr/>
         </p:nvSpPr>
         <p:spPr>
           <a:xfrm>
             <a:off x="502920" y="146160"/>
-            <a:ext cx="8868600" cy="346320"/>
+            <a:ext cx="8868240" cy="345960"/>
           </a:xfrm>
           <a:prstGeom prst="rect">
             <a:avLst/>
@@ -7157,14 +6853,14 @@
       </p:sp>
       <p:sp>
         <p:nvSpPr>
-          <p:cNvPr id="182" name="Text 2"/>
+          <p:cNvPr id="174" name="Text 2"/>
           <p:cNvSpPr/>
           <p:nvPr/>
         </p:nvSpPr>
         <p:spPr>
           <a:xfrm>
             <a:off x="9555480" y="173880"/>
-            <a:ext cx="2056320" cy="254880"/>
+            <a:ext cx="2055960" cy="254520"/>
           </a:xfrm>
           <a:prstGeom prst="rect">
             <a:avLst/>
@@ -7217,7 +6913,7 @@
       </p:sp>
       <p:sp>
         <p:nvSpPr>
-          <p:cNvPr id="183" name="Shape 3"/>
+          <p:cNvPr id="175" name="Shape 3"/>
           <p:cNvSpPr/>
           <p:nvPr/>
         </p:nvSpPr>
@@ -7260,14 +6956,14 @@
       </p:sp>
       <p:sp>
         <p:nvSpPr>
-          <p:cNvPr id="184" name="Text 4"/>
+          <p:cNvPr id="176" name="Text 4"/>
           <p:cNvSpPr/>
           <p:nvPr/>
         </p:nvSpPr>
         <p:spPr>
           <a:xfrm>
             <a:off x="502920" y="6473880"/>
-            <a:ext cx="3290760" cy="163440"/>
+            <a:ext cx="3290400" cy="163080"/>
           </a:xfrm>
           <a:prstGeom prst="rect">
             <a:avLst/>
@@ -7320,14 +7016,14 @@
       </p:sp>
       <p:sp>
         <p:nvSpPr>
-          <p:cNvPr id="185" name="Shape 5"/>
+          <p:cNvPr id="177" name="Shape 5"/>
           <p:cNvSpPr/>
           <p:nvPr/>
         </p:nvSpPr>
         <p:spPr>
           <a:xfrm>
             <a:off x="868680" y="1051560"/>
-            <a:ext cx="6399720" cy="4342320"/>
+            <a:ext cx="6399360" cy="4341960"/>
           </a:xfrm>
           <a:prstGeom prst="rect">
             <a:avLst/>
@@ -7371,7 +7067,7 @@
       </p:sp>
       <p:sp>
         <p:nvSpPr>
-          <p:cNvPr id="186" name="Shape 6"/>
+          <p:cNvPr id="178" name="Shape 6"/>
           <p:cNvSpPr/>
           <p:nvPr/>
         </p:nvSpPr>
@@ -7414,7 +7110,7 @@
       </p:sp>
       <p:sp>
         <p:nvSpPr>
-          <p:cNvPr id="187" name="Shape 7"/>
+          <p:cNvPr id="179" name="Shape 7"/>
           <p:cNvSpPr/>
           <p:nvPr/>
         </p:nvSpPr>
@@ -7457,14 +7153,14 @@
       </p:sp>
       <p:sp>
         <p:nvSpPr>
-          <p:cNvPr id="188" name="Text 8"/>
+          <p:cNvPr id="180" name="Text 8"/>
           <p:cNvSpPr/>
           <p:nvPr/>
         </p:nvSpPr>
         <p:spPr>
           <a:xfrm>
             <a:off x="3291840" y="5074920"/>
-            <a:ext cx="1644840" cy="181800"/>
+            <a:ext cx="1644480" cy="181440"/>
           </a:xfrm>
           <a:prstGeom prst="rect">
             <a:avLst/>
@@ -7517,14 +7213,14 @@
       </p:sp>
       <p:sp>
         <p:nvSpPr>
-          <p:cNvPr id="189" name="Text 9"/>
+          <p:cNvPr id="181" name="Text 9"/>
           <p:cNvSpPr/>
           <p:nvPr/>
         </p:nvSpPr>
         <p:spPr>
           <a:xfrm rot="16200000">
-            <a:off x="896040" y="1235520"/>
-            <a:ext cx="913320" cy="181800"/>
+            <a:off x="896040" y="1235880"/>
+            <a:ext cx="912960" cy="181440"/>
           </a:xfrm>
           <a:prstGeom prst="rect">
             <a:avLst/>
@@ -7577,7 +7273,7 @@
       </p:sp>
       <p:sp>
         <p:nvSpPr>
-          <p:cNvPr id="190" name="Shape 10"/>
+          <p:cNvPr id="182" name="Shape 10"/>
           <p:cNvSpPr/>
           <p:nvPr/>
         </p:nvSpPr>
@@ -7620,7 +7316,7 @@
       </p:sp>
       <p:sp>
         <p:nvSpPr>
-          <p:cNvPr id="191" name="Shape 11"/>
+          <p:cNvPr id="183" name="Shape 11"/>
           <p:cNvSpPr/>
           <p:nvPr/>
         </p:nvSpPr>
@@ -7663,7 +7359,7 @@
       </p:sp>
       <p:sp>
         <p:nvSpPr>
-          <p:cNvPr id="192" name="Shape 12"/>
+          <p:cNvPr id="184" name="Shape 12"/>
           <p:cNvSpPr/>
           <p:nvPr/>
         </p:nvSpPr>
@@ -7706,7 +7402,7 @@
       </p:sp>
       <p:sp>
         <p:nvSpPr>
-          <p:cNvPr id="193" name="Shape 13"/>
+          <p:cNvPr id="185" name="Shape 13"/>
           <p:cNvSpPr/>
           <p:nvPr/>
         </p:nvSpPr>
@@ -7749,7 +7445,7 @@
       </p:sp>
       <p:sp>
         <p:nvSpPr>
-          <p:cNvPr id="194" name="Shape 14"/>
+          <p:cNvPr id="186" name="Shape 14"/>
           <p:cNvSpPr/>
           <p:nvPr/>
         </p:nvSpPr>
@@ -7792,7 +7488,7 @@
       </p:sp>
       <p:sp>
         <p:nvSpPr>
-          <p:cNvPr id="195" name="Shape 15"/>
+          <p:cNvPr id="187" name="Shape 15"/>
           <p:cNvSpPr/>
           <p:nvPr/>
         </p:nvSpPr>
@@ -7835,7 +7531,7 @@
       </p:sp>
       <p:sp>
         <p:nvSpPr>
-          <p:cNvPr id="196" name="Shape 16"/>
+          <p:cNvPr id="188" name="Shape 16"/>
           <p:cNvSpPr/>
           <p:nvPr/>
         </p:nvSpPr>
@@ -7878,7 +7574,7 @@
       </p:sp>
       <p:sp>
         <p:nvSpPr>
-          <p:cNvPr id="197" name="Shape 17"/>
+          <p:cNvPr id="189" name="Shape 17"/>
           <p:cNvSpPr/>
           <p:nvPr/>
         </p:nvSpPr>
@@ -7921,14 +7617,14 @@
       </p:sp>
       <p:sp>
         <p:nvSpPr>
-          <p:cNvPr id="198" name="Text 18"/>
+          <p:cNvPr id="190" name="Text 18"/>
           <p:cNvSpPr/>
           <p:nvPr/>
         </p:nvSpPr>
         <p:spPr>
           <a:xfrm>
             <a:off x="5440680" y="1234440"/>
-            <a:ext cx="1507680" cy="200160"/>
+            <a:ext cx="1507320" cy="199800"/>
           </a:xfrm>
           <a:prstGeom prst="rect">
             <a:avLst/>
@@ -7981,14 +7677,14 @@
       </p:sp>
       <p:sp>
         <p:nvSpPr>
-          <p:cNvPr id="199" name="Text 19"/>
+          <p:cNvPr id="191" name="Text 19"/>
           <p:cNvSpPr/>
           <p:nvPr/>
         </p:nvSpPr>
         <p:spPr>
           <a:xfrm>
             <a:off x="5440680" y="1828800"/>
-            <a:ext cx="1004760" cy="181800"/>
+            <a:ext cx="1004400" cy="181440"/>
           </a:xfrm>
           <a:prstGeom prst="rect">
             <a:avLst/>
@@ -8041,14 +7737,14 @@
       </p:sp>
       <p:sp>
         <p:nvSpPr>
-          <p:cNvPr id="200" name="Shape 20"/>
+          <p:cNvPr id="192" name="Shape 20"/>
           <p:cNvSpPr/>
           <p:nvPr/>
         </p:nvSpPr>
         <p:spPr>
           <a:xfrm>
             <a:off x="7635240" y="1188720"/>
-            <a:ext cx="3610800" cy="1507680"/>
+            <a:ext cx="3610440" cy="1507320"/>
           </a:xfrm>
           <a:prstGeom prst="roundRect">
             <a:avLst>
@@ -8094,14 +7790,14 @@
       </p:sp>
       <p:sp>
         <p:nvSpPr>
-          <p:cNvPr id="201" name="Text 21"/>
+          <p:cNvPr id="193" name="Text 21"/>
           <p:cNvSpPr/>
           <p:nvPr/>
         </p:nvSpPr>
         <p:spPr>
           <a:xfrm>
             <a:off x="7818120" y="1353240"/>
-            <a:ext cx="3245040" cy="227520"/>
+            <a:ext cx="3244680" cy="227160"/>
           </a:xfrm>
           <a:prstGeom prst="rect">
             <a:avLst/>
@@ -8154,14 +7850,14 @@
       </p:sp>
       <p:sp>
         <p:nvSpPr>
-          <p:cNvPr id="202" name="Text 22"/>
+          <p:cNvPr id="194" name="Text 22"/>
           <p:cNvSpPr/>
           <p:nvPr/>
         </p:nvSpPr>
         <p:spPr>
           <a:xfrm>
             <a:off x="7818120" y="1691640"/>
-            <a:ext cx="3245040" cy="867600"/>
+            <a:ext cx="3244680" cy="867240"/>
           </a:xfrm>
           <a:prstGeom prst="rect">
             <a:avLst/>
@@ -8214,14 +7910,14 @@
       </p:sp>
       <p:sp>
         <p:nvSpPr>
-          <p:cNvPr id="203" name="Shape 23"/>
+          <p:cNvPr id="195" name="Shape 23"/>
           <p:cNvSpPr/>
           <p:nvPr/>
         </p:nvSpPr>
         <p:spPr>
           <a:xfrm>
             <a:off x="7635240" y="3292920"/>
-            <a:ext cx="3610800" cy="1507680"/>
+            <a:ext cx="3610440" cy="1507320"/>
           </a:xfrm>
           <a:prstGeom prst="roundRect">
             <a:avLst>
@@ -8267,14 +7963,14 @@
       </p:sp>
       <p:sp>
         <p:nvSpPr>
-          <p:cNvPr id="204" name="Text 24"/>
+          <p:cNvPr id="196" name="Text 24"/>
           <p:cNvSpPr/>
           <p:nvPr/>
         </p:nvSpPr>
         <p:spPr>
           <a:xfrm>
             <a:off x="7818120" y="3227760"/>
-            <a:ext cx="3245040" cy="227520"/>
+            <a:ext cx="3244680" cy="227160"/>
           </a:xfrm>
           <a:prstGeom prst="rect">
             <a:avLst/>
@@ -8316,14 +8012,14 @@
       </p:sp>
       <p:sp>
         <p:nvSpPr>
-          <p:cNvPr id="205" name="Text 25"/>
+          <p:cNvPr id="197" name="Text 25"/>
           <p:cNvSpPr/>
           <p:nvPr/>
         </p:nvSpPr>
         <p:spPr>
           <a:xfrm>
             <a:off x="7818120" y="3566160"/>
-            <a:ext cx="3245040" cy="867600"/>
+            <a:ext cx="3244680" cy="867240"/>
           </a:xfrm>
           <a:prstGeom prst="rect">
             <a:avLst/>
@@ -8376,14 +8072,14 @@
       </p:sp>
       <p:sp>
         <p:nvSpPr>
-          <p:cNvPr id="206" name="Text 26"/>
+          <p:cNvPr id="198" name="Text 26"/>
           <p:cNvSpPr/>
           <p:nvPr/>
         </p:nvSpPr>
         <p:spPr>
           <a:xfrm>
             <a:off x="11475720" y="6473880"/>
-            <a:ext cx="254880" cy="136080"/>
+            <a:ext cx="254520" cy="135720"/>
           </a:xfrm>
           <a:prstGeom prst="rect">
             <a:avLst/>
@@ -8436,7 +8132,7 @@
       </p:sp>
       <p:pic>
         <p:nvPicPr>
-          <p:cNvPr id="207" name=""/>
+          <p:cNvPr id="199" name=""/>
           <p:cNvPicPr/>
           <p:nvPr/>
         </p:nvPicPr>
@@ -8447,7 +8143,7 @@
         <p:spPr>
           <a:xfrm>
             <a:off x="11221200" y="6382800"/>
-            <a:ext cx="970920" cy="494640"/>
+            <a:ext cx="970560" cy="494280"/>
           </a:xfrm>
           <a:prstGeom prst="rect">
             <a:avLst/>
@@ -8490,14 +8186,14 @@
       </p:grpSpPr>
       <p:sp>
         <p:nvSpPr>
-          <p:cNvPr id="208" name="Rectangle 1"/>
+          <p:cNvPr id="200" name="Rectangle 1"/>
           <p:cNvSpPr/>
           <p:nvPr/>
         </p:nvSpPr>
         <p:spPr>
           <a:xfrm>
             <a:off x="0" y="0"/>
-            <a:ext cx="12191400" cy="6857640"/>
+            <a:ext cx="12191040" cy="6857280"/>
           </a:xfrm>
           <a:prstGeom prst="rect">
             <a:avLst/>
@@ -8533,6 +8229,11 @@
             <a:noAutofit/>
           </a:bodyPr>
           <a:p>
+            <a:pPr>
+              <a:lnSpc>
+                <a:spcPct val="100000"/>
+              </a:lnSpc>
+            </a:pPr>
             <a:endParaRPr lang="en-US" sz="1800" b="0" u="none" strike="noStrike">
               <a:solidFill>
                 <a:schemeClr val="lt1"/>
@@ -8546,14 +8247,14 @@
       </p:sp>
       <p:sp>
         <p:nvSpPr>
-          <p:cNvPr id="209" name="TextBox 2"/>
+          <p:cNvPr id="201" name="TextBox 2"/>
           <p:cNvSpPr/>
           <p:nvPr/>
         </p:nvSpPr>
         <p:spPr>
           <a:xfrm>
             <a:off x="594360" y="411480"/>
-            <a:ext cx="9600840" cy="494280"/>
+            <a:ext cx="9600480" cy="493560"/>
           </a:xfrm>
           <a:prstGeom prst="rect">
             <a:avLst/>
@@ -8603,14 +8304,14 @@
       </p:sp>
       <p:sp>
         <p:nvSpPr>
-          <p:cNvPr id="210" name="TextBox 3"/>
+          <p:cNvPr id="202" name="TextBox 3"/>
           <p:cNvSpPr/>
           <p:nvPr/>
         </p:nvSpPr>
         <p:spPr>
           <a:xfrm>
             <a:off x="612720" y="941760"/>
-            <a:ext cx="7772040" cy="235440"/>
+            <a:ext cx="7771680" cy="235080"/>
           </a:xfrm>
           <a:prstGeom prst="rect">
             <a:avLst/>
@@ -8649,14 +8350,14 @@
       </p:sp>
       <p:sp>
         <p:nvSpPr>
-          <p:cNvPr id="211" name="Rounded Rectangle 4"/>
+          <p:cNvPr id="203" name="Rounded Rectangle 4"/>
           <p:cNvSpPr/>
           <p:nvPr/>
         </p:nvSpPr>
         <p:spPr>
           <a:xfrm>
             <a:off x="868680" y="1417320"/>
-            <a:ext cx="3337200" cy="1919880"/>
+            <a:ext cx="3336840" cy="1919520"/>
           </a:xfrm>
           <a:prstGeom prst="roundRect">
             <a:avLst>
@@ -8697,6 +8398,11 @@
             <a:noAutofit/>
           </a:bodyPr>
           <a:p>
+            <a:pPr>
+              <a:lnSpc>
+                <a:spcPct val="100000"/>
+              </a:lnSpc>
+            </a:pPr>
             <a:endParaRPr lang="en-US" sz="1800" b="0" u="none" strike="noStrike">
               <a:solidFill>
                 <a:schemeClr val="lt1"/>
@@ -8710,14 +8416,14 @@
       </p:sp>
       <p:sp>
         <p:nvSpPr>
-          <p:cNvPr id="212" name="TextBox 6"/>
+          <p:cNvPr id="204" name="TextBox 6"/>
           <p:cNvSpPr/>
           <p:nvPr/>
         </p:nvSpPr>
         <p:spPr>
           <a:xfrm>
             <a:off x="1069920" y="1572840"/>
-            <a:ext cx="3017160" cy="265680"/>
+            <a:ext cx="3016800" cy="264960"/>
           </a:xfrm>
           <a:prstGeom prst="rect">
             <a:avLst/>
@@ -8767,14 +8473,14 @@
       </p:sp>
       <p:sp>
         <p:nvSpPr>
-          <p:cNvPr id="213" name="TextBox 7"/>
+          <p:cNvPr id="205" name="TextBox 7"/>
           <p:cNvSpPr/>
           <p:nvPr/>
         </p:nvSpPr>
         <p:spPr>
           <a:xfrm>
             <a:off x="1069920" y="1984320"/>
-            <a:ext cx="3017160" cy="540360"/>
+            <a:ext cx="3016800" cy="539640"/>
           </a:xfrm>
           <a:prstGeom prst="rect">
             <a:avLst/>
@@ -8809,40 +8515,7 @@
                 <a:uFillTx/>
                 <a:latin typeface="Aptos"/>
               </a:rPr>
-              <a:t>O modelo logístico representa </a:t>
-            </a:r>
-            <a:r>
-              <a:rPr lang="en-US" sz="1100" b="0" u="none" strike="noStrike">
-                <a:solidFill>
-                  <a:srgbClr val="5a6370"/>
-                </a:solidFill>
-                <a:effectLst/>
-                <a:uFillTx/>
-                <a:latin typeface="Aptos"/>
-              </a:rPr>
-              <a:t>a desaceleração natural </a:t>
-            </a:r>
-            <a:r>
-              <a:rPr lang="en-US" sz="1100" b="0" u="none" strike="noStrike">
-                <a:solidFill>
-                  <a:srgbClr val="5a6370"/>
-                </a:solidFill>
-                <a:effectLst/>
-                <a:uFillTx/>
-                <a:latin typeface="Aptos"/>
-              </a:rPr>
-              <a:t>quando recursos e espaço se </a:t>
-            </a:r>
-            <a:r>
-              <a:rPr lang="en-US" sz="1100" b="0" u="none" strike="noStrike">
-                <a:solidFill>
-                  <a:srgbClr val="5a6370"/>
-                </a:solidFill>
-                <a:effectLst/>
-                <a:uFillTx/>
-                <a:latin typeface="Aptos"/>
-              </a:rPr>
-              <a:t>tornam limitantes.</a:t>
+              <a:t>O modelo logístico representa a desaceleração natural quando recursos e espaço se tornam limitantes.</a:t>
             </a:r>
             <a:endParaRPr lang="en-US" sz="1100" b="0" u="none" strike="noStrike">
               <a:solidFill>
@@ -8857,14 +8530,14 @@
       </p:sp>
       <p:sp>
         <p:nvSpPr>
-          <p:cNvPr id="214" name="Rounded Rectangle 5"/>
+          <p:cNvPr id="206" name="Rounded Rectangle 5"/>
           <p:cNvSpPr/>
           <p:nvPr/>
         </p:nvSpPr>
         <p:spPr>
           <a:xfrm>
             <a:off x="4434840" y="1417320"/>
-            <a:ext cx="3337200" cy="1919880"/>
+            <a:ext cx="3336840" cy="1919520"/>
           </a:xfrm>
           <a:prstGeom prst="roundRect">
             <a:avLst>
@@ -8905,6 +8578,11 @@
             <a:noAutofit/>
           </a:bodyPr>
           <a:p>
+            <a:pPr>
+              <a:lnSpc>
+                <a:spcPct val="100000"/>
+              </a:lnSpc>
+            </a:pPr>
             <a:endParaRPr lang="en-US" sz="1800" b="0" u="none" strike="noStrike">
               <a:solidFill>
                 <a:schemeClr val="lt1"/>
@@ -8918,14 +8596,14 @@
       </p:sp>
       <p:sp>
         <p:nvSpPr>
-          <p:cNvPr id="215" name="TextBox 10"/>
+          <p:cNvPr id="207" name="TextBox 10"/>
           <p:cNvSpPr/>
           <p:nvPr/>
         </p:nvSpPr>
         <p:spPr>
           <a:xfrm>
             <a:off x="4636080" y="1572840"/>
-            <a:ext cx="3017160" cy="265680"/>
+            <a:ext cx="3016800" cy="264960"/>
           </a:xfrm>
           <a:prstGeom prst="rect">
             <a:avLst/>
@@ -8960,117 +8638,7 @@
                 <a:uFillTx/>
                 <a:latin typeface="Aptos"/>
               </a:rPr>
-              <a:t>2. </a:t>
-            </a:r>
-            <a:r>
-              <a:rPr lang="en-US" sz="1500" b="1" u="none" strike="noStrike">
-                <a:solidFill>
-                  <a:srgbClr val="12233a"/>
-                </a:solidFill>
-                <a:effectLst/>
-                <a:uFillTx/>
-                <a:latin typeface="Aptos"/>
-              </a:rPr>
-              <a:t>Ri</a:t>
-            </a:r>
-            <a:r>
-              <a:rPr lang="en-US" sz="1500" b="1" u="none" strike="noStrike">
-                <a:solidFill>
-                  <a:srgbClr val="12233a"/>
-                </a:solidFill>
-                <a:effectLst/>
-                <a:uFillTx/>
-                <a:latin typeface="Aptos"/>
-              </a:rPr>
-              <a:t>sc</a:t>
-            </a:r>
-            <a:r>
-              <a:rPr lang="en-US" sz="1500" b="1" u="none" strike="noStrike">
-                <a:solidFill>
-                  <a:srgbClr val="12233a"/>
-                </a:solidFill>
-                <a:effectLst/>
-                <a:uFillTx/>
-                <a:latin typeface="Aptos"/>
-              </a:rPr>
-              <a:t>o </a:t>
-            </a:r>
-            <a:r>
-              <a:rPr lang="en-US" sz="1500" b="1" u="none" strike="noStrike">
-                <a:solidFill>
-                  <a:srgbClr val="12233a"/>
-                </a:solidFill>
-                <a:effectLst/>
-                <a:uFillTx/>
-                <a:latin typeface="Aptos"/>
-              </a:rPr>
-              <a:t>m</a:t>
-            </a:r>
-            <a:r>
-              <a:rPr lang="en-US" sz="1500" b="1" u="none" strike="noStrike">
-                <a:solidFill>
-                  <a:srgbClr val="12233a"/>
-                </a:solidFill>
-                <a:effectLst/>
-                <a:uFillTx/>
-                <a:latin typeface="Aptos"/>
-              </a:rPr>
-              <a:t>ai</a:t>
-            </a:r>
-            <a:r>
-              <a:rPr lang="en-US" sz="1500" b="1" u="none" strike="noStrike">
-                <a:solidFill>
-                  <a:srgbClr val="12233a"/>
-                </a:solidFill>
-                <a:effectLst/>
-                <a:uFillTx/>
-                <a:latin typeface="Aptos"/>
-              </a:rPr>
-              <a:t>s </a:t>
-            </a:r>
-            <a:r>
-              <a:rPr lang="en-US" sz="1500" b="1" u="none" strike="noStrike">
-                <a:solidFill>
-                  <a:srgbClr val="12233a"/>
-                </a:solidFill>
-                <a:effectLst/>
-                <a:uFillTx/>
-                <a:latin typeface="Aptos"/>
-              </a:rPr>
-              <a:t>re</a:t>
-            </a:r>
-            <a:r>
-              <a:rPr lang="en-US" sz="1500" b="1" u="none" strike="noStrike">
-                <a:solidFill>
-                  <a:srgbClr val="12233a"/>
-                </a:solidFill>
-                <a:effectLst/>
-                <a:uFillTx/>
-                <a:latin typeface="Aptos"/>
-              </a:rPr>
-              <a:t>al</a:t>
-            </a:r>
-            <a:r>
-              <a:rPr lang="en-US" sz="1500" b="1" u="none" strike="noStrike">
-                <a:solidFill>
-                  <a:srgbClr val="12233a"/>
-                </a:solidFill>
-                <a:effectLst/>
-                <a:uFillTx/>
-                <a:latin typeface="Aptos"/>
-              </a:rPr>
-              <a:t>is</a:t>
-            </a:r>
-            <a:r>
-              <a:rPr lang="en-US" sz="1500" b="1" u="none" strike="noStrike">
-                <a:solidFill>
-                  <a:srgbClr val="12233a"/>
-                </a:solidFill>
-                <a:effectLst/>
-                <a:uFillTx/>
-                <a:latin typeface="Aptos"/>
-              </a:rPr>
-              <a:t>ta</a:t>
+              <a:t>2. Risco mais realista</a:t>
             </a:r>
             <a:endParaRPr lang="en-US" sz="1500" b="0" u="none" strike="noStrike">
               <a:solidFill>
@@ -9085,14 +8653,14 @@
       </p:sp>
       <p:sp>
         <p:nvSpPr>
-          <p:cNvPr id="216" name="TextBox 11"/>
+          <p:cNvPr id="208" name="TextBox 11"/>
           <p:cNvSpPr/>
           <p:nvPr/>
         </p:nvSpPr>
         <p:spPr>
           <a:xfrm>
             <a:off x="4636080" y="1984320"/>
-            <a:ext cx="3017160" cy="540360"/>
+            <a:ext cx="3016800" cy="539640"/>
           </a:xfrm>
           <a:prstGeom prst="rect">
             <a:avLst/>
@@ -9142,14 +8710,14 @@
       </p:sp>
       <p:sp>
         <p:nvSpPr>
-          <p:cNvPr id="217" name="Rounded Rectangle 6"/>
+          <p:cNvPr id="209" name="Rounded Rectangle 6"/>
           <p:cNvSpPr/>
           <p:nvPr/>
         </p:nvSpPr>
         <p:spPr>
           <a:xfrm>
             <a:off x="8001000" y="1417320"/>
-            <a:ext cx="3337200" cy="1919880"/>
+            <a:ext cx="3336840" cy="1919520"/>
           </a:xfrm>
           <a:prstGeom prst="roundRect">
             <a:avLst>
@@ -9190,6 +8758,11 @@
             <a:noAutofit/>
           </a:bodyPr>
           <a:p>
+            <a:pPr>
+              <a:lnSpc>
+                <a:spcPct val="100000"/>
+              </a:lnSpc>
+            </a:pPr>
             <a:endParaRPr lang="en-US" sz="1800" b="0" u="none" strike="noStrike">
               <a:solidFill>
                 <a:schemeClr val="lt1"/>
@@ -9203,14 +8776,14 @@
       </p:sp>
       <p:sp>
         <p:nvSpPr>
-          <p:cNvPr id="218" name="TextBox 14"/>
+          <p:cNvPr id="210" name="TextBox 14"/>
           <p:cNvSpPr/>
           <p:nvPr/>
         </p:nvSpPr>
         <p:spPr>
           <a:xfrm>
             <a:off x="8202240" y="1572840"/>
-            <a:ext cx="3017160" cy="265680"/>
+            <a:ext cx="3016800" cy="264960"/>
           </a:xfrm>
           <a:prstGeom prst="rect">
             <a:avLst/>
@@ -9260,14 +8833,14 @@
       </p:sp>
       <p:sp>
         <p:nvSpPr>
-          <p:cNvPr id="219" name="TextBox 15"/>
+          <p:cNvPr id="211" name="TextBox 15"/>
           <p:cNvSpPr/>
           <p:nvPr/>
         </p:nvSpPr>
         <p:spPr>
           <a:xfrm>
             <a:off x="8202240" y="1984320"/>
-            <a:ext cx="3017160" cy="540360"/>
+            <a:ext cx="3016800" cy="539640"/>
           </a:xfrm>
           <a:prstGeom prst="rect">
             <a:avLst/>
@@ -9317,14 +8890,14 @@
       </p:sp>
       <p:sp>
         <p:nvSpPr>
-          <p:cNvPr id="220" name="TextBox 16"/>
+          <p:cNvPr id="212" name="TextBox 16"/>
           <p:cNvSpPr/>
           <p:nvPr/>
         </p:nvSpPr>
         <p:spPr>
           <a:xfrm>
             <a:off x="960120" y="4069080"/>
-            <a:ext cx="10286640" cy="402840"/>
+            <a:ext cx="10286280" cy="402120"/>
           </a:xfrm>
           <a:prstGeom prst="rect">
             <a:avLst/>
@@ -9374,14 +8947,14 @@
       </p:sp>
       <p:sp>
         <p:nvSpPr>
-          <p:cNvPr id="221" name="TextBox 17"/>
+          <p:cNvPr id="213" name="TextBox 17"/>
           <p:cNvSpPr/>
           <p:nvPr/>
         </p:nvSpPr>
         <p:spPr>
           <a:xfrm>
             <a:off x="960120" y="5074920"/>
-            <a:ext cx="10240920" cy="555480"/>
+            <a:ext cx="10240560" cy="554760"/>
           </a:xfrm>
           <a:prstGeom prst="rect">
             <a:avLst/>
@@ -9431,14 +9004,14 @@
       </p:sp>
       <p:sp>
         <p:nvSpPr>
-          <p:cNvPr id="222" name="TextBox 18"/>
+          <p:cNvPr id="214" name="TextBox 18"/>
           <p:cNvSpPr/>
           <p:nvPr/>
         </p:nvSpPr>
         <p:spPr>
           <a:xfrm>
             <a:off x="594360" y="6446520"/>
-            <a:ext cx="4114440" cy="174600"/>
+            <a:ext cx="4114080" cy="173880"/>
           </a:xfrm>
           <a:prstGeom prst="rect">
             <a:avLst/>
@@ -9474,63 +9047,6 @@
                 <a:latin typeface="Aptos"/>
               </a:rPr>
               <a:t>Modelo logístico + binomial negativa</a:t>
-            </a:r>
-            <a:endParaRPr lang="en-US" sz="900" b="0" u="none" strike="noStrike">
-              <a:solidFill>
-                <a:srgbClr val="000000"/>
-              </a:solidFill>
-              <a:effectLst/>
-              <a:uFillTx/>
-              <a:latin typeface="Arial"/>
-            </a:endParaRPr>
-          </a:p>
-        </p:txBody>
-      </p:sp>
-      <p:sp>
-        <p:nvSpPr>
-          <p:cNvPr id="223" name="TextBox 19"/>
-          <p:cNvSpPr/>
-          <p:nvPr/>
-        </p:nvSpPr>
-        <p:spPr>
-          <a:xfrm>
-            <a:off x="11292840" y="6446520"/>
-            <a:ext cx="319680" cy="174600"/>
-          </a:xfrm>
-          <a:prstGeom prst="rect">
-            <a:avLst/>
-          </a:prstGeom>
-          <a:noFill/>
-          <a:ln w="0">
-            <a:noFill/>
-          </a:ln>
-        </p:spPr>
-        <p:style>
-          <a:lnRef idx="0"/>
-          <a:fillRef idx="0"/>
-          <a:effectRef idx="0"/>
-          <a:fontRef idx="minor"/>
-        </p:style>
-        <p:txBody>
-          <a:bodyPr lIns="45720" rIns="45720" tIns="18360" bIns="18360" anchor="t">
-            <a:spAutoFit/>
-          </a:bodyPr>
-          <a:p>
-            <a:pPr algn="r" defTabSz="457200">
-              <a:lnSpc>
-                <a:spcPct val="100000"/>
-              </a:lnSpc>
-            </a:pPr>
-            <a:r>
-              <a:rPr lang="en-US" sz="900" b="0" u="none" strike="noStrike">
-                <a:solidFill>
-                  <a:srgbClr val="d2dce6"/>
-                </a:solidFill>
-                <a:effectLst/>
-                <a:uFillTx/>
-                <a:latin typeface="Aptos"/>
-              </a:rPr>
-              <a:t>12</a:t>
             </a:r>
             <a:endParaRPr lang="en-US" sz="900" b="0" u="none" strike="noStrike">
               <a:solidFill>
@@ -9582,14 +9098,14 @@
       </p:grpSpPr>
       <p:sp>
         <p:nvSpPr>
-          <p:cNvPr id="224" name="Shape 0"/>
+          <p:cNvPr id="215" name="Shape 0"/>
           <p:cNvSpPr/>
           <p:nvPr/>
         </p:nvSpPr>
         <p:spPr>
           <a:xfrm>
             <a:off x="0" y="0"/>
-            <a:ext cx="12190680" cy="657360"/>
+            <a:ext cx="12190320" cy="657000"/>
           </a:xfrm>
           <a:prstGeom prst="rect">
             <a:avLst/>
@@ -9633,14 +9149,14 @@
       </p:sp>
       <p:sp>
         <p:nvSpPr>
-          <p:cNvPr id="225" name="Text 1"/>
+          <p:cNvPr id="216" name="Text 1"/>
           <p:cNvSpPr/>
           <p:nvPr/>
         </p:nvSpPr>
         <p:spPr>
           <a:xfrm>
             <a:off x="502920" y="146160"/>
-            <a:ext cx="8868600" cy="346320"/>
+            <a:ext cx="8868240" cy="345960"/>
           </a:xfrm>
           <a:prstGeom prst="rect">
             <a:avLst/>
@@ -9694,14 +9210,14 @@
       </p:sp>
       <p:sp>
         <p:nvSpPr>
-          <p:cNvPr id="226" name="Text 2"/>
+          <p:cNvPr id="217" name="Text 2"/>
           <p:cNvSpPr/>
           <p:nvPr/>
         </p:nvSpPr>
         <p:spPr>
           <a:xfrm>
             <a:off x="9555480" y="173880"/>
-            <a:ext cx="2056320" cy="254880"/>
+            <a:ext cx="2055960" cy="254520"/>
           </a:xfrm>
           <a:prstGeom prst="rect">
             <a:avLst/>
@@ -9754,7 +9270,7 @@
       </p:sp>
       <p:sp>
         <p:nvSpPr>
-          <p:cNvPr id="227" name="Shape 3"/>
+          <p:cNvPr id="218" name="Shape 3"/>
           <p:cNvSpPr/>
           <p:nvPr/>
         </p:nvSpPr>
@@ -9797,14 +9313,14 @@
       </p:sp>
       <p:sp>
         <p:nvSpPr>
-          <p:cNvPr id="228" name="Text 4"/>
+          <p:cNvPr id="219" name="Text 4"/>
           <p:cNvSpPr/>
           <p:nvPr/>
         </p:nvSpPr>
         <p:spPr>
           <a:xfrm>
             <a:off x="502920" y="6473880"/>
-            <a:ext cx="3290760" cy="163440"/>
+            <a:ext cx="3290400" cy="163080"/>
           </a:xfrm>
           <a:prstGeom prst="rect">
             <a:avLst/>
@@ -9857,14 +9373,14 @@
       </p:sp>
       <p:sp>
         <p:nvSpPr>
-          <p:cNvPr id="229" name="Text 5"/>
+          <p:cNvPr id="220" name="Text 5"/>
           <p:cNvSpPr/>
           <p:nvPr/>
         </p:nvSpPr>
         <p:spPr>
           <a:xfrm>
             <a:off x="914400" y="1188720"/>
-            <a:ext cx="10240200" cy="2010600"/>
+            <a:ext cx="10239840" cy="2010240"/>
           </a:xfrm>
           <a:prstGeom prst="rect">
             <a:avLst/>
@@ -10033,14 +9549,14 @@
       </p:sp>
       <p:sp>
         <p:nvSpPr>
-          <p:cNvPr id="230" name="Text 7"/>
+          <p:cNvPr id="221" name="Text 7"/>
           <p:cNvSpPr/>
           <p:nvPr/>
         </p:nvSpPr>
         <p:spPr>
           <a:xfrm>
             <a:off x="11475720" y="6473880"/>
-            <a:ext cx="254880" cy="136080"/>
+            <a:ext cx="254520" cy="135720"/>
           </a:xfrm>
           <a:prstGeom prst="rect">
             <a:avLst/>
@@ -10093,7 +9609,7 @@
       </p:sp>
       <p:pic>
         <p:nvPicPr>
-          <p:cNvPr id="231" name=""/>
+          <p:cNvPr id="222" name=""/>
           <p:cNvPicPr/>
           <p:nvPr/>
         </p:nvPicPr>
@@ -10104,7 +9620,7 @@
         <p:spPr>
           <a:xfrm>
             <a:off x="11373480" y="6400800"/>
-            <a:ext cx="970920" cy="494640"/>
+            <a:ext cx="970560" cy="494280"/>
           </a:xfrm>
           <a:prstGeom prst="rect">
             <a:avLst/>
@@ -10154,14 +9670,14 @@
       </p:grpSpPr>
       <p:sp>
         <p:nvSpPr>
-          <p:cNvPr id="21" name="Shape 27"/>
+          <p:cNvPr id="18" name="Shape 27"/>
           <p:cNvSpPr/>
           <p:nvPr/>
         </p:nvSpPr>
         <p:spPr>
           <a:xfrm>
             <a:off x="0" y="0"/>
-            <a:ext cx="12190680" cy="657360"/>
+            <a:ext cx="12190320" cy="657000"/>
           </a:xfrm>
           <a:prstGeom prst="rect">
             <a:avLst/>
@@ -10205,14 +9721,14 @@
       </p:sp>
       <p:sp>
         <p:nvSpPr>
-          <p:cNvPr id="22" name="Text 38"/>
+          <p:cNvPr id="19" name="Text 38"/>
           <p:cNvSpPr/>
           <p:nvPr/>
         </p:nvSpPr>
         <p:spPr>
           <a:xfrm>
             <a:off x="457200" y="457200"/>
-            <a:ext cx="8868600" cy="346320"/>
+            <a:ext cx="8868240" cy="345960"/>
           </a:xfrm>
           <a:prstGeom prst="rect">
             <a:avLst/>
@@ -10296,14 +9812,14 @@
       </p:sp>
       <p:sp>
         <p:nvSpPr>
-          <p:cNvPr id="23" name="Text 49"/>
+          <p:cNvPr id="20" name="Text 49"/>
           <p:cNvSpPr/>
           <p:nvPr/>
         </p:nvSpPr>
         <p:spPr>
           <a:xfrm>
             <a:off x="9555480" y="173880"/>
-            <a:ext cx="2056320" cy="254880"/>
+            <a:ext cx="2055960" cy="254520"/>
           </a:xfrm>
           <a:prstGeom prst="rect">
             <a:avLst/>
@@ -10345,7 +9861,7 @@
       </p:sp>
       <p:sp>
         <p:nvSpPr>
-          <p:cNvPr id="24" name="Shape 28"/>
+          <p:cNvPr id="21" name="Shape 28"/>
           <p:cNvSpPr/>
           <p:nvPr/>
         </p:nvSpPr>
@@ -10388,14 +9904,14 @@
       </p:sp>
       <p:sp>
         <p:nvSpPr>
-          <p:cNvPr id="25" name="Text 50"/>
+          <p:cNvPr id="22" name="Text 50"/>
           <p:cNvSpPr/>
           <p:nvPr/>
         </p:nvSpPr>
         <p:spPr>
           <a:xfrm>
             <a:off x="502920" y="6473880"/>
-            <a:ext cx="3290760" cy="163440"/>
+            <a:ext cx="3290400" cy="163080"/>
           </a:xfrm>
           <a:prstGeom prst="rect">
             <a:avLst/>
@@ -10448,14 +9964,14 @@
       </p:sp>
       <p:sp>
         <p:nvSpPr>
-          <p:cNvPr id="26" name="Text 51"/>
+          <p:cNvPr id="23" name="Text 51"/>
           <p:cNvSpPr/>
           <p:nvPr/>
         </p:nvSpPr>
         <p:spPr>
           <a:xfrm>
             <a:off x="-685800" y="803880"/>
-            <a:ext cx="5576760" cy="684720"/>
+            <a:ext cx="5576400" cy="684360"/>
           </a:xfrm>
           <a:prstGeom prst="rect">
             <a:avLst/>
@@ -10509,14 +10025,14 @@
       </p:sp>
       <p:sp>
         <p:nvSpPr>
-          <p:cNvPr id="27" name="Shape 30"/>
+          <p:cNvPr id="24" name="Shape 30"/>
           <p:cNvSpPr/>
           <p:nvPr/>
         </p:nvSpPr>
         <p:spPr>
           <a:xfrm>
             <a:off x="2240280" y="2651760"/>
-            <a:ext cx="3474360" cy="1462680"/>
+            <a:ext cx="3474000" cy="1462320"/>
           </a:xfrm>
           <a:prstGeom prst="roundRect">
             <a:avLst>
@@ -10562,14 +10078,14 @@
       </p:sp>
       <p:sp>
         <p:nvSpPr>
-          <p:cNvPr id="28" name="Text 52"/>
+          <p:cNvPr id="25" name="Text 52"/>
           <p:cNvSpPr/>
           <p:nvPr/>
         </p:nvSpPr>
         <p:spPr>
           <a:xfrm>
             <a:off x="2423160" y="2816280"/>
-            <a:ext cx="3291480" cy="227520"/>
+            <a:ext cx="3291120" cy="227160"/>
           </a:xfrm>
           <a:prstGeom prst="rect">
             <a:avLst/>
@@ -10622,14 +10138,14 @@
       </p:sp>
       <p:sp>
         <p:nvSpPr>
-          <p:cNvPr id="29" name="Text 53"/>
+          <p:cNvPr id="26" name="Text 53"/>
           <p:cNvSpPr/>
           <p:nvPr/>
         </p:nvSpPr>
         <p:spPr>
           <a:xfrm>
             <a:off x="2423160" y="3429000"/>
-            <a:ext cx="2834280" cy="227520"/>
+            <a:ext cx="2833920" cy="227160"/>
           </a:xfrm>
           <a:prstGeom prst="rect">
             <a:avLst/>
@@ -10712,14 +10228,14 @@
       </p:sp>
       <p:sp>
         <p:nvSpPr>
-          <p:cNvPr id="30" name="Text 60"/>
+          <p:cNvPr id="27" name="Text 60"/>
           <p:cNvSpPr/>
           <p:nvPr/>
         </p:nvSpPr>
         <p:spPr>
           <a:xfrm>
             <a:off x="457200" y="1828800"/>
-            <a:ext cx="8502840" cy="821880"/>
+            <a:ext cx="8502480" cy="821520"/>
           </a:xfrm>
           <a:prstGeom prst="rect">
             <a:avLst/>
@@ -10802,14 +10318,14 @@
       </p:sp>
       <p:sp>
         <p:nvSpPr>
-          <p:cNvPr id="31" name="Text 61"/>
+          <p:cNvPr id="28" name="Text 61"/>
           <p:cNvSpPr/>
           <p:nvPr/>
         </p:nvSpPr>
         <p:spPr>
           <a:xfrm>
             <a:off x="11475720" y="6473880"/>
-            <a:ext cx="254880" cy="136080"/>
+            <a:ext cx="254520" cy="135720"/>
           </a:xfrm>
           <a:prstGeom prst="rect">
             <a:avLst/>
@@ -10838,38 +10354,27 @@
                 <a:tab algn="l" pos="0"/>
               </a:tabLst>
             </a:pPr>
-            <a:r>
-              <a:rPr lang="en-US" sz="700" b="0" u="none" strike="noStrike">
-                <a:solidFill>
-                  <a:srgbClr val="64748b"/>
-                </a:solidFill>
-                <a:effectLst/>
-                <a:uFillTx/>
-                <a:latin typeface="Aptos"/>
-              </a:rPr>
-              <a:t>1</a:t>
-            </a:r>
-            <a:endParaRPr lang="en-US" sz="700" b="0" u="none" strike="noStrike">
-              <a:solidFill>
-                <a:srgbClr val="000000"/>
-              </a:solidFill>
-              <a:effectLst/>
-              <a:uFillTx/>
-              <a:latin typeface="Arial"/>
-            </a:endParaRPr>
-          </a:p>
-        </p:txBody>
-      </p:sp>
-      <p:sp>
-        <p:nvSpPr>
-          <p:cNvPr id="32" name="Shape 34"/>
+            <a:endParaRPr lang="en-US" sz="1800" b="0" u="none" strike="noStrike">
+              <a:solidFill>
+                <a:srgbClr val="000000"/>
+              </a:solidFill>
+              <a:effectLst/>
+              <a:uFillTx/>
+              <a:latin typeface="Arial"/>
+            </a:endParaRPr>
+          </a:p>
+        </p:txBody>
+      </p:sp>
+      <p:sp>
+        <p:nvSpPr>
+          <p:cNvPr id="29" name="Shape 34"/>
           <p:cNvSpPr/>
           <p:nvPr/>
         </p:nvSpPr>
         <p:spPr>
           <a:xfrm>
             <a:off x="6629400" y="2651760"/>
-            <a:ext cx="3474360" cy="1462680"/>
+            <a:ext cx="3474000" cy="1462320"/>
           </a:xfrm>
           <a:prstGeom prst="roundRect">
             <a:avLst>
@@ -10970,14 +10475,14 @@
       </p:sp>
       <p:sp>
         <p:nvSpPr>
-          <p:cNvPr id="33" name="Shape 31"/>
+          <p:cNvPr id="30" name="Shape 31"/>
           <p:cNvSpPr/>
           <p:nvPr/>
         </p:nvSpPr>
         <p:spPr>
           <a:xfrm>
             <a:off x="2240280" y="4480560"/>
-            <a:ext cx="3474360" cy="1462680"/>
+            <a:ext cx="3474000" cy="1462320"/>
           </a:xfrm>
           <a:prstGeom prst="roundRect">
             <a:avLst>
@@ -11102,14 +10607,14 @@
       </p:sp>
       <p:sp>
         <p:nvSpPr>
-          <p:cNvPr id="34" name="Shape 32"/>
+          <p:cNvPr id="31" name="Shape 32"/>
           <p:cNvSpPr/>
           <p:nvPr/>
         </p:nvSpPr>
         <p:spPr>
           <a:xfrm>
             <a:off x="6583680" y="4480560"/>
-            <a:ext cx="3474360" cy="1462680"/>
+            <a:ext cx="3474000" cy="1462320"/>
           </a:xfrm>
           <a:prstGeom prst="roundRect">
             <a:avLst>
@@ -11288,7 +10793,7 @@
       </p:grpSpPr>
       <p:pic>
         <p:nvPicPr>
-          <p:cNvPr id="35" name=""/>
+          <p:cNvPr id="32" name=""/>
           <p:cNvPicPr/>
           <p:nvPr/>
         </p:nvPicPr>
@@ -11299,7 +10804,31 @@
         <p:spPr>
           <a:xfrm>
             <a:off x="18720" y="3960"/>
-            <a:ext cx="12184200" cy="6856920"/>
+            <a:ext cx="12183840" cy="6856560"/>
+          </a:xfrm>
+          <a:prstGeom prst="rect">
+            <a:avLst/>
+          </a:prstGeom>
+          <a:noFill/>
+          <a:ln w="0">
+            <a:noFill/>
+          </a:ln>
+        </p:spPr>
+      </p:pic>
+      <p:pic>
+        <p:nvPicPr>
+          <p:cNvPr id="33" name=""/>
+          <p:cNvPicPr/>
+          <p:nvPr/>
+        </p:nvPicPr>
+        <p:blipFill>
+          <a:blip r:embed="rId2"/>
+          <a:stretch/>
+        </p:blipFill>
+        <p:spPr>
+          <a:xfrm>
+            <a:off x="11430000" y="6400800"/>
+            <a:ext cx="561240" cy="380520"/>
           </a:xfrm>
           <a:prstGeom prst="rect">
             <a:avLst/>
@@ -11342,7 +10871,7 @@
       </p:grpSpPr>
       <p:pic>
         <p:nvPicPr>
-          <p:cNvPr id="36" name=""/>
+          <p:cNvPr id="34" name=""/>
           <p:cNvPicPr/>
           <p:nvPr/>
         </p:nvPicPr>
@@ -11353,7 +10882,31 @@
         <p:spPr>
           <a:xfrm>
             <a:off x="18720" y="3960"/>
-            <a:ext cx="12184200" cy="6856920"/>
+            <a:ext cx="12183840" cy="6856560"/>
+          </a:xfrm>
+          <a:prstGeom prst="rect">
+            <a:avLst/>
+          </a:prstGeom>
+          <a:noFill/>
+          <a:ln w="0">
+            <a:noFill/>
+          </a:ln>
+        </p:spPr>
+      </p:pic>
+      <p:pic>
+        <p:nvPicPr>
+          <p:cNvPr id="35" name=""/>
+          <p:cNvPicPr/>
+          <p:nvPr/>
+        </p:nvPicPr>
+        <p:blipFill>
+          <a:blip r:embed="rId2"/>
+          <a:stretch/>
+        </p:blipFill>
+        <p:spPr>
+          <a:xfrm>
+            <a:off x="11430000" y="6400800"/>
+            <a:ext cx="561240" cy="380520"/>
           </a:xfrm>
           <a:prstGeom prst="rect">
             <a:avLst/>
@@ -11403,14 +10956,14 @@
       </p:grpSpPr>
       <p:sp>
         <p:nvSpPr>
-          <p:cNvPr id="37" name="Shape 0"/>
+          <p:cNvPr id="36" name="Shape 0"/>
           <p:cNvSpPr/>
           <p:nvPr/>
         </p:nvSpPr>
         <p:spPr>
           <a:xfrm>
             <a:off x="0" y="0"/>
-            <a:ext cx="12190680" cy="657360"/>
+            <a:ext cx="12190320" cy="657000"/>
           </a:xfrm>
           <a:prstGeom prst="rect">
             <a:avLst/>
@@ -11454,14 +11007,14 @@
       </p:sp>
       <p:sp>
         <p:nvSpPr>
-          <p:cNvPr id="38" name="Text 1"/>
+          <p:cNvPr id="37" name="Text 1"/>
           <p:cNvSpPr/>
           <p:nvPr/>
         </p:nvSpPr>
         <p:spPr>
           <a:xfrm>
             <a:off x="502920" y="146160"/>
-            <a:ext cx="8868600" cy="346320"/>
+            <a:ext cx="8868240" cy="345960"/>
           </a:xfrm>
           <a:prstGeom prst="rect">
             <a:avLst/>
@@ -11515,14 +11068,14 @@
       </p:sp>
       <p:sp>
         <p:nvSpPr>
-          <p:cNvPr id="39" name="Text 2"/>
+          <p:cNvPr id="38" name="Text 2"/>
           <p:cNvSpPr/>
           <p:nvPr/>
         </p:nvSpPr>
         <p:spPr>
           <a:xfrm>
             <a:off x="9555480" y="173880"/>
-            <a:ext cx="2056320" cy="254880"/>
+            <a:ext cx="2055960" cy="254520"/>
           </a:xfrm>
           <a:prstGeom prst="rect">
             <a:avLst/>
@@ -11551,31 +11104,20 @@
                 <a:tab algn="l" pos="0"/>
               </a:tabLst>
             </a:pPr>
-            <a:r>
-              <a:rPr lang="en-US" sz="900" b="0" u="none" strike="noStrike">
-                <a:solidFill>
-                  <a:srgbClr val="ddeaf6"/>
-                </a:solidFill>
-                <a:effectLst/>
-                <a:uFillTx/>
-                <a:latin typeface="Aptos"/>
-              </a:rPr>
-              <a:t>substitui o exponencial</a:t>
-            </a:r>
-            <a:endParaRPr lang="en-US" sz="900" b="0" u="none" strike="noStrike">
-              <a:solidFill>
-                <a:srgbClr val="000000"/>
-              </a:solidFill>
-              <a:effectLst/>
-              <a:uFillTx/>
-              <a:latin typeface="Arial"/>
-            </a:endParaRPr>
-          </a:p>
-        </p:txBody>
-      </p:sp>
-      <p:sp>
-        <p:nvSpPr>
-          <p:cNvPr id="40" name="Shape 3"/>
+            <a:endParaRPr lang="en-US" sz="1800" b="0" u="none" strike="noStrike">
+              <a:solidFill>
+                <a:srgbClr val="000000"/>
+              </a:solidFill>
+              <a:effectLst/>
+              <a:uFillTx/>
+              <a:latin typeface="Arial"/>
+            </a:endParaRPr>
+          </a:p>
+        </p:txBody>
+      </p:sp>
+      <p:sp>
+        <p:nvSpPr>
+          <p:cNvPr id="39" name="Shape 3"/>
           <p:cNvSpPr/>
           <p:nvPr/>
         </p:nvSpPr>
@@ -11618,14 +11160,14 @@
       </p:sp>
       <p:sp>
         <p:nvSpPr>
-          <p:cNvPr id="41" name="Text 4"/>
+          <p:cNvPr id="40" name="Text 4"/>
           <p:cNvSpPr/>
           <p:nvPr/>
         </p:nvSpPr>
         <p:spPr>
           <a:xfrm>
             <a:off x="502920" y="6473880"/>
-            <a:ext cx="3290760" cy="163440"/>
+            <a:ext cx="3290400" cy="163080"/>
           </a:xfrm>
           <a:prstGeom prst="rect">
             <a:avLst/>
@@ -11678,14 +11220,14 @@
       </p:sp>
       <p:sp>
         <p:nvSpPr>
-          <p:cNvPr id="42" name="Text 5"/>
+          <p:cNvPr id="41" name="Text 5"/>
           <p:cNvSpPr/>
           <p:nvPr/>
         </p:nvSpPr>
         <p:spPr>
           <a:xfrm>
             <a:off x="685800" y="1143000"/>
-            <a:ext cx="5576760" cy="684720"/>
+            <a:ext cx="5576400" cy="684360"/>
           </a:xfrm>
           <a:prstGeom prst="rect">
             <a:avLst/>
@@ -11739,14 +11281,14 @@
       </p:sp>
       <p:sp>
         <p:nvSpPr>
-          <p:cNvPr id="43" name="Text 6"/>
+          <p:cNvPr id="42" name="Text 6"/>
           <p:cNvSpPr/>
           <p:nvPr/>
         </p:nvSpPr>
         <p:spPr>
           <a:xfrm>
             <a:off x="868680" y="1993320"/>
-            <a:ext cx="5211000" cy="501840"/>
+            <a:ext cx="5210640" cy="501480"/>
           </a:xfrm>
           <a:prstGeom prst="rect">
             <a:avLst/>
@@ -11799,14 +11341,14 @@
       </p:sp>
       <p:sp>
         <p:nvSpPr>
-          <p:cNvPr id="44" name="Shape 7"/>
+          <p:cNvPr id="43" name="Shape 7"/>
           <p:cNvSpPr/>
           <p:nvPr/>
         </p:nvSpPr>
         <p:spPr>
           <a:xfrm>
             <a:off x="868680" y="2880360"/>
-            <a:ext cx="2330640" cy="867600"/>
+            <a:ext cx="2330280" cy="867240"/>
           </a:xfrm>
           <a:prstGeom prst="roundRect">
             <a:avLst>
@@ -11852,14 +11394,14 @@
       </p:sp>
       <p:sp>
         <p:nvSpPr>
-          <p:cNvPr id="45" name="Text 8"/>
+          <p:cNvPr id="44" name="Text 8"/>
           <p:cNvSpPr/>
           <p:nvPr/>
         </p:nvSpPr>
         <p:spPr>
           <a:xfrm>
             <a:off x="1051560" y="3044880"/>
-            <a:ext cx="1964880" cy="227520"/>
+            <a:ext cx="1964520" cy="227160"/>
           </a:xfrm>
           <a:prstGeom prst="rect">
             <a:avLst/>
@@ -11912,14 +11454,14 @@
       </p:sp>
       <p:sp>
         <p:nvSpPr>
-          <p:cNvPr id="46" name="Text 9"/>
+          <p:cNvPr id="45" name="Text 9"/>
           <p:cNvSpPr/>
           <p:nvPr/>
         </p:nvSpPr>
         <p:spPr>
           <a:xfrm>
             <a:off x="1051560" y="3383280"/>
-            <a:ext cx="1964880" cy="227520"/>
+            <a:ext cx="1964520" cy="227160"/>
           </a:xfrm>
           <a:prstGeom prst="rect">
             <a:avLst/>
@@ -11972,14 +11514,14 @@
       </p:sp>
       <p:sp>
         <p:nvSpPr>
-          <p:cNvPr id="47" name="Shape 10"/>
+          <p:cNvPr id="46" name="Shape 10"/>
           <p:cNvSpPr/>
           <p:nvPr/>
         </p:nvSpPr>
         <p:spPr>
           <a:xfrm>
             <a:off x="3429000" y="2880360"/>
-            <a:ext cx="2422080" cy="867600"/>
+            <a:ext cx="2421720" cy="867240"/>
           </a:xfrm>
           <a:prstGeom prst="roundRect">
             <a:avLst>
@@ -12025,14 +11567,14 @@
       </p:sp>
       <p:sp>
         <p:nvSpPr>
-          <p:cNvPr id="48" name="Text 11"/>
+          <p:cNvPr id="47" name="Text 11"/>
           <p:cNvSpPr/>
           <p:nvPr/>
         </p:nvSpPr>
         <p:spPr>
           <a:xfrm>
             <a:off x="3611880" y="3044880"/>
-            <a:ext cx="2056320" cy="227520"/>
+            <a:ext cx="2055960" cy="227160"/>
           </a:xfrm>
           <a:prstGeom prst="rect">
             <a:avLst/>
@@ -12085,14 +11627,14 @@
       </p:sp>
       <p:sp>
         <p:nvSpPr>
-          <p:cNvPr id="49" name="Text 12"/>
+          <p:cNvPr id="48" name="Text 12"/>
           <p:cNvSpPr/>
           <p:nvPr/>
         </p:nvSpPr>
         <p:spPr>
           <a:xfrm>
             <a:off x="3611880" y="3383280"/>
-            <a:ext cx="2056320" cy="227520"/>
+            <a:ext cx="2055960" cy="227160"/>
           </a:xfrm>
           <a:prstGeom prst="rect">
             <a:avLst/>
@@ -12145,14 +11687,14 @@
       </p:sp>
       <p:sp>
         <p:nvSpPr>
-          <p:cNvPr id="50" name="Shape 13"/>
+          <p:cNvPr id="49" name="Shape 13"/>
           <p:cNvSpPr/>
           <p:nvPr/>
         </p:nvSpPr>
         <p:spPr>
           <a:xfrm>
             <a:off x="868680" y="4023360"/>
-            <a:ext cx="2330640" cy="867600"/>
+            <a:ext cx="2330280" cy="867240"/>
           </a:xfrm>
           <a:prstGeom prst="roundRect">
             <a:avLst>
@@ -12198,14 +11740,14 @@
       </p:sp>
       <p:sp>
         <p:nvSpPr>
-          <p:cNvPr id="51" name="Text 14"/>
+          <p:cNvPr id="50" name="Text 14"/>
           <p:cNvSpPr/>
           <p:nvPr/>
         </p:nvSpPr>
         <p:spPr>
           <a:xfrm>
             <a:off x="1051560" y="4187880"/>
-            <a:ext cx="1964880" cy="227520"/>
+            <a:ext cx="1964520" cy="227160"/>
           </a:xfrm>
           <a:prstGeom prst="rect">
             <a:avLst/>
@@ -12258,14 +11800,14 @@
       </p:sp>
       <p:sp>
         <p:nvSpPr>
-          <p:cNvPr id="52" name="Text 15"/>
+          <p:cNvPr id="51" name="Text 15"/>
           <p:cNvSpPr/>
           <p:nvPr/>
         </p:nvSpPr>
         <p:spPr>
           <a:xfrm>
             <a:off x="1051560" y="4526280"/>
-            <a:ext cx="1964880" cy="227520"/>
+            <a:ext cx="1964520" cy="227160"/>
           </a:xfrm>
           <a:prstGeom prst="rect">
             <a:avLst/>
@@ -12318,14 +11860,14 @@
       </p:sp>
       <p:sp>
         <p:nvSpPr>
-          <p:cNvPr id="53" name="Shape 16"/>
+          <p:cNvPr id="52" name="Shape 16"/>
           <p:cNvSpPr/>
           <p:nvPr/>
         </p:nvSpPr>
         <p:spPr>
           <a:xfrm>
             <a:off x="3429000" y="4023360"/>
-            <a:ext cx="2422080" cy="1324800"/>
+            <a:ext cx="2421720" cy="1324440"/>
           </a:xfrm>
           <a:prstGeom prst="roundRect">
             <a:avLst>
@@ -12371,14 +11913,14 @@
       </p:sp>
       <p:sp>
         <p:nvSpPr>
-          <p:cNvPr id="54" name="Text 17"/>
+          <p:cNvPr id="53" name="Text 17"/>
           <p:cNvSpPr/>
           <p:nvPr/>
         </p:nvSpPr>
         <p:spPr>
           <a:xfrm>
             <a:off x="3611880" y="4187880"/>
-            <a:ext cx="2056320" cy="227520"/>
+            <a:ext cx="2055960" cy="227160"/>
           </a:xfrm>
           <a:prstGeom prst="rect">
             <a:avLst/>
@@ -12431,14 +11973,14 @@
       </p:sp>
       <p:sp>
         <p:nvSpPr>
-          <p:cNvPr id="55" name="Text 18"/>
+          <p:cNvPr id="54" name="Text 18"/>
           <p:cNvSpPr/>
           <p:nvPr/>
         </p:nvSpPr>
         <p:spPr>
           <a:xfrm>
             <a:off x="3611880" y="4526280"/>
-            <a:ext cx="2056320" cy="684720"/>
+            <a:ext cx="2055960" cy="684360"/>
           </a:xfrm>
           <a:prstGeom prst="rect">
             <a:avLst/>
@@ -12491,7 +12033,7 @@
       </p:sp>
       <p:pic>
         <p:nvPicPr>
-          <p:cNvPr id="56" name="Image 0" descr="/mnt/data/logistico_vs_exp.svg"/>
+          <p:cNvPr id="55" name="Image 0" descr="/mnt/data/logistico_vs_exp.svg"/>
           <p:cNvPicPr/>
           <p:nvPr/>
         </p:nvPicPr>
@@ -12508,7 +12050,7 @@
         <p:spPr>
           <a:xfrm>
             <a:off x="6447600" y="2057400"/>
-            <a:ext cx="5439600" cy="3234600"/>
+            <a:ext cx="5439240" cy="3234240"/>
           </a:xfrm>
           <a:prstGeom prst="rect">
             <a:avLst/>
@@ -12521,14 +12063,14 @@
       </p:pic>
       <p:sp>
         <p:nvSpPr>
-          <p:cNvPr id="57" name="Text 20"/>
+          <p:cNvPr id="56" name="Text 20"/>
           <p:cNvSpPr/>
           <p:nvPr/>
         </p:nvSpPr>
         <p:spPr>
           <a:xfrm>
             <a:off x="11475720" y="6473880"/>
-            <a:ext cx="254880" cy="136080"/>
+            <a:ext cx="254520" cy="135720"/>
           </a:xfrm>
           <a:prstGeom prst="rect">
             <a:avLst/>
@@ -12557,18 +12099,7 @@
                 <a:tab algn="l" pos="0"/>
               </a:tabLst>
             </a:pPr>
-            <a:r>
-              <a:rPr lang="en-US" sz="700" b="0" u="none" strike="noStrike">
-                <a:solidFill>
-                  <a:srgbClr val="64748b"/>
-                </a:solidFill>
-                <a:effectLst/>
-                <a:uFillTx/>
-                <a:latin typeface="Aptos"/>
-              </a:rPr>
-              <a:t>4</a:t>
-            </a:r>
-            <a:endParaRPr lang="en-US" sz="700" b="0" u="none" strike="noStrike">
+            <a:endParaRPr lang="en-US" sz="1800" b="0" u="none" strike="noStrike">
               <a:solidFill>
                 <a:srgbClr val="000000"/>
               </a:solidFill>
@@ -12618,14 +12149,14 @@
       </p:grpSpPr>
       <p:sp>
         <p:nvSpPr>
-          <p:cNvPr id="58" name="Shape 33"/>
+          <p:cNvPr id="57" name="Shape 33"/>
           <p:cNvSpPr/>
           <p:nvPr/>
         </p:nvSpPr>
         <p:spPr>
           <a:xfrm>
             <a:off x="0" y="0"/>
-            <a:ext cx="12190680" cy="657360"/>
+            <a:ext cx="12190320" cy="657000"/>
           </a:xfrm>
           <a:prstGeom prst="rect">
             <a:avLst/>
@@ -12669,14 +12200,14 @@
       </p:sp>
       <p:sp>
         <p:nvSpPr>
-          <p:cNvPr id="59" name="Text 54"/>
+          <p:cNvPr id="58" name="Text 54"/>
           <p:cNvSpPr/>
           <p:nvPr/>
         </p:nvSpPr>
         <p:spPr>
           <a:xfrm>
             <a:off x="502920" y="146160"/>
-            <a:ext cx="8868600" cy="346320"/>
+            <a:ext cx="8868240" cy="345960"/>
           </a:xfrm>
           <a:prstGeom prst="rect">
             <a:avLst/>
@@ -12730,14 +12261,14 @@
       </p:sp>
       <p:sp>
         <p:nvSpPr>
-          <p:cNvPr id="60" name="Text 55"/>
+          <p:cNvPr id="59" name="Text 55"/>
           <p:cNvSpPr/>
           <p:nvPr/>
         </p:nvSpPr>
         <p:spPr>
           <a:xfrm>
             <a:off x="9555480" y="173880"/>
-            <a:ext cx="2056320" cy="254880"/>
+            <a:ext cx="2055960" cy="254520"/>
           </a:xfrm>
           <a:prstGeom prst="rect">
             <a:avLst/>
@@ -12790,7 +12321,7 @@
       </p:sp>
       <p:sp>
         <p:nvSpPr>
-          <p:cNvPr id="61" name="Shape 35"/>
+          <p:cNvPr id="60" name="Shape 35"/>
           <p:cNvSpPr/>
           <p:nvPr/>
         </p:nvSpPr>
@@ -12833,14 +12364,14 @@
       </p:sp>
       <p:sp>
         <p:nvSpPr>
-          <p:cNvPr id="62" name="Text 56"/>
+          <p:cNvPr id="61" name="Text 56"/>
           <p:cNvSpPr/>
           <p:nvPr/>
         </p:nvSpPr>
         <p:spPr>
           <a:xfrm>
             <a:off x="502920" y="6473880"/>
-            <a:ext cx="3290760" cy="163440"/>
+            <a:ext cx="3290400" cy="163080"/>
           </a:xfrm>
           <a:prstGeom prst="rect">
             <a:avLst/>
@@ -12893,14 +12424,14 @@
       </p:sp>
       <p:sp>
         <p:nvSpPr>
-          <p:cNvPr id="63" name="Text 57"/>
+          <p:cNvPr id="62" name="Text 57"/>
           <p:cNvSpPr/>
           <p:nvPr/>
         </p:nvSpPr>
         <p:spPr>
           <a:xfrm>
             <a:off x="731520" y="1051560"/>
-            <a:ext cx="5348160" cy="501840"/>
+            <a:ext cx="5347800" cy="501480"/>
           </a:xfrm>
           <a:prstGeom prst="rect">
             <a:avLst/>
@@ -12954,14 +12485,14 @@
       </p:sp>
       <p:sp>
         <p:nvSpPr>
-          <p:cNvPr id="64" name="Text 58"/>
-          <p:cNvSpPr/>
-          <p:nvPr/>
-        </p:nvSpPr>
-        <p:spPr>
-          <a:xfrm>
-            <a:off x="731520" y="1691640"/>
-            <a:ext cx="5348160" cy="501840"/>
+          <p:cNvPr id="63" name="Text 58"/>
+          <p:cNvSpPr/>
+          <p:nvPr/>
+        </p:nvSpPr>
+        <p:spPr>
+          <a:xfrm>
+            <a:off x="5486400" y="1098720"/>
+            <a:ext cx="5347800" cy="501480"/>
           </a:xfrm>
           <a:prstGeom prst="rect">
             <a:avLst/>
@@ -13015,14 +12546,14 @@
       </p:sp>
       <p:sp>
         <p:nvSpPr>
-          <p:cNvPr id="65" name="Text 59"/>
+          <p:cNvPr id="64" name="Text 59"/>
           <p:cNvSpPr/>
           <p:nvPr/>
         </p:nvSpPr>
         <p:spPr>
           <a:xfrm>
             <a:off x="868680" y="2487240"/>
-            <a:ext cx="5073840" cy="684720"/>
+            <a:ext cx="9875520" cy="684360"/>
           </a:xfrm>
           <a:prstGeom prst="rect">
             <a:avLst/>
@@ -13075,18 +12606,18 @@
       </p:sp>
       <p:sp>
         <p:nvSpPr>
-          <p:cNvPr id="66" name="Shape 36"/>
-          <p:cNvSpPr/>
-          <p:nvPr/>
-        </p:nvSpPr>
-        <p:spPr>
-          <a:xfrm>
-            <a:off x="868680" y="3657600"/>
-            <a:ext cx="5073840" cy="1050480"/>
+          <p:cNvPr id="65" name="Shape 37"/>
+          <p:cNvSpPr/>
+          <p:nvPr/>
+        </p:nvSpPr>
+        <p:spPr>
+          <a:xfrm>
+            <a:off x="6172200" y="3886200"/>
+            <a:ext cx="4936320" cy="1371600"/>
           </a:xfrm>
           <a:prstGeom prst="roundRect">
             <a:avLst>
-              <a:gd name="adj" fmla="val 3478"/>
+              <a:gd name="adj" fmla="val 2963"/>
             </a:avLst>
           </a:prstGeom>
           <a:solidFill>
@@ -13128,14 +12659,14 @@
       </p:sp>
       <p:sp>
         <p:nvSpPr>
-          <p:cNvPr id="67" name="Text 62"/>
-          <p:cNvSpPr/>
-          <p:nvPr/>
-        </p:nvSpPr>
-        <p:spPr>
-          <a:xfrm>
-            <a:off x="1051560" y="3822120"/>
-            <a:ext cx="4708080" cy="227520"/>
+          <p:cNvPr id="66" name="Text 64"/>
+          <p:cNvSpPr/>
+          <p:nvPr/>
+        </p:nvSpPr>
+        <p:spPr>
+          <a:xfrm>
+            <a:off x="6364080" y="4069080"/>
+            <a:ext cx="4552560" cy="252720"/>
           </a:xfrm>
           <a:prstGeom prst="rect">
             <a:avLst/>
@@ -13173,7 +12704,7 @@
                 <a:uFillTx/>
                 <a:latin typeface="Aptos"/>
               </a:rPr>
-              <a:t>Leitura ambiental</a:t>
+              <a:t>Equação integrada</a:t>
             </a:r>
             <a:endParaRPr lang="en-US" sz="1300" b="0" u="none" strike="noStrike">
               <a:solidFill>
@@ -13188,14 +12719,14 @@
       </p:sp>
       <p:sp>
         <p:nvSpPr>
-          <p:cNvPr id="68" name="Text 63"/>
-          <p:cNvSpPr/>
-          <p:nvPr/>
-        </p:nvSpPr>
-        <p:spPr>
-          <a:xfrm>
-            <a:off x="1051560" y="4160520"/>
-            <a:ext cx="4708080" cy="410400"/>
+          <p:cNvPr id="67" name="Text 65"/>
+          <p:cNvSpPr/>
+          <p:nvPr/>
+        </p:nvSpPr>
+        <p:spPr>
+          <a:xfrm>
+            <a:off x="6364080" y="4445640"/>
+            <a:ext cx="4552560" cy="659520"/>
           </a:xfrm>
           <a:prstGeom prst="rect">
             <a:avLst/>
@@ -13233,7 +12764,7 @@
                 <a:uFillTx/>
                 <a:latin typeface="Aptos"/>
               </a:rPr>
-              <a:t>temperaturas maiores aumentam a velocidade de crescimento, mas não eliminam limites ecológicos.</a:t>
+              <a:t>N(t,T) = K / [1 + ((K−N₀)/N₀) · e^(−r(T)t)]</a:t>
             </a:r>
             <a:endParaRPr lang="en-US" sz="1100" b="0" u="none" strike="noStrike">
               <a:solidFill>
@@ -13248,18 +12779,18 @@
       </p:sp>
       <p:sp>
         <p:nvSpPr>
-          <p:cNvPr id="69" name="Shape 37"/>
-          <p:cNvSpPr/>
-          <p:nvPr/>
-        </p:nvSpPr>
-        <p:spPr>
-          <a:xfrm>
-            <a:off x="6400800" y="1097280"/>
-            <a:ext cx="4708080" cy="1233360"/>
+          <p:cNvPr id="68" name="Shape 38"/>
+          <p:cNvSpPr/>
+          <p:nvPr/>
+        </p:nvSpPr>
+        <p:spPr>
+          <a:xfrm>
+            <a:off x="457200" y="3886200"/>
+            <a:ext cx="4707720" cy="1324440"/>
           </a:xfrm>
           <a:prstGeom prst="roundRect">
             <a:avLst>
-              <a:gd name="adj" fmla="val 2963"/>
+              <a:gd name="adj" fmla="val 2759"/>
             </a:avLst>
           </a:prstGeom>
           <a:solidFill>
@@ -13301,14 +12832,14 @@
       </p:sp>
       <p:sp>
         <p:nvSpPr>
-          <p:cNvPr id="70" name="Text 64"/>
-          <p:cNvSpPr/>
-          <p:nvPr/>
-        </p:nvSpPr>
-        <p:spPr>
-          <a:xfrm>
-            <a:off x="6583680" y="1261800"/>
-            <a:ext cx="4342320" cy="227520"/>
+          <p:cNvPr id="69" name="Text 66"/>
+          <p:cNvSpPr/>
+          <p:nvPr/>
+        </p:nvSpPr>
+        <p:spPr>
+          <a:xfrm>
+            <a:off x="640080" y="4050720"/>
+            <a:ext cx="4341960" cy="227160"/>
           </a:xfrm>
           <a:prstGeom prst="rect">
             <a:avLst/>
@@ -13346,7 +12877,7 @@
                 <a:uFillTx/>
                 <a:latin typeface="Aptos"/>
               </a:rPr>
-              <a:t>Equação integrada</a:t>
+              <a:t>Comparação com a Parte 1</a:t>
             </a:r>
             <a:endParaRPr lang="en-US" sz="1300" b="0" u="none" strike="noStrike">
               <a:solidFill>
@@ -13361,14 +12892,14 @@
       </p:sp>
       <p:sp>
         <p:nvSpPr>
-          <p:cNvPr id="71" name="Text 65"/>
-          <p:cNvSpPr/>
-          <p:nvPr/>
-        </p:nvSpPr>
-        <p:spPr>
-          <a:xfrm>
-            <a:off x="6583680" y="1600200"/>
-            <a:ext cx="4342320" cy="593280"/>
+          <p:cNvPr id="70" name="Text 67"/>
+          <p:cNvSpPr/>
+          <p:nvPr/>
+        </p:nvSpPr>
+        <p:spPr>
+          <a:xfrm>
+            <a:off x="640080" y="4389120"/>
+            <a:ext cx="4341960" cy="684360"/>
           </a:xfrm>
           <a:prstGeom prst="rect">
             <a:avLst/>
@@ -13406,7 +12937,7 @@
                 <a:uFillTx/>
                 <a:latin typeface="Aptos"/>
               </a:rPr>
-              <a:t>N(t,T) = K / [1 + ((K−N₀)/N₀) · e^(−r(T)t)]</a:t>
+              <a:t>Antes: λ crescia exponencialmente sem limite. Agora: λ cresce até uma concentração máxima plausível definida por K.</a:t>
             </a:r>
             <a:endParaRPr lang="en-US" sz="1100" b="0" u="none" strike="noStrike">
               <a:solidFill>
@@ -13421,45 +12952,41 @@
       </p:sp>
       <p:sp>
         <p:nvSpPr>
-          <p:cNvPr id="72" name="Shape 38"/>
-          <p:cNvSpPr/>
-          <p:nvPr/>
-        </p:nvSpPr>
-        <p:spPr>
-          <a:xfrm>
-            <a:off x="6400800" y="2743200"/>
-            <a:ext cx="4708080" cy="1324800"/>
-          </a:xfrm>
-          <a:prstGeom prst="roundRect">
-            <a:avLst>
-              <a:gd name="adj" fmla="val 2759"/>
-            </a:avLst>
-          </a:prstGeom>
-          <a:solidFill>
-            <a:srgbClr val="ffffff"/>
-          </a:solidFill>
-          <a:ln w="10160">
-            <a:solidFill>
-              <a:srgbClr val="d9e2ec"/>
-            </a:solidFill>
-            <a:round/>
-          </a:ln>
-        </p:spPr>
-        <p:style>
-          <a:lnRef idx="0"/>
-          <a:fillRef idx="0"/>
-          <a:effectRef idx="0"/>
-          <a:fontRef idx="minor"/>
-        </p:style>
-        <p:txBody>
-          <a:bodyPr lIns="90000" rIns="90000" tIns="45000" bIns="45000" anchor="t">
-            <a:noAutofit/>
-          </a:bodyPr>
-          <a:p>
-            <a:pPr>
-              <a:lnSpc>
-                <a:spcPct val="100000"/>
-              </a:lnSpc>
+          <p:cNvPr id="71" name="Text 70"/>
+          <p:cNvSpPr/>
+          <p:nvPr/>
+        </p:nvSpPr>
+        <p:spPr>
+          <a:xfrm>
+            <a:off x="11475720" y="6473880"/>
+            <a:ext cx="254520" cy="135720"/>
+          </a:xfrm>
+          <a:prstGeom prst="rect">
+            <a:avLst/>
+          </a:prstGeom>
+          <a:noFill/>
+          <a:ln w="0">
+            <a:noFill/>
+          </a:ln>
+        </p:spPr>
+        <p:style>
+          <a:lnRef idx="0"/>
+          <a:fillRef idx="0"/>
+          <a:effectRef idx="0"/>
+          <a:fontRef idx="minor"/>
+        </p:style>
+        <p:txBody>
+          <a:bodyPr lIns="0" rIns="0" tIns="0" bIns="0" anchor="ctr">
+            <a:noAutofit/>
+          </a:bodyPr>
+          <a:p>
+            <a:pPr algn="r" defTabSz="914400">
+              <a:lnSpc>
+                <a:spcPct val="100000"/>
+              </a:lnSpc>
+              <a:tabLst>
+                <a:tab algn="l" pos="0"/>
+              </a:tabLst>
             </a:pPr>
             <a:endParaRPr lang="en-US" sz="1800" b="0" u="none" strike="noStrike">
               <a:solidFill>
@@ -13474,367 +13001,14 @@
       </p:sp>
       <p:sp>
         <p:nvSpPr>
-          <p:cNvPr id="73" name="Text 66"/>
-          <p:cNvSpPr/>
-          <p:nvPr/>
-        </p:nvSpPr>
-        <p:spPr>
-          <a:xfrm>
-            <a:off x="6583680" y="2907720"/>
-            <a:ext cx="4342320" cy="227520"/>
-          </a:xfrm>
-          <a:prstGeom prst="rect">
-            <a:avLst/>
-          </a:prstGeom>
-          <a:noFill/>
-          <a:ln w="0">
-            <a:noFill/>
-          </a:ln>
-        </p:spPr>
-        <p:style>
-          <a:lnRef idx="0"/>
-          <a:fillRef idx="0"/>
-          <a:effectRef idx="0"/>
-          <a:fontRef idx="minor"/>
-        </p:style>
-        <p:txBody>
-          <a:bodyPr lIns="0" rIns="0" tIns="0" bIns="0" anchor="ctr">
-            <a:noAutofit/>
-          </a:bodyPr>
-          <a:p>
-            <a:pPr defTabSz="914400">
-              <a:lnSpc>
-                <a:spcPct val="100000"/>
-              </a:lnSpc>
-              <a:tabLst>
-                <a:tab algn="l" pos="0"/>
-              </a:tabLst>
-            </a:pPr>
-            <a:r>
-              <a:rPr lang="en-US" sz="1300" b="1" u="none" strike="noStrike">
-                <a:solidFill>
-                  <a:srgbClr val="16324f"/>
-                </a:solidFill>
-                <a:effectLst/>
-                <a:uFillTx/>
-                <a:latin typeface="Aptos"/>
-              </a:rPr>
-              <a:t>Comparação com a Parte 1</a:t>
-            </a:r>
-            <a:endParaRPr lang="en-US" sz="1300" b="0" u="none" strike="noStrike">
-              <a:solidFill>
-                <a:srgbClr val="000000"/>
-              </a:solidFill>
-              <a:effectLst/>
-              <a:uFillTx/>
-              <a:latin typeface="Arial"/>
-            </a:endParaRPr>
-          </a:p>
-        </p:txBody>
-      </p:sp>
-      <p:sp>
-        <p:nvSpPr>
-          <p:cNvPr id="74" name="Text 67"/>
-          <p:cNvSpPr/>
-          <p:nvPr/>
-        </p:nvSpPr>
-        <p:spPr>
-          <a:xfrm>
-            <a:off x="6583680" y="3246120"/>
-            <a:ext cx="4342320" cy="684720"/>
-          </a:xfrm>
-          <a:prstGeom prst="rect">
-            <a:avLst/>
-          </a:prstGeom>
-          <a:noFill/>
-          <a:ln w="0">
-            <a:noFill/>
-          </a:ln>
-        </p:spPr>
-        <p:style>
-          <a:lnRef idx="0"/>
-          <a:fillRef idx="0"/>
-          <a:effectRef idx="0"/>
-          <a:fontRef idx="minor"/>
-        </p:style>
-        <p:txBody>
-          <a:bodyPr lIns="0" rIns="0" tIns="0" bIns="0" anchor="ctr">
-            <a:normAutofit/>
-          </a:bodyPr>
-          <a:p>
-            <a:pPr defTabSz="914400">
-              <a:lnSpc>
-                <a:spcPct val="100000"/>
-              </a:lnSpc>
-              <a:tabLst>
-                <a:tab algn="l" pos="0"/>
-              </a:tabLst>
-            </a:pPr>
-            <a:r>
-              <a:rPr lang="en-US" sz="1100" b="0" u="none" strike="noStrike">
-                <a:solidFill>
-                  <a:srgbClr val="1f2937"/>
-                </a:solidFill>
-                <a:effectLst/>
-                <a:uFillTx/>
-                <a:latin typeface="Aptos"/>
-              </a:rPr>
-              <a:t>Antes: λ crescia exponencialmente sem limite. Agora: λ cresce até uma concentração máxima plausível definida por K.</a:t>
-            </a:r>
-            <a:endParaRPr lang="en-US" sz="1100" b="0" u="none" strike="noStrike">
-              <a:solidFill>
-                <a:srgbClr val="000000"/>
-              </a:solidFill>
-              <a:effectLst/>
-              <a:uFillTx/>
-              <a:latin typeface="Arial"/>
-            </a:endParaRPr>
-          </a:p>
-        </p:txBody>
-      </p:sp>
-      <p:sp>
-        <p:nvSpPr>
-          <p:cNvPr id="75" name="Shape 39"/>
-          <p:cNvSpPr/>
-          <p:nvPr/>
-        </p:nvSpPr>
-        <p:spPr>
-          <a:xfrm>
-            <a:off x="6400800" y="4526280"/>
-            <a:ext cx="4708080" cy="1096200"/>
-          </a:xfrm>
-          <a:prstGeom prst="roundRect">
-            <a:avLst>
-              <a:gd name="adj" fmla="val 3333"/>
-            </a:avLst>
-          </a:prstGeom>
-          <a:solidFill>
-            <a:srgbClr val="ffffff"/>
-          </a:solidFill>
-          <a:ln w="10160">
-            <a:solidFill>
-              <a:srgbClr val="d9e2ec"/>
-            </a:solidFill>
-            <a:round/>
-          </a:ln>
-        </p:spPr>
-        <p:style>
-          <a:lnRef idx="0"/>
-          <a:fillRef idx="0"/>
-          <a:effectRef idx="0"/>
-          <a:fontRef idx="minor"/>
-        </p:style>
-        <p:txBody>
-          <a:bodyPr lIns="90000" rIns="90000" tIns="45000" bIns="45000" anchor="t">
-            <a:noAutofit/>
-          </a:bodyPr>
-          <a:p>
-            <a:pPr>
-              <a:lnSpc>
-                <a:spcPct val="100000"/>
-              </a:lnSpc>
-            </a:pPr>
-            <a:endParaRPr lang="en-US" sz="1800" b="0" u="none" strike="noStrike">
-              <a:solidFill>
-                <a:srgbClr val="000000"/>
-              </a:solidFill>
-              <a:effectLst/>
-              <a:uFillTx/>
-              <a:latin typeface="Arial"/>
-            </a:endParaRPr>
-          </a:p>
-        </p:txBody>
-      </p:sp>
-      <p:sp>
-        <p:nvSpPr>
-          <p:cNvPr id="76" name="Text 68"/>
-          <p:cNvSpPr/>
-          <p:nvPr/>
-        </p:nvSpPr>
-        <p:spPr>
-          <a:xfrm>
-            <a:off x="6583680" y="4690800"/>
-            <a:ext cx="4342320" cy="227520"/>
-          </a:xfrm>
-          <a:prstGeom prst="rect">
-            <a:avLst/>
-          </a:prstGeom>
-          <a:noFill/>
-          <a:ln w="0">
-            <a:noFill/>
-          </a:ln>
-        </p:spPr>
-        <p:style>
-          <a:lnRef idx="0"/>
-          <a:fillRef idx="0"/>
-          <a:effectRef idx="0"/>
-          <a:fontRef idx="minor"/>
-        </p:style>
-        <p:txBody>
-          <a:bodyPr lIns="0" rIns="0" tIns="0" bIns="0" anchor="ctr">
-            <a:noAutofit/>
-          </a:bodyPr>
-          <a:p>
-            <a:pPr defTabSz="914400">
-              <a:lnSpc>
-                <a:spcPct val="100000"/>
-              </a:lnSpc>
-              <a:tabLst>
-                <a:tab algn="l" pos="0"/>
-              </a:tabLst>
-            </a:pPr>
-            <a:r>
-              <a:rPr lang="en-US" sz="1300" b="1" u="none" strike="noStrike">
-                <a:solidFill>
-                  <a:srgbClr val="16324f"/>
-                </a:solidFill>
-                <a:effectLst/>
-                <a:uFillTx/>
-                <a:latin typeface="Aptos"/>
-              </a:rPr>
-              <a:t>Mensagem para apresentar</a:t>
-            </a:r>
-            <a:endParaRPr lang="en-US" sz="1300" b="0" u="none" strike="noStrike">
-              <a:solidFill>
-                <a:srgbClr val="000000"/>
-              </a:solidFill>
-              <a:effectLst/>
-              <a:uFillTx/>
-              <a:latin typeface="Arial"/>
-            </a:endParaRPr>
-          </a:p>
-        </p:txBody>
-      </p:sp>
-      <p:sp>
-        <p:nvSpPr>
-          <p:cNvPr id="77" name="Text 69"/>
-          <p:cNvSpPr/>
-          <p:nvPr/>
-        </p:nvSpPr>
-        <p:spPr>
-          <a:xfrm>
-            <a:off x="6583680" y="5029200"/>
-            <a:ext cx="4342320" cy="456120"/>
-          </a:xfrm>
-          <a:prstGeom prst="rect">
-            <a:avLst/>
-          </a:prstGeom>
-          <a:noFill/>
-          <a:ln w="0">
-            <a:noFill/>
-          </a:ln>
-        </p:spPr>
-        <p:style>
-          <a:lnRef idx="0"/>
-          <a:fillRef idx="0"/>
-          <a:effectRef idx="0"/>
-          <a:fontRef idx="minor"/>
-        </p:style>
-        <p:txBody>
-          <a:bodyPr lIns="0" rIns="0" tIns="0" bIns="0" anchor="ctr">
-            <a:normAutofit/>
-          </a:bodyPr>
-          <a:p>
-            <a:pPr defTabSz="914400">
-              <a:lnSpc>
-                <a:spcPct val="100000"/>
-              </a:lnSpc>
-              <a:tabLst>
-                <a:tab algn="l" pos="0"/>
-              </a:tabLst>
-            </a:pPr>
-            <a:r>
-              <a:rPr lang="en-US" sz="1100" b="0" u="none" strike="noStrike">
-                <a:solidFill>
-                  <a:srgbClr val="1f2937"/>
-                </a:solidFill>
-                <a:effectLst/>
-                <a:uFillTx/>
-                <a:latin typeface="Aptos"/>
-              </a:rPr>
-              <a:t>O aquecimento continua importante, mas o novo modelo separa velocidade de crescimento e limite ambiental.</a:t>
-            </a:r>
-            <a:endParaRPr lang="en-US" sz="1100" b="0" u="none" strike="noStrike">
-              <a:solidFill>
-                <a:srgbClr val="000000"/>
-              </a:solidFill>
-              <a:effectLst/>
-              <a:uFillTx/>
-              <a:latin typeface="Arial"/>
-            </a:endParaRPr>
-          </a:p>
-        </p:txBody>
-      </p:sp>
-      <p:sp>
-        <p:nvSpPr>
-          <p:cNvPr id="78" name="Text 70"/>
-          <p:cNvSpPr/>
-          <p:nvPr/>
-        </p:nvSpPr>
-        <p:spPr>
-          <a:xfrm>
-            <a:off x="11475720" y="6473880"/>
-            <a:ext cx="254880" cy="136080"/>
-          </a:xfrm>
-          <a:prstGeom prst="rect">
-            <a:avLst/>
-          </a:prstGeom>
-          <a:noFill/>
-          <a:ln w="0">
-            <a:noFill/>
-          </a:ln>
-        </p:spPr>
-        <p:style>
-          <a:lnRef idx="0"/>
-          <a:fillRef idx="0"/>
-          <a:effectRef idx="0"/>
-          <a:fontRef idx="minor"/>
-        </p:style>
-        <p:txBody>
-          <a:bodyPr lIns="0" rIns="0" tIns="0" bIns="0" anchor="ctr">
-            <a:noAutofit/>
-          </a:bodyPr>
-          <a:p>
-            <a:pPr algn="r" defTabSz="914400">
-              <a:lnSpc>
-                <a:spcPct val="100000"/>
-              </a:lnSpc>
-              <a:tabLst>
-                <a:tab algn="l" pos="0"/>
-              </a:tabLst>
-            </a:pPr>
-            <a:r>
-              <a:rPr lang="en-US" sz="700" b="0" u="none" strike="noStrike">
-                <a:solidFill>
-                  <a:srgbClr val="64748b"/>
-                </a:solidFill>
-                <a:effectLst/>
-                <a:uFillTx/>
-                <a:latin typeface="Aptos"/>
-              </a:rPr>
-              <a:t>5</a:t>
-            </a:r>
-            <a:endParaRPr lang="en-US" sz="700" b="0" u="none" strike="noStrike">
-              <a:solidFill>
-                <a:srgbClr val="000000"/>
-              </a:solidFill>
-              <a:effectLst/>
-              <a:uFillTx/>
-              <a:latin typeface="Arial"/>
-            </a:endParaRPr>
-          </a:p>
-        </p:txBody>
-      </p:sp>
-      <p:sp>
-        <p:nvSpPr>
-          <p:cNvPr id="79" name=""/>
+          <p:cNvPr id="72" name=""/>
           <p:cNvSpPr/>
           <p:nvPr/>
         </p:nvSpPr>
         <p:spPr>
           <a:xfrm>
             <a:off x="5476320" y="3115440"/>
-            <a:ext cx="1269360" cy="634320"/>
+            <a:ext cx="1269000" cy="633960"/>
           </a:xfrm>
           <a:prstGeom prst="rect">
             <a:avLst/>
@@ -13859,6 +13033,11 @@
             <a:noAutofit/>
           </a:bodyPr>
           <a:p>
+            <a:pPr>
+              <a:lnSpc>
+                <a:spcPct val="100000"/>
+              </a:lnSpc>
+            </a:pPr>
             <a:endParaRPr lang="en-US" sz="1800" b="0" u="none" strike="noStrike">
               <a:solidFill>
                 <a:srgbClr val="000000"/>
@@ -13909,14 +13088,14 @@
       </p:grpSpPr>
       <p:sp>
         <p:nvSpPr>
-          <p:cNvPr id="80" name="Shape 0"/>
+          <p:cNvPr id="73" name="Shape 0"/>
           <p:cNvSpPr/>
           <p:nvPr/>
         </p:nvSpPr>
         <p:spPr>
           <a:xfrm>
             <a:off x="0" y="0"/>
-            <a:ext cx="12190680" cy="657360"/>
+            <a:ext cx="12190320" cy="657000"/>
           </a:xfrm>
           <a:prstGeom prst="rect">
             <a:avLst/>
@@ -13960,14 +13139,14 @@
       </p:sp>
       <p:sp>
         <p:nvSpPr>
-          <p:cNvPr id="81" name="Text 1"/>
+          <p:cNvPr id="74" name="Text 1"/>
           <p:cNvSpPr/>
           <p:nvPr/>
         </p:nvSpPr>
         <p:spPr>
           <a:xfrm>
             <a:off x="502920" y="146160"/>
-            <a:ext cx="8868600" cy="346320"/>
+            <a:ext cx="8868240" cy="345960"/>
           </a:xfrm>
           <a:prstGeom prst="rect">
             <a:avLst/>
@@ -14021,14 +13200,14 @@
       </p:sp>
       <p:sp>
         <p:nvSpPr>
-          <p:cNvPr id="82" name="Text 2"/>
+          <p:cNvPr id="75" name="Text 2"/>
           <p:cNvSpPr/>
           <p:nvPr/>
         </p:nvSpPr>
         <p:spPr>
           <a:xfrm>
             <a:off x="9555480" y="173880"/>
-            <a:ext cx="2056320" cy="254880"/>
+            <a:ext cx="2055960" cy="254520"/>
           </a:xfrm>
           <a:prstGeom prst="rect">
             <a:avLst/>
@@ -14057,31 +13236,20 @@
                 <a:tab algn="l" pos="0"/>
               </a:tabLst>
             </a:pPr>
-            <a:r>
-              <a:rPr lang="en-US" sz="900" b="0" u="none" strike="noStrike">
-                <a:solidFill>
-                  <a:srgbClr val="ddeaf6"/>
-                </a:solidFill>
-                <a:effectLst/>
-                <a:uFillTx/>
-                <a:latin typeface="Aptos"/>
-              </a:rPr>
-              <a:t>substitui a Poisson</a:t>
-            </a:r>
-            <a:endParaRPr lang="en-US" sz="900" b="0" u="none" strike="noStrike">
-              <a:solidFill>
-                <a:srgbClr val="000000"/>
-              </a:solidFill>
-              <a:effectLst/>
-              <a:uFillTx/>
-              <a:latin typeface="Arial"/>
-            </a:endParaRPr>
-          </a:p>
-        </p:txBody>
-      </p:sp>
-      <p:sp>
-        <p:nvSpPr>
-          <p:cNvPr id="83" name="Shape 3"/>
+            <a:endParaRPr lang="en-US" sz="1800" b="0" u="none" strike="noStrike">
+              <a:solidFill>
+                <a:srgbClr val="000000"/>
+              </a:solidFill>
+              <a:effectLst/>
+              <a:uFillTx/>
+              <a:latin typeface="Arial"/>
+            </a:endParaRPr>
+          </a:p>
+        </p:txBody>
+      </p:sp>
+      <p:sp>
+        <p:nvSpPr>
+          <p:cNvPr id="76" name="Shape 3"/>
           <p:cNvSpPr/>
           <p:nvPr/>
         </p:nvSpPr>
@@ -14124,14 +13292,14 @@
       </p:sp>
       <p:sp>
         <p:nvSpPr>
-          <p:cNvPr id="84" name="Text 4"/>
+          <p:cNvPr id="77" name="Text 4"/>
           <p:cNvSpPr/>
           <p:nvPr/>
         </p:nvSpPr>
         <p:spPr>
           <a:xfrm>
             <a:off x="502920" y="6473880"/>
-            <a:ext cx="3290760" cy="163440"/>
+            <a:ext cx="3290400" cy="163080"/>
           </a:xfrm>
           <a:prstGeom prst="rect">
             <a:avLst/>
@@ -14184,14 +13352,14 @@
       </p:sp>
       <p:sp>
         <p:nvSpPr>
-          <p:cNvPr id="85" name="Text 5"/>
+          <p:cNvPr id="78" name="Text 5"/>
           <p:cNvSpPr/>
           <p:nvPr/>
         </p:nvSpPr>
         <p:spPr>
           <a:xfrm>
             <a:off x="777240" y="1078920"/>
-            <a:ext cx="4388040" cy="501840"/>
+            <a:ext cx="4387680" cy="501480"/>
           </a:xfrm>
           <a:prstGeom prst="rect">
             <a:avLst/>
@@ -14245,14 +13413,14 @@
       </p:sp>
       <p:sp>
         <p:nvSpPr>
-          <p:cNvPr id="86" name="Text 6"/>
+          <p:cNvPr id="79" name="Text 6"/>
           <p:cNvSpPr/>
           <p:nvPr/>
         </p:nvSpPr>
         <p:spPr>
           <a:xfrm>
             <a:off x="868680" y="1828800"/>
-            <a:ext cx="4662360" cy="547560"/>
+            <a:ext cx="4662000" cy="547200"/>
           </a:xfrm>
           <a:prstGeom prst="rect">
             <a:avLst/>
@@ -14305,14 +13473,14 @@
       </p:sp>
       <p:sp>
         <p:nvSpPr>
-          <p:cNvPr id="87" name="Shape 7"/>
+          <p:cNvPr id="80" name="Shape 7"/>
           <p:cNvSpPr/>
           <p:nvPr/>
         </p:nvSpPr>
         <p:spPr>
           <a:xfrm>
             <a:off x="868680" y="2788920"/>
-            <a:ext cx="2056320" cy="730440"/>
+            <a:ext cx="2055960" cy="730080"/>
           </a:xfrm>
           <a:prstGeom prst="roundRect">
             <a:avLst>
@@ -14358,14 +13526,14 @@
       </p:sp>
       <p:sp>
         <p:nvSpPr>
-          <p:cNvPr id="88" name="Text 8"/>
+          <p:cNvPr id="81" name="Text 8"/>
           <p:cNvSpPr/>
           <p:nvPr/>
         </p:nvSpPr>
         <p:spPr>
           <a:xfrm>
             <a:off x="1051560" y="2953440"/>
-            <a:ext cx="1690560" cy="227520"/>
+            <a:ext cx="1690200" cy="227160"/>
           </a:xfrm>
           <a:prstGeom prst="rect">
             <a:avLst/>
@@ -14418,14 +13586,14 @@
       </p:sp>
       <p:sp>
         <p:nvSpPr>
-          <p:cNvPr id="89" name="Text 9"/>
+          <p:cNvPr id="82" name="Text 9"/>
           <p:cNvSpPr/>
           <p:nvPr/>
         </p:nvSpPr>
         <p:spPr>
           <a:xfrm>
             <a:off x="1051560" y="3291840"/>
-            <a:ext cx="1690560" cy="90360"/>
+            <a:ext cx="1690200" cy="90000"/>
           </a:xfrm>
           <a:prstGeom prst="rect">
             <a:avLst/>
@@ -14478,14 +13646,14 @@
       </p:sp>
       <p:sp>
         <p:nvSpPr>
-          <p:cNvPr id="90" name="Shape 10"/>
+          <p:cNvPr id="83" name="Shape 10"/>
           <p:cNvSpPr/>
           <p:nvPr/>
         </p:nvSpPr>
         <p:spPr>
           <a:xfrm>
             <a:off x="3246120" y="2788920"/>
-            <a:ext cx="2239200" cy="730440"/>
+            <a:ext cx="2238840" cy="730080"/>
           </a:xfrm>
           <a:prstGeom prst="roundRect">
             <a:avLst>
@@ -14531,14 +13699,14 @@
       </p:sp>
       <p:sp>
         <p:nvSpPr>
-          <p:cNvPr id="91" name="Text 11"/>
+          <p:cNvPr id="84" name="Text 11"/>
           <p:cNvSpPr/>
           <p:nvPr/>
         </p:nvSpPr>
         <p:spPr>
           <a:xfrm>
             <a:off x="3429000" y="2953440"/>
-            <a:ext cx="1873440" cy="227520"/>
+            <a:ext cx="1873080" cy="227160"/>
           </a:xfrm>
           <a:prstGeom prst="rect">
             <a:avLst/>
@@ -14591,14 +13759,14 @@
       </p:sp>
       <p:sp>
         <p:nvSpPr>
-          <p:cNvPr id="92" name="Text 12"/>
+          <p:cNvPr id="85" name="Text 12"/>
           <p:cNvSpPr/>
           <p:nvPr/>
         </p:nvSpPr>
         <p:spPr>
           <a:xfrm>
             <a:off x="3429000" y="3291840"/>
-            <a:ext cx="1873440" cy="90360"/>
+            <a:ext cx="1873080" cy="90000"/>
           </a:xfrm>
           <a:prstGeom prst="rect">
             <a:avLst/>
@@ -14651,14 +13819,14 @@
       </p:sp>
       <p:sp>
         <p:nvSpPr>
-          <p:cNvPr id="93" name="Shape 13"/>
+          <p:cNvPr id="86" name="Shape 13"/>
           <p:cNvSpPr/>
           <p:nvPr/>
         </p:nvSpPr>
         <p:spPr>
           <a:xfrm>
             <a:off x="868680" y="3886200"/>
-            <a:ext cx="4616640" cy="1050480"/>
+            <a:ext cx="4616280" cy="1050120"/>
           </a:xfrm>
           <a:prstGeom prst="roundRect">
             <a:avLst>
@@ -14704,14 +13872,14 @@
       </p:sp>
       <p:sp>
         <p:nvSpPr>
-          <p:cNvPr id="94" name="Text 14"/>
+          <p:cNvPr id="87" name="Text 14"/>
           <p:cNvSpPr/>
           <p:nvPr/>
         </p:nvSpPr>
         <p:spPr>
           <a:xfrm>
             <a:off x="1051560" y="4050720"/>
-            <a:ext cx="4250880" cy="227520"/>
+            <a:ext cx="4250520" cy="227160"/>
           </a:xfrm>
           <a:prstGeom prst="rect">
             <a:avLst/>
@@ -14764,14 +13932,14 @@
       </p:sp>
       <p:sp>
         <p:nvSpPr>
-          <p:cNvPr id="95" name="Text 15"/>
+          <p:cNvPr id="88" name="Text 15"/>
           <p:cNvSpPr/>
           <p:nvPr/>
         </p:nvSpPr>
         <p:spPr>
           <a:xfrm>
             <a:off x="1051560" y="4389120"/>
-            <a:ext cx="4250880" cy="410400"/>
+            <a:ext cx="4250520" cy="410040"/>
           </a:xfrm>
           <a:prstGeom prst="rect">
             <a:avLst/>
@@ -14824,7 +13992,7 @@
       </p:sp>
       <p:pic>
         <p:nvPicPr>
-          <p:cNvPr id="96" name="Image 0" descr="/mnt/data/poisson_vs_nb.svg"/>
+          <p:cNvPr id="89" name="Image 0" descr="/mnt/data/poisson_vs_nb.svg"/>
           <p:cNvPicPr/>
           <p:nvPr/>
         </p:nvPicPr>
@@ -14840,8 +14008,8 @@
         </p:blipFill>
         <p:spPr>
           <a:xfrm>
-            <a:off x="6172200" y="1024200"/>
-            <a:ext cx="5256720" cy="2632320"/>
+            <a:off x="6400800" y="2514600"/>
+            <a:ext cx="5256360" cy="2631960"/>
           </a:xfrm>
           <a:prstGeom prst="rect">
             <a:avLst/>
@@ -14854,74 +14022,14 @@
       </p:pic>
       <p:sp>
         <p:nvSpPr>
-          <p:cNvPr id="97" name="Text 16"/>
-          <p:cNvSpPr/>
-          <p:nvPr/>
-        </p:nvSpPr>
-        <p:spPr>
-          <a:xfrm>
-            <a:off x="6355080" y="3977640"/>
-            <a:ext cx="4799520" cy="1050480"/>
-          </a:xfrm>
-          <a:prstGeom prst="rect">
-            <a:avLst/>
-          </a:prstGeom>
-          <a:noFill/>
-          <a:ln w="0">
-            <a:noFill/>
-          </a:ln>
-        </p:spPr>
-        <p:style>
-          <a:lnRef idx="0"/>
-          <a:fillRef idx="0"/>
-          <a:effectRef idx="0"/>
-          <a:fontRef idx="minor"/>
-        </p:style>
-        <p:txBody>
-          <a:bodyPr lIns="360" rIns="360" tIns="360" bIns="360" anchor="ctr">
-            <a:normAutofit/>
-          </a:bodyPr>
-          <a:p>
-            <a:pPr defTabSz="914400">
-              <a:lnSpc>
-                <a:spcPct val="100000"/>
-              </a:lnSpc>
-              <a:tabLst>
-                <a:tab algn="l" pos="0"/>
-              </a:tabLst>
-            </a:pPr>
-            <a:r>
-              <a:rPr lang="en-US" sz="1400" b="0" u="none" strike="noStrike">
-                <a:solidFill>
-                  <a:srgbClr val="1f2937"/>
-                </a:solidFill>
-                <a:effectLst/>
-                <a:uFillTx/>
-                <a:latin typeface="Aptos"/>
-              </a:rPr>
-              <a:t>Interpretação: mesmo com a mesma média μ, a binomial negativa coloca mais probabilidade em valores extremos. Isso é essencial para estimar risco de ultrapassar limites sanitários.</a:t>
-            </a:r>
-            <a:endParaRPr lang="en-US" sz="1400" b="0" u="none" strike="noStrike">
-              <a:solidFill>
-                <a:srgbClr val="000000"/>
-              </a:solidFill>
-              <a:effectLst/>
-              <a:uFillTx/>
-              <a:latin typeface="Arial"/>
-            </a:endParaRPr>
-          </a:p>
-        </p:txBody>
-      </p:sp>
-      <p:sp>
-        <p:nvSpPr>
-          <p:cNvPr id="98" name="Text 17"/>
+          <p:cNvPr id="90" name="Text 17"/>
           <p:cNvSpPr/>
           <p:nvPr/>
         </p:nvSpPr>
         <p:spPr>
           <a:xfrm>
             <a:off x="11475720" y="6473880"/>
-            <a:ext cx="254880" cy="136080"/>
+            <a:ext cx="254520" cy="135720"/>
           </a:xfrm>
           <a:prstGeom prst="rect">
             <a:avLst/>
@@ -14950,18 +14058,7 @@
                 <a:tab algn="l" pos="0"/>
               </a:tabLst>
             </a:pPr>
-            <a:r>
-              <a:rPr lang="en-US" sz="700" b="0" u="none" strike="noStrike">
-                <a:solidFill>
-                  <a:srgbClr val="64748b"/>
-                </a:solidFill>
-                <a:effectLst/>
-                <a:uFillTx/>
-                <a:latin typeface="Aptos"/>
-              </a:rPr>
-              <a:t>6</a:t>
-            </a:r>
-            <a:endParaRPr lang="en-US" sz="700" b="0" u="none" strike="noStrike">
+            <a:endParaRPr lang="en-US" sz="1800" b="0" u="none" strike="noStrike">
               <a:solidFill>
                 <a:srgbClr val="000000"/>
               </a:solidFill>
@@ -15004,7 +14101,7 @@
       </p:grpSpPr>
       <p:pic>
         <p:nvPicPr>
-          <p:cNvPr id="99" name=""/>
+          <p:cNvPr id="91" name=""/>
           <p:cNvPicPr/>
           <p:nvPr/>
         </p:nvPicPr>
@@ -15015,7 +14112,7 @@
         <p:spPr>
           <a:xfrm>
             <a:off x="18720" y="3960"/>
-            <a:ext cx="12184920" cy="6857640"/>
+            <a:ext cx="12184560" cy="6857280"/>
           </a:xfrm>
           <a:prstGeom prst="rect">
             <a:avLst/>
@@ -15028,7 +14125,7 @@
       </p:pic>
       <p:pic>
         <p:nvPicPr>
-          <p:cNvPr id="100" name=""/>
+          <p:cNvPr id="92" name=""/>
           <p:cNvPicPr/>
           <p:nvPr/>
         </p:nvPicPr>
@@ -15039,7 +14136,7 @@
         <p:spPr>
           <a:xfrm>
             <a:off x="10972800" y="6363360"/>
-            <a:ext cx="970920" cy="494640"/>
+            <a:ext cx="970560" cy="494280"/>
           </a:xfrm>
           <a:prstGeom prst="rect">
             <a:avLst/>
@@ -15089,14 +14186,14 @@
       </p:grpSpPr>
       <p:sp>
         <p:nvSpPr>
-          <p:cNvPr id="101" name="Shape 0"/>
+          <p:cNvPr id="93" name="Shape 0"/>
           <p:cNvSpPr/>
           <p:nvPr/>
         </p:nvSpPr>
         <p:spPr>
           <a:xfrm>
             <a:off x="0" y="0"/>
-            <a:ext cx="12190680" cy="657360"/>
+            <a:ext cx="12190320" cy="657000"/>
           </a:xfrm>
           <a:prstGeom prst="rect">
             <a:avLst/>
@@ -15140,14 +14237,14 @@
       </p:sp>
       <p:sp>
         <p:nvSpPr>
-          <p:cNvPr id="102" name="Text 1"/>
+          <p:cNvPr id="94" name="Text 1"/>
           <p:cNvSpPr/>
           <p:nvPr/>
         </p:nvSpPr>
         <p:spPr>
           <a:xfrm>
             <a:off x="502920" y="146160"/>
-            <a:ext cx="8868600" cy="346320"/>
+            <a:ext cx="8868240" cy="345960"/>
           </a:xfrm>
           <a:prstGeom prst="rect">
             <a:avLst/>
@@ -15201,14 +14298,14 @@
       </p:sp>
       <p:sp>
         <p:nvSpPr>
-          <p:cNvPr id="103" name="Text 2"/>
+          <p:cNvPr id="95" name="Text 2"/>
           <p:cNvSpPr/>
           <p:nvPr/>
         </p:nvSpPr>
         <p:spPr>
           <a:xfrm>
             <a:off x="9555480" y="173880"/>
-            <a:ext cx="2056320" cy="254880"/>
+            <a:ext cx="2055960" cy="254520"/>
           </a:xfrm>
           <a:prstGeom prst="rect">
             <a:avLst/>
@@ -15261,7 +14358,7 @@
       </p:sp>
       <p:sp>
         <p:nvSpPr>
-          <p:cNvPr id="104" name="Shape 3"/>
+          <p:cNvPr id="96" name="Shape 3"/>
           <p:cNvSpPr/>
           <p:nvPr/>
         </p:nvSpPr>
@@ -15304,14 +14401,14 @@
       </p:sp>
       <p:sp>
         <p:nvSpPr>
-          <p:cNvPr id="105" name="Text 4"/>
+          <p:cNvPr id="97" name="Text 4"/>
           <p:cNvSpPr/>
           <p:nvPr/>
         </p:nvSpPr>
         <p:spPr>
           <a:xfrm>
             <a:off x="502920" y="6473880"/>
-            <a:ext cx="3290760" cy="163440"/>
+            <a:ext cx="3290400" cy="163080"/>
           </a:xfrm>
           <a:prstGeom prst="rect">
             <a:avLst/>
@@ -15364,14 +14461,14 @@
       </p:sp>
       <p:sp>
         <p:nvSpPr>
-          <p:cNvPr id="106" name="Text 5"/>
+          <p:cNvPr id="98" name="Text 5"/>
           <p:cNvSpPr/>
           <p:nvPr/>
         </p:nvSpPr>
         <p:spPr>
           <a:xfrm>
             <a:off x="731520" y="960120"/>
-            <a:ext cx="10605960" cy="456120"/>
+            <a:ext cx="10605600" cy="455760"/>
           </a:xfrm>
           <a:prstGeom prst="rect">
             <a:avLst/>
@@ -15424,14 +14521,14 @@
       </p:sp>
       <p:sp>
         <p:nvSpPr>
-          <p:cNvPr id="107" name="Shape 6"/>
+          <p:cNvPr id="99" name="Shape 6"/>
           <p:cNvSpPr/>
           <p:nvPr/>
         </p:nvSpPr>
         <p:spPr>
           <a:xfrm>
             <a:off x="822960" y="2011680"/>
-            <a:ext cx="1964880" cy="1416240"/>
+            <a:ext cx="1964520" cy="1415880"/>
           </a:xfrm>
           <a:prstGeom prst="roundRect">
             <a:avLst>
@@ -15477,14 +14574,14 @@
       </p:sp>
       <p:sp>
         <p:nvSpPr>
-          <p:cNvPr id="108" name="Text 7"/>
+          <p:cNvPr id="100" name="Text 7"/>
           <p:cNvSpPr/>
           <p:nvPr/>
         </p:nvSpPr>
         <p:spPr>
           <a:xfrm>
             <a:off x="960120" y="2240280"/>
-            <a:ext cx="1690560" cy="227520"/>
+            <a:ext cx="1690200" cy="227160"/>
           </a:xfrm>
           <a:prstGeom prst="rect">
             <a:avLst/>
@@ -15537,14 +14634,14 @@
       </p:sp>
       <p:sp>
         <p:nvSpPr>
-          <p:cNvPr id="109" name="Text 8"/>
+          <p:cNvPr id="101" name="Text 8"/>
           <p:cNvSpPr/>
           <p:nvPr/>
         </p:nvSpPr>
         <p:spPr>
           <a:xfrm>
             <a:off x="987480" y="2697480"/>
-            <a:ext cx="1644840" cy="410400"/>
+            <a:ext cx="1644480" cy="410040"/>
           </a:xfrm>
           <a:prstGeom prst="rect">
             <a:avLst/>
@@ -15597,14 +14694,14 @@
       </p:sp>
       <p:sp>
         <p:nvSpPr>
-          <p:cNvPr id="110" name="Shape 9"/>
+          <p:cNvPr id="102" name="Shape 9"/>
           <p:cNvSpPr/>
           <p:nvPr/>
         </p:nvSpPr>
         <p:spPr>
           <a:xfrm>
             <a:off x="2834640" y="2423160"/>
-            <a:ext cx="318960" cy="547560"/>
+            <a:ext cx="318600" cy="547200"/>
           </a:xfrm>
           <a:prstGeom prst="chevron">
             <a:avLst>
@@ -15650,14 +14747,14 @@
       </p:sp>
       <p:sp>
         <p:nvSpPr>
-          <p:cNvPr id="111" name="Shape 10"/>
+          <p:cNvPr id="103" name="Shape 10"/>
           <p:cNvSpPr/>
           <p:nvPr/>
         </p:nvSpPr>
         <p:spPr>
           <a:xfrm>
             <a:off x="3291840" y="2011680"/>
-            <a:ext cx="1964880" cy="1416240"/>
+            <a:ext cx="1964520" cy="1415880"/>
           </a:xfrm>
           <a:prstGeom prst="roundRect">
             <a:avLst>
@@ -15703,14 +14800,14 @@
       </p:sp>
       <p:sp>
         <p:nvSpPr>
-          <p:cNvPr id="112" name="Text 11"/>
+          <p:cNvPr id="104" name="Text 11"/>
           <p:cNvSpPr/>
           <p:nvPr/>
         </p:nvSpPr>
         <p:spPr>
           <a:xfrm>
             <a:off x="3429000" y="2240280"/>
-            <a:ext cx="1690560" cy="227520"/>
+            <a:ext cx="1690200" cy="227160"/>
           </a:xfrm>
           <a:prstGeom prst="rect">
             <a:avLst/>
@@ -15763,14 +14860,14 @@
       </p:sp>
       <p:sp>
         <p:nvSpPr>
-          <p:cNvPr id="113" name="Text 12"/>
+          <p:cNvPr id="105" name="Text 12"/>
           <p:cNvSpPr/>
           <p:nvPr/>
         </p:nvSpPr>
         <p:spPr>
           <a:xfrm>
             <a:off x="3456360" y="2697480"/>
-            <a:ext cx="1644840" cy="410400"/>
+            <a:ext cx="1644480" cy="410040"/>
           </a:xfrm>
           <a:prstGeom prst="rect">
             <a:avLst/>
@@ -15823,14 +14920,14 @@
       </p:sp>
       <p:sp>
         <p:nvSpPr>
-          <p:cNvPr id="114" name="Shape 13"/>
+          <p:cNvPr id="106" name="Shape 13"/>
           <p:cNvSpPr/>
           <p:nvPr/>
         </p:nvSpPr>
         <p:spPr>
           <a:xfrm>
             <a:off x="5303520" y="2423160"/>
-            <a:ext cx="318960" cy="547560"/>
+            <a:ext cx="318600" cy="547200"/>
           </a:xfrm>
           <a:prstGeom prst="chevron">
             <a:avLst>
@@ -15876,14 +14973,14 @@
       </p:sp>
       <p:sp>
         <p:nvSpPr>
-          <p:cNvPr id="115" name="Shape 14"/>
+          <p:cNvPr id="107" name="Shape 14"/>
           <p:cNvSpPr/>
           <p:nvPr/>
         </p:nvSpPr>
         <p:spPr>
           <a:xfrm>
             <a:off x="5760720" y="2011680"/>
-            <a:ext cx="1964880" cy="1416240"/>
+            <a:ext cx="1964520" cy="1415880"/>
           </a:xfrm>
           <a:prstGeom prst="roundRect">
             <a:avLst>
@@ -15929,14 +15026,14 @@
       </p:sp>
       <p:sp>
         <p:nvSpPr>
-          <p:cNvPr id="116" name="Text 15"/>
+          <p:cNvPr id="108" name="Text 15"/>
           <p:cNvSpPr/>
           <p:nvPr/>
         </p:nvSpPr>
         <p:spPr>
           <a:xfrm>
             <a:off x="5897880" y="2240280"/>
-            <a:ext cx="1690560" cy="227520"/>
+            <a:ext cx="1690200" cy="227160"/>
           </a:xfrm>
           <a:prstGeom prst="rect">
             <a:avLst/>
@@ -15989,14 +15086,14 @@
       </p:sp>
       <p:sp>
         <p:nvSpPr>
-          <p:cNvPr id="117" name="Text 16"/>
+          <p:cNvPr id="109" name="Text 16"/>
           <p:cNvSpPr/>
           <p:nvPr/>
         </p:nvSpPr>
         <p:spPr>
           <a:xfrm>
             <a:off x="5925240" y="2697480"/>
-            <a:ext cx="1644840" cy="410400"/>
+            <a:ext cx="1644480" cy="410040"/>
           </a:xfrm>
           <a:prstGeom prst="rect">
             <a:avLst/>
@@ -16049,14 +15146,14 @@
       </p:sp>
       <p:sp>
         <p:nvSpPr>
-          <p:cNvPr id="118" name="Shape 17"/>
+          <p:cNvPr id="110" name="Shape 17"/>
           <p:cNvSpPr/>
           <p:nvPr/>
         </p:nvSpPr>
         <p:spPr>
           <a:xfrm>
             <a:off x="7772400" y="2423160"/>
-            <a:ext cx="318960" cy="547560"/>
+            <a:ext cx="318600" cy="547200"/>
           </a:xfrm>
           <a:prstGeom prst="chevron">
             <a:avLst>
@@ -16102,14 +15199,14 @@
       </p:sp>
       <p:sp>
         <p:nvSpPr>
-          <p:cNvPr id="119" name="Shape 18"/>
+          <p:cNvPr id="111" name="Shape 18"/>
           <p:cNvSpPr/>
           <p:nvPr/>
         </p:nvSpPr>
         <p:spPr>
           <a:xfrm>
             <a:off x="8229600" y="2011680"/>
-            <a:ext cx="1964880" cy="1416240"/>
+            <a:ext cx="1964520" cy="1415880"/>
           </a:xfrm>
           <a:prstGeom prst="roundRect">
             <a:avLst>
@@ -16155,14 +15252,14 @@
       </p:sp>
       <p:sp>
         <p:nvSpPr>
-          <p:cNvPr id="120" name="Text 19"/>
+          <p:cNvPr id="112" name="Text 19"/>
           <p:cNvSpPr/>
           <p:nvPr/>
         </p:nvSpPr>
         <p:spPr>
           <a:xfrm>
             <a:off x="8366760" y="2240280"/>
-            <a:ext cx="1690560" cy="227520"/>
+            <a:ext cx="1690200" cy="227160"/>
           </a:xfrm>
           <a:prstGeom prst="rect">
             <a:avLst/>
@@ -16215,14 +15312,14 @@
       </p:sp>
       <p:sp>
         <p:nvSpPr>
-          <p:cNvPr id="121" name="Text 20"/>
+          <p:cNvPr id="113" name="Text 20"/>
           <p:cNvSpPr/>
           <p:nvPr/>
         </p:nvSpPr>
         <p:spPr>
           <a:xfrm>
             <a:off x="8394120" y="2697480"/>
-            <a:ext cx="1644840" cy="410400"/>
+            <a:ext cx="1644480" cy="410040"/>
           </a:xfrm>
           <a:prstGeom prst="rect">
             <a:avLst/>
@@ -16275,14 +15372,14 @@
       </p:sp>
       <p:sp>
         <p:nvSpPr>
-          <p:cNvPr id="122" name="Text 21"/>
+          <p:cNvPr id="114" name="Text 21"/>
           <p:cNvSpPr/>
           <p:nvPr/>
         </p:nvSpPr>
         <p:spPr>
           <a:xfrm>
             <a:off x="1965960" y="4297680"/>
-            <a:ext cx="8228520" cy="593280"/>
+            <a:ext cx="8228160" cy="592920"/>
           </a:xfrm>
           <a:prstGeom prst="rect">
             <a:avLst/>
@@ -16336,14 +15433,14 @@
       </p:sp>
       <p:sp>
         <p:nvSpPr>
-          <p:cNvPr id="123" name="Text 22"/>
+          <p:cNvPr id="115" name="Text 22"/>
           <p:cNvSpPr/>
           <p:nvPr/>
         </p:nvSpPr>
         <p:spPr>
           <a:xfrm>
             <a:off x="1645920" y="5120640"/>
-            <a:ext cx="8960040" cy="547560"/>
+            <a:ext cx="8959680" cy="547200"/>
           </a:xfrm>
           <a:prstGeom prst="rect">
             <a:avLst/>
@@ -16396,14 +15493,14 @@
       </p:sp>
       <p:sp>
         <p:nvSpPr>
-          <p:cNvPr id="124" name="Text 23"/>
+          <p:cNvPr id="116" name="Text 23"/>
           <p:cNvSpPr/>
           <p:nvPr/>
         </p:nvSpPr>
         <p:spPr>
           <a:xfrm>
             <a:off x="11475720" y="6473880"/>
-            <a:ext cx="254880" cy="136080"/>
+            <a:ext cx="254520" cy="135720"/>
           </a:xfrm>
           <a:prstGeom prst="rect">
             <a:avLst/>
@@ -16432,18 +15529,7 @@
                 <a:tab algn="l" pos="0"/>
               </a:tabLst>
             </a:pPr>
-            <a:r>
-              <a:rPr lang="en-US" sz="700" b="0" u="none" strike="noStrike">
-                <a:solidFill>
-                  <a:srgbClr val="64748b"/>
-                </a:solidFill>
-                <a:effectLst/>
-                <a:uFillTx/>
-                <a:latin typeface="Aptos"/>
-              </a:rPr>
-              <a:t>6</a:t>
-            </a:r>
-            <a:endParaRPr lang="en-US" sz="700" b="0" u="none" strike="noStrike">
+            <a:endParaRPr lang="en-US" sz="1800" b="0" u="none" strike="noStrike">
               <a:solidFill>
                 <a:srgbClr val="000000"/>
               </a:solidFill>
